--- a/tools/article-images/article-images.pptx
+++ b/tools/article-images/article-images.pptx
@@ -7,6 +7,7 @@
   <p:sldIdLst>
     <p:sldId id="256" r:id="rId7"/>
     <p:sldId id="257" r:id="rId8"/>
+    <p:sldId id="258" r:id="rId9"/>
   </p:sldIdLst>
   <p:sldSz cx="11430000" cy="6000750" type="screen4x3"/>
   <p:notesSz cx="6858000" cy="9144000"/>
@@ -3085,7 +3086,7 @@
     <p:bg>
       <p:bgPr>
         <a:solidFill>
-          <a:srgbClr val="0F4C3A"/>
+          <a:srgbClr val="014172"/>
         </a:solidFill>
         <a:effectLst/>
       </p:bgPr>
@@ -3259,7 +3260,7 @@
             <a:r>
               <a:rPr sz="1800" b="1">
                 <a:solidFill>
-                  <a:srgbClr val="7FD1AE"/>
+                  <a:srgbClr val="8EC5E8"/>
                 </a:solidFill>
                 <a:latin typeface="Yu Gothic UI"/>
               </a:rPr>
@@ -3392,7 +3393,7 @@
             <a:r>
               <a:rPr sz="1700" b="0">
                 <a:solidFill>
-                  <a:srgbClr val="7FD1AE"/>
+                  <a:srgbClr val="8EC5E8"/>
                 </a:solidFill>
                 <a:latin typeface="Yu Gothic UI"/>
               </a:rPr>
@@ -3529,7 +3530,7 @@
             <a:avLst/>
           </a:prstGeom>
           <a:solidFill>
-            <a:srgbClr val="7FD1AE"/>
+            <a:srgbClr val="8EC5E8"/>
           </a:solidFill>
           <a:ln>
             <a:noFill/>
@@ -3627,7 +3628,7 @@
             <a:r>
               <a:rPr sz="1300" b="0">
                 <a:solidFill>
-                  <a:srgbClr val="7FD1AE"/>
+                  <a:srgbClr val="8EC5E8"/>
                 </a:solidFill>
                 <a:latin typeface="Yu Gothic UI"/>
               </a:rPr>
@@ -3650,7 +3651,7 @@
     <p:bg>
       <p:bgPr>
         <a:solidFill>
-          <a:srgbClr val="0F4C3A"/>
+          <a:srgbClr val="014172"/>
         </a:solidFill>
         <a:effectLst/>
       </p:bgPr>
@@ -3824,7 +3825,7 @@
             <a:r>
               <a:rPr sz="1800" b="1">
                 <a:solidFill>
-                  <a:srgbClr val="7FD1AE"/>
+                  <a:srgbClr val="8EC5E8"/>
                 </a:solidFill>
                 <a:latin typeface="Yu Gothic UI"/>
               </a:rPr>
@@ -3957,7 +3958,7 @@
             <a:r>
               <a:rPr sz="1700" b="0">
                 <a:solidFill>
-                  <a:srgbClr val="7FD1AE"/>
+                  <a:srgbClr val="8EC5E8"/>
                 </a:solidFill>
                 <a:latin typeface="Yu Gothic UI"/>
               </a:rPr>
@@ -4094,7 +4095,7 @@
             <a:avLst/>
           </a:prstGeom>
           <a:solidFill>
-            <a:srgbClr val="7FD1AE"/>
+            <a:srgbClr val="8EC5E8"/>
           </a:solidFill>
           <a:ln>
             <a:noFill/>
@@ -4192,7 +4193,7 @@
             <a:r>
               <a:rPr sz="1300" b="0">
                 <a:solidFill>
-                  <a:srgbClr val="7FD1AE"/>
+                  <a:srgbClr val="8EC5E8"/>
                 </a:solidFill>
                 <a:latin typeface="Yu Gothic UI"/>
               </a:rPr>
@@ -4201,6 +4202,311 @@
           </a:p>
         </p:txBody>
       </p:sp>
+    </p:spTree>
+  </p:cSld>
+  <p:clrMapOvr>
+    <a:masterClrMapping/>
+  </p:clrMapOvr>
+</p:sld>
+</file>
+
+<file path=ppt/slides/slide3.xml><?xml version="1.0" encoding="utf-8"?>
+<p:sld xmlns:a="http://schemas.openxmlformats.org/drawingml/2006/main" xmlns:p="http://schemas.openxmlformats.org/presentationml/2006/main" xmlns:r="http://schemas.openxmlformats.org/officeDocument/2006/relationships">
+  <p:cSld>
+    <p:bg>
+      <p:bgPr>
+        <a:solidFill>
+          <a:srgbClr val="014172"/>
+        </a:solidFill>
+        <a:effectLst/>
+      </p:bgPr>
+    </p:bg>
+    <p:spTree>
+      <p:nvGrpSpPr>
+        <p:cNvPr id="1" name=""/>
+        <p:cNvGrpSpPr/>
+        <p:nvPr/>
+      </p:nvGrpSpPr>
+      <p:grpSpPr/>
+      <p:sp>
+        <p:nvSpPr>
+          <p:cNvPr id="2" name="Rounded Rectangle 1"/>
+          <p:cNvSpPr/>
+          <p:nvPr/>
+        </p:nvSpPr>
+        <p:spPr>
+          <a:xfrm>
+            <a:off x="713232" y="566928"/>
+            <a:ext cx="2377440" cy="68580"/>
+          </a:xfrm>
+          <a:prstGeom prst="roundRect">
+            <a:avLst/>
+          </a:prstGeom>
+          <a:solidFill>
+            <a:srgbClr val="FFFFFF"/>
+          </a:solidFill>
+          <a:ln>
+            <a:noFill/>
+          </a:ln>
+          <a:effectLst/>
+        </p:spPr>
+        <p:style>
+          <a:lnRef idx="1">
+            <a:schemeClr val="accent1"/>
+          </a:lnRef>
+          <a:fillRef idx="3">
+            <a:schemeClr val="accent1"/>
+          </a:fillRef>
+          <a:effectRef idx="2">
+            <a:schemeClr val="accent1"/>
+          </a:effectRef>
+          <a:fontRef idx="minor">
+            <a:schemeClr val="lt1"/>
+          </a:fontRef>
+        </p:style>
+        <p:txBody>
+          <a:bodyPr rtlCol="0" anchor="ctr"/>
+          <a:lstStyle/>
+          <a:p>
+            <a:pPr algn="ctr"/>
+          </a:p>
+        </p:txBody>
+      </p:sp>
+      <p:sp>
+        <p:nvSpPr>
+          <p:cNvPr id="3" name="Rounded Rectangle 2"/>
+          <p:cNvSpPr/>
+          <p:nvPr/>
+        </p:nvSpPr>
+        <p:spPr>
+          <a:xfrm>
+            <a:off x="713232" y="781812"/>
+            <a:ext cx="1920240" cy="68580"/>
+          </a:xfrm>
+          <a:prstGeom prst="roundRect">
+            <a:avLst/>
+          </a:prstGeom>
+          <a:solidFill>
+            <a:srgbClr val="FFFFFF"/>
+          </a:solidFill>
+          <a:ln>
+            <a:noFill/>
+          </a:ln>
+          <a:effectLst/>
+        </p:spPr>
+        <p:style>
+          <a:lnRef idx="1">
+            <a:schemeClr val="accent1"/>
+          </a:lnRef>
+          <a:fillRef idx="3">
+            <a:schemeClr val="accent1"/>
+          </a:fillRef>
+          <a:effectRef idx="2">
+            <a:schemeClr val="accent1"/>
+          </a:effectRef>
+          <a:fontRef idx="minor">
+            <a:schemeClr val="lt1"/>
+          </a:fontRef>
+        </p:style>
+        <p:txBody>
+          <a:bodyPr rtlCol="0" anchor="ctr"/>
+          <a:lstStyle/>
+          <a:p>
+            <a:pPr algn="ctr"/>
+          </a:p>
+        </p:txBody>
+      </p:sp>
+      <p:sp>
+        <p:nvSpPr>
+          <p:cNvPr id="4" name="Rounded Rectangle 3"/>
+          <p:cNvSpPr/>
+          <p:nvPr/>
+        </p:nvSpPr>
+        <p:spPr>
+          <a:xfrm>
+            <a:off x="713232" y="996695"/>
+            <a:ext cx="1463040" cy="68580"/>
+          </a:xfrm>
+          <a:prstGeom prst="roundRect">
+            <a:avLst/>
+          </a:prstGeom>
+          <a:solidFill>
+            <a:srgbClr val="FFFFFF"/>
+          </a:solidFill>
+          <a:ln>
+            <a:noFill/>
+          </a:ln>
+          <a:effectLst/>
+        </p:spPr>
+        <p:style>
+          <a:lnRef idx="1">
+            <a:schemeClr val="accent1"/>
+          </a:lnRef>
+          <a:fillRef idx="3">
+            <a:schemeClr val="accent1"/>
+          </a:fillRef>
+          <a:effectRef idx="2">
+            <a:schemeClr val="accent1"/>
+          </a:effectRef>
+          <a:fontRef idx="minor">
+            <a:schemeClr val="lt1"/>
+          </a:fontRef>
+        </p:style>
+        <p:txBody>
+          <a:bodyPr rtlCol="0" anchor="ctr"/>
+          <a:lstStyle/>
+          <a:p>
+            <a:pPr algn="ctr"/>
+          </a:p>
+        </p:txBody>
+      </p:sp>
+      <p:sp>
+        <p:nvSpPr>
+          <p:cNvPr id="5" name="TextBox 4"/>
+          <p:cNvSpPr txBox="1"/>
+          <p:nvPr/>
+        </p:nvSpPr>
+        <p:spPr>
+          <a:xfrm>
+            <a:off x="713232" y="2103120"/>
+            <a:ext cx="5257800" cy="1005840"/>
+          </a:xfrm>
+          <a:prstGeom prst="rect">
+            <a:avLst/>
+          </a:prstGeom>
+          <a:noFill/>
+        </p:spPr>
+        <p:txBody>
+          <a:bodyPr wrap="square" lIns="0" rIns="0" tIns="0" bIns="0">
+            <a:spAutoFit/>
+          </a:bodyPr>
+          <a:lstStyle/>
+          <a:p>
+            <a:pPr algn="l">
+              <a:lnSpc>
+                <a:spcPct val="125000"/>
+              </a:lnSpc>
+            </a:pPr>
+            <a:r>
+              <a:rPr sz="5400" b="1">
+                <a:solidFill>
+                  <a:srgbClr val="FFFFFF"/>
+                </a:solidFill>
+                <a:latin typeface="Yu Gothic UI"/>
+              </a:rPr>
+              <a:t>家計の制度ログ</a:t>
+            </a:r>
+          </a:p>
+        </p:txBody>
+      </p:sp>
+      <p:sp>
+        <p:nvSpPr>
+          <p:cNvPr id="6" name="TextBox 5"/>
+          <p:cNvSpPr txBox="1"/>
+          <p:nvPr/>
+        </p:nvSpPr>
+        <p:spPr>
+          <a:xfrm>
+            <a:off x="713232" y="3246120"/>
+            <a:ext cx="5669280" cy="548640"/>
+          </a:xfrm>
+          <a:prstGeom prst="rect">
+            <a:avLst/>
+          </a:prstGeom>
+          <a:noFill/>
+        </p:spPr>
+        <p:txBody>
+          <a:bodyPr wrap="square" lIns="0" rIns="0" tIns="0" bIns="0">
+            <a:spAutoFit/>
+          </a:bodyPr>
+          <a:lstStyle/>
+          <a:p>
+            <a:pPr algn="l">
+              <a:lnSpc>
+                <a:spcPct val="125000"/>
+              </a:lnSpc>
+            </a:pPr>
+            <a:r>
+              <a:rPr sz="2100" b="0">
+                <a:solidFill>
+                  <a:srgbClr val="FFFFFF"/>
+                </a:solidFill>
+                <a:latin typeface="Yu Gothic UI"/>
+              </a:rPr>
+              <a:t>お金の制度を、公式の原文で確かめて書く</a:t>
+            </a:r>
+          </a:p>
+        </p:txBody>
+      </p:sp>
+      <p:sp>
+        <p:nvSpPr>
+          <p:cNvPr id="7" name="TextBox 6"/>
+          <p:cNvSpPr txBox="1"/>
+          <p:nvPr/>
+        </p:nvSpPr>
+        <p:spPr>
+          <a:xfrm>
+            <a:off x="713232" y="5138928"/>
+            <a:ext cx="5120640" cy="365760"/>
+          </a:xfrm>
+          <a:prstGeom prst="rect">
+            <a:avLst/>
+          </a:prstGeom>
+          <a:noFill/>
+        </p:spPr>
+        <p:txBody>
+          <a:bodyPr wrap="square" lIns="0" rIns="0" tIns="0" bIns="0">
+            <a:spAutoFit/>
+          </a:bodyPr>
+          <a:lstStyle/>
+          <a:p>
+            <a:pPr algn="l">
+              <a:lnSpc>
+                <a:spcPct val="125000"/>
+              </a:lnSpc>
+            </a:pPr>
+            <a:r>
+              <a:rPr sz="1900" b="0">
+                <a:solidFill>
+                  <a:srgbClr val="8EC5E8"/>
+                </a:solidFill>
+                <a:latin typeface="Yu Gothic UI"/>
+              </a:rPr>
+              <a:t>kakei.nexeed-lab.com</a:t>
+            </a:r>
+          </a:p>
+        </p:txBody>
+      </p:sp>
+      <p:pic>
+        <p:nvPicPr>
+          <p:cNvPr id="8" name="Picture 7" descr="brand-mark.png"/>
+          <p:cNvPicPr>
+            <a:picLocks noChangeAspect="1"/>
+          </p:cNvPicPr>
+          <p:nvPr/>
+        </p:nvPicPr>
+        <p:blipFill>
+          <a:blip r:embed="rId2">
+            <a:extLst>
+              <a:ext uri="{96DAC541-7B7A-43D3-8B79-37D633B846F1}">
+                <asvg:svgBlip xmlns:asvg="http://schemas.microsoft.com/office/drawing/2016/SVG/main" r:embed="rId3"/>
+              </a:ext>
+            </a:extLst>
+          </a:blip>
+          <a:stretch>
+            <a:fillRect/>
+          </a:stretch>
+        </p:blipFill>
+        <p:spPr>
+          <a:xfrm>
+            <a:off x="6053328" y="566928"/>
+            <a:ext cx="4764024" cy="4288536"/>
+          </a:xfrm>
+          <a:prstGeom prst="rect">
+            <a:avLst/>
+          </a:prstGeom>
+        </p:spPr>
+      </p:pic>
     </p:spTree>
   </p:cSld>
   <p:clrMapOvr>

--- a/tools/article-images/article-images.pptx
+++ b/tools/article-images/article-images.pptx
@@ -8,6 +8,7 @@
     <p:sldId id="256" r:id="rId7"/>
     <p:sldId id="257" r:id="rId8"/>
     <p:sldId id="258" r:id="rId9"/>
+    <p:sldId id="259" r:id="rId10"/>
   </p:sldIdLst>
   <p:sldSz cx="11430000" cy="6000750" type="screen4x3"/>
   <p:notesSz cx="6858000" cy="9144000"/>
@@ -4211,6 +4212,571 @@
 </file>
 
 <file path=ppt/slides/slide3.xml><?xml version="1.0" encoding="utf-8"?>
+<p:sld xmlns:a="http://schemas.openxmlformats.org/drawingml/2006/main" xmlns:p="http://schemas.openxmlformats.org/presentationml/2006/main" xmlns:r="http://schemas.openxmlformats.org/officeDocument/2006/relationships">
+  <p:cSld>
+    <p:bg>
+      <p:bgPr>
+        <a:solidFill>
+          <a:srgbClr val="014172"/>
+        </a:solidFill>
+        <a:effectLst/>
+      </p:bgPr>
+    </p:bg>
+    <p:spTree>
+      <p:nvGrpSpPr>
+        <p:cNvPr id="1" name=""/>
+        <p:cNvGrpSpPr/>
+        <p:nvPr/>
+      </p:nvGrpSpPr>
+      <p:grpSpPr/>
+      <p:sp>
+        <p:nvSpPr>
+          <p:cNvPr id="2" name="Rounded Rectangle 1"/>
+          <p:cNvSpPr/>
+          <p:nvPr/>
+        </p:nvSpPr>
+        <p:spPr>
+          <a:xfrm>
+            <a:off x="713232" y="566928"/>
+            <a:ext cx="2377440" cy="68580"/>
+          </a:xfrm>
+          <a:prstGeom prst="roundRect">
+            <a:avLst/>
+          </a:prstGeom>
+          <a:solidFill>
+            <a:srgbClr val="FFFFFF"/>
+          </a:solidFill>
+          <a:ln>
+            <a:noFill/>
+          </a:ln>
+          <a:effectLst/>
+        </p:spPr>
+        <p:style>
+          <a:lnRef idx="1">
+            <a:schemeClr val="accent1"/>
+          </a:lnRef>
+          <a:fillRef idx="3">
+            <a:schemeClr val="accent1"/>
+          </a:fillRef>
+          <a:effectRef idx="2">
+            <a:schemeClr val="accent1"/>
+          </a:effectRef>
+          <a:fontRef idx="minor">
+            <a:schemeClr val="lt1"/>
+          </a:fontRef>
+        </p:style>
+        <p:txBody>
+          <a:bodyPr rtlCol="0" anchor="ctr"/>
+          <a:lstStyle/>
+          <a:p>
+            <a:pPr algn="ctr"/>
+          </a:p>
+        </p:txBody>
+      </p:sp>
+      <p:sp>
+        <p:nvSpPr>
+          <p:cNvPr id="3" name="Rounded Rectangle 2"/>
+          <p:cNvSpPr/>
+          <p:nvPr/>
+        </p:nvSpPr>
+        <p:spPr>
+          <a:xfrm>
+            <a:off x="713232" y="781812"/>
+            <a:ext cx="1920240" cy="68580"/>
+          </a:xfrm>
+          <a:prstGeom prst="roundRect">
+            <a:avLst/>
+          </a:prstGeom>
+          <a:solidFill>
+            <a:srgbClr val="FFFFFF"/>
+          </a:solidFill>
+          <a:ln>
+            <a:noFill/>
+          </a:ln>
+          <a:effectLst/>
+        </p:spPr>
+        <p:style>
+          <a:lnRef idx="1">
+            <a:schemeClr val="accent1"/>
+          </a:lnRef>
+          <a:fillRef idx="3">
+            <a:schemeClr val="accent1"/>
+          </a:fillRef>
+          <a:effectRef idx="2">
+            <a:schemeClr val="accent1"/>
+          </a:effectRef>
+          <a:fontRef idx="minor">
+            <a:schemeClr val="lt1"/>
+          </a:fontRef>
+        </p:style>
+        <p:txBody>
+          <a:bodyPr rtlCol="0" anchor="ctr"/>
+          <a:lstStyle/>
+          <a:p>
+            <a:pPr algn="ctr"/>
+          </a:p>
+        </p:txBody>
+      </p:sp>
+      <p:sp>
+        <p:nvSpPr>
+          <p:cNvPr id="4" name="Rounded Rectangle 3"/>
+          <p:cNvSpPr/>
+          <p:nvPr/>
+        </p:nvSpPr>
+        <p:spPr>
+          <a:xfrm>
+            <a:off x="713232" y="996695"/>
+            <a:ext cx="1463040" cy="68580"/>
+          </a:xfrm>
+          <a:prstGeom prst="roundRect">
+            <a:avLst/>
+          </a:prstGeom>
+          <a:solidFill>
+            <a:srgbClr val="FFFFFF"/>
+          </a:solidFill>
+          <a:ln>
+            <a:noFill/>
+          </a:ln>
+          <a:effectLst/>
+        </p:spPr>
+        <p:style>
+          <a:lnRef idx="1">
+            <a:schemeClr val="accent1"/>
+          </a:lnRef>
+          <a:fillRef idx="3">
+            <a:schemeClr val="accent1"/>
+          </a:fillRef>
+          <a:effectRef idx="2">
+            <a:schemeClr val="accent1"/>
+          </a:effectRef>
+          <a:fontRef idx="minor">
+            <a:schemeClr val="lt1"/>
+          </a:fontRef>
+        </p:style>
+        <p:txBody>
+          <a:bodyPr rtlCol="0" anchor="ctr"/>
+          <a:lstStyle/>
+          <a:p>
+            <a:pPr algn="ctr"/>
+          </a:p>
+        </p:txBody>
+      </p:sp>
+      <p:sp>
+        <p:nvSpPr>
+          <p:cNvPr id="5" name="TextBox 4"/>
+          <p:cNvSpPr txBox="1"/>
+          <p:nvPr/>
+        </p:nvSpPr>
+        <p:spPr>
+          <a:xfrm>
+            <a:off x="713232" y="1481328"/>
+            <a:ext cx="4937760" cy="411480"/>
+          </a:xfrm>
+          <a:prstGeom prst="rect">
+            <a:avLst/>
+          </a:prstGeom>
+          <a:noFill/>
+        </p:spPr>
+        <p:txBody>
+          <a:bodyPr wrap="square" lIns="0" rIns="0" tIns="0" bIns="0">
+            <a:spAutoFit/>
+          </a:bodyPr>
+          <a:lstStyle/>
+          <a:p>
+            <a:pPr algn="l">
+              <a:lnSpc>
+                <a:spcPct val="125000"/>
+              </a:lnSpc>
+            </a:pPr>
+            <a:r>
+              <a:rPr sz="1800" b="1">
+                <a:solidFill>
+                  <a:srgbClr val="8EC5E8"/>
+                </a:solidFill>
+                <a:latin typeface="Yu Gothic UI"/>
+              </a:rPr>
+              <a:t>教育費</a:t>
+            </a:r>
+          </a:p>
+        </p:txBody>
+      </p:sp>
+      <p:sp>
+        <p:nvSpPr>
+          <p:cNvPr id="6" name="TextBox 5"/>
+          <p:cNvSpPr txBox="1"/>
+          <p:nvPr/>
+        </p:nvSpPr>
+        <p:spPr>
+          <a:xfrm>
+            <a:off x="713232" y="1938528"/>
+            <a:ext cx="5257800" cy="914400"/>
+          </a:xfrm>
+          <a:prstGeom prst="rect">
+            <a:avLst/>
+          </a:prstGeom>
+          <a:noFill/>
+        </p:spPr>
+        <p:txBody>
+          <a:bodyPr wrap="square" lIns="0" rIns="0" tIns="0" bIns="0">
+            <a:spAutoFit/>
+          </a:bodyPr>
+          <a:lstStyle/>
+          <a:p>
+            <a:pPr algn="l">
+              <a:lnSpc>
+                <a:spcPct val="125000"/>
+              </a:lnSpc>
+            </a:pPr>
+            <a:r>
+              <a:rPr sz="3400" b="1">
+                <a:solidFill>
+                  <a:srgbClr val="FFFFFF"/>
+                </a:solidFill>
+                <a:latin typeface="Yu Gothic UI"/>
+              </a:rPr>
+              <a:t>「高校無償化」の中身</a:t>
+            </a:r>
+          </a:p>
+        </p:txBody>
+      </p:sp>
+      <p:sp>
+        <p:nvSpPr>
+          <p:cNvPr id="7" name="TextBox 6"/>
+          <p:cNvSpPr txBox="1"/>
+          <p:nvPr/>
+        </p:nvSpPr>
+        <p:spPr>
+          <a:xfrm>
+            <a:off x="713232" y="2999232"/>
+            <a:ext cx="5120640" cy="1280160"/>
+          </a:xfrm>
+          <a:prstGeom prst="rect">
+            <a:avLst/>
+          </a:prstGeom>
+          <a:noFill/>
+        </p:spPr>
+        <p:txBody>
+          <a:bodyPr wrap="square" lIns="0" rIns="0" tIns="0" bIns="0">
+            <a:spAutoFit/>
+          </a:bodyPr>
+          <a:lstStyle/>
+          <a:p>
+            <a:pPr algn="l">
+              <a:lnSpc>
+                <a:spcPct val="135000"/>
+              </a:lnSpc>
+            </a:pPr>
+            <a:r>
+              <a:rPr sz="2600" b="0">
+                <a:solidFill>
+                  <a:srgbClr val="FFFFFF"/>
+                </a:solidFill>
+                <a:latin typeface="Yu Gothic UI"/>
+              </a:rPr>
+              <a:t>制度名は高等学校等就学支援金</a:t>
+            </a:r>
+          </a:p>
+          <a:p>
+            <a:pPr algn="l">
+              <a:lnSpc>
+                <a:spcPct val="135000"/>
+              </a:lnSpc>
+            </a:pPr>
+            <a:r>
+              <a:rPr sz="2600" b="0">
+                <a:solidFill>
+                  <a:srgbClr val="FFFFFF"/>
+                </a:solidFill>
+                <a:latin typeface="Yu Gothic UI"/>
+              </a:rPr>
+              <a:t>授業料以外は別の給付金</a:t>
+            </a:r>
+          </a:p>
+        </p:txBody>
+      </p:sp>
+      <p:sp>
+        <p:nvSpPr>
+          <p:cNvPr id="8" name="TextBox 7"/>
+          <p:cNvSpPr txBox="1"/>
+          <p:nvPr/>
+        </p:nvSpPr>
+        <p:spPr>
+          <a:xfrm>
+            <a:off x="713232" y="5138928"/>
+            <a:ext cx="5120640" cy="365760"/>
+          </a:xfrm>
+          <a:prstGeom prst="rect">
+            <a:avLst/>
+          </a:prstGeom>
+          <a:noFill/>
+        </p:spPr>
+        <p:txBody>
+          <a:bodyPr wrap="square" lIns="0" rIns="0" tIns="0" bIns="0">
+            <a:spAutoFit/>
+          </a:bodyPr>
+          <a:lstStyle/>
+          <a:p>
+            <a:pPr algn="l">
+              <a:lnSpc>
+                <a:spcPct val="125000"/>
+              </a:lnSpc>
+            </a:pPr>
+            <a:r>
+              <a:rPr sz="1700" b="0">
+                <a:solidFill>
+                  <a:srgbClr val="8EC5E8"/>
+                </a:solidFill>
+                <a:latin typeface="Yu Gothic UI"/>
+              </a:rPr>
+              <a:t>家計の制度ログ　kakei.nexeed-lab.com</a:t>
+            </a:r>
+          </a:p>
+        </p:txBody>
+      </p:sp>
+      <p:pic>
+        <p:nvPicPr>
+          <p:cNvPr id="9" name="Picture 8" descr="koukou-mushouka.png"/>
+          <p:cNvPicPr>
+            <a:picLocks noChangeAspect="1"/>
+          </p:cNvPicPr>
+          <p:nvPr/>
+        </p:nvPicPr>
+        <p:blipFill>
+          <a:blip r:embed="rId2">
+            <a:extLst>
+              <a:ext uri="{96DAC541-7B7A-43D3-8B79-37D633B846F1}">
+                <asvg:svgBlip xmlns:asvg="http://schemas.microsoft.com/office/drawing/2016/SVG/main" r:embed="rId3"/>
+              </a:ext>
+            </a:extLst>
+          </a:blip>
+          <a:stretch>
+            <a:fillRect/>
+          </a:stretch>
+        </p:blipFill>
+        <p:spPr>
+          <a:xfrm>
+            <a:off x="6053328" y="566928"/>
+            <a:ext cx="4764024" cy="4288536"/>
+          </a:xfrm>
+          <a:prstGeom prst="rect">
+            <a:avLst/>
+          </a:prstGeom>
+        </p:spPr>
+      </p:pic>
+      <p:sp>
+        <p:nvSpPr>
+          <p:cNvPr id="10" name="Rounded Rectangle 9"/>
+          <p:cNvSpPr/>
+          <p:nvPr/>
+        </p:nvSpPr>
+        <p:spPr>
+          <a:xfrm>
+            <a:off x="6172200" y="4992624"/>
+            <a:ext cx="155448" cy="155448"/>
+          </a:xfrm>
+          <a:prstGeom prst="roundRect">
+            <a:avLst/>
+          </a:prstGeom>
+          <a:solidFill>
+            <a:srgbClr val="FFFFFF"/>
+          </a:solidFill>
+          <a:ln>
+            <a:noFill/>
+          </a:ln>
+          <a:effectLst/>
+        </p:spPr>
+        <p:style>
+          <a:lnRef idx="1">
+            <a:schemeClr val="accent1"/>
+          </a:lnRef>
+          <a:fillRef idx="3">
+            <a:schemeClr val="accent1"/>
+          </a:fillRef>
+          <a:effectRef idx="2">
+            <a:schemeClr val="accent1"/>
+          </a:effectRef>
+          <a:fontRef idx="minor">
+            <a:schemeClr val="lt1"/>
+          </a:fontRef>
+        </p:style>
+        <p:txBody>
+          <a:bodyPr rtlCol="0" anchor="ctr"/>
+          <a:lstStyle/>
+          <a:p>
+            <a:pPr algn="ctr"/>
+          </a:p>
+        </p:txBody>
+      </p:sp>
+      <p:sp>
+        <p:nvSpPr>
+          <p:cNvPr id="11" name="TextBox 10"/>
+          <p:cNvSpPr txBox="1"/>
+          <p:nvPr/>
+        </p:nvSpPr>
+        <p:spPr>
+          <a:xfrm>
+            <a:off x="6428232" y="4956048"/>
+            <a:ext cx="2103120" cy="274320"/>
+          </a:xfrm>
+          <a:prstGeom prst="rect">
+            <a:avLst/>
+          </a:prstGeom>
+          <a:noFill/>
+        </p:spPr>
+        <p:txBody>
+          <a:bodyPr wrap="square" lIns="0" rIns="0" tIns="0" bIns="0">
+            <a:spAutoFit/>
+          </a:bodyPr>
+          <a:lstStyle/>
+          <a:p>
+            <a:pPr algn="l">
+              <a:lnSpc>
+                <a:spcPct val="125000"/>
+              </a:lnSpc>
+            </a:pPr>
+            <a:r>
+              <a:rPr sz="1500" b="0">
+                <a:solidFill>
+                  <a:srgbClr val="FFFFFF"/>
+                </a:solidFill>
+                <a:latin typeface="Yu Gothic UI"/>
+              </a:rPr>
+              <a:t>授業料＝就学支援金</a:t>
+            </a:r>
+          </a:p>
+        </p:txBody>
+      </p:sp>
+      <p:sp>
+        <p:nvSpPr>
+          <p:cNvPr id="12" name="Rounded Rectangle 11"/>
+          <p:cNvSpPr/>
+          <p:nvPr/>
+        </p:nvSpPr>
+        <p:spPr>
+          <a:xfrm>
+            <a:off x="8412480" y="4992624"/>
+            <a:ext cx="155448" cy="155448"/>
+          </a:xfrm>
+          <a:prstGeom prst="roundRect">
+            <a:avLst/>
+          </a:prstGeom>
+          <a:solidFill>
+            <a:srgbClr val="8EC5E8"/>
+          </a:solidFill>
+          <a:ln>
+            <a:noFill/>
+          </a:ln>
+          <a:effectLst/>
+        </p:spPr>
+        <p:style>
+          <a:lnRef idx="1">
+            <a:schemeClr val="accent1"/>
+          </a:lnRef>
+          <a:fillRef idx="3">
+            <a:schemeClr val="accent1"/>
+          </a:fillRef>
+          <a:effectRef idx="2">
+            <a:schemeClr val="accent1"/>
+          </a:effectRef>
+          <a:fontRef idx="minor">
+            <a:schemeClr val="lt1"/>
+          </a:fontRef>
+        </p:style>
+        <p:txBody>
+          <a:bodyPr rtlCol="0" anchor="ctr"/>
+          <a:lstStyle/>
+          <a:p>
+            <a:pPr algn="ctr"/>
+          </a:p>
+        </p:txBody>
+      </p:sp>
+      <p:sp>
+        <p:nvSpPr>
+          <p:cNvPr id="13" name="TextBox 12"/>
+          <p:cNvSpPr txBox="1"/>
+          <p:nvPr/>
+        </p:nvSpPr>
+        <p:spPr>
+          <a:xfrm>
+            <a:off x="8668512" y="4956048"/>
+            <a:ext cx="2103120" cy="274320"/>
+          </a:xfrm>
+          <a:prstGeom prst="rect">
+            <a:avLst/>
+          </a:prstGeom>
+          <a:noFill/>
+        </p:spPr>
+        <p:txBody>
+          <a:bodyPr wrap="square" lIns="0" rIns="0" tIns="0" bIns="0">
+            <a:spAutoFit/>
+          </a:bodyPr>
+          <a:lstStyle/>
+          <a:p>
+            <a:pPr algn="l">
+              <a:lnSpc>
+                <a:spcPct val="125000"/>
+              </a:lnSpc>
+            </a:pPr>
+            <a:r>
+              <a:rPr sz="1500" b="0">
+                <a:solidFill>
+                  <a:srgbClr val="FFFFFF"/>
+                </a:solidFill>
+                <a:latin typeface="Yu Gothic UI"/>
+              </a:rPr>
+              <a:t>授業料以外＝奨学給付金</a:t>
+            </a:r>
+          </a:p>
+        </p:txBody>
+      </p:sp>
+      <p:sp>
+        <p:nvSpPr>
+          <p:cNvPr id="14" name="TextBox 13"/>
+          <p:cNvSpPr txBox="1"/>
+          <p:nvPr/>
+        </p:nvSpPr>
+        <p:spPr>
+          <a:xfrm>
+            <a:off x="6053328" y="5376672"/>
+            <a:ext cx="4764024" cy="274320"/>
+          </a:xfrm>
+          <a:prstGeom prst="rect">
+            <a:avLst/>
+          </a:prstGeom>
+          <a:noFill/>
+        </p:spPr>
+        <p:txBody>
+          <a:bodyPr wrap="square" lIns="0" rIns="0" tIns="0" bIns="0">
+            <a:spAutoFit/>
+          </a:bodyPr>
+          <a:lstStyle/>
+          <a:p>
+            <a:pPr algn="l">
+              <a:lnSpc>
+                <a:spcPct val="125000"/>
+              </a:lnSpc>
+            </a:pPr>
+            <a:r>
+              <a:rPr sz="1300" b="0">
+                <a:solidFill>
+                  <a:srgbClr val="8EC5E8"/>
+                </a:solidFill>
+                <a:latin typeface="Yu Gothic UI"/>
+              </a:rPr>
+              <a:t>数字は年額の上限・給付額（円）</a:t>
+            </a:r>
+          </a:p>
+        </p:txBody>
+      </p:sp>
+    </p:spTree>
+  </p:cSld>
+  <p:clrMapOvr>
+    <a:masterClrMapping/>
+  </p:clrMapOvr>
+</p:sld>
+</file>
+
+<file path=ppt/slides/slide4.xml><?xml version="1.0" encoding="utf-8"?>
 <p:sld xmlns:a="http://schemas.openxmlformats.org/drawingml/2006/main" xmlns:p="http://schemas.openxmlformats.org/presentationml/2006/main" xmlns:r="http://schemas.openxmlformats.org/officeDocument/2006/relationships">
   <p:cSld>
     <p:bg>

--- a/tools/article-images/article-images.pptx
+++ b/tools/article-images/article-images.pptx
@@ -4198,7 +4198,7 @@
                 </a:solidFill>
                 <a:latin typeface="Yu Gothic UI"/>
               </a:rPr>
-              <a:t>底＝自己負担2,000円／破線＝住民税所得割額の20％</a:t>
+              <a:t>破線＝住民税所得割額の20％の天井</a:t>
             </a:r>
           </a:p>
         </p:txBody>
@@ -4763,7 +4763,7 @@
                 </a:solidFill>
                 <a:latin typeface="Yu Gothic UI"/>
               </a:rPr>
-              <a:t>数字は年額の上限・給付額（円）</a:t>
+              <a:t>数字は私立高校の年額（円）</a:t>
             </a:r>
           </a:p>
         </p:txBody>

--- a/tools/article-images/article-images.pptx
+++ b/tools/article-images/article-images.pptx
@@ -9,6 +9,7 @@
     <p:sldId id="257" r:id="rId8"/>
     <p:sldId id="258" r:id="rId9"/>
     <p:sldId id="259" r:id="rId10"/>
+    <p:sldId id="260" r:id="rId11"/>
   </p:sldIdLst>
   <p:sldSz cx="11430000" cy="6000750" type="screen4x3"/>
   <p:notesSz cx="6858000" cy="9144000"/>
@@ -4777,6 +4778,571 @@
 </file>
 
 <file path=ppt/slides/slide4.xml><?xml version="1.0" encoding="utf-8"?>
+<p:sld xmlns:a="http://schemas.openxmlformats.org/drawingml/2006/main" xmlns:p="http://schemas.openxmlformats.org/presentationml/2006/main" xmlns:r="http://schemas.openxmlformats.org/officeDocument/2006/relationships">
+  <p:cSld>
+    <p:bg>
+      <p:bgPr>
+        <a:solidFill>
+          <a:srgbClr val="014172"/>
+        </a:solidFill>
+        <a:effectLst/>
+      </p:bgPr>
+    </p:bg>
+    <p:spTree>
+      <p:nvGrpSpPr>
+        <p:cNvPr id="1" name=""/>
+        <p:cNvGrpSpPr/>
+        <p:nvPr/>
+      </p:nvGrpSpPr>
+      <p:grpSpPr/>
+      <p:sp>
+        <p:nvSpPr>
+          <p:cNvPr id="2" name="Rounded Rectangle 1"/>
+          <p:cNvSpPr/>
+          <p:nvPr/>
+        </p:nvSpPr>
+        <p:spPr>
+          <a:xfrm>
+            <a:off x="713232" y="566928"/>
+            <a:ext cx="2377440" cy="68580"/>
+          </a:xfrm>
+          <a:prstGeom prst="roundRect">
+            <a:avLst/>
+          </a:prstGeom>
+          <a:solidFill>
+            <a:srgbClr val="FFFFFF"/>
+          </a:solidFill>
+          <a:ln>
+            <a:noFill/>
+          </a:ln>
+          <a:effectLst/>
+        </p:spPr>
+        <p:style>
+          <a:lnRef idx="1">
+            <a:schemeClr val="accent1"/>
+          </a:lnRef>
+          <a:fillRef idx="3">
+            <a:schemeClr val="accent1"/>
+          </a:fillRef>
+          <a:effectRef idx="2">
+            <a:schemeClr val="accent1"/>
+          </a:effectRef>
+          <a:fontRef idx="minor">
+            <a:schemeClr val="lt1"/>
+          </a:fontRef>
+        </p:style>
+        <p:txBody>
+          <a:bodyPr rtlCol="0" anchor="ctr"/>
+          <a:lstStyle/>
+          <a:p>
+            <a:pPr algn="ctr"/>
+          </a:p>
+        </p:txBody>
+      </p:sp>
+      <p:sp>
+        <p:nvSpPr>
+          <p:cNvPr id="3" name="Rounded Rectangle 2"/>
+          <p:cNvSpPr/>
+          <p:nvPr/>
+        </p:nvSpPr>
+        <p:spPr>
+          <a:xfrm>
+            <a:off x="713232" y="781812"/>
+            <a:ext cx="1920240" cy="68580"/>
+          </a:xfrm>
+          <a:prstGeom prst="roundRect">
+            <a:avLst/>
+          </a:prstGeom>
+          <a:solidFill>
+            <a:srgbClr val="FFFFFF"/>
+          </a:solidFill>
+          <a:ln>
+            <a:noFill/>
+          </a:ln>
+          <a:effectLst/>
+        </p:spPr>
+        <p:style>
+          <a:lnRef idx="1">
+            <a:schemeClr val="accent1"/>
+          </a:lnRef>
+          <a:fillRef idx="3">
+            <a:schemeClr val="accent1"/>
+          </a:fillRef>
+          <a:effectRef idx="2">
+            <a:schemeClr val="accent1"/>
+          </a:effectRef>
+          <a:fontRef idx="minor">
+            <a:schemeClr val="lt1"/>
+          </a:fontRef>
+        </p:style>
+        <p:txBody>
+          <a:bodyPr rtlCol="0" anchor="ctr"/>
+          <a:lstStyle/>
+          <a:p>
+            <a:pPr algn="ctr"/>
+          </a:p>
+        </p:txBody>
+      </p:sp>
+      <p:sp>
+        <p:nvSpPr>
+          <p:cNvPr id="4" name="Rounded Rectangle 3"/>
+          <p:cNvSpPr/>
+          <p:nvPr/>
+        </p:nvSpPr>
+        <p:spPr>
+          <a:xfrm>
+            <a:off x="713232" y="996695"/>
+            <a:ext cx="1463040" cy="68580"/>
+          </a:xfrm>
+          <a:prstGeom prst="roundRect">
+            <a:avLst/>
+          </a:prstGeom>
+          <a:solidFill>
+            <a:srgbClr val="FFFFFF"/>
+          </a:solidFill>
+          <a:ln>
+            <a:noFill/>
+          </a:ln>
+          <a:effectLst/>
+        </p:spPr>
+        <p:style>
+          <a:lnRef idx="1">
+            <a:schemeClr val="accent1"/>
+          </a:lnRef>
+          <a:fillRef idx="3">
+            <a:schemeClr val="accent1"/>
+          </a:fillRef>
+          <a:effectRef idx="2">
+            <a:schemeClr val="accent1"/>
+          </a:effectRef>
+          <a:fontRef idx="minor">
+            <a:schemeClr val="lt1"/>
+          </a:fontRef>
+        </p:style>
+        <p:txBody>
+          <a:bodyPr rtlCol="0" anchor="ctr"/>
+          <a:lstStyle/>
+          <a:p>
+            <a:pPr algn="ctr"/>
+          </a:p>
+        </p:txBody>
+      </p:sp>
+      <p:sp>
+        <p:nvSpPr>
+          <p:cNvPr id="5" name="TextBox 4"/>
+          <p:cNvSpPr txBox="1"/>
+          <p:nvPr/>
+        </p:nvSpPr>
+        <p:spPr>
+          <a:xfrm>
+            <a:off x="713232" y="1481328"/>
+            <a:ext cx="4937760" cy="411480"/>
+          </a:xfrm>
+          <a:prstGeom prst="rect">
+            <a:avLst/>
+          </a:prstGeom>
+          <a:noFill/>
+        </p:spPr>
+        <p:txBody>
+          <a:bodyPr wrap="square" lIns="0" rIns="0" tIns="0" bIns="0">
+            <a:spAutoFit/>
+          </a:bodyPr>
+          <a:lstStyle/>
+          <a:p>
+            <a:pPr algn="l">
+              <a:lnSpc>
+                <a:spcPct val="125000"/>
+              </a:lnSpc>
+            </a:pPr>
+            <a:r>
+              <a:rPr sz="1800" b="1">
+                <a:solidFill>
+                  <a:srgbClr val="8EC5E8"/>
+                </a:solidFill>
+                <a:latin typeface="Yu Gothic UI"/>
+              </a:rPr>
+              <a:t>教育費</a:t>
+            </a:r>
+          </a:p>
+        </p:txBody>
+      </p:sp>
+      <p:sp>
+        <p:nvSpPr>
+          <p:cNvPr id="6" name="TextBox 5"/>
+          <p:cNvSpPr txBox="1"/>
+          <p:nvPr/>
+        </p:nvSpPr>
+        <p:spPr>
+          <a:xfrm>
+            <a:off x="713232" y="1938528"/>
+            <a:ext cx="5257800" cy="914400"/>
+          </a:xfrm>
+          <a:prstGeom prst="rect">
+            <a:avLst/>
+          </a:prstGeom>
+          <a:noFill/>
+        </p:spPr>
+        <p:txBody>
+          <a:bodyPr wrap="square" lIns="0" rIns="0" tIns="0" bIns="0">
+            <a:spAutoFit/>
+          </a:bodyPr>
+          <a:lstStyle/>
+          <a:p>
+            <a:pPr algn="l">
+              <a:lnSpc>
+                <a:spcPct val="125000"/>
+              </a:lnSpc>
+            </a:pPr>
+            <a:r>
+              <a:rPr sz="3400" b="1">
+                <a:solidFill>
+                  <a:srgbClr val="FFFFFF"/>
+                </a:solidFill>
+                <a:latin typeface="Yu Gothic UI"/>
+              </a:rPr>
+              <a:t>「大学無償化」の中身</a:t>
+            </a:r>
+          </a:p>
+        </p:txBody>
+      </p:sp>
+      <p:sp>
+        <p:nvSpPr>
+          <p:cNvPr id="7" name="TextBox 6"/>
+          <p:cNvSpPr txBox="1"/>
+          <p:nvPr/>
+        </p:nvSpPr>
+        <p:spPr>
+          <a:xfrm>
+            <a:off x="713232" y="2999232"/>
+            <a:ext cx="5120640" cy="1280160"/>
+          </a:xfrm>
+          <a:prstGeom prst="rect">
+            <a:avLst/>
+          </a:prstGeom>
+          <a:noFill/>
+        </p:spPr>
+        <p:txBody>
+          <a:bodyPr wrap="square" lIns="0" rIns="0" tIns="0" bIns="0">
+            <a:spAutoFit/>
+          </a:bodyPr>
+          <a:lstStyle/>
+          <a:p>
+            <a:pPr algn="l">
+              <a:lnSpc>
+                <a:spcPct val="135000"/>
+              </a:lnSpc>
+            </a:pPr>
+            <a:r>
+              <a:rPr sz="2600" b="0">
+                <a:solidFill>
+                  <a:srgbClr val="FFFFFF"/>
+                </a:solidFill>
+                <a:latin typeface="Yu Gothic UI"/>
+              </a:rPr>
+              <a:t>高等教育の修学支援新制度</a:t>
+            </a:r>
+          </a:p>
+          <a:p>
+            <a:pPr algn="l">
+              <a:lnSpc>
+                <a:spcPct val="135000"/>
+              </a:lnSpc>
+            </a:pPr>
+            <a:r>
+              <a:rPr sz="2600" b="0">
+                <a:solidFill>
+                  <a:srgbClr val="FFFFFF"/>
+                </a:solidFill>
+                <a:latin typeface="Yu Gothic UI"/>
+              </a:rPr>
+              <a:t>無償化されたのは減免だけ</a:t>
+            </a:r>
+          </a:p>
+        </p:txBody>
+      </p:sp>
+      <p:sp>
+        <p:nvSpPr>
+          <p:cNvPr id="8" name="TextBox 7"/>
+          <p:cNvSpPr txBox="1"/>
+          <p:nvPr/>
+        </p:nvSpPr>
+        <p:spPr>
+          <a:xfrm>
+            <a:off x="713232" y="5138928"/>
+            <a:ext cx="5120640" cy="365760"/>
+          </a:xfrm>
+          <a:prstGeom prst="rect">
+            <a:avLst/>
+          </a:prstGeom>
+          <a:noFill/>
+        </p:spPr>
+        <p:txBody>
+          <a:bodyPr wrap="square" lIns="0" rIns="0" tIns="0" bIns="0">
+            <a:spAutoFit/>
+          </a:bodyPr>
+          <a:lstStyle/>
+          <a:p>
+            <a:pPr algn="l">
+              <a:lnSpc>
+                <a:spcPct val="125000"/>
+              </a:lnSpc>
+            </a:pPr>
+            <a:r>
+              <a:rPr sz="1700" b="0">
+                <a:solidFill>
+                  <a:srgbClr val="8EC5E8"/>
+                </a:solidFill>
+                <a:latin typeface="Yu Gothic UI"/>
+              </a:rPr>
+              <a:t>家計の制度ログ　kakei.nexeed-lab.com</a:t>
+            </a:r>
+          </a:p>
+        </p:txBody>
+      </p:sp>
+      <p:pic>
+        <p:nvPicPr>
+          <p:cNvPr id="9" name="Picture 8" descr="daigaku-mushouka.png"/>
+          <p:cNvPicPr>
+            <a:picLocks noChangeAspect="1"/>
+          </p:cNvPicPr>
+          <p:nvPr/>
+        </p:nvPicPr>
+        <p:blipFill>
+          <a:blip r:embed="rId2">
+            <a:extLst>
+              <a:ext uri="{96DAC541-7B7A-43D3-8B79-37D633B846F1}">
+                <asvg:svgBlip xmlns:asvg="http://schemas.microsoft.com/office/drawing/2016/SVG/main" r:embed="rId3"/>
+              </a:ext>
+            </a:extLst>
+          </a:blip>
+          <a:stretch>
+            <a:fillRect/>
+          </a:stretch>
+        </p:blipFill>
+        <p:spPr>
+          <a:xfrm>
+            <a:off x="6053328" y="566928"/>
+            <a:ext cx="4764024" cy="4288536"/>
+          </a:xfrm>
+          <a:prstGeom prst="rect">
+            <a:avLst/>
+          </a:prstGeom>
+        </p:spPr>
+      </p:pic>
+      <p:sp>
+        <p:nvSpPr>
+          <p:cNvPr id="10" name="Rounded Rectangle 9"/>
+          <p:cNvSpPr/>
+          <p:nvPr/>
+        </p:nvSpPr>
+        <p:spPr>
+          <a:xfrm>
+            <a:off x="6172200" y="4992624"/>
+            <a:ext cx="155448" cy="155448"/>
+          </a:xfrm>
+          <a:prstGeom prst="roundRect">
+            <a:avLst/>
+          </a:prstGeom>
+          <a:solidFill>
+            <a:srgbClr val="FFFFFF"/>
+          </a:solidFill>
+          <a:ln>
+            <a:noFill/>
+          </a:ln>
+          <a:effectLst/>
+        </p:spPr>
+        <p:style>
+          <a:lnRef idx="1">
+            <a:schemeClr val="accent1"/>
+          </a:lnRef>
+          <a:fillRef idx="3">
+            <a:schemeClr val="accent1"/>
+          </a:fillRef>
+          <a:effectRef idx="2">
+            <a:schemeClr val="accent1"/>
+          </a:effectRef>
+          <a:fontRef idx="minor">
+            <a:schemeClr val="lt1"/>
+          </a:fontRef>
+        </p:style>
+        <p:txBody>
+          <a:bodyPr rtlCol="0" anchor="ctr"/>
+          <a:lstStyle/>
+          <a:p>
+            <a:pPr algn="ctr"/>
+          </a:p>
+        </p:txBody>
+      </p:sp>
+      <p:sp>
+        <p:nvSpPr>
+          <p:cNvPr id="11" name="TextBox 10"/>
+          <p:cNvSpPr txBox="1"/>
+          <p:nvPr/>
+        </p:nvSpPr>
+        <p:spPr>
+          <a:xfrm>
+            <a:off x="6428232" y="4956048"/>
+            <a:ext cx="2103120" cy="274320"/>
+          </a:xfrm>
+          <a:prstGeom prst="rect">
+            <a:avLst/>
+          </a:prstGeom>
+          <a:noFill/>
+        </p:spPr>
+        <p:txBody>
+          <a:bodyPr wrap="square" lIns="0" rIns="0" tIns="0" bIns="0">
+            <a:spAutoFit/>
+          </a:bodyPr>
+          <a:lstStyle/>
+          <a:p>
+            <a:pPr algn="l">
+              <a:lnSpc>
+                <a:spcPct val="125000"/>
+              </a:lnSpc>
+            </a:pPr>
+            <a:r>
+              <a:rPr sz="1500" b="0">
+                <a:solidFill>
+                  <a:srgbClr val="FFFFFF"/>
+                </a:solidFill>
+                <a:latin typeface="Yu Gothic UI"/>
+              </a:rPr>
+              <a:t>授業料等減免</a:t>
+            </a:r>
+          </a:p>
+        </p:txBody>
+      </p:sp>
+      <p:sp>
+        <p:nvSpPr>
+          <p:cNvPr id="12" name="Rounded Rectangle 11"/>
+          <p:cNvSpPr/>
+          <p:nvPr/>
+        </p:nvSpPr>
+        <p:spPr>
+          <a:xfrm>
+            <a:off x="8412480" y="4992624"/>
+            <a:ext cx="155448" cy="155448"/>
+          </a:xfrm>
+          <a:prstGeom prst="roundRect">
+            <a:avLst/>
+          </a:prstGeom>
+          <a:solidFill>
+            <a:srgbClr val="8EC5E8"/>
+          </a:solidFill>
+          <a:ln>
+            <a:noFill/>
+          </a:ln>
+          <a:effectLst/>
+        </p:spPr>
+        <p:style>
+          <a:lnRef idx="1">
+            <a:schemeClr val="accent1"/>
+          </a:lnRef>
+          <a:fillRef idx="3">
+            <a:schemeClr val="accent1"/>
+          </a:fillRef>
+          <a:effectRef idx="2">
+            <a:schemeClr val="accent1"/>
+          </a:effectRef>
+          <a:fontRef idx="minor">
+            <a:schemeClr val="lt1"/>
+          </a:fontRef>
+        </p:style>
+        <p:txBody>
+          <a:bodyPr rtlCol="0" anchor="ctr"/>
+          <a:lstStyle/>
+          <a:p>
+            <a:pPr algn="ctr"/>
+          </a:p>
+        </p:txBody>
+      </p:sp>
+      <p:sp>
+        <p:nvSpPr>
+          <p:cNvPr id="13" name="TextBox 12"/>
+          <p:cNvSpPr txBox="1"/>
+          <p:nvPr/>
+        </p:nvSpPr>
+        <p:spPr>
+          <a:xfrm>
+            <a:off x="8668512" y="4956048"/>
+            <a:ext cx="2103120" cy="274320"/>
+          </a:xfrm>
+          <a:prstGeom prst="rect">
+            <a:avLst/>
+          </a:prstGeom>
+          <a:noFill/>
+        </p:spPr>
+        <p:txBody>
+          <a:bodyPr wrap="square" lIns="0" rIns="0" tIns="0" bIns="0">
+            <a:spAutoFit/>
+          </a:bodyPr>
+          <a:lstStyle/>
+          <a:p>
+            <a:pPr algn="l">
+              <a:lnSpc>
+                <a:spcPct val="125000"/>
+              </a:lnSpc>
+            </a:pPr>
+            <a:r>
+              <a:rPr sz="1500" b="0">
+                <a:solidFill>
+                  <a:srgbClr val="FFFFFF"/>
+                </a:solidFill>
+                <a:latin typeface="Yu Gothic UI"/>
+              </a:rPr>
+              <a:t>給付型奨学金</a:t>
+            </a:r>
+          </a:p>
+        </p:txBody>
+      </p:sp>
+      <p:sp>
+        <p:nvSpPr>
+          <p:cNvPr id="14" name="TextBox 13"/>
+          <p:cNvSpPr txBox="1"/>
+          <p:nvPr/>
+        </p:nvSpPr>
+        <p:spPr>
+          <a:xfrm>
+            <a:off x="6053328" y="5376672"/>
+            <a:ext cx="4764024" cy="274320"/>
+          </a:xfrm>
+          <a:prstGeom prst="rect">
+            <a:avLst/>
+          </a:prstGeom>
+          <a:noFill/>
+        </p:spPr>
+        <p:txBody>
+          <a:bodyPr wrap="square" lIns="0" rIns="0" tIns="0" bIns="0">
+            <a:spAutoFit/>
+          </a:bodyPr>
+          <a:lstStyle/>
+          <a:p>
+            <a:pPr algn="l">
+              <a:lnSpc>
+                <a:spcPct val="125000"/>
+              </a:lnSpc>
+            </a:pPr>
+            <a:r>
+              <a:rPr sz="1300" b="0">
+                <a:solidFill>
+                  <a:srgbClr val="8EC5E8"/>
+                </a:solidFill>
+                <a:latin typeface="Yu Gothic UI"/>
+              </a:rPr>
+              <a:t>数字は私立大学の年額（給付型は自宅外）</a:t>
+            </a:r>
+          </a:p>
+        </p:txBody>
+      </p:sp>
+    </p:spTree>
+  </p:cSld>
+  <p:clrMapOvr>
+    <a:masterClrMapping/>
+  </p:clrMapOvr>
+</p:sld>
+</file>
+
+<file path=ppt/slides/slide5.xml><?xml version="1.0" encoding="utf-8"?>
 <p:sld xmlns:a="http://schemas.openxmlformats.org/drawingml/2006/main" xmlns:p="http://schemas.openxmlformats.org/presentationml/2006/main" xmlns:r="http://schemas.openxmlformats.org/officeDocument/2006/relationships">
   <p:cSld>
     <p:bg>

--- a/tools/article-images/article-images.pptx
+++ b/tools/article-images/article-images.pptx
@@ -10,6 +10,7 @@
     <p:sldId id="258" r:id="rId9"/>
     <p:sldId id="259" r:id="rId10"/>
     <p:sldId id="260" r:id="rId11"/>
+    <p:sldId id="261" r:id="rId12"/>
   </p:sldIdLst>
   <p:sldSz cx="11430000" cy="6000750" type="screen4x3"/>
   <p:notesSz cx="6858000" cy="9144000"/>
@@ -5343,6 +5344,571 @@
 </file>
 
 <file path=ppt/slides/slide5.xml><?xml version="1.0" encoding="utf-8"?>
+<p:sld xmlns:a="http://schemas.openxmlformats.org/drawingml/2006/main" xmlns:p="http://schemas.openxmlformats.org/presentationml/2006/main" xmlns:r="http://schemas.openxmlformats.org/officeDocument/2006/relationships">
+  <p:cSld>
+    <p:bg>
+      <p:bgPr>
+        <a:solidFill>
+          <a:srgbClr val="014172"/>
+        </a:solidFill>
+        <a:effectLst/>
+      </p:bgPr>
+    </p:bg>
+    <p:spTree>
+      <p:nvGrpSpPr>
+        <p:cNvPr id="1" name=""/>
+        <p:cNvGrpSpPr/>
+        <p:nvPr/>
+      </p:nvGrpSpPr>
+      <p:grpSpPr/>
+      <p:sp>
+        <p:nvSpPr>
+          <p:cNvPr id="2" name="Rounded Rectangle 1"/>
+          <p:cNvSpPr/>
+          <p:nvPr/>
+        </p:nvSpPr>
+        <p:spPr>
+          <a:xfrm>
+            <a:off x="713232" y="566928"/>
+            <a:ext cx="2377440" cy="68580"/>
+          </a:xfrm>
+          <a:prstGeom prst="roundRect">
+            <a:avLst/>
+          </a:prstGeom>
+          <a:solidFill>
+            <a:srgbClr val="FFFFFF"/>
+          </a:solidFill>
+          <a:ln>
+            <a:noFill/>
+          </a:ln>
+          <a:effectLst/>
+        </p:spPr>
+        <p:style>
+          <a:lnRef idx="1">
+            <a:schemeClr val="accent1"/>
+          </a:lnRef>
+          <a:fillRef idx="3">
+            <a:schemeClr val="accent1"/>
+          </a:fillRef>
+          <a:effectRef idx="2">
+            <a:schemeClr val="accent1"/>
+          </a:effectRef>
+          <a:fontRef idx="minor">
+            <a:schemeClr val="lt1"/>
+          </a:fontRef>
+        </p:style>
+        <p:txBody>
+          <a:bodyPr rtlCol="0" anchor="ctr"/>
+          <a:lstStyle/>
+          <a:p>
+            <a:pPr algn="ctr"/>
+          </a:p>
+        </p:txBody>
+      </p:sp>
+      <p:sp>
+        <p:nvSpPr>
+          <p:cNvPr id="3" name="Rounded Rectangle 2"/>
+          <p:cNvSpPr/>
+          <p:nvPr/>
+        </p:nvSpPr>
+        <p:spPr>
+          <a:xfrm>
+            <a:off x="713232" y="781812"/>
+            <a:ext cx="1920240" cy="68580"/>
+          </a:xfrm>
+          <a:prstGeom prst="roundRect">
+            <a:avLst/>
+          </a:prstGeom>
+          <a:solidFill>
+            <a:srgbClr val="FFFFFF"/>
+          </a:solidFill>
+          <a:ln>
+            <a:noFill/>
+          </a:ln>
+          <a:effectLst/>
+        </p:spPr>
+        <p:style>
+          <a:lnRef idx="1">
+            <a:schemeClr val="accent1"/>
+          </a:lnRef>
+          <a:fillRef idx="3">
+            <a:schemeClr val="accent1"/>
+          </a:fillRef>
+          <a:effectRef idx="2">
+            <a:schemeClr val="accent1"/>
+          </a:effectRef>
+          <a:fontRef idx="minor">
+            <a:schemeClr val="lt1"/>
+          </a:fontRef>
+        </p:style>
+        <p:txBody>
+          <a:bodyPr rtlCol="0" anchor="ctr"/>
+          <a:lstStyle/>
+          <a:p>
+            <a:pPr algn="ctr"/>
+          </a:p>
+        </p:txBody>
+      </p:sp>
+      <p:sp>
+        <p:nvSpPr>
+          <p:cNvPr id="4" name="Rounded Rectangle 3"/>
+          <p:cNvSpPr/>
+          <p:nvPr/>
+        </p:nvSpPr>
+        <p:spPr>
+          <a:xfrm>
+            <a:off x="713232" y="996695"/>
+            <a:ext cx="1463040" cy="68580"/>
+          </a:xfrm>
+          <a:prstGeom prst="roundRect">
+            <a:avLst/>
+          </a:prstGeom>
+          <a:solidFill>
+            <a:srgbClr val="FFFFFF"/>
+          </a:solidFill>
+          <a:ln>
+            <a:noFill/>
+          </a:ln>
+          <a:effectLst/>
+        </p:spPr>
+        <p:style>
+          <a:lnRef idx="1">
+            <a:schemeClr val="accent1"/>
+          </a:lnRef>
+          <a:fillRef idx="3">
+            <a:schemeClr val="accent1"/>
+          </a:fillRef>
+          <a:effectRef idx="2">
+            <a:schemeClr val="accent1"/>
+          </a:effectRef>
+          <a:fontRef idx="minor">
+            <a:schemeClr val="lt1"/>
+          </a:fontRef>
+        </p:style>
+        <p:txBody>
+          <a:bodyPr rtlCol="0" anchor="ctr"/>
+          <a:lstStyle/>
+          <a:p>
+            <a:pPr algn="ctr"/>
+          </a:p>
+        </p:txBody>
+      </p:sp>
+      <p:sp>
+        <p:nvSpPr>
+          <p:cNvPr id="5" name="TextBox 4"/>
+          <p:cNvSpPr txBox="1"/>
+          <p:nvPr/>
+        </p:nvSpPr>
+        <p:spPr>
+          <a:xfrm>
+            <a:off x="713232" y="1481328"/>
+            <a:ext cx="4937760" cy="411480"/>
+          </a:xfrm>
+          <a:prstGeom prst="rect">
+            <a:avLst/>
+          </a:prstGeom>
+          <a:noFill/>
+        </p:spPr>
+        <p:txBody>
+          <a:bodyPr wrap="square" lIns="0" rIns="0" tIns="0" bIns="0">
+            <a:spAutoFit/>
+          </a:bodyPr>
+          <a:lstStyle/>
+          <a:p>
+            <a:pPr algn="l">
+              <a:lnSpc>
+                <a:spcPct val="125000"/>
+              </a:lnSpc>
+            </a:pPr>
+            <a:r>
+              <a:rPr sz="1800" b="1">
+                <a:solidFill>
+                  <a:srgbClr val="8EC5E8"/>
+                </a:solidFill>
+                <a:latin typeface="Yu Gothic UI"/>
+              </a:rPr>
+              <a:t>税と社会保険</a:t>
+            </a:r>
+          </a:p>
+        </p:txBody>
+      </p:sp>
+      <p:sp>
+        <p:nvSpPr>
+          <p:cNvPr id="6" name="TextBox 5"/>
+          <p:cNvSpPr txBox="1"/>
+          <p:nvPr/>
+        </p:nvSpPr>
+        <p:spPr>
+          <a:xfrm>
+            <a:off x="713232" y="1938528"/>
+            <a:ext cx="5257800" cy="914400"/>
+          </a:xfrm>
+          <a:prstGeom prst="rect">
+            <a:avLst/>
+          </a:prstGeom>
+          <a:noFill/>
+        </p:spPr>
+        <p:txBody>
+          <a:bodyPr wrap="square" lIns="0" rIns="0" tIns="0" bIns="0">
+            <a:spAutoFit/>
+          </a:bodyPr>
+          <a:lstStyle/>
+          <a:p>
+            <a:pPr algn="l">
+              <a:lnSpc>
+                <a:spcPct val="125000"/>
+              </a:lnSpc>
+            </a:pPr>
+            <a:r>
+              <a:rPr sz="3400" b="1">
+                <a:solidFill>
+                  <a:srgbClr val="FFFFFF"/>
+                </a:solidFill>
+                <a:latin typeface="Yu Gothic UI"/>
+              </a:rPr>
+              <a:t>高額療養費の年間上限</a:t>
+            </a:r>
+          </a:p>
+        </p:txBody>
+      </p:sp>
+      <p:sp>
+        <p:nvSpPr>
+          <p:cNvPr id="7" name="TextBox 6"/>
+          <p:cNvSpPr txBox="1"/>
+          <p:nvPr/>
+        </p:nvSpPr>
+        <p:spPr>
+          <a:xfrm>
+            <a:off x="713232" y="2999232"/>
+            <a:ext cx="5120640" cy="1280160"/>
+          </a:xfrm>
+          <a:prstGeom prst="rect">
+            <a:avLst/>
+          </a:prstGeom>
+          <a:noFill/>
+        </p:spPr>
+        <p:txBody>
+          <a:bodyPr wrap="square" lIns="0" rIns="0" tIns="0" bIns="0">
+            <a:spAutoFit/>
+          </a:bodyPr>
+          <a:lstStyle/>
+          <a:p>
+            <a:pPr algn="l">
+              <a:lnSpc>
+                <a:spcPct val="135000"/>
+              </a:lnSpc>
+            </a:pPr>
+            <a:r>
+              <a:rPr sz="2600" b="0">
+                <a:solidFill>
+                  <a:srgbClr val="FFFFFF"/>
+                </a:solidFill>
+                <a:latin typeface="Yu Gothic UI"/>
+              </a:rPr>
+              <a:t>2026年8月から</a:t>
+            </a:r>
+          </a:p>
+          <a:p>
+            <a:pPr algn="l">
+              <a:lnSpc>
+                <a:spcPct val="135000"/>
+              </a:lnSpc>
+            </a:pPr>
+            <a:r>
+              <a:rPr sz="2600" b="0">
+                <a:solidFill>
+                  <a:srgbClr val="FFFFFF"/>
+                </a:solidFill>
+                <a:latin typeface="Yu Gothic UI"/>
+              </a:rPr>
+              <a:t>年単位の上限額が入った</a:t>
+            </a:r>
+          </a:p>
+        </p:txBody>
+      </p:sp>
+      <p:sp>
+        <p:nvSpPr>
+          <p:cNvPr id="8" name="TextBox 7"/>
+          <p:cNvSpPr txBox="1"/>
+          <p:nvPr/>
+        </p:nvSpPr>
+        <p:spPr>
+          <a:xfrm>
+            <a:off x="713232" y="5138928"/>
+            <a:ext cx="5120640" cy="365760"/>
+          </a:xfrm>
+          <a:prstGeom prst="rect">
+            <a:avLst/>
+          </a:prstGeom>
+          <a:noFill/>
+        </p:spPr>
+        <p:txBody>
+          <a:bodyPr wrap="square" lIns="0" rIns="0" tIns="0" bIns="0">
+            <a:spAutoFit/>
+          </a:bodyPr>
+          <a:lstStyle/>
+          <a:p>
+            <a:pPr algn="l">
+              <a:lnSpc>
+                <a:spcPct val="125000"/>
+              </a:lnSpc>
+            </a:pPr>
+            <a:r>
+              <a:rPr sz="1700" b="0">
+                <a:solidFill>
+                  <a:srgbClr val="8EC5E8"/>
+                </a:solidFill>
+                <a:latin typeface="Yu Gothic UI"/>
+              </a:rPr>
+              <a:t>家計の制度ログ　kakei.nexeed-lab.com</a:t>
+            </a:r>
+          </a:p>
+        </p:txBody>
+      </p:sp>
+      <p:pic>
+        <p:nvPicPr>
+          <p:cNvPr id="9" name="Picture 8" descr="kougaku-ryouyouhi.png"/>
+          <p:cNvPicPr>
+            <a:picLocks noChangeAspect="1"/>
+          </p:cNvPicPr>
+          <p:nvPr/>
+        </p:nvPicPr>
+        <p:blipFill>
+          <a:blip r:embed="rId2">
+            <a:extLst>
+              <a:ext uri="{96DAC541-7B7A-43D3-8B79-37D633B846F1}">
+                <asvg:svgBlip xmlns:asvg="http://schemas.microsoft.com/office/drawing/2016/SVG/main" r:embed="rId3"/>
+              </a:ext>
+            </a:extLst>
+          </a:blip>
+          <a:stretch>
+            <a:fillRect/>
+          </a:stretch>
+        </p:blipFill>
+        <p:spPr>
+          <a:xfrm>
+            <a:off x="6053328" y="566928"/>
+            <a:ext cx="4764024" cy="4288536"/>
+          </a:xfrm>
+          <a:prstGeom prst="rect">
+            <a:avLst/>
+          </a:prstGeom>
+        </p:spPr>
+      </p:pic>
+      <p:sp>
+        <p:nvSpPr>
+          <p:cNvPr id="10" name="Rounded Rectangle 9"/>
+          <p:cNvSpPr/>
+          <p:nvPr/>
+        </p:nvSpPr>
+        <p:spPr>
+          <a:xfrm>
+            <a:off x="6172200" y="4992624"/>
+            <a:ext cx="155448" cy="155448"/>
+          </a:xfrm>
+          <a:prstGeom prst="roundRect">
+            <a:avLst/>
+          </a:prstGeom>
+          <a:solidFill>
+            <a:srgbClr val="FFFFFF"/>
+          </a:solidFill>
+          <a:ln>
+            <a:noFill/>
+          </a:ln>
+          <a:effectLst/>
+        </p:spPr>
+        <p:style>
+          <a:lnRef idx="1">
+            <a:schemeClr val="accent1"/>
+          </a:lnRef>
+          <a:fillRef idx="3">
+            <a:schemeClr val="accent1"/>
+          </a:fillRef>
+          <a:effectRef idx="2">
+            <a:schemeClr val="accent1"/>
+          </a:effectRef>
+          <a:fontRef idx="minor">
+            <a:schemeClr val="lt1"/>
+          </a:fontRef>
+        </p:style>
+        <p:txBody>
+          <a:bodyPr rtlCol="0" anchor="ctr"/>
+          <a:lstStyle/>
+          <a:p>
+            <a:pPr algn="ctr"/>
+          </a:p>
+        </p:txBody>
+      </p:sp>
+      <p:sp>
+        <p:nvSpPr>
+          <p:cNvPr id="11" name="TextBox 10"/>
+          <p:cNvSpPr txBox="1"/>
+          <p:nvPr/>
+        </p:nvSpPr>
+        <p:spPr>
+          <a:xfrm>
+            <a:off x="6428232" y="4956048"/>
+            <a:ext cx="2103120" cy="274320"/>
+          </a:xfrm>
+          <a:prstGeom prst="rect">
+            <a:avLst/>
+          </a:prstGeom>
+          <a:noFill/>
+        </p:spPr>
+        <p:txBody>
+          <a:bodyPr wrap="square" lIns="0" rIns="0" tIns="0" bIns="0">
+            <a:spAutoFit/>
+          </a:bodyPr>
+          <a:lstStyle/>
+          <a:p>
+            <a:pPr algn="l">
+              <a:lnSpc>
+                <a:spcPct val="125000"/>
+              </a:lnSpc>
+            </a:pPr>
+            <a:r>
+              <a:rPr sz="1500" b="0">
+                <a:solidFill>
+                  <a:srgbClr val="FFFFFF"/>
+                </a:solidFill>
+                <a:latin typeface="Yu Gothic UI"/>
+              </a:rPr>
+              <a:t>窓口で払う自己負担</a:t>
+            </a:r>
+          </a:p>
+        </p:txBody>
+      </p:sp>
+      <p:sp>
+        <p:nvSpPr>
+          <p:cNvPr id="12" name="Rounded Rectangle 11"/>
+          <p:cNvSpPr/>
+          <p:nvPr/>
+        </p:nvSpPr>
+        <p:spPr>
+          <a:xfrm>
+            <a:off x="8412480" y="4992624"/>
+            <a:ext cx="155448" cy="155448"/>
+          </a:xfrm>
+          <a:prstGeom prst="roundRect">
+            <a:avLst/>
+          </a:prstGeom>
+          <a:solidFill>
+            <a:srgbClr val="8EC5E8"/>
+          </a:solidFill>
+          <a:ln>
+            <a:noFill/>
+          </a:ln>
+          <a:effectLst/>
+        </p:spPr>
+        <p:style>
+          <a:lnRef idx="1">
+            <a:schemeClr val="accent1"/>
+          </a:lnRef>
+          <a:fillRef idx="3">
+            <a:schemeClr val="accent1"/>
+          </a:fillRef>
+          <a:effectRef idx="2">
+            <a:schemeClr val="accent1"/>
+          </a:effectRef>
+          <a:fontRef idx="minor">
+            <a:schemeClr val="lt1"/>
+          </a:fontRef>
+        </p:style>
+        <p:txBody>
+          <a:bodyPr rtlCol="0" anchor="ctr"/>
+          <a:lstStyle/>
+          <a:p>
+            <a:pPr algn="ctr"/>
+          </a:p>
+        </p:txBody>
+      </p:sp>
+      <p:sp>
+        <p:nvSpPr>
+          <p:cNvPr id="13" name="TextBox 12"/>
+          <p:cNvSpPr txBox="1"/>
+          <p:nvPr/>
+        </p:nvSpPr>
+        <p:spPr>
+          <a:xfrm>
+            <a:off x="8668512" y="4956048"/>
+            <a:ext cx="2103120" cy="274320"/>
+          </a:xfrm>
+          <a:prstGeom prst="rect">
+            <a:avLst/>
+          </a:prstGeom>
+          <a:noFill/>
+        </p:spPr>
+        <p:txBody>
+          <a:bodyPr wrap="square" lIns="0" rIns="0" tIns="0" bIns="0">
+            <a:spAutoFit/>
+          </a:bodyPr>
+          <a:lstStyle/>
+          <a:p>
+            <a:pPr algn="l">
+              <a:lnSpc>
+                <a:spcPct val="125000"/>
+              </a:lnSpc>
+            </a:pPr>
+            <a:r>
+              <a:rPr sz="1500" b="0">
+                <a:solidFill>
+                  <a:srgbClr val="FFFFFF"/>
+                </a:solidFill>
+                <a:latin typeface="Yu Gothic UI"/>
+              </a:rPr>
+              <a:t>上限を超えて戻る分</a:t>
+            </a:r>
+          </a:p>
+        </p:txBody>
+      </p:sp>
+      <p:sp>
+        <p:nvSpPr>
+          <p:cNvPr id="14" name="TextBox 13"/>
+          <p:cNvSpPr txBox="1"/>
+          <p:nvPr/>
+        </p:nvSpPr>
+        <p:spPr>
+          <a:xfrm>
+            <a:off x="6053328" y="5376672"/>
+            <a:ext cx="4764024" cy="274320"/>
+          </a:xfrm>
+          <a:prstGeom prst="rect">
+            <a:avLst/>
+          </a:prstGeom>
+          <a:noFill/>
+        </p:spPr>
+        <p:txBody>
+          <a:bodyPr wrap="square" lIns="0" rIns="0" tIns="0" bIns="0">
+            <a:spAutoFit/>
+          </a:bodyPr>
+          <a:lstStyle/>
+          <a:p>
+            <a:pPr algn="l">
+              <a:lnSpc>
+                <a:spcPct val="125000"/>
+              </a:lnSpc>
+            </a:pPr>
+            <a:r>
+              <a:rPr sz="1300" b="0">
+                <a:solidFill>
+                  <a:srgbClr val="8EC5E8"/>
+                </a:solidFill>
+                <a:latin typeface="Yu Gothic UI"/>
+              </a:rPr>
+              <a:t>破線＝年間上限（万円）。8月から翌年7月まで</a:t>
+            </a:r>
+          </a:p>
+        </p:txBody>
+      </p:sp>
+    </p:spTree>
+  </p:cSld>
+  <p:clrMapOvr>
+    <a:masterClrMapping/>
+  </p:clrMapOvr>
+</p:sld>
+</file>
+
+<file path=ppt/slides/slide6.xml><?xml version="1.0" encoding="utf-8"?>
 <p:sld xmlns:a="http://schemas.openxmlformats.org/drawingml/2006/main" xmlns:p="http://schemas.openxmlformats.org/presentationml/2006/main" xmlns:r="http://schemas.openxmlformats.org/officeDocument/2006/relationships">
   <p:cSld>
     <p:bg>

--- a/tools/article-images/article-images.pptx
+++ b/tools/article-images/article-images.pptx
@@ -5773,7 +5773,7 @@
                 </a:solidFill>
                 <a:latin typeface="Yu Gothic UI"/>
               </a:rPr>
-              <a:t>窓口で払う自己負担</a:t>
+              <a:t>実際に払う自己負担</a:t>
             </a:r>
           </a:p>
         </p:txBody>
@@ -5856,7 +5856,7 @@
                 </a:solidFill>
                 <a:latin typeface="Yu Gothic UI"/>
               </a:rPr>
-              <a:t>上限を超えて戻る分</a:t>
+              <a:t>払わずに済む分</a:t>
             </a:r>
           </a:p>
         </p:txBody>
@@ -5895,7 +5895,23 @@
                 </a:solidFill>
                 <a:latin typeface="Yu Gothic UI"/>
               </a:rPr>
-              <a:t>破線＝年間上限（万円）。8月から翌年7月まで</a:t>
+              <a:t>横＝8月から翌年7月の12か月　縦＝自己負担の積み上がり</a:t>
+            </a:r>
+          </a:p>
+          <a:p>
+            <a:pPr algn="l">
+              <a:lnSpc>
+                <a:spcPct val="125000"/>
+              </a:lnSpc>
+            </a:pPr>
+            <a:r>
+              <a:rPr sz="1300" b="0">
+                <a:solidFill>
+                  <a:srgbClr val="8EC5E8"/>
+                </a:solidFill>
+                <a:latin typeface="Yu Gothic UI"/>
+              </a:rPr>
+              <a:t>破線＝年間上限。ここから先は払わなくてよい</a:t>
             </a:r>
           </a:p>
         </p:txBody>

--- a/tools/article-images/article-images.pptx
+++ b/tools/article-images/article-images.pptx
@@ -11,6 +11,7 @@
     <p:sldId id="259" r:id="rId10"/>
     <p:sldId id="260" r:id="rId11"/>
     <p:sldId id="261" r:id="rId12"/>
+    <p:sldId id="262" r:id="rId13"/>
   </p:sldIdLst>
   <p:sldSz cx="11430000" cy="6000750" type="screen4x3"/>
   <p:notesSz cx="6858000" cy="9144000"/>
@@ -5925,6 +5926,587 @@
 </file>
 
 <file path=ppt/slides/slide6.xml><?xml version="1.0" encoding="utf-8"?>
+<p:sld xmlns:a="http://schemas.openxmlformats.org/drawingml/2006/main" xmlns:p="http://schemas.openxmlformats.org/presentationml/2006/main" xmlns:r="http://schemas.openxmlformats.org/officeDocument/2006/relationships">
+  <p:cSld>
+    <p:bg>
+      <p:bgPr>
+        <a:solidFill>
+          <a:srgbClr val="014172"/>
+        </a:solidFill>
+        <a:effectLst/>
+      </p:bgPr>
+    </p:bg>
+    <p:spTree>
+      <p:nvGrpSpPr>
+        <p:cNvPr id="1" name=""/>
+        <p:cNvGrpSpPr/>
+        <p:nvPr/>
+      </p:nvGrpSpPr>
+      <p:grpSpPr/>
+      <p:sp>
+        <p:nvSpPr>
+          <p:cNvPr id="2" name="Rounded Rectangle 1"/>
+          <p:cNvSpPr/>
+          <p:nvPr/>
+        </p:nvSpPr>
+        <p:spPr>
+          <a:xfrm>
+            <a:off x="713232" y="566928"/>
+            <a:ext cx="2377440" cy="68580"/>
+          </a:xfrm>
+          <a:prstGeom prst="roundRect">
+            <a:avLst/>
+          </a:prstGeom>
+          <a:solidFill>
+            <a:srgbClr val="FFFFFF"/>
+          </a:solidFill>
+          <a:ln>
+            <a:noFill/>
+          </a:ln>
+          <a:effectLst/>
+        </p:spPr>
+        <p:style>
+          <a:lnRef idx="1">
+            <a:schemeClr val="accent1"/>
+          </a:lnRef>
+          <a:fillRef idx="3">
+            <a:schemeClr val="accent1"/>
+          </a:fillRef>
+          <a:effectRef idx="2">
+            <a:schemeClr val="accent1"/>
+          </a:effectRef>
+          <a:fontRef idx="minor">
+            <a:schemeClr val="lt1"/>
+          </a:fontRef>
+        </p:style>
+        <p:txBody>
+          <a:bodyPr rtlCol="0" anchor="ctr"/>
+          <a:lstStyle/>
+          <a:p>
+            <a:pPr algn="ctr"/>
+          </a:p>
+        </p:txBody>
+      </p:sp>
+      <p:sp>
+        <p:nvSpPr>
+          <p:cNvPr id="3" name="Rounded Rectangle 2"/>
+          <p:cNvSpPr/>
+          <p:nvPr/>
+        </p:nvSpPr>
+        <p:spPr>
+          <a:xfrm>
+            <a:off x="713232" y="781812"/>
+            <a:ext cx="1920240" cy="68580"/>
+          </a:xfrm>
+          <a:prstGeom prst="roundRect">
+            <a:avLst/>
+          </a:prstGeom>
+          <a:solidFill>
+            <a:srgbClr val="FFFFFF"/>
+          </a:solidFill>
+          <a:ln>
+            <a:noFill/>
+          </a:ln>
+          <a:effectLst/>
+        </p:spPr>
+        <p:style>
+          <a:lnRef idx="1">
+            <a:schemeClr val="accent1"/>
+          </a:lnRef>
+          <a:fillRef idx="3">
+            <a:schemeClr val="accent1"/>
+          </a:fillRef>
+          <a:effectRef idx="2">
+            <a:schemeClr val="accent1"/>
+          </a:effectRef>
+          <a:fontRef idx="minor">
+            <a:schemeClr val="lt1"/>
+          </a:fontRef>
+        </p:style>
+        <p:txBody>
+          <a:bodyPr rtlCol="0" anchor="ctr"/>
+          <a:lstStyle/>
+          <a:p>
+            <a:pPr algn="ctr"/>
+          </a:p>
+        </p:txBody>
+      </p:sp>
+      <p:sp>
+        <p:nvSpPr>
+          <p:cNvPr id="4" name="Rounded Rectangle 3"/>
+          <p:cNvSpPr/>
+          <p:nvPr/>
+        </p:nvSpPr>
+        <p:spPr>
+          <a:xfrm>
+            <a:off x="713232" y="996695"/>
+            <a:ext cx="1463040" cy="68580"/>
+          </a:xfrm>
+          <a:prstGeom prst="roundRect">
+            <a:avLst/>
+          </a:prstGeom>
+          <a:solidFill>
+            <a:srgbClr val="FFFFFF"/>
+          </a:solidFill>
+          <a:ln>
+            <a:noFill/>
+          </a:ln>
+          <a:effectLst/>
+        </p:spPr>
+        <p:style>
+          <a:lnRef idx="1">
+            <a:schemeClr val="accent1"/>
+          </a:lnRef>
+          <a:fillRef idx="3">
+            <a:schemeClr val="accent1"/>
+          </a:fillRef>
+          <a:effectRef idx="2">
+            <a:schemeClr val="accent1"/>
+          </a:effectRef>
+          <a:fontRef idx="minor">
+            <a:schemeClr val="lt1"/>
+          </a:fontRef>
+        </p:style>
+        <p:txBody>
+          <a:bodyPr rtlCol="0" anchor="ctr"/>
+          <a:lstStyle/>
+          <a:p>
+            <a:pPr algn="ctr"/>
+          </a:p>
+        </p:txBody>
+      </p:sp>
+      <p:sp>
+        <p:nvSpPr>
+          <p:cNvPr id="5" name="TextBox 4"/>
+          <p:cNvSpPr txBox="1"/>
+          <p:nvPr/>
+        </p:nvSpPr>
+        <p:spPr>
+          <a:xfrm>
+            <a:off x="713232" y="1481328"/>
+            <a:ext cx="4937760" cy="411480"/>
+          </a:xfrm>
+          <a:prstGeom prst="rect">
+            <a:avLst/>
+          </a:prstGeom>
+          <a:noFill/>
+        </p:spPr>
+        <p:txBody>
+          <a:bodyPr wrap="square" lIns="0" rIns="0" tIns="0" bIns="0">
+            <a:spAutoFit/>
+          </a:bodyPr>
+          <a:lstStyle/>
+          <a:p>
+            <a:pPr algn="l">
+              <a:lnSpc>
+                <a:spcPct val="125000"/>
+              </a:lnSpc>
+            </a:pPr>
+            <a:r>
+              <a:rPr sz="1800" b="1">
+                <a:solidFill>
+                  <a:srgbClr val="8EC5E8"/>
+                </a:solidFill>
+                <a:latin typeface="Yu Gothic UI"/>
+              </a:rPr>
+              <a:t>教育費</a:t>
+            </a:r>
+          </a:p>
+        </p:txBody>
+      </p:sp>
+      <p:sp>
+        <p:nvSpPr>
+          <p:cNvPr id="6" name="TextBox 5"/>
+          <p:cNvSpPr txBox="1"/>
+          <p:nvPr/>
+        </p:nvSpPr>
+        <p:spPr>
+          <a:xfrm>
+            <a:off x="713232" y="1938528"/>
+            <a:ext cx="5257800" cy="914400"/>
+          </a:xfrm>
+          <a:prstGeom prst="rect">
+            <a:avLst/>
+          </a:prstGeom>
+          <a:noFill/>
+        </p:spPr>
+        <p:txBody>
+          <a:bodyPr wrap="square" lIns="0" rIns="0" tIns="0" bIns="0">
+            <a:spAutoFit/>
+          </a:bodyPr>
+          <a:lstStyle/>
+          <a:p>
+            <a:pPr algn="l">
+              <a:lnSpc>
+                <a:spcPct val="125000"/>
+              </a:lnSpc>
+            </a:pPr>
+            <a:r>
+              <a:rPr sz="3400" b="1">
+                <a:solidFill>
+                  <a:srgbClr val="FFFFFF"/>
+                </a:solidFill>
+                <a:latin typeface="Yu Gothic UI"/>
+              </a:rPr>
+              <a:t>児童手当の「第3子」</a:t>
+            </a:r>
+          </a:p>
+        </p:txBody>
+      </p:sp>
+      <p:sp>
+        <p:nvSpPr>
+          <p:cNvPr id="7" name="TextBox 6"/>
+          <p:cNvSpPr txBox="1"/>
+          <p:nvPr/>
+        </p:nvSpPr>
+        <p:spPr>
+          <a:xfrm>
+            <a:off x="713232" y="2999232"/>
+            <a:ext cx="5120640" cy="1280160"/>
+          </a:xfrm>
+          <a:prstGeom prst="rect">
+            <a:avLst/>
+          </a:prstGeom>
+          <a:noFill/>
+        </p:spPr>
+        <p:txBody>
+          <a:bodyPr wrap="square" lIns="0" rIns="0" tIns="0" bIns="0">
+            <a:spAutoFit/>
+          </a:bodyPr>
+          <a:lstStyle/>
+          <a:p>
+            <a:pPr algn="l">
+              <a:lnSpc>
+                <a:spcPct val="135000"/>
+              </a:lnSpc>
+            </a:pPr>
+            <a:r>
+              <a:rPr sz="2600" b="0">
+                <a:solidFill>
+                  <a:srgbClr val="FFFFFF"/>
+                </a:solidFill>
+                <a:latin typeface="Yu Gothic UI"/>
+              </a:rPr>
+              <a:t>3人いても</a:t>
+            </a:r>
+          </a:p>
+          <a:p>
+            <a:pPr algn="l">
+              <a:lnSpc>
+                <a:spcPct val="135000"/>
+              </a:lnSpc>
+            </a:pPr>
+            <a:r>
+              <a:rPr sz="2600" b="0">
+                <a:solidFill>
+                  <a:srgbClr val="FFFFFF"/>
+                </a:solidFill>
+                <a:latin typeface="Yu Gothic UI"/>
+              </a:rPr>
+              <a:t>第3子とは限らない</a:t>
+            </a:r>
+          </a:p>
+        </p:txBody>
+      </p:sp>
+      <p:sp>
+        <p:nvSpPr>
+          <p:cNvPr id="8" name="TextBox 7"/>
+          <p:cNvSpPr txBox="1"/>
+          <p:nvPr/>
+        </p:nvSpPr>
+        <p:spPr>
+          <a:xfrm>
+            <a:off x="713232" y="5138928"/>
+            <a:ext cx="5120640" cy="365760"/>
+          </a:xfrm>
+          <a:prstGeom prst="rect">
+            <a:avLst/>
+          </a:prstGeom>
+          <a:noFill/>
+        </p:spPr>
+        <p:txBody>
+          <a:bodyPr wrap="square" lIns="0" rIns="0" tIns="0" bIns="0">
+            <a:spAutoFit/>
+          </a:bodyPr>
+          <a:lstStyle/>
+          <a:p>
+            <a:pPr algn="l">
+              <a:lnSpc>
+                <a:spcPct val="125000"/>
+              </a:lnSpc>
+            </a:pPr>
+            <a:r>
+              <a:rPr sz="1700" b="0">
+                <a:solidFill>
+                  <a:srgbClr val="8EC5E8"/>
+                </a:solidFill>
+                <a:latin typeface="Yu Gothic UI"/>
+              </a:rPr>
+              <a:t>家計の制度ログ　kakei.nexeed-lab.com</a:t>
+            </a:r>
+          </a:p>
+        </p:txBody>
+      </p:sp>
+      <p:pic>
+        <p:nvPicPr>
+          <p:cNvPr id="9" name="Picture 8" descr="jidouteate.png"/>
+          <p:cNvPicPr>
+            <a:picLocks noChangeAspect="1"/>
+          </p:cNvPicPr>
+          <p:nvPr/>
+        </p:nvPicPr>
+        <p:blipFill>
+          <a:blip r:embed="rId2">
+            <a:extLst>
+              <a:ext uri="{96DAC541-7B7A-43D3-8B79-37D633B846F1}">
+                <asvg:svgBlip xmlns:asvg="http://schemas.microsoft.com/office/drawing/2016/SVG/main" r:embed="rId3"/>
+              </a:ext>
+            </a:extLst>
+          </a:blip>
+          <a:stretch>
+            <a:fillRect/>
+          </a:stretch>
+        </p:blipFill>
+        <p:spPr>
+          <a:xfrm>
+            <a:off x="6053328" y="566928"/>
+            <a:ext cx="4764024" cy="4288536"/>
+          </a:xfrm>
+          <a:prstGeom prst="rect">
+            <a:avLst/>
+          </a:prstGeom>
+        </p:spPr>
+      </p:pic>
+      <p:sp>
+        <p:nvSpPr>
+          <p:cNvPr id="10" name="Rounded Rectangle 9"/>
+          <p:cNvSpPr/>
+          <p:nvPr/>
+        </p:nvSpPr>
+        <p:spPr>
+          <a:xfrm>
+            <a:off x="6172200" y="4992624"/>
+            <a:ext cx="155448" cy="155448"/>
+          </a:xfrm>
+          <a:prstGeom prst="roundRect">
+            <a:avLst/>
+          </a:prstGeom>
+          <a:solidFill>
+            <a:srgbClr val="FFFFFF"/>
+          </a:solidFill>
+          <a:ln>
+            <a:noFill/>
+          </a:ln>
+          <a:effectLst/>
+        </p:spPr>
+        <p:style>
+          <a:lnRef idx="1">
+            <a:schemeClr val="accent1"/>
+          </a:lnRef>
+          <a:fillRef idx="3">
+            <a:schemeClr val="accent1"/>
+          </a:fillRef>
+          <a:effectRef idx="2">
+            <a:schemeClr val="accent1"/>
+          </a:effectRef>
+          <a:fontRef idx="minor">
+            <a:schemeClr val="lt1"/>
+          </a:fontRef>
+        </p:style>
+        <p:txBody>
+          <a:bodyPr rtlCol="0" anchor="ctr"/>
+          <a:lstStyle/>
+          <a:p>
+            <a:pPr algn="ctr"/>
+          </a:p>
+        </p:txBody>
+      </p:sp>
+      <p:sp>
+        <p:nvSpPr>
+          <p:cNvPr id="11" name="TextBox 10"/>
+          <p:cNvSpPr txBox="1"/>
+          <p:nvPr/>
+        </p:nvSpPr>
+        <p:spPr>
+          <a:xfrm>
+            <a:off x="6428232" y="4956048"/>
+            <a:ext cx="2103120" cy="274320"/>
+          </a:xfrm>
+          <a:prstGeom prst="rect">
+            <a:avLst/>
+          </a:prstGeom>
+          <a:noFill/>
+        </p:spPr>
+        <p:txBody>
+          <a:bodyPr wrap="square" lIns="0" rIns="0" tIns="0" bIns="0">
+            <a:spAutoFit/>
+          </a:bodyPr>
+          <a:lstStyle/>
+          <a:p>
+            <a:pPr algn="l">
+              <a:lnSpc>
+                <a:spcPct val="125000"/>
+              </a:lnSpc>
+            </a:pPr>
+            <a:r>
+              <a:rPr sz="1500" b="0">
+                <a:solidFill>
+                  <a:srgbClr val="FFFFFF"/>
+                </a:solidFill>
+                <a:latin typeface="Yu Gothic UI"/>
+              </a:rPr>
+              <a:t>加算の対象になる子</a:t>
+            </a:r>
+          </a:p>
+        </p:txBody>
+      </p:sp>
+      <p:sp>
+        <p:nvSpPr>
+          <p:cNvPr id="12" name="Rounded Rectangle 11"/>
+          <p:cNvSpPr/>
+          <p:nvPr/>
+        </p:nvSpPr>
+        <p:spPr>
+          <a:xfrm>
+            <a:off x="8412480" y="4992624"/>
+            <a:ext cx="155448" cy="155448"/>
+          </a:xfrm>
+          <a:prstGeom prst="roundRect">
+            <a:avLst/>
+          </a:prstGeom>
+          <a:solidFill>
+            <a:srgbClr val="8EC5E8"/>
+          </a:solidFill>
+          <a:ln>
+            <a:noFill/>
+          </a:ln>
+          <a:effectLst/>
+        </p:spPr>
+        <p:style>
+          <a:lnRef idx="1">
+            <a:schemeClr val="accent1"/>
+          </a:lnRef>
+          <a:fillRef idx="3">
+            <a:schemeClr val="accent1"/>
+          </a:fillRef>
+          <a:effectRef idx="2">
+            <a:schemeClr val="accent1"/>
+          </a:effectRef>
+          <a:fontRef idx="minor">
+            <a:schemeClr val="lt1"/>
+          </a:fontRef>
+        </p:style>
+        <p:txBody>
+          <a:bodyPr rtlCol="0" anchor="ctr"/>
+          <a:lstStyle/>
+          <a:p>
+            <a:pPr algn="ctr"/>
+          </a:p>
+        </p:txBody>
+      </p:sp>
+      <p:sp>
+        <p:nvSpPr>
+          <p:cNvPr id="13" name="TextBox 12"/>
+          <p:cNvSpPr txBox="1"/>
+          <p:nvPr/>
+        </p:nvSpPr>
+        <p:spPr>
+          <a:xfrm>
+            <a:off x="8668512" y="4956048"/>
+            <a:ext cx="2103120" cy="274320"/>
+          </a:xfrm>
+          <a:prstGeom prst="rect">
+            <a:avLst/>
+          </a:prstGeom>
+          <a:noFill/>
+        </p:spPr>
+        <p:txBody>
+          <a:bodyPr wrap="square" lIns="0" rIns="0" tIns="0" bIns="0">
+            <a:spAutoFit/>
+          </a:bodyPr>
+          <a:lstStyle/>
+          <a:p>
+            <a:pPr algn="l">
+              <a:lnSpc>
+                <a:spcPct val="125000"/>
+              </a:lnSpc>
+            </a:pPr>
+            <a:r>
+              <a:rPr sz="1500" b="0">
+                <a:solidFill>
+                  <a:srgbClr val="FFFFFF"/>
+                </a:solidFill>
+                <a:latin typeface="Yu Gothic UI"/>
+              </a:rPr>
+              <a:t>数に入る上の子</a:t>
+            </a:r>
+          </a:p>
+        </p:txBody>
+      </p:sp>
+      <p:sp>
+        <p:nvSpPr>
+          <p:cNvPr id="14" name="TextBox 13"/>
+          <p:cNvSpPr txBox="1"/>
+          <p:nvPr/>
+        </p:nvSpPr>
+        <p:spPr>
+          <a:xfrm>
+            <a:off x="6053328" y="5376672"/>
+            <a:ext cx="4764024" cy="274320"/>
+          </a:xfrm>
+          <a:prstGeom prst="rect">
+            <a:avLst/>
+          </a:prstGeom>
+          <a:noFill/>
+        </p:spPr>
+        <p:txBody>
+          <a:bodyPr wrap="square" lIns="0" rIns="0" tIns="0" bIns="0">
+            <a:spAutoFit/>
+          </a:bodyPr>
+          <a:lstStyle/>
+          <a:p>
+            <a:pPr algn="l">
+              <a:lnSpc>
+                <a:spcPct val="125000"/>
+              </a:lnSpc>
+            </a:pPr>
+            <a:r>
+              <a:rPr sz="1300" b="0">
+                <a:solidFill>
+                  <a:srgbClr val="8EC5E8"/>
+                </a:solidFill>
+                <a:latin typeface="Yu Gothic UI"/>
+              </a:rPr>
+              <a:t>上の子から順に数える（左の点＝数える順番）</a:t>
+            </a:r>
+          </a:p>
+          <a:p>
+            <a:pPr algn="l">
+              <a:lnSpc>
+                <a:spcPct val="125000"/>
+              </a:lnSpc>
+            </a:pPr>
+            <a:r>
+              <a:rPr sz="1300" b="0">
+                <a:solidFill>
+                  <a:srgbClr val="8EC5E8"/>
+                </a:solidFill>
+                <a:latin typeface="Yu Gothic UI"/>
+              </a:rPr>
+              <a:t>上の子を数に入れるには経済的負担と確認書が要る</a:t>
+            </a:r>
+          </a:p>
+        </p:txBody>
+      </p:sp>
+    </p:spTree>
+  </p:cSld>
+  <p:clrMapOvr>
+    <a:masterClrMapping/>
+  </p:clrMapOvr>
+</p:sld>
+</file>
+
+<file path=ppt/slides/slide7.xml><?xml version="1.0" encoding="utf-8"?>
 <p:sld xmlns:a="http://schemas.openxmlformats.org/drawingml/2006/main" xmlns:p="http://schemas.openxmlformats.org/presentationml/2006/main" xmlns:r="http://schemas.openxmlformats.org/officeDocument/2006/relationships">
   <p:cSld>
     <p:bg>

--- a/tools/article-images/article-images.pptx
+++ b/tools/article-images/article-images.pptx
@@ -12,6 +12,7 @@
     <p:sldId id="260" r:id="rId11"/>
     <p:sldId id="261" r:id="rId12"/>
     <p:sldId id="262" r:id="rId13"/>
+    <p:sldId id="263" r:id="rId14"/>
   </p:sldIdLst>
   <p:sldSz cx="11430000" cy="6000750" type="screen4x3"/>
   <p:notesSz cx="6858000" cy="9144000"/>
@@ -6507,6 +6508,587 @@
 </file>
 
 <file path=ppt/slides/slide7.xml><?xml version="1.0" encoding="utf-8"?>
+<p:sld xmlns:a="http://schemas.openxmlformats.org/drawingml/2006/main" xmlns:p="http://schemas.openxmlformats.org/presentationml/2006/main" xmlns:r="http://schemas.openxmlformats.org/officeDocument/2006/relationships">
+  <p:cSld>
+    <p:bg>
+      <p:bgPr>
+        <a:solidFill>
+          <a:srgbClr val="014172"/>
+        </a:solidFill>
+        <a:effectLst/>
+      </p:bgPr>
+    </p:bg>
+    <p:spTree>
+      <p:nvGrpSpPr>
+        <p:cNvPr id="1" name=""/>
+        <p:cNvGrpSpPr/>
+        <p:nvPr/>
+      </p:nvGrpSpPr>
+      <p:grpSpPr/>
+      <p:sp>
+        <p:nvSpPr>
+          <p:cNvPr id="2" name="Rounded Rectangle 1"/>
+          <p:cNvSpPr/>
+          <p:nvPr/>
+        </p:nvSpPr>
+        <p:spPr>
+          <a:xfrm>
+            <a:off x="713232" y="566928"/>
+            <a:ext cx="2377440" cy="68580"/>
+          </a:xfrm>
+          <a:prstGeom prst="roundRect">
+            <a:avLst/>
+          </a:prstGeom>
+          <a:solidFill>
+            <a:srgbClr val="FFFFFF"/>
+          </a:solidFill>
+          <a:ln>
+            <a:noFill/>
+          </a:ln>
+          <a:effectLst/>
+        </p:spPr>
+        <p:style>
+          <a:lnRef idx="1">
+            <a:schemeClr val="accent1"/>
+          </a:lnRef>
+          <a:fillRef idx="3">
+            <a:schemeClr val="accent1"/>
+          </a:fillRef>
+          <a:effectRef idx="2">
+            <a:schemeClr val="accent1"/>
+          </a:effectRef>
+          <a:fontRef idx="minor">
+            <a:schemeClr val="lt1"/>
+          </a:fontRef>
+        </p:style>
+        <p:txBody>
+          <a:bodyPr rtlCol="0" anchor="ctr"/>
+          <a:lstStyle/>
+          <a:p>
+            <a:pPr algn="ctr"/>
+          </a:p>
+        </p:txBody>
+      </p:sp>
+      <p:sp>
+        <p:nvSpPr>
+          <p:cNvPr id="3" name="Rounded Rectangle 2"/>
+          <p:cNvSpPr/>
+          <p:nvPr/>
+        </p:nvSpPr>
+        <p:spPr>
+          <a:xfrm>
+            <a:off x="713232" y="781812"/>
+            <a:ext cx="1920240" cy="68580"/>
+          </a:xfrm>
+          <a:prstGeom prst="roundRect">
+            <a:avLst/>
+          </a:prstGeom>
+          <a:solidFill>
+            <a:srgbClr val="FFFFFF"/>
+          </a:solidFill>
+          <a:ln>
+            <a:noFill/>
+          </a:ln>
+          <a:effectLst/>
+        </p:spPr>
+        <p:style>
+          <a:lnRef idx="1">
+            <a:schemeClr val="accent1"/>
+          </a:lnRef>
+          <a:fillRef idx="3">
+            <a:schemeClr val="accent1"/>
+          </a:fillRef>
+          <a:effectRef idx="2">
+            <a:schemeClr val="accent1"/>
+          </a:effectRef>
+          <a:fontRef idx="minor">
+            <a:schemeClr val="lt1"/>
+          </a:fontRef>
+        </p:style>
+        <p:txBody>
+          <a:bodyPr rtlCol="0" anchor="ctr"/>
+          <a:lstStyle/>
+          <a:p>
+            <a:pPr algn="ctr"/>
+          </a:p>
+        </p:txBody>
+      </p:sp>
+      <p:sp>
+        <p:nvSpPr>
+          <p:cNvPr id="4" name="Rounded Rectangle 3"/>
+          <p:cNvSpPr/>
+          <p:nvPr/>
+        </p:nvSpPr>
+        <p:spPr>
+          <a:xfrm>
+            <a:off x="713232" y="996695"/>
+            <a:ext cx="1463040" cy="68580"/>
+          </a:xfrm>
+          <a:prstGeom prst="roundRect">
+            <a:avLst/>
+          </a:prstGeom>
+          <a:solidFill>
+            <a:srgbClr val="FFFFFF"/>
+          </a:solidFill>
+          <a:ln>
+            <a:noFill/>
+          </a:ln>
+          <a:effectLst/>
+        </p:spPr>
+        <p:style>
+          <a:lnRef idx="1">
+            <a:schemeClr val="accent1"/>
+          </a:lnRef>
+          <a:fillRef idx="3">
+            <a:schemeClr val="accent1"/>
+          </a:fillRef>
+          <a:effectRef idx="2">
+            <a:schemeClr val="accent1"/>
+          </a:effectRef>
+          <a:fontRef idx="minor">
+            <a:schemeClr val="lt1"/>
+          </a:fontRef>
+        </p:style>
+        <p:txBody>
+          <a:bodyPr rtlCol="0" anchor="ctr"/>
+          <a:lstStyle/>
+          <a:p>
+            <a:pPr algn="ctr"/>
+          </a:p>
+        </p:txBody>
+      </p:sp>
+      <p:sp>
+        <p:nvSpPr>
+          <p:cNvPr id="5" name="TextBox 4"/>
+          <p:cNvSpPr txBox="1"/>
+          <p:nvPr/>
+        </p:nvSpPr>
+        <p:spPr>
+          <a:xfrm>
+            <a:off x="713232" y="1481328"/>
+            <a:ext cx="4937760" cy="411480"/>
+          </a:xfrm>
+          <a:prstGeom prst="rect">
+            <a:avLst/>
+          </a:prstGeom>
+          <a:noFill/>
+        </p:spPr>
+        <p:txBody>
+          <a:bodyPr wrap="square" lIns="0" rIns="0" tIns="0" bIns="0">
+            <a:spAutoFit/>
+          </a:bodyPr>
+          <a:lstStyle/>
+          <a:p>
+            <a:pPr algn="l">
+              <a:lnSpc>
+                <a:spcPct val="125000"/>
+              </a:lnSpc>
+            </a:pPr>
+            <a:r>
+              <a:rPr sz="1800" b="1">
+                <a:solidFill>
+                  <a:srgbClr val="8EC5E8"/>
+                </a:solidFill>
+                <a:latin typeface="Yu Gothic UI"/>
+              </a:rPr>
+              <a:t>税と社会保険</a:t>
+            </a:r>
+          </a:p>
+        </p:txBody>
+      </p:sp>
+      <p:sp>
+        <p:nvSpPr>
+          <p:cNvPr id="6" name="TextBox 5"/>
+          <p:cNvSpPr txBox="1"/>
+          <p:nvPr/>
+        </p:nvSpPr>
+        <p:spPr>
+          <a:xfrm>
+            <a:off x="713232" y="1938528"/>
+            <a:ext cx="5257800" cy="914400"/>
+          </a:xfrm>
+          <a:prstGeom prst="rect">
+            <a:avLst/>
+          </a:prstGeom>
+          <a:noFill/>
+        </p:spPr>
+        <p:txBody>
+          <a:bodyPr wrap="square" lIns="0" rIns="0" tIns="0" bIns="0">
+            <a:spAutoFit/>
+          </a:bodyPr>
+          <a:lstStyle/>
+          <a:p>
+            <a:pPr algn="l">
+              <a:lnSpc>
+                <a:spcPct val="125000"/>
+              </a:lnSpc>
+            </a:pPr>
+            <a:r>
+              <a:rPr sz="3400" b="1">
+                <a:solidFill>
+                  <a:srgbClr val="FFFFFF"/>
+                </a:solidFill>
+                <a:latin typeface="Yu Gothic UI"/>
+              </a:rPr>
+              <a:t>医療費控除の下限額</a:t>
+            </a:r>
+          </a:p>
+        </p:txBody>
+      </p:sp>
+      <p:sp>
+        <p:nvSpPr>
+          <p:cNvPr id="7" name="TextBox 6"/>
+          <p:cNvSpPr txBox="1"/>
+          <p:nvPr/>
+        </p:nvSpPr>
+        <p:spPr>
+          <a:xfrm>
+            <a:off x="713232" y="2999232"/>
+            <a:ext cx="5120640" cy="1280160"/>
+          </a:xfrm>
+          <a:prstGeom prst="rect">
+            <a:avLst/>
+          </a:prstGeom>
+          <a:noFill/>
+        </p:spPr>
+        <p:txBody>
+          <a:bodyPr wrap="square" lIns="0" rIns="0" tIns="0" bIns="0">
+            <a:spAutoFit/>
+          </a:bodyPr>
+          <a:lstStyle/>
+          <a:p>
+            <a:pPr algn="l">
+              <a:lnSpc>
+                <a:spcPct val="135000"/>
+              </a:lnSpc>
+            </a:pPr>
+            <a:r>
+              <a:rPr sz="2600" b="0">
+                <a:solidFill>
+                  <a:srgbClr val="FFFFFF"/>
+                </a:solidFill>
+                <a:latin typeface="Yu Gothic UI"/>
+              </a:rPr>
+              <a:t>10万円とは限らない</a:t>
+            </a:r>
+          </a:p>
+          <a:p>
+            <a:pPr algn="l">
+              <a:lnSpc>
+                <a:spcPct val="135000"/>
+              </a:lnSpc>
+            </a:pPr>
+            <a:r>
+              <a:rPr sz="2600" b="0">
+                <a:solidFill>
+                  <a:srgbClr val="FFFFFF"/>
+                </a:solidFill>
+                <a:latin typeface="Yu Gothic UI"/>
+              </a:rPr>
+              <a:t>引く順番も決まっている</a:t>
+            </a:r>
+          </a:p>
+        </p:txBody>
+      </p:sp>
+      <p:sp>
+        <p:nvSpPr>
+          <p:cNvPr id="8" name="TextBox 7"/>
+          <p:cNvSpPr txBox="1"/>
+          <p:nvPr/>
+        </p:nvSpPr>
+        <p:spPr>
+          <a:xfrm>
+            <a:off x="713232" y="5138928"/>
+            <a:ext cx="5120640" cy="365760"/>
+          </a:xfrm>
+          <a:prstGeom prst="rect">
+            <a:avLst/>
+          </a:prstGeom>
+          <a:noFill/>
+        </p:spPr>
+        <p:txBody>
+          <a:bodyPr wrap="square" lIns="0" rIns="0" tIns="0" bIns="0">
+            <a:spAutoFit/>
+          </a:bodyPr>
+          <a:lstStyle/>
+          <a:p>
+            <a:pPr algn="l">
+              <a:lnSpc>
+                <a:spcPct val="125000"/>
+              </a:lnSpc>
+            </a:pPr>
+            <a:r>
+              <a:rPr sz="1700" b="0">
+                <a:solidFill>
+                  <a:srgbClr val="8EC5E8"/>
+                </a:solidFill>
+                <a:latin typeface="Yu Gothic UI"/>
+              </a:rPr>
+              <a:t>家計の制度ログ　kakei.nexeed-lab.com</a:t>
+            </a:r>
+          </a:p>
+        </p:txBody>
+      </p:sp>
+      <p:pic>
+        <p:nvPicPr>
+          <p:cNvPr id="9" name="Picture 8" descr="iryouhi-koujo.png"/>
+          <p:cNvPicPr>
+            <a:picLocks noChangeAspect="1"/>
+          </p:cNvPicPr>
+          <p:nvPr/>
+        </p:nvPicPr>
+        <p:blipFill>
+          <a:blip r:embed="rId2">
+            <a:extLst>
+              <a:ext uri="{96DAC541-7B7A-43D3-8B79-37D633B846F1}">
+                <asvg:svgBlip xmlns:asvg="http://schemas.microsoft.com/office/drawing/2016/SVG/main" r:embed="rId3"/>
+              </a:ext>
+            </a:extLst>
+          </a:blip>
+          <a:stretch>
+            <a:fillRect/>
+          </a:stretch>
+        </p:blipFill>
+        <p:spPr>
+          <a:xfrm>
+            <a:off x="6053328" y="566928"/>
+            <a:ext cx="4764024" cy="4288536"/>
+          </a:xfrm>
+          <a:prstGeom prst="rect">
+            <a:avLst/>
+          </a:prstGeom>
+        </p:spPr>
+      </p:pic>
+      <p:sp>
+        <p:nvSpPr>
+          <p:cNvPr id="10" name="Rounded Rectangle 9"/>
+          <p:cNvSpPr/>
+          <p:nvPr/>
+        </p:nvSpPr>
+        <p:spPr>
+          <a:xfrm>
+            <a:off x="6172200" y="4992624"/>
+            <a:ext cx="155448" cy="155448"/>
+          </a:xfrm>
+          <a:prstGeom prst="roundRect">
+            <a:avLst/>
+          </a:prstGeom>
+          <a:solidFill>
+            <a:srgbClr val="FFFFFF"/>
+          </a:solidFill>
+          <a:ln>
+            <a:noFill/>
+          </a:ln>
+          <a:effectLst/>
+        </p:spPr>
+        <p:style>
+          <a:lnRef idx="1">
+            <a:schemeClr val="accent1"/>
+          </a:lnRef>
+          <a:fillRef idx="3">
+            <a:schemeClr val="accent1"/>
+          </a:fillRef>
+          <a:effectRef idx="2">
+            <a:schemeClr val="accent1"/>
+          </a:effectRef>
+          <a:fontRef idx="minor">
+            <a:schemeClr val="lt1"/>
+          </a:fontRef>
+        </p:style>
+        <p:txBody>
+          <a:bodyPr rtlCol="0" anchor="ctr"/>
+          <a:lstStyle/>
+          <a:p>
+            <a:pPr algn="ctr"/>
+          </a:p>
+        </p:txBody>
+      </p:sp>
+      <p:sp>
+        <p:nvSpPr>
+          <p:cNvPr id="11" name="TextBox 10"/>
+          <p:cNvSpPr txBox="1"/>
+          <p:nvPr/>
+        </p:nvSpPr>
+        <p:spPr>
+          <a:xfrm>
+            <a:off x="6428232" y="4956048"/>
+            <a:ext cx="2103120" cy="274320"/>
+          </a:xfrm>
+          <a:prstGeom prst="rect">
+            <a:avLst/>
+          </a:prstGeom>
+          <a:noFill/>
+        </p:spPr>
+        <p:txBody>
+          <a:bodyPr wrap="square" lIns="0" rIns="0" tIns="0" bIns="0">
+            <a:spAutoFit/>
+          </a:bodyPr>
+          <a:lstStyle/>
+          <a:p>
+            <a:pPr algn="l">
+              <a:lnSpc>
+                <a:spcPct val="125000"/>
+              </a:lnSpc>
+            </a:pPr>
+            <a:r>
+              <a:rPr sz="1500" b="0">
+                <a:solidFill>
+                  <a:srgbClr val="FFFFFF"/>
+                </a:solidFill>
+                <a:latin typeface="Yu Gothic UI"/>
+              </a:rPr>
+              <a:t>控除の対象</a:t>
+            </a:r>
+          </a:p>
+        </p:txBody>
+      </p:sp>
+      <p:sp>
+        <p:nvSpPr>
+          <p:cNvPr id="12" name="Rounded Rectangle 11"/>
+          <p:cNvSpPr/>
+          <p:nvPr/>
+        </p:nvSpPr>
+        <p:spPr>
+          <a:xfrm>
+            <a:off x="8412480" y="4992624"/>
+            <a:ext cx="155448" cy="155448"/>
+          </a:xfrm>
+          <a:prstGeom prst="roundRect">
+            <a:avLst/>
+          </a:prstGeom>
+          <a:solidFill>
+            <a:srgbClr val="8EC5E8"/>
+          </a:solidFill>
+          <a:ln>
+            <a:noFill/>
+          </a:ln>
+          <a:effectLst/>
+        </p:spPr>
+        <p:style>
+          <a:lnRef idx="1">
+            <a:schemeClr val="accent1"/>
+          </a:lnRef>
+          <a:fillRef idx="3">
+            <a:schemeClr val="accent1"/>
+          </a:fillRef>
+          <a:effectRef idx="2">
+            <a:schemeClr val="accent1"/>
+          </a:effectRef>
+          <a:fontRef idx="minor">
+            <a:schemeClr val="lt1"/>
+          </a:fontRef>
+        </p:style>
+        <p:txBody>
+          <a:bodyPr rtlCol="0" anchor="ctr"/>
+          <a:lstStyle/>
+          <a:p>
+            <a:pPr algn="ctr"/>
+          </a:p>
+        </p:txBody>
+      </p:sp>
+      <p:sp>
+        <p:nvSpPr>
+          <p:cNvPr id="13" name="TextBox 12"/>
+          <p:cNvSpPr txBox="1"/>
+          <p:nvPr/>
+        </p:nvSpPr>
+        <p:spPr>
+          <a:xfrm>
+            <a:off x="8668512" y="4956048"/>
+            <a:ext cx="2103120" cy="274320"/>
+          </a:xfrm>
+          <a:prstGeom prst="rect">
+            <a:avLst/>
+          </a:prstGeom>
+          <a:noFill/>
+        </p:spPr>
+        <p:txBody>
+          <a:bodyPr wrap="square" lIns="0" rIns="0" tIns="0" bIns="0">
+            <a:spAutoFit/>
+          </a:bodyPr>
+          <a:lstStyle/>
+          <a:p>
+            <a:pPr algn="l">
+              <a:lnSpc>
+                <a:spcPct val="125000"/>
+              </a:lnSpc>
+            </a:pPr>
+            <a:r>
+              <a:rPr sz="1500" b="0">
+                <a:solidFill>
+                  <a:srgbClr val="FFFFFF"/>
+                </a:solidFill>
+                <a:latin typeface="Yu Gothic UI"/>
+              </a:rPr>
+              <a:t>差し引かれる分</a:t>
+            </a:r>
+          </a:p>
+        </p:txBody>
+      </p:sp>
+      <p:sp>
+        <p:nvSpPr>
+          <p:cNvPr id="14" name="TextBox 13"/>
+          <p:cNvSpPr txBox="1"/>
+          <p:nvPr/>
+        </p:nvSpPr>
+        <p:spPr>
+          <a:xfrm>
+            <a:off x="6053328" y="5376672"/>
+            <a:ext cx="4764024" cy="274320"/>
+          </a:xfrm>
+          <a:prstGeom prst="rect">
+            <a:avLst/>
+          </a:prstGeom>
+          <a:noFill/>
+        </p:spPr>
+        <p:txBody>
+          <a:bodyPr wrap="square" lIns="0" rIns="0" tIns="0" bIns="0">
+            <a:spAutoFit/>
+          </a:bodyPr>
+          <a:lstStyle/>
+          <a:p>
+            <a:pPr algn="l">
+              <a:lnSpc>
+                <a:spcPct val="125000"/>
+              </a:lnSpc>
+            </a:pPr>
+            <a:r>
+              <a:rPr sz="1300" b="0">
+                <a:solidFill>
+                  <a:srgbClr val="8EC5E8"/>
+                </a:solidFill>
+                <a:latin typeface="Yu Gothic UI"/>
+              </a:rPr>
+              <a:t>縦＝1年間に支払った医療費の積み上がり</a:t>
+            </a:r>
+          </a:p>
+          <a:p>
+            <a:pPr algn="l">
+              <a:lnSpc>
+                <a:spcPct val="125000"/>
+              </a:lnSpc>
+            </a:pPr>
+            <a:r>
+              <a:rPr sz="1300" b="0">
+                <a:solidFill>
+                  <a:srgbClr val="8EC5E8"/>
+                </a:solidFill>
+                <a:latin typeface="Yu Gothic UI"/>
+              </a:rPr>
+              <a:t>破線まで＝保険金などと下限額。ここまでは引かれる</a:t>
+            </a:r>
+          </a:p>
+        </p:txBody>
+      </p:sp>
+    </p:spTree>
+  </p:cSld>
+  <p:clrMapOvr>
+    <a:masterClrMapping/>
+  </p:clrMapOvr>
+</p:sld>
+</file>
+
+<file path=ppt/slides/slide8.xml><?xml version="1.0" encoding="utf-8"?>
 <p:sld xmlns:a="http://schemas.openxmlformats.org/drawingml/2006/main" xmlns:p="http://schemas.openxmlformats.org/presentationml/2006/main" xmlns:r="http://schemas.openxmlformats.org/officeDocument/2006/relationships">
   <p:cSld>
     <p:bg>

--- a/tools/article-images/article-images.pptx
+++ b/tools/article-images/article-images.pptx
@@ -13,6 +13,7 @@
     <p:sldId id="261" r:id="rId12"/>
     <p:sldId id="262" r:id="rId13"/>
     <p:sldId id="263" r:id="rId14"/>
+    <p:sldId id="264" r:id="rId15"/>
   </p:sldIdLst>
   <p:sldSz cx="11430000" cy="6000750" type="screen4x3"/>
   <p:notesSz cx="6858000" cy="9144000"/>
@@ -7089,6 +7090,587 @@
 </file>
 
 <file path=ppt/slides/slide8.xml><?xml version="1.0" encoding="utf-8"?>
+<p:sld xmlns:a="http://schemas.openxmlformats.org/drawingml/2006/main" xmlns:p="http://schemas.openxmlformats.org/presentationml/2006/main" xmlns:r="http://schemas.openxmlformats.org/officeDocument/2006/relationships">
+  <p:cSld>
+    <p:bg>
+      <p:bgPr>
+        <a:solidFill>
+          <a:srgbClr val="014172"/>
+        </a:solidFill>
+        <a:effectLst/>
+      </p:bgPr>
+    </p:bg>
+    <p:spTree>
+      <p:nvGrpSpPr>
+        <p:cNvPr id="1" name=""/>
+        <p:cNvGrpSpPr/>
+        <p:nvPr/>
+      </p:nvGrpSpPr>
+      <p:grpSpPr/>
+      <p:sp>
+        <p:nvSpPr>
+          <p:cNvPr id="2" name="Rounded Rectangle 1"/>
+          <p:cNvSpPr/>
+          <p:nvPr/>
+        </p:nvSpPr>
+        <p:spPr>
+          <a:xfrm>
+            <a:off x="713232" y="566928"/>
+            <a:ext cx="2377440" cy="68580"/>
+          </a:xfrm>
+          <a:prstGeom prst="roundRect">
+            <a:avLst/>
+          </a:prstGeom>
+          <a:solidFill>
+            <a:srgbClr val="FFFFFF"/>
+          </a:solidFill>
+          <a:ln>
+            <a:noFill/>
+          </a:ln>
+          <a:effectLst/>
+        </p:spPr>
+        <p:style>
+          <a:lnRef idx="1">
+            <a:schemeClr val="accent1"/>
+          </a:lnRef>
+          <a:fillRef idx="3">
+            <a:schemeClr val="accent1"/>
+          </a:fillRef>
+          <a:effectRef idx="2">
+            <a:schemeClr val="accent1"/>
+          </a:effectRef>
+          <a:fontRef idx="minor">
+            <a:schemeClr val="lt1"/>
+          </a:fontRef>
+        </p:style>
+        <p:txBody>
+          <a:bodyPr rtlCol="0" anchor="ctr"/>
+          <a:lstStyle/>
+          <a:p>
+            <a:pPr algn="ctr"/>
+          </a:p>
+        </p:txBody>
+      </p:sp>
+      <p:sp>
+        <p:nvSpPr>
+          <p:cNvPr id="3" name="Rounded Rectangle 2"/>
+          <p:cNvSpPr/>
+          <p:nvPr/>
+        </p:nvSpPr>
+        <p:spPr>
+          <a:xfrm>
+            <a:off x="713232" y="781812"/>
+            <a:ext cx="1920240" cy="68580"/>
+          </a:xfrm>
+          <a:prstGeom prst="roundRect">
+            <a:avLst/>
+          </a:prstGeom>
+          <a:solidFill>
+            <a:srgbClr val="FFFFFF"/>
+          </a:solidFill>
+          <a:ln>
+            <a:noFill/>
+          </a:ln>
+          <a:effectLst/>
+        </p:spPr>
+        <p:style>
+          <a:lnRef idx="1">
+            <a:schemeClr val="accent1"/>
+          </a:lnRef>
+          <a:fillRef idx="3">
+            <a:schemeClr val="accent1"/>
+          </a:fillRef>
+          <a:effectRef idx="2">
+            <a:schemeClr val="accent1"/>
+          </a:effectRef>
+          <a:fontRef idx="minor">
+            <a:schemeClr val="lt1"/>
+          </a:fontRef>
+        </p:style>
+        <p:txBody>
+          <a:bodyPr rtlCol="0" anchor="ctr"/>
+          <a:lstStyle/>
+          <a:p>
+            <a:pPr algn="ctr"/>
+          </a:p>
+        </p:txBody>
+      </p:sp>
+      <p:sp>
+        <p:nvSpPr>
+          <p:cNvPr id="4" name="Rounded Rectangle 3"/>
+          <p:cNvSpPr/>
+          <p:nvPr/>
+        </p:nvSpPr>
+        <p:spPr>
+          <a:xfrm>
+            <a:off x="713232" y="996695"/>
+            <a:ext cx="1463040" cy="68580"/>
+          </a:xfrm>
+          <a:prstGeom prst="roundRect">
+            <a:avLst/>
+          </a:prstGeom>
+          <a:solidFill>
+            <a:srgbClr val="FFFFFF"/>
+          </a:solidFill>
+          <a:ln>
+            <a:noFill/>
+          </a:ln>
+          <a:effectLst/>
+        </p:spPr>
+        <p:style>
+          <a:lnRef idx="1">
+            <a:schemeClr val="accent1"/>
+          </a:lnRef>
+          <a:fillRef idx="3">
+            <a:schemeClr val="accent1"/>
+          </a:fillRef>
+          <a:effectRef idx="2">
+            <a:schemeClr val="accent1"/>
+          </a:effectRef>
+          <a:fontRef idx="minor">
+            <a:schemeClr val="lt1"/>
+          </a:fontRef>
+        </p:style>
+        <p:txBody>
+          <a:bodyPr rtlCol="0" anchor="ctr"/>
+          <a:lstStyle/>
+          <a:p>
+            <a:pPr algn="ctr"/>
+          </a:p>
+        </p:txBody>
+      </p:sp>
+      <p:sp>
+        <p:nvSpPr>
+          <p:cNvPr id="5" name="TextBox 4"/>
+          <p:cNvSpPr txBox="1"/>
+          <p:nvPr/>
+        </p:nvSpPr>
+        <p:spPr>
+          <a:xfrm>
+            <a:off x="713232" y="1481328"/>
+            <a:ext cx="4937760" cy="411480"/>
+          </a:xfrm>
+          <a:prstGeom prst="rect">
+            <a:avLst/>
+          </a:prstGeom>
+          <a:noFill/>
+        </p:spPr>
+        <p:txBody>
+          <a:bodyPr wrap="square" lIns="0" rIns="0" tIns="0" bIns="0">
+            <a:spAutoFit/>
+          </a:bodyPr>
+          <a:lstStyle/>
+          <a:p>
+            <a:pPr algn="l">
+              <a:lnSpc>
+                <a:spcPct val="125000"/>
+              </a:lnSpc>
+            </a:pPr>
+            <a:r>
+              <a:rPr sz="1800" b="1">
+                <a:solidFill>
+                  <a:srgbClr val="8EC5E8"/>
+                </a:solidFill>
+                <a:latin typeface="Yu Gothic UI"/>
+              </a:rPr>
+              <a:t>税と社会保険</a:t>
+            </a:r>
+          </a:p>
+        </p:txBody>
+      </p:sp>
+      <p:sp>
+        <p:nvSpPr>
+          <p:cNvPr id="6" name="TextBox 5"/>
+          <p:cNvSpPr txBox="1"/>
+          <p:nvPr/>
+        </p:nvSpPr>
+        <p:spPr>
+          <a:xfrm>
+            <a:off x="713232" y="1938528"/>
+            <a:ext cx="5257800" cy="914400"/>
+          </a:xfrm>
+          <a:prstGeom prst="rect">
+            <a:avLst/>
+          </a:prstGeom>
+          <a:noFill/>
+        </p:spPr>
+        <p:txBody>
+          <a:bodyPr wrap="square" lIns="0" rIns="0" tIns="0" bIns="0">
+            <a:spAutoFit/>
+          </a:bodyPr>
+          <a:lstStyle/>
+          <a:p>
+            <a:pPr algn="l">
+              <a:lnSpc>
+                <a:spcPct val="125000"/>
+              </a:lnSpc>
+            </a:pPr>
+            <a:r>
+              <a:rPr sz="3400" b="1">
+                <a:solidFill>
+                  <a:srgbClr val="FFFFFF"/>
+                </a:solidFill>
+                <a:latin typeface="Yu Gothic UI"/>
+              </a:rPr>
+              <a:t>住宅ローン減税の区分</a:t>
+            </a:r>
+          </a:p>
+        </p:txBody>
+      </p:sp>
+      <p:sp>
+        <p:nvSpPr>
+          <p:cNvPr id="7" name="TextBox 6"/>
+          <p:cNvSpPr txBox="1"/>
+          <p:nvPr/>
+        </p:nvSpPr>
+        <p:spPr>
+          <a:xfrm>
+            <a:off x="713232" y="2999232"/>
+            <a:ext cx="5120640" cy="1280160"/>
+          </a:xfrm>
+          <a:prstGeom prst="rect">
+            <a:avLst/>
+          </a:prstGeom>
+          <a:noFill/>
+        </p:spPr>
+        <p:txBody>
+          <a:bodyPr wrap="square" lIns="0" rIns="0" tIns="0" bIns="0">
+            <a:spAutoFit/>
+          </a:bodyPr>
+          <a:lstStyle/>
+          <a:p>
+            <a:pPr algn="l">
+              <a:lnSpc>
+                <a:spcPct val="135000"/>
+              </a:lnSpc>
+            </a:pPr>
+            <a:r>
+              <a:rPr sz="2600" b="0">
+                <a:solidFill>
+                  <a:srgbClr val="FFFFFF"/>
+                </a:solidFill>
+                <a:latin typeface="Yu Gothic UI"/>
+              </a:rPr>
+              <a:t>省エネ基準を満たさない</a:t>
+            </a:r>
+          </a:p>
+          <a:p>
+            <a:pPr algn="l">
+              <a:lnSpc>
+                <a:spcPct val="135000"/>
+              </a:lnSpc>
+            </a:pPr>
+            <a:r>
+              <a:rPr sz="2600" b="0">
+                <a:solidFill>
+                  <a:srgbClr val="FFFFFF"/>
+                </a:solidFill>
+                <a:latin typeface="Yu Gothic UI"/>
+              </a:rPr>
+              <a:t>新築は支援対象外</a:t>
+            </a:r>
+          </a:p>
+        </p:txBody>
+      </p:sp>
+      <p:sp>
+        <p:nvSpPr>
+          <p:cNvPr id="8" name="TextBox 7"/>
+          <p:cNvSpPr txBox="1"/>
+          <p:nvPr/>
+        </p:nvSpPr>
+        <p:spPr>
+          <a:xfrm>
+            <a:off x="713232" y="5138928"/>
+            <a:ext cx="5120640" cy="365760"/>
+          </a:xfrm>
+          <a:prstGeom prst="rect">
+            <a:avLst/>
+          </a:prstGeom>
+          <a:noFill/>
+        </p:spPr>
+        <p:txBody>
+          <a:bodyPr wrap="square" lIns="0" rIns="0" tIns="0" bIns="0">
+            <a:spAutoFit/>
+          </a:bodyPr>
+          <a:lstStyle/>
+          <a:p>
+            <a:pPr algn="l">
+              <a:lnSpc>
+                <a:spcPct val="125000"/>
+              </a:lnSpc>
+            </a:pPr>
+            <a:r>
+              <a:rPr sz="1700" b="0">
+                <a:solidFill>
+                  <a:srgbClr val="8EC5E8"/>
+                </a:solidFill>
+                <a:latin typeface="Yu Gothic UI"/>
+              </a:rPr>
+              <a:t>家計の制度ログ　kakei.nexeed-lab.com</a:t>
+            </a:r>
+          </a:p>
+        </p:txBody>
+      </p:sp>
+      <p:pic>
+        <p:nvPicPr>
+          <p:cNvPr id="9" name="Picture 8" descr="jutaku-loan-koujo.png"/>
+          <p:cNvPicPr>
+            <a:picLocks noChangeAspect="1"/>
+          </p:cNvPicPr>
+          <p:nvPr/>
+        </p:nvPicPr>
+        <p:blipFill>
+          <a:blip r:embed="rId2">
+            <a:extLst>
+              <a:ext uri="{96DAC541-7B7A-43D3-8B79-37D633B846F1}">
+                <asvg:svgBlip xmlns:asvg="http://schemas.microsoft.com/office/drawing/2016/SVG/main" r:embed="rId3"/>
+              </a:ext>
+            </a:extLst>
+          </a:blip>
+          <a:stretch>
+            <a:fillRect/>
+          </a:stretch>
+        </p:blipFill>
+        <p:spPr>
+          <a:xfrm>
+            <a:off x="6053328" y="566928"/>
+            <a:ext cx="4764024" cy="4288536"/>
+          </a:xfrm>
+          <a:prstGeom prst="rect">
+            <a:avLst/>
+          </a:prstGeom>
+        </p:spPr>
+      </p:pic>
+      <p:sp>
+        <p:nvSpPr>
+          <p:cNvPr id="10" name="Rounded Rectangle 9"/>
+          <p:cNvSpPr/>
+          <p:nvPr/>
+        </p:nvSpPr>
+        <p:spPr>
+          <a:xfrm>
+            <a:off x="6172200" y="4992624"/>
+            <a:ext cx="155448" cy="155448"/>
+          </a:xfrm>
+          <a:prstGeom prst="roundRect">
+            <a:avLst/>
+          </a:prstGeom>
+          <a:solidFill>
+            <a:srgbClr val="FFFFFF"/>
+          </a:solidFill>
+          <a:ln>
+            <a:noFill/>
+          </a:ln>
+          <a:effectLst/>
+        </p:spPr>
+        <p:style>
+          <a:lnRef idx="1">
+            <a:schemeClr val="accent1"/>
+          </a:lnRef>
+          <a:fillRef idx="3">
+            <a:schemeClr val="accent1"/>
+          </a:fillRef>
+          <a:effectRef idx="2">
+            <a:schemeClr val="accent1"/>
+          </a:effectRef>
+          <a:fontRef idx="minor">
+            <a:schemeClr val="lt1"/>
+          </a:fontRef>
+        </p:style>
+        <p:txBody>
+          <a:bodyPr rtlCol="0" anchor="ctr"/>
+          <a:lstStyle/>
+          <a:p>
+            <a:pPr algn="ctr"/>
+          </a:p>
+        </p:txBody>
+      </p:sp>
+      <p:sp>
+        <p:nvSpPr>
+          <p:cNvPr id="11" name="TextBox 10"/>
+          <p:cNvSpPr txBox="1"/>
+          <p:nvPr/>
+        </p:nvSpPr>
+        <p:spPr>
+          <a:xfrm>
+            <a:off x="6428232" y="4956048"/>
+            <a:ext cx="2103120" cy="274320"/>
+          </a:xfrm>
+          <a:prstGeom prst="rect">
+            <a:avLst/>
+          </a:prstGeom>
+          <a:noFill/>
+        </p:spPr>
+        <p:txBody>
+          <a:bodyPr wrap="square" lIns="0" rIns="0" tIns="0" bIns="0">
+            <a:spAutoFit/>
+          </a:bodyPr>
+          <a:lstStyle/>
+          <a:p>
+            <a:pPr algn="l">
+              <a:lnSpc>
+                <a:spcPct val="125000"/>
+              </a:lnSpc>
+            </a:pPr>
+            <a:r>
+              <a:rPr sz="1500" b="0">
+                <a:solidFill>
+                  <a:srgbClr val="FFFFFF"/>
+                </a:solidFill>
+                <a:latin typeface="Yu Gothic UI"/>
+              </a:rPr>
+              <a:t>新築住宅</a:t>
+            </a:r>
+          </a:p>
+        </p:txBody>
+      </p:sp>
+      <p:sp>
+        <p:nvSpPr>
+          <p:cNvPr id="12" name="Rounded Rectangle 11"/>
+          <p:cNvSpPr/>
+          <p:nvPr/>
+        </p:nvSpPr>
+        <p:spPr>
+          <a:xfrm>
+            <a:off x="8412480" y="4992624"/>
+            <a:ext cx="155448" cy="155448"/>
+          </a:xfrm>
+          <a:prstGeom prst="roundRect">
+            <a:avLst/>
+          </a:prstGeom>
+          <a:solidFill>
+            <a:srgbClr val="8EC5E8"/>
+          </a:solidFill>
+          <a:ln>
+            <a:noFill/>
+          </a:ln>
+          <a:effectLst/>
+        </p:spPr>
+        <p:style>
+          <a:lnRef idx="1">
+            <a:schemeClr val="accent1"/>
+          </a:lnRef>
+          <a:fillRef idx="3">
+            <a:schemeClr val="accent1"/>
+          </a:fillRef>
+          <a:effectRef idx="2">
+            <a:schemeClr val="accent1"/>
+          </a:effectRef>
+          <a:fontRef idx="minor">
+            <a:schemeClr val="lt1"/>
+          </a:fontRef>
+        </p:style>
+        <p:txBody>
+          <a:bodyPr rtlCol="0" anchor="ctr"/>
+          <a:lstStyle/>
+          <a:p>
+            <a:pPr algn="ctr"/>
+          </a:p>
+        </p:txBody>
+      </p:sp>
+      <p:sp>
+        <p:nvSpPr>
+          <p:cNvPr id="13" name="TextBox 12"/>
+          <p:cNvSpPr txBox="1"/>
+          <p:nvPr/>
+        </p:nvSpPr>
+        <p:spPr>
+          <a:xfrm>
+            <a:off x="8668512" y="4956048"/>
+            <a:ext cx="2103120" cy="274320"/>
+          </a:xfrm>
+          <a:prstGeom prst="rect">
+            <a:avLst/>
+          </a:prstGeom>
+          <a:noFill/>
+        </p:spPr>
+        <p:txBody>
+          <a:bodyPr wrap="square" lIns="0" rIns="0" tIns="0" bIns="0">
+            <a:spAutoFit/>
+          </a:bodyPr>
+          <a:lstStyle/>
+          <a:p>
+            <a:pPr algn="l">
+              <a:lnSpc>
+                <a:spcPct val="125000"/>
+              </a:lnSpc>
+            </a:pPr>
+            <a:r>
+              <a:rPr sz="1500" b="0">
+                <a:solidFill>
+                  <a:srgbClr val="FFFFFF"/>
+                </a:solidFill>
+                <a:latin typeface="Yu Gothic UI"/>
+              </a:rPr>
+              <a:t>既存住宅（中古）</a:t>
+            </a:r>
+          </a:p>
+        </p:txBody>
+      </p:sp>
+      <p:sp>
+        <p:nvSpPr>
+          <p:cNvPr id="14" name="TextBox 13"/>
+          <p:cNvSpPr txBox="1"/>
+          <p:nvPr/>
+        </p:nvSpPr>
+        <p:spPr>
+          <a:xfrm>
+            <a:off x="6053328" y="5376672"/>
+            <a:ext cx="4764024" cy="274320"/>
+          </a:xfrm>
+          <a:prstGeom prst="rect">
+            <a:avLst/>
+          </a:prstGeom>
+          <a:noFill/>
+        </p:spPr>
+        <p:txBody>
+          <a:bodyPr wrap="square" lIns="0" rIns="0" tIns="0" bIns="0">
+            <a:spAutoFit/>
+          </a:bodyPr>
+          <a:lstStyle/>
+          <a:p>
+            <a:pPr algn="l">
+              <a:lnSpc>
+                <a:spcPct val="125000"/>
+              </a:lnSpc>
+            </a:pPr>
+            <a:r>
+              <a:rPr sz="1300" b="0">
+                <a:solidFill>
+                  <a:srgbClr val="8EC5E8"/>
+                </a:solidFill>
+                <a:latin typeface="Yu Gothic UI"/>
+              </a:rPr>
+              <a:t>横の長さ＝借入限度額　上から省エネ性能の高い区分</a:t>
+            </a:r>
+          </a:p>
+          <a:p>
+            <a:pPr algn="l">
+              <a:lnSpc>
+                <a:spcPct val="125000"/>
+              </a:lnSpc>
+            </a:pPr>
+            <a:r>
+              <a:rPr sz="1300" b="0">
+                <a:solidFill>
+                  <a:srgbClr val="8EC5E8"/>
+                </a:solidFill>
+                <a:latin typeface="Yu Gothic UI"/>
+              </a:rPr>
+              <a:t>黄の破線＝支援対象外（新築のその他住宅）</a:t>
+            </a:r>
+          </a:p>
+        </p:txBody>
+      </p:sp>
+    </p:spTree>
+  </p:cSld>
+  <p:clrMapOvr>
+    <a:masterClrMapping/>
+  </p:clrMapOvr>
+</p:sld>
+</file>
+
+<file path=ppt/slides/slide9.xml><?xml version="1.0" encoding="utf-8"?>
 <p:sld xmlns:a="http://schemas.openxmlformats.org/drawingml/2006/main" xmlns:p="http://schemas.openxmlformats.org/presentationml/2006/main" xmlns:r="http://schemas.openxmlformats.org/officeDocument/2006/relationships">
   <p:cSld>
     <p:bg>

--- a/tools/article-images/article-images.pptx
+++ b/tools/article-images/article-images.pptx
@@ -14,6 +14,7 @@
     <p:sldId id="262" r:id="rId13"/>
     <p:sldId id="263" r:id="rId14"/>
     <p:sldId id="264" r:id="rId15"/>
+    <p:sldId id="265" r:id="rId16"/>
   </p:sldIdLst>
   <p:sldSz cx="11430000" cy="6000750" type="screen4x3"/>
   <p:notesSz cx="6858000" cy="9144000"/>
@@ -3651,6 +3652,311 @@
 </p:sld>
 </file>
 
+<file path=ppt/slides/slide10.xml><?xml version="1.0" encoding="utf-8"?>
+<p:sld xmlns:a="http://schemas.openxmlformats.org/drawingml/2006/main" xmlns:p="http://schemas.openxmlformats.org/presentationml/2006/main" xmlns:r="http://schemas.openxmlformats.org/officeDocument/2006/relationships">
+  <p:cSld>
+    <p:bg>
+      <p:bgPr>
+        <a:solidFill>
+          <a:srgbClr val="014172"/>
+        </a:solidFill>
+        <a:effectLst/>
+      </p:bgPr>
+    </p:bg>
+    <p:spTree>
+      <p:nvGrpSpPr>
+        <p:cNvPr id="1" name=""/>
+        <p:cNvGrpSpPr/>
+        <p:nvPr/>
+      </p:nvGrpSpPr>
+      <p:grpSpPr/>
+      <p:sp>
+        <p:nvSpPr>
+          <p:cNvPr id="2" name="Rounded Rectangle 1"/>
+          <p:cNvSpPr/>
+          <p:nvPr/>
+        </p:nvSpPr>
+        <p:spPr>
+          <a:xfrm>
+            <a:off x="713232" y="566928"/>
+            <a:ext cx="2377440" cy="68580"/>
+          </a:xfrm>
+          <a:prstGeom prst="roundRect">
+            <a:avLst/>
+          </a:prstGeom>
+          <a:solidFill>
+            <a:srgbClr val="FFFFFF"/>
+          </a:solidFill>
+          <a:ln>
+            <a:noFill/>
+          </a:ln>
+          <a:effectLst/>
+        </p:spPr>
+        <p:style>
+          <a:lnRef idx="1">
+            <a:schemeClr val="accent1"/>
+          </a:lnRef>
+          <a:fillRef idx="3">
+            <a:schemeClr val="accent1"/>
+          </a:fillRef>
+          <a:effectRef idx="2">
+            <a:schemeClr val="accent1"/>
+          </a:effectRef>
+          <a:fontRef idx="minor">
+            <a:schemeClr val="lt1"/>
+          </a:fontRef>
+        </p:style>
+        <p:txBody>
+          <a:bodyPr rtlCol="0" anchor="ctr"/>
+          <a:lstStyle/>
+          <a:p>
+            <a:pPr algn="ctr"/>
+          </a:p>
+        </p:txBody>
+      </p:sp>
+      <p:sp>
+        <p:nvSpPr>
+          <p:cNvPr id="3" name="Rounded Rectangle 2"/>
+          <p:cNvSpPr/>
+          <p:nvPr/>
+        </p:nvSpPr>
+        <p:spPr>
+          <a:xfrm>
+            <a:off x="713232" y="781812"/>
+            <a:ext cx="1920240" cy="68580"/>
+          </a:xfrm>
+          <a:prstGeom prst="roundRect">
+            <a:avLst/>
+          </a:prstGeom>
+          <a:solidFill>
+            <a:srgbClr val="FFFFFF"/>
+          </a:solidFill>
+          <a:ln>
+            <a:noFill/>
+          </a:ln>
+          <a:effectLst/>
+        </p:spPr>
+        <p:style>
+          <a:lnRef idx="1">
+            <a:schemeClr val="accent1"/>
+          </a:lnRef>
+          <a:fillRef idx="3">
+            <a:schemeClr val="accent1"/>
+          </a:fillRef>
+          <a:effectRef idx="2">
+            <a:schemeClr val="accent1"/>
+          </a:effectRef>
+          <a:fontRef idx="minor">
+            <a:schemeClr val="lt1"/>
+          </a:fontRef>
+        </p:style>
+        <p:txBody>
+          <a:bodyPr rtlCol="0" anchor="ctr"/>
+          <a:lstStyle/>
+          <a:p>
+            <a:pPr algn="ctr"/>
+          </a:p>
+        </p:txBody>
+      </p:sp>
+      <p:sp>
+        <p:nvSpPr>
+          <p:cNvPr id="4" name="Rounded Rectangle 3"/>
+          <p:cNvSpPr/>
+          <p:nvPr/>
+        </p:nvSpPr>
+        <p:spPr>
+          <a:xfrm>
+            <a:off x="713232" y="996695"/>
+            <a:ext cx="1463040" cy="68580"/>
+          </a:xfrm>
+          <a:prstGeom prst="roundRect">
+            <a:avLst/>
+          </a:prstGeom>
+          <a:solidFill>
+            <a:srgbClr val="FFFFFF"/>
+          </a:solidFill>
+          <a:ln>
+            <a:noFill/>
+          </a:ln>
+          <a:effectLst/>
+        </p:spPr>
+        <p:style>
+          <a:lnRef idx="1">
+            <a:schemeClr val="accent1"/>
+          </a:lnRef>
+          <a:fillRef idx="3">
+            <a:schemeClr val="accent1"/>
+          </a:fillRef>
+          <a:effectRef idx="2">
+            <a:schemeClr val="accent1"/>
+          </a:effectRef>
+          <a:fontRef idx="minor">
+            <a:schemeClr val="lt1"/>
+          </a:fontRef>
+        </p:style>
+        <p:txBody>
+          <a:bodyPr rtlCol="0" anchor="ctr"/>
+          <a:lstStyle/>
+          <a:p>
+            <a:pPr algn="ctr"/>
+          </a:p>
+        </p:txBody>
+      </p:sp>
+      <p:sp>
+        <p:nvSpPr>
+          <p:cNvPr id="5" name="TextBox 4"/>
+          <p:cNvSpPr txBox="1"/>
+          <p:nvPr/>
+        </p:nvSpPr>
+        <p:spPr>
+          <a:xfrm>
+            <a:off x="713232" y="2103120"/>
+            <a:ext cx="5257800" cy="1005840"/>
+          </a:xfrm>
+          <a:prstGeom prst="rect">
+            <a:avLst/>
+          </a:prstGeom>
+          <a:noFill/>
+        </p:spPr>
+        <p:txBody>
+          <a:bodyPr wrap="square" lIns="0" rIns="0" tIns="0" bIns="0">
+            <a:spAutoFit/>
+          </a:bodyPr>
+          <a:lstStyle/>
+          <a:p>
+            <a:pPr algn="l">
+              <a:lnSpc>
+                <a:spcPct val="125000"/>
+              </a:lnSpc>
+            </a:pPr>
+            <a:r>
+              <a:rPr sz="5400" b="1">
+                <a:solidFill>
+                  <a:srgbClr val="FFFFFF"/>
+                </a:solidFill>
+                <a:latin typeface="Yu Gothic UI"/>
+              </a:rPr>
+              <a:t>家計の制度ログ</a:t>
+            </a:r>
+          </a:p>
+        </p:txBody>
+      </p:sp>
+      <p:sp>
+        <p:nvSpPr>
+          <p:cNvPr id="6" name="TextBox 5"/>
+          <p:cNvSpPr txBox="1"/>
+          <p:nvPr/>
+        </p:nvSpPr>
+        <p:spPr>
+          <a:xfrm>
+            <a:off x="713232" y="3246120"/>
+            <a:ext cx="5669280" cy="548640"/>
+          </a:xfrm>
+          <a:prstGeom prst="rect">
+            <a:avLst/>
+          </a:prstGeom>
+          <a:noFill/>
+        </p:spPr>
+        <p:txBody>
+          <a:bodyPr wrap="square" lIns="0" rIns="0" tIns="0" bIns="0">
+            <a:spAutoFit/>
+          </a:bodyPr>
+          <a:lstStyle/>
+          <a:p>
+            <a:pPr algn="l">
+              <a:lnSpc>
+                <a:spcPct val="125000"/>
+              </a:lnSpc>
+            </a:pPr>
+            <a:r>
+              <a:rPr sz="2100" b="0">
+                <a:solidFill>
+                  <a:srgbClr val="FFFFFF"/>
+                </a:solidFill>
+                <a:latin typeface="Yu Gothic UI"/>
+              </a:rPr>
+              <a:t>お金の制度を、公式の原文で確かめて書く</a:t>
+            </a:r>
+          </a:p>
+        </p:txBody>
+      </p:sp>
+      <p:sp>
+        <p:nvSpPr>
+          <p:cNvPr id="7" name="TextBox 6"/>
+          <p:cNvSpPr txBox="1"/>
+          <p:nvPr/>
+        </p:nvSpPr>
+        <p:spPr>
+          <a:xfrm>
+            <a:off x="713232" y="5138928"/>
+            <a:ext cx="5120640" cy="365760"/>
+          </a:xfrm>
+          <a:prstGeom prst="rect">
+            <a:avLst/>
+          </a:prstGeom>
+          <a:noFill/>
+        </p:spPr>
+        <p:txBody>
+          <a:bodyPr wrap="square" lIns="0" rIns="0" tIns="0" bIns="0">
+            <a:spAutoFit/>
+          </a:bodyPr>
+          <a:lstStyle/>
+          <a:p>
+            <a:pPr algn="l">
+              <a:lnSpc>
+                <a:spcPct val="125000"/>
+              </a:lnSpc>
+            </a:pPr>
+            <a:r>
+              <a:rPr sz="1900" b="0">
+                <a:solidFill>
+                  <a:srgbClr val="8EC5E8"/>
+                </a:solidFill>
+                <a:latin typeface="Yu Gothic UI"/>
+              </a:rPr>
+              <a:t>kakei.nexeed-lab.com</a:t>
+            </a:r>
+          </a:p>
+        </p:txBody>
+      </p:sp>
+      <p:pic>
+        <p:nvPicPr>
+          <p:cNvPr id="8" name="Picture 7" descr="brand-mark.png"/>
+          <p:cNvPicPr>
+            <a:picLocks noChangeAspect="1"/>
+          </p:cNvPicPr>
+          <p:nvPr/>
+        </p:nvPicPr>
+        <p:blipFill>
+          <a:blip r:embed="rId2">
+            <a:extLst>
+              <a:ext uri="{96DAC541-7B7A-43D3-8B79-37D633B846F1}">
+                <asvg:svgBlip xmlns:asvg="http://schemas.microsoft.com/office/drawing/2016/SVG/main" r:embed="rId3"/>
+              </a:ext>
+            </a:extLst>
+          </a:blip>
+          <a:stretch>
+            <a:fillRect/>
+          </a:stretch>
+        </p:blipFill>
+        <p:spPr>
+          <a:xfrm>
+            <a:off x="6053328" y="566928"/>
+            <a:ext cx="4764024" cy="4288536"/>
+          </a:xfrm>
+          <a:prstGeom prst="rect">
+            <a:avLst/>
+          </a:prstGeom>
+        </p:spPr>
+      </p:pic>
+    </p:spTree>
+  </p:cSld>
+  <p:clrMapOvr>
+    <a:masterClrMapping/>
+  </p:clrMapOvr>
+</p:sld>
+</file>
+
 <file path=ppt/slides/slide2.xml><?xml version="1.0" encoding="utf-8"?>
 <p:sld xmlns:a="http://schemas.openxmlformats.org/drawingml/2006/main" xmlns:p="http://schemas.openxmlformats.org/presentationml/2006/main" xmlns:r="http://schemas.openxmlformats.org/officeDocument/2006/relationships">
   <p:cSld>
@@ -7828,8 +8134,8 @@
         </p:nvSpPr>
         <p:spPr>
           <a:xfrm>
-            <a:off x="713232" y="2103120"/>
-            <a:ext cx="5257800" cy="1005840"/>
+            <a:off x="713232" y="1481328"/>
+            <a:ext cx="4937760" cy="411480"/>
           </a:xfrm>
           <a:prstGeom prst="rect">
             <a:avLst/>
@@ -7848,13 +8154,13 @@
               </a:lnSpc>
             </a:pPr>
             <a:r>
-              <a:rPr sz="5400" b="1">
-                <a:solidFill>
-                  <a:srgbClr val="FFFFFF"/>
+              <a:rPr sz="1800" b="1">
+                <a:solidFill>
+                  <a:srgbClr val="8EC5E8"/>
                 </a:solidFill>
                 <a:latin typeface="Yu Gothic UI"/>
               </a:rPr>
-              <a:t>家計の制度ログ</a:t>
+              <a:t>教育費</a:t>
             </a:r>
           </a:p>
         </p:txBody>
@@ -7867,8 +8173,8 @@
         </p:nvSpPr>
         <p:spPr>
           <a:xfrm>
-            <a:off x="713232" y="3246120"/>
-            <a:ext cx="5669280" cy="548640"/>
+            <a:off x="713232" y="1938528"/>
+            <a:ext cx="5257800" cy="914400"/>
           </a:xfrm>
           <a:prstGeom prst="rect">
             <a:avLst/>
@@ -7887,13 +8193,13 @@
               </a:lnSpc>
             </a:pPr>
             <a:r>
-              <a:rPr sz="2100" b="0">
+              <a:rPr sz="3000" b="1">
                 <a:solidFill>
                   <a:srgbClr val="FFFFFF"/>
                 </a:solidFill>
                 <a:latin typeface="Yu Gothic UI"/>
               </a:rPr>
-              <a:t>お金の制度を、公式の原文で確かめて書く</a:t>
+              <a:t>奨学金の返還が苦しいとき</a:t>
             </a:r>
           </a:p>
         </p:txBody>
@@ -7901,6 +8207,61 @@
       <p:sp>
         <p:nvSpPr>
           <p:cNvPr id="7" name="TextBox 6"/>
+          <p:cNvSpPr txBox="1"/>
+          <p:nvPr/>
+        </p:nvSpPr>
+        <p:spPr>
+          <a:xfrm>
+            <a:off x="713232" y="2999232"/>
+            <a:ext cx="5120640" cy="1280160"/>
+          </a:xfrm>
+          <a:prstGeom prst="rect">
+            <a:avLst/>
+          </a:prstGeom>
+          <a:noFill/>
+        </p:spPr>
+        <p:txBody>
+          <a:bodyPr wrap="square" lIns="0" rIns="0" tIns="0" bIns="0">
+            <a:spAutoFit/>
+          </a:bodyPr>
+          <a:lstStyle/>
+          <a:p>
+            <a:pPr algn="l">
+              <a:lnSpc>
+                <a:spcPct val="135000"/>
+              </a:lnSpc>
+            </a:pPr>
+            <a:r>
+              <a:rPr sz="2600" b="0">
+                <a:solidFill>
+                  <a:srgbClr val="FFFFFF"/>
+                </a:solidFill>
+                <a:latin typeface="Yu Gothic UI"/>
+              </a:rPr>
+              <a:t>減額返還も猶予も</a:t>
+            </a:r>
+          </a:p>
+          <a:p>
+            <a:pPr algn="l">
+              <a:lnSpc>
+                <a:spcPct val="135000"/>
+              </a:lnSpc>
+            </a:pPr>
+            <a:r>
+              <a:rPr sz="2600" b="0">
+                <a:solidFill>
+                  <a:srgbClr val="FFFFFF"/>
+                </a:solidFill>
+                <a:latin typeface="Yu Gothic UI"/>
+              </a:rPr>
+              <a:t>返す総額は減らない</a:t>
+            </a:r>
+          </a:p>
+        </p:txBody>
+      </p:sp>
+      <p:sp>
+        <p:nvSpPr>
+          <p:cNvPr id="8" name="TextBox 7"/>
           <p:cNvSpPr txBox="1"/>
           <p:nvPr/>
         </p:nvSpPr>
@@ -7926,20 +8287,20 @@
               </a:lnSpc>
             </a:pPr>
             <a:r>
-              <a:rPr sz="1900" b="0">
+              <a:rPr sz="1700" b="0">
                 <a:solidFill>
                   <a:srgbClr val="8EC5E8"/>
                 </a:solidFill>
                 <a:latin typeface="Yu Gothic UI"/>
               </a:rPr>
-              <a:t>kakei.nexeed-lab.com</a:t>
+              <a:t>家計の制度ログ　kakei.nexeed-lab.com</a:t>
             </a:r>
           </a:p>
         </p:txBody>
       </p:sp>
       <p:pic>
         <p:nvPicPr>
-          <p:cNvPr id="8" name="Picture 7" descr="brand-mark.png"/>
+          <p:cNvPr id="9" name="Picture 8" descr="shogakukin-henkan.png"/>
           <p:cNvPicPr>
             <a:picLocks noChangeAspect="1"/>
           </p:cNvPicPr>
@@ -7967,6 +8328,227 @@
           </a:prstGeom>
         </p:spPr>
       </p:pic>
+      <p:sp>
+        <p:nvSpPr>
+          <p:cNvPr id="10" name="Rounded Rectangle 9"/>
+          <p:cNvSpPr/>
+          <p:nvPr/>
+        </p:nvSpPr>
+        <p:spPr>
+          <a:xfrm>
+            <a:off x="6172200" y="4992624"/>
+            <a:ext cx="155448" cy="155448"/>
+          </a:xfrm>
+          <a:prstGeom prst="roundRect">
+            <a:avLst/>
+          </a:prstGeom>
+          <a:solidFill>
+            <a:srgbClr val="FFFFFF"/>
+          </a:solidFill>
+          <a:ln>
+            <a:noFill/>
+          </a:ln>
+          <a:effectLst/>
+        </p:spPr>
+        <p:style>
+          <a:lnRef idx="1">
+            <a:schemeClr val="accent1"/>
+          </a:lnRef>
+          <a:fillRef idx="3">
+            <a:schemeClr val="accent1"/>
+          </a:fillRef>
+          <a:effectRef idx="2">
+            <a:schemeClr val="accent1"/>
+          </a:effectRef>
+          <a:fontRef idx="minor">
+            <a:schemeClr val="lt1"/>
+          </a:fontRef>
+        </p:style>
+        <p:txBody>
+          <a:bodyPr rtlCol="0" anchor="ctr"/>
+          <a:lstStyle/>
+          <a:p>
+            <a:pPr algn="ctr"/>
+          </a:p>
+        </p:txBody>
+      </p:sp>
+      <p:sp>
+        <p:nvSpPr>
+          <p:cNvPr id="11" name="TextBox 10"/>
+          <p:cNvSpPr txBox="1"/>
+          <p:nvPr/>
+        </p:nvSpPr>
+        <p:spPr>
+          <a:xfrm>
+            <a:off x="6428232" y="4956048"/>
+            <a:ext cx="2103120" cy="274320"/>
+          </a:xfrm>
+          <a:prstGeom prst="rect">
+            <a:avLst/>
+          </a:prstGeom>
+          <a:noFill/>
+        </p:spPr>
+        <p:txBody>
+          <a:bodyPr wrap="square" lIns="0" rIns="0" tIns="0" bIns="0">
+            <a:spAutoFit/>
+          </a:bodyPr>
+          <a:lstStyle/>
+          <a:p>
+            <a:pPr algn="l">
+              <a:lnSpc>
+                <a:spcPct val="125000"/>
+              </a:lnSpc>
+            </a:pPr>
+            <a:r>
+              <a:rPr sz="1500" b="0">
+                <a:solidFill>
+                  <a:srgbClr val="FFFFFF"/>
+                </a:solidFill>
+                <a:latin typeface="Yu Gothic UI"/>
+              </a:rPr>
+              <a:t>返す分</a:t>
+            </a:r>
+          </a:p>
+        </p:txBody>
+      </p:sp>
+      <p:sp>
+        <p:nvSpPr>
+          <p:cNvPr id="12" name="Rounded Rectangle 11"/>
+          <p:cNvSpPr/>
+          <p:nvPr/>
+        </p:nvSpPr>
+        <p:spPr>
+          <a:xfrm>
+            <a:off x="8412480" y="4992624"/>
+            <a:ext cx="155448" cy="155448"/>
+          </a:xfrm>
+          <a:prstGeom prst="roundRect">
+            <a:avLst/>
+          </a:prstGeom>
+          <a:solidFill>
+            <a:srgbClr val="8EC5E8"/>
+          </a:solidFill>
+          <a:ln>
+            <a:noFill/>
+          </a:ln>
+          <a:effectLst/>
+        </p:spPr>
+        <p:style>
+          <a:lnRef idx="1">
+            <a:schemeClr val="accent1"/>
+          </a:lnRef>
+          <a:fillRef idx="3">
+            <a:schemeClr val="accent1"/>
+          </a:fillRef>
+          <a:effectRef idx="2">
+            <a:schemeClr val="accent1"/>
+          </a:effectRef>
+          <a:fontRef idx="minor">
+            <a:schemeClr val="lt1"/>
+          </a:fontRef>
+        </p:style>
+        <p:txBody>
+          <a:bodyPr rtlCol="0" anchor="ctr"/>
+          <a:lstStyle/>
+          <a:p>
+            <a:pPr algn="ctr"/>
+          </a:p>
+        </p:txBody>
+      </p:sp>
+      <p:sp>
+        <p:nvSpPr>
+          <p:cNvPr id="13" name="TextBox 12"/>
+          <p:cNvSpPr txBox="1"/>
+          <p:nvPr/>
+        </p:nvSpPr>
+        <p:spPr>
+          <a:xfrm>
+            <a:off x="8668512" y="4956048"/>
+            <a:ext cx="2103120" cy="274320"/>
+          </a:xfrm>
+          <a:prstGeom prst="rect">
+            <a:avLst/>
+          </a:prstGeom>
+          <a:noFill/>
+        </p:spPr>
+        <p:txBody>
+          <a:bodyPr wrap="square" lIns="0" rIns="0" tIns="0" bIns="0">
+            <a:spAutoFit/>
+          </a:bodyPr>
+          <a:lstStyle/>
+          <a:p>
+            <a:pPr algn="l">
+              <a:lnSpc>
+                <a:spcPct val="125000"/>
+              </a:lnSpc>
+            </a:pPr>
+            <a:r>
+              <a:rPr sz="1500" b="0">
+                <a:solidFill>
+                  <a:srgbClr val="FFFFFF"/>
+                </a:solidFill>
+                <a:latin typeface="Yu Gothic UI"/>
+              </a:rPr>
+              <a:t>待つ期間</a:t>
+            </a:r>
+          </a:p>
+        </p:txBody>
+      </p:sp>
+      <p:sp>
+        <p:nvSpPr>
+          <p:cNvPr id="14" name="TextBox 13"/>
+          <p:cNvSpPr txBox="1"/>
+          <p:nvPr/>
+        </p:nvSpPr>
+        <p:spPr>
+          <a:xfrm>
+            <a:off x="6053328" y="5376672"/>
+            <a:ext cx="4764024" cy="274320"/>
+          </a:xfrm>
+          <a:prstGeom prst="rect">
+            <a:avLst/>
+          </a:prstGeom>
+          <a:noFill/>
+        </p:spPr>
+        <p:txBody>
+          <a:bodyPr wrap="square" lIns="0" rIns="0" tIns="0" bIns="0">
+            <a:spAutoFit/>
+          </a:bodyPr>
+          <a:lstStyle/>
+          <a:p>
+            <a:pPr algn="l">
+              <a:lnSpc>
+                <a:spcPct val="125000"/>
+              </a:lnSpc>
+            </a:pPr>
+            <a:r>
+              <a:rPr sz="1300" b="0">
+                <a:solidFill>
+                  <a:srgbClr val="8EC5E8"/>
+                </a:solidFill>
+                <a:latin typeface="Yu Gothic UI"/>
+              </a:rPr>
+              <a:t>上から 元の返還／減額返還／返還期限猶予／返還免除</a:t>
+            </a:r>
+          </a:p>
+          <a:p>
+            <a:pPr algn="l">
+              <a:lnSpc>
+                <a:spcPct val="125000"/>
+              </a:lnSpc>
+            </a:pPr>
+            <a:r>
+              <a:rPr sz="1300" b="0">
+                <a:solidFill>
+                  <a:srgbClr val="8EC5E8"/>
+                </a:solidFill>
+                <a:latin typeface="Yu Gothic UI"/>
+              </a:rPr>
+              <a:t>白の合計＝返す総額。減るのは免除だけ（黄の破線）</a:t>
+            </a:r>
+          </a:p>
+        </p:txBody>
+      </p:sp>
     </p:spTree>
   </p:cSld>
   <p:clrMapOvr>

--- a/tools/article-images/article-images.pptx
+++ b/tools/article-images/article-images.pptx
@@ -4311,45 +4311,40 @@
       </p:pic>
       <p:sp>
         <p:nvSpPr>
-          <p:cNvPr id="10" name="Rounded Rectangle 9"/>
-          <p:cNvSpPr/>
-          <p:nvPr/>
-        </p:nvSpPr>
-        <p:spPr>
-          <a:xfrm>
-            <a:off x="6172200" y="4992624"/>
-            <a:ext cx="155448" cy="155448"/>
-          </a:xfrm>
-          <a:prstGeom prst="roundRect">
-            <a:avLst/>
-          </a:prstGeom>
-          <a:solidFill>
-            <a:srgbClr val="FFFFFF"/>
-          </a:solidFill>
-          <a:ln>
-            <a:noFill/>
-          </a:ln>
-          <a:effectLst/>
-        </p:spPr>
-        <p:style>
-          <a:lnRef idx="1">
-            <a:schemeClr val="accent1"/>
-          </a:lnRef>
-          <a:fillRef idx="3">
-            <a:schemeClr val="accent1"/>
-          </a:fillRef>
-          <a:effectRef idx="2">
-            <a:schemeClr val="accent1"/>
-          </a:effectRef>
-          <a:fontRef idx="minor">
-            <a:schemeClr val="lt1"/>
-          </a:fontRef>
-        </p:style>
-        <p:txBody>
-          <a:bodyPr rtlCol="0" anchor="ctr"/>
-          <a:lstStyle/>
-          <a:p>
-            <a:pPr algn="ctr"/>
+          <p:cNvPr id="10" name="TextBox 9"/>
+          <p:cNvSpPr txBox="1"/>
+          <p:nvPr/>
+        </p:nvSpPr>
+        <p:spPr>
+          <a:xfrm>
+            <a:off x="8073274" y="3717645"/>
+            <a:ext cx="1737360" cy="304800"/>
+          </a:xfrm>
+          <a:prstGeom prst="rect">
+            <a:avLst/>
+          </a:prstGeom>
+          <a:noFill/>
+        </p:spPr>
+        <p:txBody>
+          <a:bodyPr wrap="square" lIns="0" rIns="0" tIns="0" bIns="0">
+            <a:spAutoFit/>
+          </a:bodyPr>
+          <a:lstStyle/>
+          <a:p>
+            <a:pPr algn="l">
+              <a:lnSpc>
+                <a:spcPct val="115000"/>
+              </a:lnSpc>
+            </a:pPr>
+            <a:r>
+              <a:rPr sz="1500" b="1">
+                <a:solidFill>
+                  <a:srgbClr val="FFFFFF"/>
+                </a:solidFill>
+                <a:latin typeface="Yu Gothic UI"/>
+              </a:rPr>
+              <a:t>(1) 所得税から</a:t>
+            </a:r>
           </a:p>
         </p:txBody>
       </p:sp>
@@ -4361,8 +4356,141 @@
         </p:nvSpPr>
         <p:spPr>
           <a:xfrm>
-            <a:off x="6428232" y="4956048"/>
-            <a:ext cx="2103120" cy="274320"/>
+            <a:off x="8073274" y="2936179"/>
+            <a:ext cx="1737360" cy="304800"/>
+          </a:xfrm>
+          <a:prstGeom prst="rect">
+            <a:avLst/>
+          </a:prstGeom>
+          <a:noFill/>
+        </p:spPr>
+        <p:txBody>
+          <a:bodyPr wrap="square" lIns="0" rIns="0" tIns="0" bIns="0">
+            <a:spAutoFit/>
+          </a:bodyPr>
+          <a:lstStyle/>
+          <a:p>
+            <a:pPr algn="l">
+              <a:lnSpc>
+                <a:spcPct val="115000"/>
+              </a:lnSpc>
+            </a:pPr>
+            <a:r>
+              <a:rPr sz="1500" b="1">
+                <a:solidFill>
+                  <a:srgbClr val="FFFFFF"/>
+                </a:solidFill>
+                <a:latin typeface="Yu Gothic UI"/>
+              </a:rPr>
+              <a:t>(2) 住民税の基本分</a:t>
+            </a:r>
+          </a:p>
+        </p:txBody>
+      </p:sp>
+      <p:sp>
+        <p:nvSpPr>
+          <p:cNvPr id="12" name="TextBox 11"/>
+          <p:cNvSpPr txBox="1"/>
+          <p:nvPr/>
+        </p:nvSpPr>
+        <p:spPr>
+          <a:xfrm>
+            <a:off x="8073274" y="2040351"/>
+            <a:ext cx="1737360" cy="304800"/>
+          </a:xfrm>
+          <a:prstGeom prst="rect">
+            <a:avLst/>
+          </a:prstGeom>
+          <a:noFill/>
+        </p:spPr>
+        <p:txBody>
+          <a:bodyPr wrap="square" lIns="0" rIns="0" tIns="0" bIns="0">
+            <a:spAutoFit/>
+          </a:bodyPr>
+          <a:lstStyle/>
+          <a:p>
+            <a:pPr algn="l">
+              <a:lnSpc>
+                <a:spcPct val="115000"/>
+              </a:lnSpc>
+            </a:pPr>
+            <a:r>
+              <a:rPr sz="1500" b="1">
+                <a:solidFill>
+                  <a:srgbClr val="FFFFFF"/>
+                </a:solidFill>
+                <a:latin typeface="Yu Gothic UI"/>
+              </a:rPr>
+              <a:t>(3) 住民税の特例分</a:t>
+            </a:r>
+          </a:p>
+        </p:txBody>
+      </p:sp>
+      <p:sp>
+        <p:nvSpPr>
+          <p:cNvPr id="13" name="TextBox 12"/>
+          <p:cNvSpPr txBox="1"/>
+          <p:nvPr/>
+        </p:nvSpPr>
+        <p:spPr>
+          <a:xfrm>
+            <a:off x="8073274" y="1153281"/>
+            <a:ext cx="1737360" cy="264160"/>
+          </a:xfrm>
+          <a:prstGeom prst="rect">
+            <a:avLst/>
+          </a:prstGeom>
+          <a:noFill/>
+        </p:spPr>
+        <p:txBody>
+          <a:bodyPr wrap="square" lIns="0" rIns="0" tIns="0" bIns="0">
+            <a:spAutoFit/>
+          </a:bodyPr>
+          <a:lstStyle/>
+          <a:p>
+            <a:pPr algn="l">
+              <a:lnSpc>
+                <a:spcPct val="115000"/>
+              </a:lnSpc>
+            </a:pPr>
+            <a:r>
+              <a:rPr sz="1300" b="1">
+                <a:solidFill>
+                  <a:srgbClr val="E7CD7A"/>
+                </a:solidFill>
+                <a:latin typeface="Yu Gothic UI"/>
+              </a:rPr>
+              <a:t>住民税所得割額の20％</a:t>
+            </a:r>
+          </a:p>
+          <a:p>
+            <a:pPr algn="l">
+              <a:lnSpc>
+                <a:spcPct val="115000"/>
+              </a:lnSpc>
+            </a:pPr>
+            <a:r>
+              <a:rPr sz="1300" b="1">
+                <a:solidFill>
+                  <a:srgbClr val="E7CD7A"/>
+                </a:solidFill>
+                <a:latin typeface="Yu Gothic UI"/>
+              </a:rPr>
+              <a:t>＝ここが天井</a:t>
+            </a:r>
+          </a:p>
+        </p:txBody>
+      </p:sp>
+      <p:sp>
+        <p:nvSpPr>
+          <p:cNvPr id="14" name="TextBox 13"/>
+          <p:cNvSpPr txBox="1"/>
+          <p:nvPr/>
+        </p:nvSpPr>
+        <p:spPr>
+          <a:xfrm>
+            <a:off x="6053328" y="5376672"/>
+            <a:ext cx="4764024" cy="274320"/>
           </a:xfrm>
           <a:prstGeom prst="rect">
             <a:avLst/>
@@ -4381,135 +4509,13 @@
               </a:lnSpc>
             </a:pPr>
             <a:r>
-              <a:rPr sz="1500" b="0">
-                <a:solidFill>
-                  <a:srgbClr val="FFFFFF"/>
+              <a:rPr sz="1300" b="0">
+                <a:solidFill>
+                  <a:srgbClr val="8EC5E8"/>
                 </a:solidFill>
                 <a:latin typeface="Yu Gothic UI"/>
               </a:rPr>
-              <a:t>(1) 所得税</a:t>
-            </a:r>
-          </a:p>
-        </p:txBody>
-      </p:sp>
-      <p:sp>
-        <p:nvSpPr>
-          <p:cNvPr id="12" name="Rounded Rectangle 11"/>
-          <p:cNvSpPr/>
-          <p:nvPr/>
-        </p:nvSpPr>
-        <p:spPr>
-          <a:xfrm>
-            <a:off x="8412480" y="4992624"/>
-            <a:ext cx="155448" cy="155448"/>
-          </a:xfrm>
-          <a:prstGeom prst="roundRect">
-            <a:avLst/>
-          </a:prstGeom>
-          <a:solidFill>
-            <a:srgbClr val="8EC5E8"/>
-          </a:solidFill>
-          <a:ln>
-            <a:noFill/>
-          </a:ln>
-          <a:effectLst/>
-        </p:spPr>
-        <p:style>
-          <a:lnRef idx="1">
-            <a:schemeClr val="accent1"/>
-          </a:lnRef>
-          <a:fillRef idx="3">
-            <a:schemeClr val="accent1"/>
-          </a:fillRef>
-          <a:effectRef idx="2">
-            <a:schemeClr val="accent1"/>
-          </a:effectRef>
-          <a:fontRef idx="minor">
-            <a:schemeClr val="lt1"/>
-          </a:fontRef>
-        </p:style>
-        <p:txBody>
-          <a:bodyPr rtlCol="0" anchor="ctr"/>
-          <a:lstStyle/>
-          <a:p>
-            <a:pPr algn="ctr"/>
-          </a:p>
-        </p:txBody>
-      </p:sp>
-      <p:sp>
-        <p:nvSpPr>
-          <p:cNvPr id="13" name="TextBox 12"/>
-          <p:cNvSpPr txBox="1"/>
-          <p:nvPr/>
-        </p:nvSpPr>
-        <p:spPr>
-          <a:xfrm>
-            <a:off x="8668512" y="4956048"/>
-            <a:ext cx="2103120" cy="274320"/>
-          </a:xfrm>
-          <a:prstGeom prst="rect">
-            <a:avLst/>
-          </a:prstGeom>
-          <a:noFill/>
-        </p:spPr>
-        <p:txBody>
-          <a:bodyPr wrap="square" lIns="0" rIns="0" tIns="0" bIns="0">
-            <a:spAutoFit/>
-          </a:bodyPr>
-          <a:lstStyle/>
-          <a:p>
-            <a:pPr algn="l">
-              <a:lnSpc>
-                <a:spcPct val="125000"/>
-              </a:lnSpc>
-            </a:pPr>
-            <a:r>
-              <a:rPr sz="1500" b="0">
-                <a:solidFill>
-                  <a:srgbClr val="FFFFFF"/>
-                </a:solidFill>
-                <a:latin typeface="Yu Gothic UI"/>
-              </a:rPr>
-              <a:t>(2)(3) 住民税</a:t>
-            </a:r>
-          </a:p>
-        </p:txBody>
-      </p:sp>
-      <p:sp>
-        <p:nvSpPr>
-          <p:cNvPr id="14" name="TextBox 13"/>
-          <p:cNvSpPr txBox="1"/>
-          <p:nvPr/>
-        </p:nvSpPr>
-        <p:spPr>
-          <a:xfrm>
-            <a:off x="6053328" y="5376672"/>
-            <a:ext cx="4764024" cy="274320"/>
-          </a:xfrm>
-          <a:prstGeom prst="rect">
-            <a:avLst/>
-          </a:prstGeom>
-          <a:noFill/>
-        </p:spPr>
-        <p:txBody>
-          <a:bodyPr wrap="square" lIns="0" rIns="0" tIns="0" bIns="0">
-            <a:spAutoFit/>
-          </a:bodyPr>
-          <a:lstStyle/>
-          <a:p>
-            <a:pPr algn="l">
-              <a:lnSpc>
-                <a:spcPct val="125000"/>
-              </a:lnSpc>
-            </a:pPr>
-            <a:r>
-              <a:rPr sz="1300" b="0">
-                <a:solidFill>
-                  <a:srgbClr val="8EC5E8"/>
-                </a:solidFill>
-                <a:latin typeface="Yu Gothic UI"/>
-              </a:rPr>
-              <a:t>破線＝住民税所得割額の20％の天井</a:t>
+              <a:t>破線の上にはみ出した分は控除されず、自己負担として残る</a:t>
             </a:r>
           </a:p>
         </p:txBody>

--- a/tools/article-images/article-images.pptx
+++ b/tools/article-images/article-images.pptx
@@ -3441,58 +3441,14 @@
       </p:pic>
       <p:sp>
         <p:nvSpPr>
-          <p:cNvPr id="10" name="Rounded Rectangle 9"/>
-          <p:cNvSpPr/>
-          <p:nvPr/>
-        </p:nvSpPr>
-        <p:spPr>
-          <a:xfrm>
-            <a:off x="6172200" y="4992624"/>
-            <a:ext cx="155448" cy="155448"/>
-          </a:xfrm>
-          <a:prstGeom prst="roundRect">
-            <a:avLst/>
-          </a:prstGeom>
-          <a:solidFill>
-            <a:srgbClr val="FFFFFF"/>
-          </a:solidFill>
-          <a:ln>
-            <a:noFill/>
-          </a:ln>
-          <a:effectLst/>
-        </p:spPr>
-        <p:style>
-          <a:lnRef idx="1">
-            <a:schemeClr val="accent1"/>
-          </a:lnRef>
-          <a:fillRef idx="3">
-            <a:schemeClr val="accent1"/>
-          </a:fillRef>
-          <a:effectRef idx="2">
-            <a:schemeClr val="accent1"/>
-          </a:effectRef>
-          <a:fontRef idx="minor">
-            <a:schemeClr val="lt1"/>
-          </a:fontRef>
-        </p:style>
-        <p:txBody>
-          <a:bodyPr rtlCol="0" anchor="ctr"/>
-          <a:lstStyle/>
-          <a:p>
-            <a:pPr algn="ctr"/>
-          </a:p>
-        </p:txBody>
-      </p:sp>
-      <p:sp>
-        <p:nvSpPr>
-          <p:cNvPr id="11" name="TextBox 10"/>
+          <p:cNvPr id="10" name="TextBox 9"/>
           <p:cNvSpPr txBox="1"/>
           <p:nvPr/>
         </p:nvSpPr>
         <p:spPr>
           <a:xfrm>
-            <a:off x="6428232" y="4956048"/>
-            <a:ext cx="2103120" cy="274320"/>
+            <a:off x="6290523" y="4554363"/>
+            <a:ext cx="859536" cy="203200"/>
           </a:xfrm>
           <a:prstGeom prst="rect">
             <a:avLst/>
@@ -3505,77 +3461,49 @@
           </a:bodyPr>
           <a:lstStyle/>
           <a:p>
-            <a:pPr algn="l">
-              <a:lnSpc>
-                <a:spcPct val="125000"/>
-              </a:lnSpc>
-            </a:pPr>
-            <a:r>
-              <a:rPr sz="1500" b="0">
+            <a:pPr algn="ctr">
+              <a:lnSpc>
+                <a:spcPct val="115000"/>
+              </a:lnSpc>
+            </a:pPr>
+            <a:r>
+              <a:rPr sz="1000" b="1">
                 <a:solidFill>
                   <a:srgbClr val="FFFFFF"/>
                 </a:solidFill>
                 <a:latin typeface="Yu Gothic UI"/>
               </a:rPr>
-              <a:t>税の壁</a:t>
-            </a:r>
-          </a:p>
-        </p:txBody>
-      </p:sp>
-      <p:sp>
-        <p:nvSpPr>
-          <p:cNvPr id="12" name="Rounded Rectangle 11"/>
-          <p:cNvSpPr/>
-          <p:nvPr/>
-        </p:nvSpPr>
-        <p:spPr>
-          <a:xfrm>
-            <a:off x="8412480" y="4992624"/>
-            <a:ext cx="155448" cy="155448"/>
-          </a:xfrm>
-          <a:prstGeom prst="roundRect">
-            <a:avLst/>
-          </a:prstGeom>
-          <a:solidFill>
-            <a:srgbClr val="8EC5E8"/>
-          </a:solidFill>
-          <a:ln>
-            <a:noFill/>
-          </a:ln>
-          <a:effectLst/>
-        </p:spPr>
-        <p:style>
-          <a:lnRef idx="1">
-            <a:schemeClr val="accent1"/>
-          </a:lnRef>
-          <a:fillRef idx="3">
-            <a:schemeClr val="accent1"/>
-          </a:fillRef>
-          <a:effectRef idx="2">
-            <a:schemeClr val="accent1"/>
-          </a:effectRef>
-          <a:fontRef idx="minor">
-            <a:schemeClr val="lt1"/>
-          </a:fontRef>
-        </p:style>
-        <p:txBody>
-          <a:bodyPr rtlCol="0" anchor="ctr"/>
-          <a:lstStyle/>
-          <a:p>
-            <a:pPr algn="ctr"/>
-          </a:p>
-        </p:txBody>
-      </p:sp>
-      <p:sp>
-        <p:nvSpPr>
-          <p:cNvPr id="13" name="TextBox 12"/>
+              <a:t>所得税</a:t>
+            </a:r>
+          </a:p>
+          <a:p>
+            <a:pPr algn="ctr">
+              <a:lnSpc>
+                <a:spcPct val="115000"/>
+              </a:lnSpc>
+            </a:pPr>
+            <a:r>
+              <a:rPr sz="1000" b="1">
+                <a:solidFill>
+                  <a:srgbClr val="FFFFFF"/>
+                </a:solidFill>
+                <a:latin typeface="Yu Gothic UI"/>
+              </a:rPr>
+              <a:t>〜令和6年分</a:t>
+            </a:r>
+          </a:p>
+        </p:txBody>
+      </p:sp>
+      <p:sp>
+        <p:nvSpPr>
+          <p:cNvPr id="11" name="TextBox 10"/>
           <p:cNvSpPr txBox="1"/>
           <p:nvPr/>
         </p:nvSpPr>
         <p:spPr>
           <a:xfrm>
-            <a:off x="8668512" y="4956048"/>
-            <a:ext cx="2103120" cy="274320"/>
+            <a:off x="7148047" y="4554363"/>
+            <a:ext cx="859536" cy="203200"/>
           </a:xfrm>
           <a:prstGeom prst="rect">
             <a:avLst/>
@@ -3588,33 +3516,49 @@
           </a:bodyPr>
           <a:lstStyle/>
           <a:p>
-            <a:pPr algn="l">
-              <a:lnSpc>
-                <a:spcPct val="125000"/>
-              </a:lnSpc>
-            </a:pPr>
-            <a:r>
-              <a:rPr sz="1500" b="0">
-                <a:solidFill>
-                  <a:srgbClr val="FFFFFF"/>
-                </a:solidFill>
-                <a:latin typeface="Yu Gothic UI"/>
-              </a:rPr>
-              <a:t>社会保険の壁</a:t>
-            </a:r>
-          </a:p>
-        </p:txBody>
-      </p:sp>
-      <p:sp>
-        <p:nvSpPr>
-          <p:cNvPr id="14" name="TextBox 13"/>
+            <a:pPr algn="ctr">
+              <a:lnSpc>
+                <a:spcPct val="115000"/>
+              </a:lnSpc>
+            </a:pPr>
+            <a:r>
+              <a:rPr sz="1000" b="1">
+                <a:solidFill>
+                  <a:srgbClr val="8EC5E8"/>
+                </a:solidFill>
+                <a:latin typeface="Yu Gothic UI"/>
+              </a:rPr>
+              <a:t>社会保険</a:t>
+            </a:r>
+          </a:p>
+          <a:p>
+            <a:pPr algn="ctr">
+              <a:lnSpc>
+                <a:spcPct val="115000"/>
+              </a:lnSpc>
+            </a:pPr>
+            <a:r>
+              <a:rPr sz="1000" b="1">
+                <a:solidFill>
+                  <a:srgbClr val="8EC5E8"/>
+                </a:solidFill>
+                <a:latin typeface="Yu Gothic UI"/>
+              </a:rPr>
+              <a:t>適用拡大</a:t>
+            </a:r>
+          </a:p>
+        </p:txBody>
+      </p:sp>
+      <p:sp>
+        <p:nvSpPr>
+          <p:cNvPr id="12" name="TextBox 11"/>
           <p:cNvSpPr txBox="1"/>
           <p:nvPr/>
         </p:nvSpPr>
         <p:spPr>
           <a:xfrm>
-            <a:off x="6053328" y="5376672"/>
-            <a:ext cx="4764024" cy="274320"/>
+            <a:off x="8005572" y="4554363"/>
+            <a:ext cx="859536" cy="203200"/>
           </a:xfrm>
           <a:prstGeom prst="rect">
             <a:avLst/>
@@ -3627,6 +3571,171 @@
           </a:bodyPr>
           <a:lstStyle/>
           <a:p>
+            <a:pPr algn="ctr">
+              <a:lnSpc>
+                <a:spcPct val="115000"/>
+              </a:lnSpc>
+            </a:pPr>
+            <a:r>
+              <a:rPr sz="1000" b="1">
+                <a:solidFill>
+                  <a:srgbClr val="8EC5E8"/>
+                </a:solidFill>
+                <a:latin typeface="Yu Gothic UI"/>
+              </a:rPr>
+              <a:t>健康保険の</a:t>
+            </a:r>
+          </a:p>
+          <a:p>
+            <a:pPr algn="ctr">
+              <a:lnSpc>
+                <a:spcPct val="115000"/>
+              </a:lnSpc>
+            </a:pPr>
+            <a:r>
+              <a:rPr sz="1000" b="1">
+                <a:solidFill>
+                  <a:srgbClr val="8EC5E8"/>
+                </a:solidFill>
+                <a:latin typeface="Yu Gothic UI"/>
+              </a:rPr>
+              <a:t>被扶養者</a:t>
+            </a:r>
+          </a:p>
+        </p:txBody>
+      </p:sp>
+      <p:sp>
+        <p:nvSpPr>
+          <p:cNvPr id="13" name="TextBox 12"/>
+          <p:cNvSpPr txBox="1"/>
+          <p:nvPr/>
+        </p:nvSpPr>
+        <p:spPr>
+          <a:xfrm>
+            <a:off x="8863096" y="4554363"/>
+            <a:ext cx="859536" cy="203200"/>
+          </a:xfrm>
+          <a:prstGeom prst="rect">
+            <a:avLst/>
+          </a:prstGeom>
+          <a:noFill/>
+        </p:spPr>
+        <p:txBody>
+          <a:bodyPr wrap="square" lIns="0" rIns="0" tIns="0" bIns="0">
+            <a:spAutoFit/>
+          </a:bodyPr>
+          <a:lstStyle/>
+          <a:p>
+            <a:pPr algn="ctr">
+              <a:lnSpc>
+                <a:spcPct val="115000"/>
+              </a:lnSpc>
+            </a:pPr>
+            <a:r>
+              <a:rPr sz="1000" b="1">
+                <a:solidFill>
+                  <a:srgbClr val="FFFFFF"/>
+                </a:solidFill>
+                <a:latin typeface="Yu Gothic UI"/>
+              </a:rPr>
+              <a:t>配偶者</a:t>
+            </a:r>
+          </a:p>
+          <a:p>
+            <a:pPr algn="ctr">
+              <a:lnSpc>
+                <a:spcPct val="115000"/>
+              </a:lnSpc>
+            </a:pPr>
+            <a:r>
+              <a:rPr sz="1000" b="1">
+                <a:solidFill>
+                  <a:srgbClr val="FFFFFF"/>
+                </a:solidFill>
+                <a:latin typeface="Yu Gothic UI"/>
+              </a:rPr>
+              <a:t>特別控除</a:t>
+            </a:r>
+          </a:p>
+        </p:txBody>
+      </p:sp>
+      <p:sp>
+        <p:nvSpPr>
+          <p:cNvPr id="14" name="TextBox 13"/>
+          <p:cNvSpPr txBox="1"/>
+          <p:nvPr/>
+        </p:nvSpPr>
+        <p:spPr>
+          <a:xfrm>
+            <a:off x="9720620" y="4554363"/>
+            <a:ext cx="859536" cy="203200"/>
+          </a:xfrm>
+          <a:prstGeom prst="rect">
+            <a:avLst/>
+          </a:prstGeom>
+          <a:noFill/>
+        </p:spPr>
+        <p:txBody>
+          <a:bodyPr wrap="square" lIns="0" rIns="0" tIns="0" bIns="0">
+            <a:spAutoFit/>
+          </a:bodyPr>
+          <a:lstStyle/>
+          <a:p>
+            <a:pPr algn="ctr">
+              <a:lnSpc>
+                <a:spcPct val="115000"/>
+              </a:lnSpc>
+            </a:pPr>
+            <a:r>
+              <a:rPr sz="1000" b="1">
+                <a:solidFill>
+                  <a:srgbClr val="FFFFFF"/>
+                </a:solidFill>
+                <a:latin typeface="Yu Gothic UI"/>
+              </a:rPr>
+              <a:t>所得税</a:t>
+            </a:r>
+          </a:p>
+          <a:p>
+            <a:pPr algn="ctr">
+              <a:lnSpc>
+                <a:spcPct val="115000"/>
+              </a:lnSpc>
+            </a:pPr>
+            <a:r>
+              <a:rPr sz="1000" b="1">
+                <a:solidFill>
+                  <a:srgbClr val="FFFFFF"/>
+                </a:solidFill>
+                <a:latin typeface="Yu Gothic UI"/>
+              </a:rPr>
+              <a:t>令和7年分〜</a:t>
+            </a:r>
+          </a:p>
+        </p:txBody>
+      </p:sp>
+      <p:sp>
+        <p:nvSpPr>
+          <p:cNvPr id="15" name="TextBox 14"/>
+          <p:cNvSpPr txBox="1"/>
+          <p:nvPr/>
+        </p:nvSpPr>
+        <p:spPr>
+          <a:xfrm>
+            <a:off x="6053328" y="5376672"/>
+            <a:ext cx="4764024" cy="274320"/>
+          </a:xfrm>
+          <a:prstGeom prst="rect">
+            <a:avLst/>
+          </a:prstGeom>
+          <a:noFill/>
+        </p:spPr>
+        <p:txBody>
+          <a:bodyPr wrap="square" lIns="0" rIns="0" tIns="0" bIns="0">
+            <a:spAutoFit/>
+          </a:bodyPr>
+          <a:lstStyle/>
+          <a:p>
             <a:pPr algn="l">
               <a:lnSpc>
                 <a:spcPct val="125000"/>
@@ -3639,7 +3748,7 @@
                 </a:solidFill>
                 <a:latin typeface="Yu Gothic UI"/>
               </a:rPr>
-              <a:t>単位：万円</a:t>
+              <a:t>単位：万円　白＝税の壁　青＝社会保険の壁</a:t>
             </a:r>
           </a:p>
         </p:txBody>
@@ -4882,58 +4991,14 @@
       </p:pic>
       <p:sp>
         <p:nvSpPr>
-          <p:cNvPr id="10" name="Rounded Rectangle 9"/>
-          <p:cNvSpPr/>
-          <p:nvPr/>
-        </p:nvSpPr>
-        <p:spPr>
-          <a:xfrm>
-            <a:off x="6172200" y="4992624"/>
-            <a:ext cx="155448" cy="155448"/>
-          </a:xfrm>
-          <a:prstGeom prst="roundRect">
-            <a:avLst/>
-          </a:prstGeom>
-          <a:solidFill>
-            <a:srgbClr val="FFFFFF"/>
-          </a:solidFill>
-          <a:ln>
-            <a:noFill/>
-          </a:ln>
-          <a:effectLst/>
-        </p:spPr>
-        <p:style>
-          <a:lnRef idx="1">
-            <a:schemeClr val="accent1"/>
-          </a:lnRef>
-          <a:fillRef idx="3">
-            <a:schemeClr val="accent1"/>
-          </a:fillRef>
-          <a:effectRef idx="2">
-            <a:schemeClr val="accent1"/>
-          </a:effectRef>
-          <a:fontRef idx="minor">
-            <a:schemeClr val="lt1"/>
-          </a:fontRef>
-        </p:style>
-        <p:txBody>
-          <a:bodyPr rtlCol="0" anchor="ctr"/>
-          <a:lstStyle/>
-          <a:p>
-            <a:pPr algn="ctr"/>
-          </a:p>
-        </p:txBody>
-      </p:sp>
-      <p:sp>
-        <p:nvSpPr>
-          <p:cNvPr id="11" name="TextBox 10"/>
+          <p:cNvPr id="10" name="TextBox 9"/>
           <p:cNvSpPr txBox="1"/>
           <p:nvPr/>
         </p:nvSpPr>
         <p:spPr>
           <a:xfrm>
-            <a:off x="6428232" y="4956048"/>
-            <a:ext cx="2103120" cy="274320"/>
+            <a:off x="7429500" y="1105631"/>
+            <a:ext cx="2011680" cy="264160"/>
           </a:xfrm>
           <a:prstGeom prst="rect">
             <a:avLst/>
@@ -4946,77 +5011,33 @@
           </a:bodyPr>
           <a:lstStyle/>
           <a:p>
-            <a:pPr algn="l">
-              <a:lnSpc>
-                <a:spcPct val="125000"/>
-              </a:lnSpc>
-            </a:pPr>
-            <a:r>
-              <a:rPr sz="1500" b="0">
+            <a:pPr algn="ctr">
+              <a:lnSpc>
+                <a:spcPct val="115000"/>
+              </a:lnSpc>
+            </a:pPr>
+            <a:r>
+              <a:rPr sz="1300" b="1">
                 <a:solidFill>
                   <a:srgbClr val="FFFFFF"/>
                 </a:solidFill>
                 <a:latin typeface="Yu Gothic UI"/>
               </a:rPr>
-              <a:t>授業料＝就学支援金</a:t>
-            </a:r>
-          </a:p>
-        </p:txBody>
-      </p:sp>
-      <p:sp>
-        <p:nvSpPr>
-          <p:cNvPr id="12" name="Rounded Rectangle 11"/>
-          <p:cNvSpPr/>
-          <p:nvPr/>
-        </p:nvSpPr>
-        <p:spPr>
-          <a:xfrm>
-            <a:off x="8412480" y="4992624"/>
-            <a:ext cx="155448" cy="155448"/>
-          </a:xfrm>
-          <a:prstGeom prst="roundRect">
-            <a:avLst/>
-          </a:prstGeom>
-          <a:solidFill>
-            <a:srgbClr val="8EC5E8"/>
-          </a:solidFill>
-          <a:ln>
-            <a:noFill/>
-          </a:ln>
-          <a:effectLst/>
-        </p:spPr>
-        <p:style>
-          <a:lnRef idx="1">
-            <a:schemeClr val="accent1"/>
-          </a:lnRef>
-          <a:fillRef idx="3">
-            <a:schemeClr val="accent1"/>
-          </a:fillRef>
-          <a:effectRef idx="2">
-            <a:schemeClr val="accent1"/>
-          </a:effectRef>
-          <a:fontRef idx="minor">
-            <a:schemeClr val="lt1"/>
-          </a:fontRef>
-        </p:style>
-        <p:txBody>
-          <a:bodyPr rtlCol="0" anchor="ctr"/>
-          <a:lstStyle/>
-          <a:p>
-            <a:pPr algn="ctr"/>
-          </a:p>
-        </p:txBody>
-      </p:sp>
-      <p:sp>
-        <p:nvSpPr>
-          <p:cNvPr id="13" name="TextBox 12"/>
+              <a:t>高校でかかる費用</a:t>
+            </a:r>
+          </a:p>
+        </p:txBody>
+      </p:sp>
+      <p:sp>
+        <p:nvSpPr>
+          <p:cNvPr id="11" name="TextBox 10"/>
           <p:cNvSpPr txBox="1"/>
           <p:nvPr/>
         </p:nvSpPr>
         <p:spPr>
           <a:xfrm>
-            <a:off x="8668512" y="4956048"/>
-            <a:ext cx="2103120" cy="274320"/>
+            <a:off x="6533790" y="1411366"/>
+            <a:ext cx="1554480" cy="304800"/>
           </a:xfrm>
           <a:prstGeom prst="rect">
             <a:avLst/>
@@ -5029,33 +5050,33 @@
           </a:bodyPr>
           <a:lstStyle/>
           <a:p>
-            <a:pPr algn="l">
-              <a:lnSpc>
-                <a:spcPct val="125000"/>
-              </a:lnSpc>
-            </a:pPr>
-            <a:r>
-              <a:rPr sz="1500" b="0">
+            <a:pPr algn="ctr">
+              <a:lnSpc>
+                <a:spcPct val="115000"/>
+              </a:lnSpc>
+            </a:pPr>
+            <a:r>
+              <a:rPr sz="1500" b="1">
                 <a:solidFill>
                   <a:srgbClr val="FFFFFF"/>
                 </a:solidFill>
                 <a:latin typeface="Yu Gothic UI"/>
               </a:rPr>
-              <a:t>授業料以外＝奨学給付金</a:t>
-            </a:r>
-          </a:p>
-        </p:txBody>
-      </p:sp>
-      <p:sp>
-        <p:nvSpPr>
-          <p:cNvPr id="14" name="TextBox 13"/>
+              <a:t>授業料</a:t>
+            </a:r>
+          </a:p>
+        </p:txBody>
+      </p:sp>
+      <p:sp>
+        <p:nvSpPr>
+          <p:cNvPr id="12" name="TextBox 11"/>
           <p:cNvSpPr txBox="1"/>
           <p:nvPr/>
         </p:nvSpPr>
         <p:spPr>
           <a:xfrm>
-            <a:off x="6053328" y="5376672"/>
-            <a:ext cx="4764024" cy="274320"/>
+            <a:off x="8782409" y="1411366"/>
+            <a:ext cx="1554480" cy="304800"/>
           </a:xfrm>
           <a:prstGeom prst="rect">
             <a:avLst/>
@@ -5067,6 +5088,171 @@
             <a:spAutoFit/>
           </a:bodyPr>
           <a:lstStyle/>
+          <a:p>
+            <a:pPr algn="ctr">
+              <a:lnSpc>
+                <a:spcPct val="115000"/>
+              </a:lnSpc>
+            </a:pPr>
+            <a:r>
+              <a:rPr sz="1500" b="1">
+                <a:solidFill>
+                  <a:srgbClr val="8EC5E8"/>
+                </a:solidFill>
+                <a:latin typeface="Yu Gothic UI"/>
+              </a:rPr>
+              <a:t>授業料以外</a:t>
+            </a:r>
+          </a:p>
+        </p:txBody>
+      </p:sp>
+      <p:sp>
+        <p:nvSpPr>
+          <p:cNvPr id="13" name="TextBox 12"/>
+          <p:cNvSpPr txBox="1"/>
+          <p:nvPr/>
+        </p:nvSpPr>
+        <p:spPr>
+          <a:xfrm>
+            <a:off x="6533790" y="4164015"/>
+            <a:ext cx="1554480" cy="223520"/>
+          </a:xfrm>
+          <a:prstGeom prst="rect">
+            <a:avLst/>
+          </a:prstGeom>
+          <a:noFill/>
+        </p:spPr>
+        <p:txBody>
+          <a:bodyPr wrap="square" lIns="0" rIns="0" tIns="0" bIns="0">
+            <a:spAutoFit/>
+          </a:bodyPr>
+          <a:lstStyle/>
+          <a:p>
+            <a:pPr algn="ctr">
+              <a:lnSpc>
+                <a:spcPct val="115000"/>
+              </a:lnSpc>
+            </a:pPr>
+            <a:r>
+              <a:rPr sz="1100" b="1">
+                <a:solidFill>
+                  <a:srgbClr val="FFFFFF"/>
+                </a:solidFill>
+                <a:latin typeface="Yu Gothic UI"/>
+              </a:rPr>
+              <a:t>高等学校等</a:t>
+            </a:r>
+          </a:p>
+          <a:p>
+            <a:pPr algn="ctr">
+              <a:lnSpc>
+                <a:spcPct val="115000"/>
+              </a:lnSpc>
+            </a:pPr>
+            <a:r>
+              <a:rPr sz="1100" b="1">
+                <a:solidFill>
+                  <a:srgbClr val="FFFFFF"/>
+                </a:solidFill>
+                <a:latin typeface="Yu Gothic UI"/>
+              </a:rPr>
+              <a:t>就学支援金</a:t>
+            </a:r>
+          </a:p>
+        </p:txBody>
+      </p:sp>
+      <p:sp>
+        <p:nvSpPr>
+          <p:cNvPr id="14" name="TextBox 13"/>
+          <p:cNvSpPr txBox="1"/>
+          <p:nvPr/>
+        </p:nvSpPr>
+        <p:spPr>
+          <a:xfrm>
+            <a:off x="8782409" y="4164015"/>
+            <a:ext cx="1554480" cy="223520"/>
+          </a:xfrm>
+          <a:prstGeom prst="rect">
+            <a:avLst/>
+          </a:prstGeom>
+          <a:noFill/>
+        </p:spPr>
+        <p:txBody>
+          <a:bodyPr wrap="square" lIns="0" rIns="0" tIns="0" bIns="0">
+            <a:spAutoFit/>
+          </a:bodyPr>
+          <a:lstStyle/>
+          <a:p>
+            <a:pPr algn="ctr">
+              <a:lnSpc>
+                <a:spcPct val="115000"/>
+              </a:lnSpc>
+            </a:pPr>
+            <a:r>
+              <a:rPr sz="1100" b="1">
+                <a:solidFill>
+                  <a:srgbClr val="8EC5E8"/>
+                </a:solidFill>
+                <a:latin typeface="Yu Gothic UI"/>
+              </a:rPr>
+              <a:t>高校生等</a:t>
+            </a:r>
+          </a:p>
+          <a:p>
+            <a:pPr algn="ctr">
+              <a:lnSpc>
+                <a:spcPct val="115000"/>
+              </a:lnSpc>
+            </a:pPr>
+            <a:r>
+              <a:rPr sz="1100" b="1">
+                <a:solidFill>
+                  <a:srgbClr val="8EC5E8"/>
+                </a:solidFill>
+                <a:latin typeface="Yu Gothic UI"/>
+              </a:rPr>
+              <a:t>奨学給付金</a:t>
+            </a:r>
+          </a:p>
+        </p:txBody>
+      </p:sp>
+      <p:sp>
+        <p:nvSpPr>
+          <p:cNvPr id="15" name="TextBox 14"/>
+          <p:cNvSpPr txBox="1"/>
+          <p:nvPr/>
+        </p:nvSpPr>
+        <p:spPr>
+          <a:xfrm>
+            <a:off x="6053328" y="5376672"/>
+            <a:ext cx="4764024" cy="274320"/>
+          </a:xfrm>
+          <a:prstGeom prst="rect">
+            <a:avLst/>
+          </a:prstGeom>
+          <a:noFill/>
+        </p:spPr>
+        <p:txBody>
+          <a:bodyPr wrap="square" lIns="0" rIns="0" tIns="0" bIns="0">
+            <a:spAutoFit/>
+          </a:bodyPr>
+          <a:lstStyle/>
+          <a:p>
+            <a:pPr algn="l">
+              <a:lnSpc>
+                <a:spcPct val="125000"/>
+              </a:lnSpc>
+            </a:pPr>
+            <a:r>
+              <a:rPr sz="1300" b="0">
+                <a:solidFill>
+                  <a:srgbClr val="8EC5E8"/>
+                </a:solidFill>
+                <a:latin typeface="Yu Gothic UI"/>
+              </a:rPr>
+              <a:t>矢印の先＝それを受け止める制度</a:t>
+            </a:r>
+          </a:p>
           <a:p>
             <a:pPr algn="l">
               <a:lnSpc>
@@ -5447,58 +5633,14 @@
       </p:pic>
       <p:sp>
         <p:nvSpPr>
-          <p:cNvPr id="10" name="Rounded Rectangle 9"/>
-          <p:cNvSpPr/>
-          <p:nvPr/>
-        </p:nvSpPr>
-        <p:spPr>
-          <a:xfrm>
-            <a:off x="6172200" y="4992624"/>
-            <a:ext cx="155448" cy="155448"/>
-          </a:xfrm>
-          <a:prstGeom prst="roundRect">
-            <a:avLst/>
-          </a:prstGeom>
-          <a:solidFill>
-            <a:srgbClr val="FFFFFF"/>
-          </a:solidFill>
-          <a:ln>
-            <a:noFill/>
-          </a:ln>
-          <a:effectLst/>
-        </p:spPr>
-        <p:style>
-          <a:lnRef idx="1">
-            <a:schemeClr val="accent1"/>
-          </a:lnRef>
-          <a:fillRef idx="3">
-            <a:schemeClr val="accent1"/>
-          </a:fillRef>
-          <a:effectRef idx="2">
-            <a:schemeClr val="accent1"/>
-          </a:effectRef>
-          <a:fontRef idx="minor">
-            <a:schemeClr val="lt1"/>
-          </a:fontRef>
-        </p:style>
-        <p:txBody>
-          <a:bodyPr rtlCol="0" anchor="ctr"/>
-          <a:lstStyle/>
-          <a:p>
-            <a:pPr algn="ctr"/>
-          </a:p>
-        </p:txBody>
-      </p:sp>
-      <p:sp>
-        <p:nvSpPr>
-          <p:cNvPr id="11" name="TextBox 10"/>
+          <p:cNvPr id="10" name="TextBox 9"/>
           <p:cNvSpPr txBox="1"/>
           <p:nvPr/>
         </p:nvSpPr>
         <p:spPr>
           <a:xfrm>
-            <a:off x="6428232" y="4956048"/>
-            <a:ext cx="2103120" cy="274320"/>
+            <a:off x="7155180" y="1048451"/>
+            <a:ext cx="2560320" cy="264160"/>
           </a:xfrm>
           <a:prstGeom prst="rect">
             <a:avLst/>
@@ -5511,77 +5653,33 @@
           </a:bodyPr>
           <a:lstStyle/>
           <a:p>
-            <a:pPr algn="l">
-              <a:lnSpc>
-                <a:spcPct val="125000"/>
-              </a:lnSpc>
-            </a:pPr>
-            <a:r>
-              <a:rPr sz="1500" b="0">
+            <a:pPr algn="ctr">
+              <a:lnSpc>
+                <a:spcPct val="115000"/>
+              </a:lnSpc>
+            </a:pPr>
+            <a:r>
+              <a:rPr sz="1300" b="1">
                 <a:solidFill>
                   <a:srgbClr val="FFFFFF"/>
                 </a:solidFill>
                 <a:latin typeface="Yu Gothic UI"/>
               </a:rPr>
-              <a:t>授業料等減免</a:t>
-            </a:r>
-          </a:p>
-        </p:txBody>
-      </p:sp>
-      <p:sp>
-        <p:nvSpPr>
-          <p:cNvPr id="12" name="Rounded Rectangle 11"/>
-          <p:cNvSpPr/>
-          <p:nvPr/>
-        </p:nvSpPr>
-        <p:spPr>
-          <a:xfrm>
-            <a:off x="8412480" y="4992624"/>
-            <a:ext cx="155448" cy="155448"/>
-          </a:xfrm>
-          <a:prstGeom prst="roundRect">
-            <a:avLst/>
-          </a:prstGeom>
-          <a:solidFill>
-            <a:srgbClr val="8EC5E8"/>
-          </a:solidFill>
-          <a:ln>
-            <a:noFill/>
-          </a:ln>
-          <a:effectLst/>
-        </p:spPr>
-        <p:style>
-          <a:lnRef idx="1">
-            <a:schemeClr val="accent1"/>
-          </a:lnRef>
-          <a:fillRef idx="3">
-            <a:schemeClr val="accent1"/>
-          </a:fillRef>
-          <a:effectRef idx="2">
-            <a:schemeClr val="accent1"/>
-          </a:effectRef>
-          <a:fontRef idx="minor">
-            <a:schemeClr val="lt1"/>
-          </a:fontRef>
-        </p:style>
-        <p:txBody>
-          <a:bodyPr rtlCol="0" anchor="ctr"/>
-          <a:lstStyle/>
-          <a:p>
-            <a:pPr algn="ctr"/>
-          </a:p>
-        </p:txBody>
-      </p:sp>
-      <p:sp>
-        <p:nvSpPr>
-          <p:cNvPr id="13" name="TextBox 12"/>
+              <a:t>高等教育の修学支援新制度</a:t>
+            </a:r>
+          </a:p>
+        </p:txBody>
+      </p:sp>
+      <p:sp>
+        <p:nvSpPr>
+          <p:cNvPr id="11" name="TextBox 10"/>
           <p:cNvSpPr txBox="1"/>
           <p:nvPr/>
         </p:nvSpPr>
         <p:spPr>
           <a:xfrm>
-            <a:off x="8668512" y="4956048"/>
-            <a:ext cx="2103120" cy="274320"/>
+            <a:off x="6581430" y="2201976"/>
+            <a:ext cx="1554480" cy="284480"/>
           </a:xfrm>
           <a:prstGeom prst="rect">
             <a:avLst/>
@@ -5594,19 +5692,113 @@
           </a:bodyPr>
           <a:lstStyle/>
           <a:p>
-            <a:pPr algn="l">
-              <a:lnSpc>
-                <a:spcPct val="125000"/>
-              </a:lnSpc>
-            </a:pPr>
-            <a:r>
-              <a:rPr sz="1500" b="0">
+            <a:pPr algn="ctr">
+              <a:lnSpc>
+                <a:spcPct val="115000"/>
+              </a:lnSpc>
+            </a:pPr>
+            <a:r>
+              <a:rPr sz="1400" b="1">
+                <a:solidFill>
+                  <a:srgbClr val="014172"/>
+                </a:solidFill>
+                <a:latin typeface="Yu Gothic UI"/>
+              </a:rPr>
+              <a:t>授業料等減免</a:t>
+            </a:r>
+          </a:p>
+        </p:txBody>
+      </p:sp>
+      <p:sp>
+        <p:nvSpPr>
+          <p:cNvPr id="12" name="TextBox 11"/>
+          <p:cNvSpPr txBox="1"/>
+          <p:nvPr/>
+        </p:nvSpPr>
+        <p:spPr>
+          <a:xfrm>
+            <a:off x="8734769" y="1868424"/>
+            <a:ext cx="1554480" cy="284480"/>
+          </a:xfrm>
+          <a:prstGeom prst="rect">
+            <a:avLst/>
+          </a:prstGeom>
+          <a:noFill/>
+        </p:spPr>
+        <p:txBody>
+          <a:bodyPr wrap="square" lIns="0" rIns="0" tIns="0" bIns="0">
+            <a:spAutoFit/>
+          </a:bodyPr>
+          <a:lstStyle/>
+          <a:p>
+            <a:pPr algn="ctr">
+              <a:lnSpc>
+                <a:spcPct val="115000"/>
+              </a:lnSpc>
+            </a:pPr>
+            <a:r>
+              <a:rPr sz="1400" b="1">
+                <a:solidFill>
+                  <a:srgbClr val="014172"/>
+                </a:solidFill>
+                <a:latin typeface="Yu Gothic UI"/>
+              </a:rPr>
+              <a:t>給付型奨学金</a:t>
+            </a:r>
+          </a:p>
+        </p:txBody>
+      </p:sp>
+      <p:sp>
+        <p:nvSpPr>
+          <p:cNvPr id="13" name="TextBox 12"/>
+          <p:cNvSpPr txBox="1"/>
+          <p:nvPr/>
+        </p:nvSpPr>
+        <p:spPr>
+          <a:xfrm>
+            <a:off x="6581430" y="4497182"/>
+            <a:ext cx="1554480" cy="203200"/>
+          </a:xfrm>
+          <a:prstGeom prst="rect">
+            <a:avLst/>
+          </a:prstGeom>
+          <a:noFill/>
+        </p:spPr>
+        <p:txBody>
+          <a:bodyPr wrap="square" lIns="0" rIns="0" tIns="0" bIns="0">
+            <a:spAutoFit/>
+          </a:bodyPr>
+          <a:lstStyle/>
+          <a:p>
+            <a:pPr algn="ctr">
+              <a:lnSpc>
+                <a:spcPct val="115000"/>
+              </a:lnSpc>
+            </a:pPr>
+            <a:r>
+              <a:rPr sz="1000" b="1">
                 <a:solidFill>
                   <a:srgbClr val="FFFFFF"/>
                 </a:solidFill>
                 <a:latin typeface="Yu Gothic UI"/>
               </a:rPr>
-              <a:t>給付型奨学金</a:t>
+              <a:t>多子世帯は</a:t>
+            </a:r>
+          </a:p>
+          <a:p>
+            <a:pPr algn="ctr">
+              <a:lnSpc>
+                <a:spcPct val="115000"/>
+              </a:lnSpc>
+            </a:pPr>
+            <a:r>
+              <a:rPr sz="1000" b="1">
+                <a:solidFill>
+                  <a:srgbClr val="FFFFFF"/>
+                </a:solidFill>
+                <a:latin typeface="Yu Gothic UI"/>
+              </a:rPr>
+              <a:t>所得制限なし</a:t>
             </a:r>
           </a:p>
         </p:txBody>
@@ -5614,6 +5806,61 @@
       <p:sp>
         <p:nvSpPr>
           <p:cNvPr id="14" name="TextBox 13"/>
+          <p:cNvSpPr txBox="1"/>
+          <p:nvPr/>
+        </p:nvSpPr>
+        <p:spPr>
+          <a:xfrm>
+            <a:off x="8734769" y="4497182"/>
+            <a:ext cx="1554480" cy="203200"/>
+          </a:xfrm>
+          <a:prstGeom prst="rect">
+            <a:avLst/>
+          </a:prstGeom>
+          <a:noFill/>
+        </p:spPr>
+        <p:txBody>
+          <a:bodyPr wrap="square" lIns="0" rIns="0" tIns="0" bIns="0">
+            <a:spAutoFit/>
+          </a:bodyPr>
+          <a:lstStyle/>
+          <a:p>
+            <a:pPr algn="ctr">
+              <a:lnSpc>
+                <a:spcPct val="115000"/>
+              </a:lnSpc>
+            </a:pPr>
+            <a:r>
+              <a:rPr sz="1000" b="1">
+                <a:solidFill>
+                  <a:srgbClr val="8EC5E8"/>
+                </a:solidFill>
+                <a:latin typeface="Yu Gothic UI"/>
+              </a:rPr>
+              <a:t>収入の基準が</a:t>
+            </a:r>
+          </a:p>
+          <a:p>
+            <a:pPr algn="ctr">
+              <a:lnSpc>
+                <a:spcPct val="115000"/>
+              </a:lnSpc>
+            </a:pPr>
+            <a:r>
+              <a:rPr sz="1000" b="1">
+                <a:solidFill>
+                  <a:srgbClr val="8EC5E8"/>
+                </a:solidFill>
+                <a:latin typeface="Yu Gothic UI"/>
+              </a:rPr>
+              <a:t>残っている</a:t>
+            </a:r>
+          </a:p>
+        </p:txBody>
+      </p:sp>
+      <p:sp>
+        <p:nvSpPr>
+          <p:cNvPr id="15" name="TextBox 14"/>
           <p:cNvSpPr txBox="1"/>
           <p:nvPr/>
         </p:nvSpPr>
@@ -6012,58 +6259,14 @@
       </p:pic>
       <p:sp>
         <p:nvSpPr>
-          <p:cNvPr id="10" name="Rounded Rectangle 9"/>
-          <p:cNvSpPr/>
-          <p:nvPr/>
-        </p:nvSpPr>
-        <p:spPr>
-          <a:xfrm>
-            <a:off x="6172200" y="4992624"/>
-            <a:ext cx="155448" cy="155448"/>
-          </a:xfrm>
-          <a:prstGeom prst="roundRect">
-            <a:avLst/>
-          </a:prstGeom>
-          <a:solidFill>
-            <a:srgbClr val="FFFFFF"/>
-          </a:solidFill>
-          <a:ln>
-            <a:noFill/>
-          </a:ln>
-          <a:effectLst/>
-        </p:spPr>
-        <p:style>
-          <a:lnRef idx="1">
-            <a:schemeClr val="accent1"/>
-          </a:lnRef>
-          <a:fillRef idx="3">
-            <a:schemeClr val="accent1"/>
-          </a:fillRef>
-          <a:effectRef idx="2">
-            <a:schemeClr val="accent1"/>
-          </a:effectRef>
-          <a:fontRef idx="minor">
-            <a:schemeClr val="lt1"/>
-          </a:fontRef>
-        </p:style>
-        <p:txBody>
-          <a:bodyPr rtlCol="0" anchor="ctr"/>
-          <a:lstStyle/>
-          <a:p>
-            <a:pPr algn="ctr"/>
-          </a:p>
-        </p:txBody>
-      </p:sp>
-      <p:sp>
-        <p:nvSpPr>
-          <p:cNvPr id="11" name="TextBox 10"/>
+          <p:cNvPr id="10" name="TextBox 9"/>
           <p:cNvSpPr txBox="1"/>
           <p:nvPr/>
         </p:nvSpPr>
         <p:spPr>
           <a:xfrm>
-            <a:off x="6428232" y="4956048"/>
-            <a:ext cx="2103120" cy="274320"/>
+            <a:off x="6472562" y="1619869"/>
+            <a:ext cx="1737360" cy="243840"/>
           </a:xfrm>
           <a:prstGeom prst="rect">
             <a:avLst/>
@@ -6078,75 +6281,31 @@
           <a:p>
             <a:pPr algn="l">
               <a:lnSpc>
-                <a:spcPct val="125000"/>
-              </a:lnSpc>
-            </a:pPr>
-            <a:r>
-              <a:rPr sz="1500" b="0">
-                <a:solidFill>
-                  <a:srgbClr val="FFFFFF"/>
-                </a:solidFill>
-                <a:latin typeface="Yu Gothic UI"/>
-              </a:rPr>
-              <a:t>実際に払う自己負担</a:t>
-            </a:r>
-          </a:p>
-        </p:txBody>
-      </p:sp>
-      <p:sp>
-        <p:nvSpPr>
-          <p:cNvPr id="12" name="Rounded Rectangle 11"/>
-          <p:cNvSpPr/>
-          <p:nvPr/>
-        </p:nvSpPr>
-        <p:spPr>
-          <a:xfrm>
-            <a:off x="8412480" y="4992624"/>
-            <a:ext cx="155448" cy="155448"/>
-          </a:xfrm>
-          <a:prstGeom prst="roundRect">
-            <a:avLst/>
-          </a:prstGeom>
-          <a:solidFill>
-            <a:srgbClr val="8EC5E8"/>
-          </a:solidFill>
-          <a:ln>
-            <a:noFill/>
-          </a:ln>
-          <a:effectLst/>
-        </p:spPr>
-        <p:style>
-          <a:lnRef idx="1">
-            <a:schemeClr val="accent1"/>
-          </a:lnRef>
-          <a:fillRef idx="3">
-            <a:schemeClr val="accent1"/>
-          </a:fillRef>
-          <a:effectRef idx="2">
-            <a:schemeClr val="accent1"/>
-          </a:effectRef>
-          <a:fontRef idx="minor">
-            <a:schemeClr val="lt1"/>
-          </a:fontRef>
-        </p:style>
-        <p:txBody>
-          <a:bodyPr rtlCol="0" anchor="ctr"/>
-          <a:lstStyle/>
-          <a:p>
-            <a:pPr algn="ctr"/>
-          </a:p>
-        </p:txBody>
-      </p:sp>
-      <p:sp>
-        <p:nvSpPr>
-          <p:cNvPr id="13" name="TextBox 12"/>
+                <a:spcPct val="115000"/>
+              </a:lnSpc>
+            </a:pPr>
+            <a:r>
+              <a:rPr sz="1200" b="1">
+                <a:solidFill>
+                  <a:srgbClr val="E7CD7A"/>
+                </a:solidFill>
+                <a:latin typeface="Yu Gothic UI"/>
+              </a:rPr>
+              <a:t>年間上限</a:t>
+            </a:r>
+          </a:p>
+        </p:txBody>
+      </p:sp>
+      <p:sp>
+        <p:nvSpPr>
+          <p:cNvPr id="11" name="TextBox 10"/>
           <p:cNvSpPr txBox="1"/>
           <p:nvPr/>
         </p:nvSpPr>
         <p:spPr>
           <a:xfrm>
-            <a:off x="8668512" y="4956048"/>
-            <a:ext cx="2103120" cy="274320"/>
+            <a:off x="7520940" y="3831234"/>
+            <a:ext cx="1828800" cy="264160"/>
           </a:xfrm>
           <a:prstGeom prst="rect">
             <a:avLst/>
@@ -6159,33 +6318,33 @@
           </a:bodyPr>
           <a:lstStyle/>
           <a:p>
-            <a:pPr algn="l">
-              <a:lnSpc>
-                <a:spcPct val="125000"/>
-              </a:lnSpc>
-            </a:pPr>
-            <a:r>
-              <a:rPr sz="1500" b="0">
-                <a:solidFill>
-                  <a:srgbClr val="FFFFFF"/>
-                </a:solidFill>
-                <a:latin typeface="Yu Gothic UI"/>
-              </a:rPr>
-              <a:t>払わずに済む分</a:t>
-            </a:r>
-          </a:p>
-        </p:txBody>
-      </p:sp>
-      <p:sp>
-        <p:nvSpPr>
-          <p:cNvPr id="14" name="TextBox 13"/>
+            <a:pPr algn="ctr">
+              <a:lnSpc>
+                <a:spcPct val="115000"/>
+              </a:lnSpc>
+            </a:pPr>
+            <a:r>
+              <a:rPr sz="1300" b="1">
+                <a:solidFill>
+                  <a:srgbClr val="014172"/>
+                </a:solidFill>
+                <a:latin typeface="Yu Gothic UI"/>
+              </a:rPr>
+              <a:t>実際に払う自己負担</a:t>
+            </a:r>
+          </a:p>
+        </p:txBody>
+      </p:sp>
+      <p:sp>
+        <p:nvSpPr>
+          <p:cNvPr id="12" name="TextBox 11"/>
           <p:cNvSpPr txBox="1"/>
           <p:nvPr/>
         </p:nvSpPr>
         <p:spPr>
           <a:xfrm>
-            <a:off x="6053328" y="5376672"/>
-            <a:ext cx="4764024" cy="274320"/>
+            <a:off x="8866241" y="1057208"/>
+            <a:ext cx="1463040" cy="223520"/>
           </a:xfrm>
           <a:prstGeom prst="rect">
             <a:avLst/>
@@ -6198,6 +6357,123 @@
           </a:bodyPr>
           <a:lstStyle/>
           <a:p>
+            <a:pPr algn="ctr">
+              <a:lnSpc>
+                <a:spcPct val="115000"/>
+              </a:lnSpc>
+            </a:pPr>
+            <a:r>
+              <a:rPr sz="1100" b="1">
+                <a:solidFill>
+                  <a:srgbClr val="FFFFFF"/>
+                </a:solidFill>
+                <a:latin typeface="Yu Gothic UI"/>
+              </a:rPr>
+              <a:t>払わずに済む分</a:t>
+            </a:r>
+          </a:p>
+        </p:txBody>
+      </p:sp>
+      <p:sp>
+        <p:nvSpPr>
+          <p:cNvPr id="13" name="TextBox 12"/>
+          <p:cNvSpPr txBox="1"/>
+          <p:nvPr/>
+        </p:nvSpPr>
+        <p:spPr>
+          <a:xfrm>
+            <a:off x="6259250" y="4573423"/>
+            <a:ext cx="731520" cy="203200"/>
+          </a:xfrm>
+          <a:prstGeom prst="rect">
+            <a:avLst/>
+          </a:prstGeom>
+          <a:noFill/>
+        </p:spPr>
+        <p:txBody>
+          <a:bodyPr wrap="square" lIns="0" rIns="0" tIns="0" bIns="0">
+            <a:spAutoFit/>
+          </a:bodyPr>
+          <a:lstStyle/>
+          <a:p>
+            <a:pPr algn="ctr">
+              <a:lnSpc>
+                <a:spcPct val="115000"/>
+              </a:lnSpc>
+            </a:pPr>
+            <a:r>
+              <a:rPr sz="1000" b="1">
+                <a:solidFill>
+                  <a:srgbClr val="FFFFFF"/>
+                </a:solidFill>
+                <a:latin typeface="Yu Gothic UI"/>
+              </a:rPr>
+              <a:t>8月</a:t>
+            </a:r>
+          </a:p>
+        </p:txBody>
+      </p:sp>
+      <p:sp>
+        <p:nvSpPr>
+          <p:cNvPr id="14" name="TextBox 13"/>
+          <p:cNvSpPr txBox="1"/>
+          <p:nvPr/>
+        </p:nvSpPr>
+        <p:spPr>
+          <a:xfrm>
+            <a:off x="9757964" y="4573423"/>
+            <a:ext cx="822960" cy="203200"/>
+          </a:xfrm>
+          <a:prstGeom prst="rect">
+            <a:avLst/>
+          </a:prstGeom>
+          <a:noFill/>
+        </p:spPr>
+        <p:txBody>
+          <a:bodyPr wrap="square" lIns="0" rIns="0" tIns="0" bIns="0">
+            <a:spAutoFit/>
+          </a:bodyPr>
+          <a:lstStyle/>
+          <a:p>
+            <a:pPr algn="ctr">
+              <a:lnSpc>
+                <a:spcPct val="115000"/>
+              </a:lnSpc>
+            </a:pPr>
+            <a:r>
+              <a:rPr sz="1000" b="1">
+                <a:solidFill>
+                  <a:srgbClr val="FFFFFF"/>
+                </a:solidFill>
+                <a:latin typeface="Yu Gothic UI"/>
+              </a:rPr>
+              <a:t>翌年7月</a:t>
+            </a:r>
+          </a:p>
+        </p:txBody>
+      </p:sp>
+      <p:sp>
+        <p:nvSpPr>
+          <p:cNvPr id="15" name="TextBox 14"/>
+          <p:cNvSpPr txBox="1"/>
+          <p:nvPr/>
+        </p:nvSpPr>
+        <p:spPr>
+          <a:xfrm>
+            <a:off x="6053328" y="5376672"/>
+            <a:ext cx="4764024" cy="274320"/>
+          </a:xfrm>
+          <a:prstGeom prst="rect">
+            <a:avLst/>
+          </a:prstGeom>
+          <a:noFill/>
+        </p:spPr>
+        <p:txBody>
+          <a:bodyPr wrap="square" lIns="0" rIns="0" tIns="0" bIns="0">
+            <a:spAutoFit/>
+          </a:bodyPr>
+          <a:lstStyle/>
+          <a:p>
             <a:pPr algn="l">
               <a:lnSpc>
                 <a:spcPct val="125000"/>
@@ -6210,23 +6486,7 @@
                 </a:solidFill>
                 <a:latin typeface="Yu Gothic UI"/>
               </a:rPr>
-              <a:t>横＝8月から翌年7月の12か月　縦＝自己負担の積み上がり</a:t>
-            </a:r>
-          </a:p>
-          <a:p>
-            <a:pPr algn="l">
-              <a:lnSpc>
-                <a:spcPct val="125000"/>
-              </a:lnSpc>
-            </a:pPr>
-            <a:r>
-              <a:rPr sz="1300" b="0">
-                <a:solidFill>
-                  <a:srgbClr val="8EC5E8"/>
-                </a:solidFill>
-                <a:latin typeface="Yu Gothic UI"/>
-              </a:rPr>
-              <a:t>破線＝年間上限。ここから先は払わなくてよい</a:t>
+              <a:t>1段＝1か月ぶんの自己負担。破線から先は払わなくてよい</a:t>
             </a:r>
           </a:p>
         </p:txBody>
@@ -6593,58 +6853,14 @@
       </p:pic>
       <p:sp>
         <p:nvSpPr>
-          <p:cNvPr id="10" name="Rounded Rectangle 9"/>
-          <p:cNvSpPr/>
-          <p:nvPr/>
-        </p:nvSpPr>
-        <p:spPr>
-          <a:xfrm>
-            <a:off x="6172200" y="4992624"/>
-            <a:ext cx="155448" cy="155448"/>
-          </a:xfrm>
-          <a:prstGeom prst="roundRect">
-            <a:avLst/>
-          </a:prstGeom>
-          <a:solidFill>
-            <a:srgbClr val="FFFFFF"/>
-          </a:solidFill>
-          <a:ln>
-            <a:noFill/>
-          </a:ln>
-          <a:effectLst/>
-        </p:spPr>
-        <p:style>
-          <a:lnRef idx="1">
-            <a:schemeClr val="accent1"/>
-          </a:lnRef>
-          <a:fillRef idx="3">
-            <a:schemeClr val="accent1"/>
-          </a:fillRef>
-          <a:effectRef idx="2">
-            <a:schemeClr val="accent1"/>
-          </a:effectRef>
-          <a:fontRef idx="minor">
-            <a:schemeClr val="lt1"/>
-          </a:fontRef>
-        </p:style>
-        <p:txBody>
-          <a:bodyPr rtlCol="0" anchor="ctr"/>
-          <a:lstStyle/>
-          <a:p>
-            <a:pPr algn="ctr"/>
-          </a:p>
-        </p:txBody>
-      </p:sp>
-      <p:sp>
-        <p:nvSpPr>
-          <p:cNvPr id="11" name="TextBox 10"/>
+          <p:cNvPr id="10" name="TextBox 9"/>
           <p:cNvSpPr txBox="1"/>
           <p:nvPr/>
         </p:nvSpPr>
         <p:spPr>
           <a:xfrm>
-            <a:off x="6428232" y="4956048"/>
-            <a:ext cx="2103120" cy="274320"/>
+            <a:off x="8088782" y="1372859"/>
+            <a:ext cx="1645920" cy="284480"/>
           </a:xfrm>
           <a:prstGeom prst="rect">
             <a:avLst/>
@@ -6657,77 +6873,33 @@
           </a:bodyPr>
           <a:lstStyle/>
           <a:p>
-            <a:pPr algn="l">
-              <a:lnSpc>
-                <a:spcPct val="125000"/>
-              </a:lnSpc>
-            </a:pPr>
-            <a:r>
-              <a:rPr sz="1500" b="0">
-                <a:solidFill>
-                  <a:srgbClr val="FFFFFF"/>
-                </a:solidFill>
-                <a:latin typeface="Yu Gothic UI"/>
-              </a:rPr>
-              <a:t>加算の対象になる子</a:t>
-            </a:r>
-          </a:p>
-        </p:txBody>
-      </p:sp>
-      <p:sp>
-        <p:nvSpPr>
-          <p:cNvPr id="12" name="Rounded Rectangle 11"/>
-          <p:cNvSpPr/>
-          <p:nvPr/>
-        </p:nvSpPr>
-        <p:spPr>
-          <a:xfrm>
-            <a:off x="8412480" y="4992624"/>
-            <a:ext cx="155448" cy="155448"/>
-          </a:xfrm>
-          <a:prstGeom prst="roundRect">
-            <a:avLst/>
-          </a:prstGeom>
-          <a:solidFill>
-            <a:srgbClr val="8EC5E8"/>
-          </a:solidFill>
-          <a:ln>
-            <a:noFill/>
-          </a:ln>
-          <a:effectLst/>
-        </p:spPr>
-        <p:style>
-          <a:lnRef idx="1">
-            <a:schemeClr val="accent1"/>
-          </a:lnRef>
-          <a:fillRef idx="3">
-            <a:schemeClr val="accent1"/>
-          </a:fillRef>
-          <a:effectRef idx="2">
-            <a:schemeClr val="accent1"/>
-          </a:effectRef>
-          <a:fontRef idx="minor">
-            <a:schemeClr val="lt1"/>
-          </a:fontRef>
-        </p:style>
-        <p:txBody>
-          <a:bodyPr rtlCol="0" anchor="ctr"/>
-          <a:lstStyle/>
-          <a:p>
-            <a:pPr algn="ctr"/>
-          </a:p>
-        </p:txBody>
-      </p:sp>
-      <p:sp>
-        <p:nvSpPr>
-          <p:cNvPr id="13" name="TextBox 12"/>
+            <a:pPr algn="ctr">
+              <a:lnSpc>
+                <a:spcPct val="115000"/>
+              </a:lnSpc>
+            </a:pPr>
+            <a:r>
+              <a:rPr sz="1400" b="1">
+                <a:solidFill>
+                  <a:srgbClr val="8EC5E8"/>
+                </a:solidFill>
+                <a:latin typeface="Yu Gothic UI"/>
+              </a:rPr>
+              <a:t>1人目</a:t>
+            </a:r>
+          </a:p>
+        </p:txBody>
+      </p:sp>
+      <p:sp>
+        <p:nvSpPr>
+          <p:cNvPr id="11" name="TextBox 10"/>
           <p:cNvSpPr txBox="1"/>
           <p:nvPr/>
         </p:nvSpPr>
         <p:spPr>
           <a:xfrm>
-            <a:off x="8668512" y="4956048"/>
-            <a:ext cx="2103120" cy="274320"/>
+            <a:off x="8088782" y="2516469"/>
+            <a:ext cx="1645920" cy="284480"/>
           </a:xfrm>
           <a:prstGeom prst="rect">
             <a:avLst/>
@@ -6740,33 +6912,33 @@
           </a:bodyPr>
           <a:lstStyle/>
           <a:p>
-            <a:pPr algn="l">
-              <a:lnSpc>
-                <a:spcPct val="125000"/>
-              </a:lnSpc>
-            </a:pPr>
-            <a:r>
-              <a:rPr sz="1500" b="0">
-                <a:solidFill>
-                  <a:srgbClr val="FFFFFF"/>
-                </a:solidFill>
-                <a:latin typeface="Yu Gothic UI"/>
-              </a:rPr>
-              <a:t>数に入る上の子</a:t>
-            </a:r>
-          </a:p>
-        </p:txBody>
-      </p:sp>
-      <p:sp>
-        <p:nvSpPr>
-          <p:cNvPr id="14" name="TextBox 13"/>
+            <a:pPr algn="ctr">
+              <a:lnSpc>
+                <a:spcPct val="115000"/>
+              </a:lnSpc>
+            </a:pPr>
+            <a:r>
+              <a:rPr sz="1400" b="1">
+                <a:solidFill>
+                  <a:srgbClr val="8EC5E8"/>
+                </a:solidFill>
+                <a:latin typeface="Yu Gothic UI"/>
+              </a:rPr>
+              <a:t>2人目</a:t>
+            </a:r>
+          </a:p>
+        </p:txBody>
+      </p:sp>
+      <p:sp>
+        <p:nvSpPr>
+          <p:cNvPr id="12" name="TextBox 11"/>
           <p:cNvSpPr txBox="1"/>
           <p:nvPr/>
         </p:nvSpPr>
         <p:spPr>
           <a:xfrm>
-            <a:off x="6053328" y="5376672"/>
-            <a:ext cx="4764024" cy="274320"/>
+            <a:off x="8043062" y="3669223"/>
+            <a:ext cx="1737360" cy="264160"/>
           </a:xfrm>
           <a:prstGeom prst="rect">
             <a:avLst/>
@@ -6779,6 +6951,45 @@
           </a:bodyPr>
           <a:lstStyle/>
           <a:p>
+            <a:pPr algn="ctr">
+              <a:lnSpc>
+                <a:spcPct val="115000"/>
+              </a:lnSpc>
+            </a:pPr>
+            <a:r>
+              <a:rPr sz="1300" b="1">
+                <a:solidFill>
+                  <a:srgbClr val="014172"/>
+                </a:solidFill>
+                <a:latin typeface="Yu Gothic UI"/>
+              </a:rPr>
+              <a:t>3人目＝加算の対象</a:t>
+            </a:r>
+          </a:p>
+        </p:txBody>
+      </p:sp>
+      <p:sp>
+        <p:nvSpPr>
+          <p:cNvPr id="13" name="TextBox 12"/>
+          <p:cNvSpPr txBox="1"/>
+          <p:nvPr/>
+        </p:nvSpPr>
+        <p:spPr>
+          <a:xfrm>
+            <a:off x="6053328" y="5376672"/>
+            <a:ext cx="4764024" cy="274320"/>
+          </a:xfrm>
+          <a:prstGeom prst="rect">
+            <a:avLst/>
+          </a:prstGeom>
+          <a:noFill/>
+        </p:spPr>
+        <p:txBody>
+          <a:bodyPr wrap="square" lIns="0" rIns="0" tIns="0" bIns="0">
+            <a:spAutoFit/>
+          </a:bodyPr>
+          <a:lstStyle/>
+          <a:p>
             <a:pPr algn="l">
               <a:lnSpc>
                 <a:spcPct val="125000"/>
@@ -6791,7 +7002,7 @@
                 </a:solidFill>
                 <a:latin typeface="Yu Gothic UI"/>
               </a:rPr>
-              <a:t>上の子から順に数える（左の点＝数える順番）</a:t>
+              <a:t>点線＝経済的負担と確認書があれば数に入る上の子</a:t>
             </a:r>
           </a:p>
           <a:p>
@@ -6807,7 +7018,7 @@
                 </a:solidFill>
                 <a:latin typeface="Yu Gothic UI"/>
               </a:rPr>
-              <a:t>上の子を数に入れるには経済的負担と確認書が要る</a:t>
+              <a:t>左の点＝数える順番（上の子から数える）</a:t>
             </a:r>
           </a:p>
         </p:txBody>
@@ -7174,58 +7385,14 @@
       </p:pic>
       <p:sp>
         <p:nvSpPr>
-          <p:cNvPr id="10" name="Rounded Rectangle 9"/>
-          <p:cNvSpPr/>
-          <p:nvPr/>
-        </p:nvSpPr>
-        <p:spPr>
-          <a:xfrm>
-            <a:off x="6172200" y="4992624"/>
-            <a:ext cx="155448" cy="155448"/>
-          </a:xfrm>
-          <a:prstGeom prst="roundRect">
-            <a:avLst/>
-          </a:prstGeom>
-          <a:solidFill>
-            <a:srgbClr val="FFFFFF"/>
-          </a:solidFill>
-          <a:ln>
-            <a:noFill/>
-          </a:ln>
-          <a:effectLst/>
-        </p:spPr>
-        <p:style>
-          <a:lnRef idx="1">
-            <a:schemeClr val="accent1"/>
-          </a:lnRef>
-          <a:fillRef idx="3">
-            <a:schemeClr val="accent1"/>
-          </a:fillRef>
-          <a:effectRef idx="2">
-            <a:schemeClr val="accent1"/>
-          </a:effectRef>
-          <a:fontRef idx="minor">
-            <a:schemeClr val="lt1"/>
-          </a:fontRef>
-        </p:style>
-        <p:txBody>
-          <a:bodyPr rtlCol="0" anchor="ctr"/>
-          <a:lstStyle/>
-          <a:p>
-            <a:pPr algn="ctr"/>
-          </a:p>
-        </p:txBody>
-      </p:sp>
-      <p:sp>
-        <p:nvSpPr>
-          <p:cNvPr id="11" name="TextBox 10"/>
+          <p:cNvPr id="10" name="TextBox 9"/>
           <p:cNvSpPr txBox="1"/>
           <p:nvPr/>
         </p:nvSpPr>
         <p:spPr>
           <a:xfrm>
-            <a:off x="6428232" y="4956048"/>
-            <a:ext cx="2103120" cy="274320"/>
+            <a:off x="9026078" y="1886712"/>
+            <a:ext cx="1645920" cy="243840"/>
           </a:xfrm>
           <a:prstGeom prst="rect">
             <a:avLst/>
@@ -7240,11 +7407,11 @@
           <a:p>
             <a:pPr algn="l">
               <a:lnSpc>
-                <a:spcPct val="125000"/>
-              </a:lnSpc>
-            </a:pPr>
-            <a:r>
-              <a:rPr sz="1500" b="0">
+                <a:spcPct val="115000"/>
+              </a:lnSpc>
+            </a:pPr>
+            <a:r>
+              <a:rPr sz="1200" b="1">
                 <a:solidFill>
                   <a:srgbClr val="FFFFFF"/>
                 </a:solidFill>
@@ -7253,62 +7420,34 @@
               <a:t>控除の対象</a:t>
             </a:r>
           </a:p>
-        </p:txBody>
-      </p:sp>
-      <p:sp>
-        <p:nvSpPr>
-          <p:cNvPr id="12" name="Rounded Rectangle 11"/>
-          <p:cNvSpPr/>
-          <p:nvPr/>
-        </p:nvSpPr>
-        <p:spPr>
-          <a:xfrm>
-            <a:off x="8412480" y="4992624"/>
-            <a:ext cx="155448" cy="155448"/>
-          </a:xfrm>
-          <a:prstGeom prst="roundRect">
-            <a:avLst/>
-          </a:prstGeom>
-          <a:solidFill>
-            <a:srgbClr val="8EC5E8"/>
-          </a:solidFill>
-          <a:ln>
-            <a:noFill/>
-          </a:ln>
-          <a:effectLst/>
-        </p:spPr>
-        <p:style>
-          <a:lnRef idx="1">
-            <a:schemeClr val="accent1"/>
-          </a:lnRef>
-          <a:fillRef idx="3">
-            <a:schemeClr val="accent1"/>
-          </a:fillRef>
-          <a:effectRef idx="2">
-            <a:schemeClr val="accent1"/>
-          </a:effectRef>
-          <a:fontRef idx="minor">
-            <a:schemeClr val="lt1"/>
-          </a:fontRef>
-        </p:style>
-        <p:txBody>
-          <a:bodyPr rtlCol="0" anchor="ctr"/>
-          <a:lstStyle/>
-          <a:p>
-            <a:pPr algn="ctr"/>
-          </a:p>
-        </p:txBody>
-      </p:sp>
-      <p:sp>
-        <p:nvSpPr>
-          <p:cNvPr id="13" name="TextBox 12"/>
+          <a:p>
+            <a:pPr algn="l">
+              <a:lnSpc>
+                <a:spcPct val="115000"/>
+              </a:lnSpc>
+            </a:pPr>
+            <a:r>
+              <a:rPr sz="1200" b="1">
+                <a:solidFill>
+                  <a:srgbClr val="FFFFFF"/>
+                </a:solidFill>
+                <a:latin typeface="Yu Gothic UI"/>
+              </a:rPr>
+              <a:t>になる分</a:t>
+            </a:r>
+          </a:p>
+        </p:txBody>
+      </p:sp>
+      <p:sp>
+        <p:nvSpPr>
+          <p:cNvPr id="11" name="TextBox 10"/>
           <p:cNvSpPr txBox="1"/>
           <p:nvPr/>
         </p:nvSpPr>
         <p:spPr>
           <a:xfrm>
-            <a:off x="8668512" y="4956048"/>
-            <a:ext cx="2103120" cy="274320"/>
+            <a:off x="9083247" y="2838948"/>
+            <a:ext cx="1645920" cy="203200"/>
           </a:xfrm>
           <a:prstGeom prst="rect">
             <a:avLst/>
@@ -7323,31 +7462,31 @@
           <a:p>
             <a:pPr algn="l">
               <a:lnSpc>
-                <a:spcPct val="125000"/>
-              </a:lnSpc>
-            </a:pPr>
-            <a:r>
-              <a:rPr sz="1500" b="0">
-                <a:solidFill>
-                  <a:srgbClr val="FFFFFF"/>
-                </a:solidFill>
-                <a:latin typeface="Yu Gothic UI"/>
-              </a:rPr>
-              <a:t>差し引かれる分</a:t>
-            </a:r>
-          </a:p>
-        </p:txBody>
-      </p:sp>
-      <p:sp>
-        <p:nvSpPr>
-          <p:cNvPr id="14" name="TextBox 13"/>
+                <a:spcPct val="115000"/>
+              </a:lnSpc>
+            </a:pPr>
+            <a:r>
+              <a:rPr sz="1000" b="1">
+                <a:solidFill>
+                  <a:srgbClr val="E7CD7A"/>
+                </a:solidFill>
+                <a:latin typeface="Yu Gothic UI"/>
+              </a:rPr>
+              <a:t>ここまでが引かれる</a:t>
+            </a:r>
+          </a:p>
+        </p:txBody>
+      </p:sp>
+      <p:sp>
+        <p:nvSpPr>
+          <p:cNvPr id="12" name="TextBox 11"/>
           <p:cNvSpPr txBox="1"/>
           <p:nvPr/>
         </p:nvSpPr>
         <p:spPr>
           <a:xfrm>
-            <a:off x="6053328" y="5376672"/>
-            <a:ext cx="4764024" cy="274320"/>
+            <a:off x="9026078" y="3182416"/>
+            <a:ext cx="1645920" cy="223520"/>
           </a:xfrm>
           <a:prstGeom prst="rect">
             <a:avLst/>
@@ -7362,6 +7501,100 @@
           <a:p>
             <a:pPr algn="l">
               <a:lnSpc>
+                <a:spcPct val="115000"/>
+              </a:lnSpc>
+            </a:pPr>
+            <a:r>
+              <a:rPr sz="1100" b="1">
+                <a:solidFill>
+                  <a:srgbClr val="8EC5E8"/>
+                </a:solidFill>
+                <a:latin typeface="Yu Gothic UI"/>
+              </a:rPr>
+              <a:t>適用下限額</a:t>
+            </a:r>
+          </a:p>
+        </p:txBody>
+      </p:sp>
+      <p:sp>
+        <p:nvSpPr>
+          <p:cNvPr id="13" name="TextBox 12"/>
+          <p:cNvSpPr txBox="1"/>
+          <p:nvPr/>
+        </p:nvSpPr>
+        <p:spPr>
+          <a:xfrm>
+            <a:off x="9026078" y="3925377"/>
+            <a:ext cx="1645920" cy="203200"/>
+          </a:xfrm>
+          <a:prstGeom prst="rect">
+            <a:avLst/>
+          </a:prstGeom>
+          <a:noFill/>
+        </p:spPr>
+        <p:txBody>
+          <a:bodyPr wrap="square" lIns="0" rIns="0" tIns="0" bIns="0">
+            <a:spAutoFit/>
+          </a:bodyPr>
+          <a:lstStyle/>
+          <a:p>
+            <a:pPr algn="l">
+              <a:lnSpc>
+                <a:spcPct val="115000"/>
+              </a:lnSpc>
+            </a:pPr>
+            <a:r>
+              <a:rPr sz="1000" b="1">
+                <a:solidFill>
+                  <a:srgbClr val="8EC5E8"/>
+                </a:solidFill>
+                <a:latin typeface="Yu Gothic UI"/>
+              </a:rPr>
+              <a:t>保険金などで</a:t>
+            </a:r>
+          </a:p>
+          <a:p>
+            <a:pPr algn="l">
+              <a:lnSpc>
+                <a:spcPct val="115000"/>
+              </a:lnSpc>
+            </a:pPr>
+            <a:r>
+              <a:rPr sz="1000" b="1">
+                <a:solidFill>
+                  <a:srgbClr val="8EC5E8"/>
+                </a:solidFill>
+                <a:latin typeface="Yu Gothic UI"/>
+              </a:rPr>
+              <a:t>補てんされた分</a:t>
+            </a:r>
+          </a:p>
+        </p:txBody>
+      </p:sp>
+      <p:sp>
+        <p:nvSpPr>
+          <p:cNvPr id="14" name="TextBox 13"/>
+          <p:cNvSpPr txBox="1"/>
+          <p:nvPr/>
+        </p:nvSpPr>
+        <p:spPr>
+          <a:xfrm>
+            <a:off x="6053328" y="5376672"/>
+            <a:ext cx="4764024" cy="274320"/>
+          </a:xfrm>
+          <a:prstGeom prst="rect">
+            <a:avLst/>
+          </a:prstGeom>
+          <a:noFill/>
+        </p:spPr>
+        <p:txBody>
+          <a:bodyPr wrap="square" lIns="0" rIns="0" tIns="0" bIns="0">
+            <a:spAutoFit/>
+          </a:bodyPr>
+          <a:lstStyle/>
+          <a:p>
+            <a:pPr algn="l">
+              <a:lnSpc>
                 <a:spcPct val="125000"/>
               </a:lnSpc>
             </a:pPr>
@@ -7373,22 +7606,6 @@
                 <a:latin typeface="Yu Gothic UI"/>
               </a:rPr>
               <a:t>縦＝1年間に支払った医療費の積み上がり</a:t>
-            </a:r>
-          </a:p>
-          <a:p>
-            <a:pPr algn="l">
-              <a:lnSpc>
-                <a:spcPct val="125000"/>
-              </a:lnSpc>
-            </a:pPr>
-            <a:r>
-              <a:rPr sz="1300" b="0">
-                <a:solidFill>
-                  <a:srgbClr val="8EC5E8"/>
-                </a:solidFill>
-                <a:latin typeface="Yu Gothic UI"/>
-              </a:rPr>
-              <a:t>破線まで＝保険金などと下限額。ここまでは引かれる</a:t>
             </a:r>
           </a:p>
         </p:txBody>
@@ -7755,7 +7972,227 @@
       </p:pic>
       <p:sp>
         <p:nvSpPr>
-          <p:cNvPr id="10" name="Rounded Rectangle 9"/>
+          <p:cNvPr id="10" name="TextBox 9"/>
+          <p:cNvSpPr txBox="1"/>
+          <p:nvPr/>
+        </p:nvSpPr>
+        <p:spPr>
+          <a:xfrm>
+            <a:off x="9168266" y="1352641"/>
+            <a:ext cx="1645920" cy="223520"/>
+          </a:xfrm>
+          <a:prstGeom prst="rect">
+            <a:avLst/>
+          </a:prstGeom>
+          <a:noFill/>
+        </p:spPr>
+        <p:txBody>
+          <a:bodyPr wrap="square" lIns="0" rIns="0" tIns="0" bIns="0">
+            <a:spAutoFit/>
+          </a:bodyPr>
+          <a:lstStyle/>
+          <a:p>
+            <a:pPr algn="l">
+              <a:lnSpc>
+                <a:spcPct val="115000"/>
+              </a:lnSpc>
+            </a:pPr>
+            <a:r>
+              <a:rPr sz="1100" b="1">
+                <a:solidFill>
+                  <a:srgbClr val="FFFFFF"/>
+                </a:solidFill>
+                <a:latin typeface="Yu Gothic UI"/>
+              </a:rPr>
+              <a:t>長期優良住宅</a:t>
+            </a:r>
+          </a:p>
+          <a:p>
+            <a:pPr algn="l">
+              <a:lnSpc>
+                <a:spcPct val="115000"/>
+              </a:lnSpc>
+            </a:pPr>
+            <a:r>
+              <a:rPr sz="1100" b="1">
+                <a:solidFill>
+                  <a:srgbClr val="FFFFFF"/>
+                </a:solidFill>
+                <a:latin typeface="Yu Gothic UI"/>
+              </a:rPr>
+              <a:t>低炭素住宅</a:t>
+            </a:r>
+          </a:p>
+        </p:txBody>
+      </p:sp>
+      <p:sp>
+        <p:nvSpPr>
+          <p:cNvPr id="11" name="TextBox 10"/>
+          <p:cNvSpPr txBox="1"/>
+          <p:nvPr/>
+        </p:nvSpPr>
+        <p:spPr>
+          <a:xfrm>
+            <a:off x="9168266" y="2267529"/>
+            <a:ext cx="1645920" cy="223520"/>
+          </a:xfrm>
+          <a:prstGeom prst="rect">
+            <a:avLst/>
+          </a:prstGeom>
+          <a:noFill/>
+        </p:spPr>
+        <p:txBody>
+          <a:bodyPr wrap="square" lIns="0" rIns="0" tIns="0" bIns="0">
+            <a:spAutoFit/>
+          </a:bodyPr>
+          <a:lstStyle/>
+          <a:p>
+            <a:pPr algn="l">
+              <a:lnSpc>
+                <a:spcPct val="115000"/>
+              </a:lnSpc>
+            </a:pPr>
+            <a:r>
+              <a:rPr sz="1100" b="1">
+                <a:solidFill>
+                  <a:srgbClr val="FFFFFF"/>
+                </a:solidFill>
+                <a:latin typeface="Yu Gothic UI"/>
+              </a:rPr>
+              <a:t>ZEH水準</a:t>
+            </a:r>
+          </a:p>
+          <a:p>
+            <a:pPr algn="l">
+              <a:lnSpc>
+                <a:spcPct val="115000"/>
+              </a:lnSpc>
+            </a:pPr>
+            <a:r>
+              <a:rPr sz="1100" b="1">
+                <a:solidFill>
+                  <a:srgbClr val="FFFFFF"/>
+                </a:solidFill>
+                <a:latin typeface="Yu Gothic UI"/>
+              </a:rPr>
+              <a:t>省エネ住宅</a:t>
+            </a:r>
+          </a:p>
+        </p:txBody>
+      </p:sp>
+      <p:sp>
+        <p:nvSpPr>
+          <p:cNvPr id="12" name="TextBox 11"/>
+          <p:cNvSpPr txBox="1"/>
+          <p:nvPr/>
+        </p:nvSpPr>
+        <p:spPr>
+          <a:xfrm>
+            <a:off x="9168266" y="3182416"/>
+            <a:ext cx="1645920" cy="223520"/>
+          </a:xfrm>
+          <a:prstGeom prst="rect">
+            <a:avLst/>
+          </a:prstGeom>
+          <a:noFill/>
+        </p:spPr>
+        <p:txBody>
+          <a:bodyPr wrap="square" lIns="0" rIns="0" tIns="0" bIns="0">
+            <a:spAutoFit/>
+          </a:bodyPr>
+          <a:lstStyle/>
+          <a:p>
+            <a:pPr algn="l">
+              <a:lnSpc>
+                <a:spcPct val="115000"/>
+              </a:lnSpc>
+            </a:pPr>
+            <a:r>
+              <a:rPr sz="1100" b="1">
+                <a:solidFill>
+                  <a:srgbClr val="FFFFFF"/>
+                </a:solidFill>
+                <a:latin typeface="Yu Gothic UI"/>
+              </a:rPr>
+              <a:t>省エネ基準</a:t>
+            </a:r>
+          </a:p>
+          <a:p>
+            <a:pPr algn="l">
+              <a:lnSpc>
+                <a:spcPct val="115000"/>
+              </a:lnSpc>
+            </a:pPr>
+            <a:r>
+              <a:rPr sz="1100" b="1">
+                <a:solidFill>
+                  <a:srgbClr val="FFFFFF"/>
+                </a:solidFill>
+                <a:latin typeface="Yu Gothic UI"/>
+              </a:rPr>
+              <a:t>適合住宅</a:t>
+            </a:r>
+          </a:p>
+        </p:txBody>
+      </p:sp>
+      <p:sp>
+        <p:nvSpPr>
+          <p:cNvPr id="13" name="TextBox 12"/>
+          <p:cNvSpPr txBox="1"/>
+          <p:nvPr/>
+        </p:nvSpPr>
+        <p:spPr>
+          <a:xfrm>
+            <a:off x="9168266" y="4097304"/>
+            <a:ext cx="1645920" cy="223520"/>
+          </a:xfrm>
+          <a:prstGeom prst="rect">
+            <a:avLst/>
+          </a:prstGeom>
+          <a:noFill/>
+        </p:spPr>
+        <p:txBody>
+          <a:bodyPr wrap="square" lIns="0" rIns="0" tIns="0" bIns="0">
+            <a:spAutoFit/>
+          </a:bodyPr>
+          <a:lstStyle/>
+          <a:p>
+            <a:pPr algn="l">
+              <a:lnSpc>
+                <a:spcPct val="115000"/>
+              </a:lnSpc>
+            </a:pPr>
+            <a:r>
+              <a:rPr sz="1100" b="1">
+                <a:solidFill>
+                  <a:srgbClr val="E7CD7A"/>
+                </a:solidFill>
+                <a:latin typeface="Yu Gothic UI"/>
+              </a:rPr>
+              <a:t>その他住宅</a:t>
+            </a:r>
+          </a:p>
+          <a:p>
+            <a:pPr algn="l">
+              <a:lnSpc>
+                <a:spcPct val="115000"/>
+              </a:lnSpc>
+            </a:pPr>
+            <a:r>
+              <a:rPr sz="1100" b="1">
+                <a:solidFill>
+                  <a:srgbClr val="E7CD7A"/>
+                </a:solidFill>
+                <a:latin typeface="Yu Gothic UI"/>
+              </a:rPr>
+              <a:t>新築は支援対象外</a:t>
+            </a:r>
+          </a:p>
+        </p:txBody>
+      </p:sp>
+      <p:sp>
+        <p:nvSpPr>
+          <p:cNvPr id="14" name="Rounded Rectangle 13"/>
           <p:cNvSpPr/>
           <p:nvPr/>
         </p:nvSpPr>
@@ -7799,7 +8236,7 @@
       </p:sp>
       <p:sp>
         <p:nvSpPr>
-          <p:cNvPr id="11" name="TextBox 10"/>
+          <p:cNvPr id="15" name="TextBox 14"/>
           <p:cNvSpPr txBox="1"/>
           <p:nvPr/>
         </p:nvSpPr>
@@ -7838,7 +8275,7 @@
       </p:sp>
       <p:sp>
         <p:nvSpPr>
-          <p:cNvPr id="12" name="Rounded Rectangle 11"/>
+          <p:cNvPr id="16" name="Rounded Rectangle 15"/>
           <p:cNvSpPr/>
           <p:nvPr/>
         </p:nvSpPr>
@@ -7882,7 +8319,7 @@
       </p:sp>
       <p:sp>
         <p:nvSpPr>
-          <p:cNvPr id="13" name="TextBox 12"/>
+          <p:cNvPr id="17" name="TextBox 16"/>
           <p:cNvSpPr txBox="1"/>
           <p:nvPr/>
         </p:nvSpPr>
@@ -7921,7 +8358,7 @@
       </p:sp>
       <p:sp>
         <p:nvSpPr>
-          <p:cNvPr id="14" name="TextBox 13"/>
+          <p:cNvPr id="18" name="TextBox 17"/>
           <p:cNvSpPr txBox="1"/>
           <p:nvPr/>
         </p:nvSpPr>
@@ -7953,23 +8390,7 @@
                 </a:solidFill>
                 <a:latin typeface="Yu Gothic UI"/>
               </a:rPr>
-              <a:t>横の長さ＝借入限度額　上から省エネ性能の高い区分</a:t>
-            </a:r>
-          </a:p>
-          <a:p>
-            <a:pPr algn="l">
-              <a:lnSpc>
-                <a:spcPct val="125000"/>
-              </a:lnSpc>
-            </a:pPr>
-            <a:r>
-              <a:rPr sz="1300" b="0">
-                <a:solidFill>
-                  <a:srgbClr val="8EC5E8"/>
-                </a:solidFill>
-                <a:latin typeface="Yu Gothic UI"/>
-              </a:rPr>
-              <a:t>黄の破線＝支援対象外（新築のその他住宅）</a:t>
+              <a:t>横の長さ＝借入限度額（令和8年〜令和12年に入居した場合）</a:t>
             </a:r>
           </a:p>
         </p:txBody>
@@ -8336,7 +8757,163 @@
       </p:pic>
       <p:sp>
         <p:nvSpPr>
-          <p:cNvPr id="10" name="Rounded Rectangle 9"/>
+          <p:cNvPr id="10" name="TextBox 9"/>
+          <p:cNvSpPr txBox="1"/>
+          <p:nvPr/>
+        </p:nvSpPr>
+        <p:spPr>
+          <a:xfrm>
+            <a:off x="9333175" y="1191016"/>
+            <a:ext cx="1554480" cy="243840"/>
+          </a:xfrm>
+          <a:prstGeom prst="rect">
+            <a:avLst/>
+          </a:prstGeom>
+          <a:noFill/>
+        </p:spPr>
+        <p:txBody>
+          <a:bodyPr wrap="square" lIns="0" rIns="0" tIns="0" bIns="0">
+            <a:spAutoFit/>
+          </a:bodyPr>
+          <a:lstStyle/>
+          <a:p>
+            <a:pPr algn="l">
+              <a:lnSpc>
+                <a:spcPct val="115000"/>
+              </a:lnSpc>
+            </a:pPr>
+            <a:r>
+              <a:rPr sz="1200" b="1">
+                <a:solidFill>
+                  <a:srgbClr val="FFFFFF"/>
+                </a:solidFill>
+                <a:latin typeface="Yu Gothic UI"/>
+              </a:rPr>
+              <a:t>元の返還</a:t>
+            </a:r>
+          </a:p>
+        </p:txBody>
+      </p:sp>
+      <p:sp>
+        <p:nvSpPr>
+          <p:cNvPr id="11" name="TextBox 10"/>
+          <p:cNvSpPr txBox="1"/>
+          <p:nvPr/>
+        </p:nvSpPr>
+        <p:spPr>
+          <a:xfrm>
+            <a:off x="9333175" y="2048723"/>
+            <a:ext cx="1554480" cy="243840"/>
+          </a:xfrm>
+          <a:prstGeom prst="rect">
+            <a:avLst/>
+          </a:prstGeom>
+          <a:noFill/>
+        </p:spPr>
+        <p:txBody>
+          <a:bodyPr wrap="square" lIns="0" rIns="0" tIns="0" bIns="0">
+            <a:spAutoFit/>
+          </a:bodyPr>
+          <a:lstStyle/>
+          <a:p>
+            <a:pPr algn="l">
+              <a:lnSpc>
+                <a:spcPct val="115000"/>
+              </a:lnSpc>
+            </a:pPr>
+            <a:r>
+              <a:rPr sz="1200" b="1">
+                <a:solidFill>
+                  <a:srgbClr val="FFFFFF"/>
+                </a:solidFill>
+                <a:latin typeface="Yu Gothic UI"/>
+              </a:rPr>
+              <a:t>減額返還</a:t>
+            </a:r>
+          </a:p>
+        </p:txBody>
+      </p:sp>
+      <p:sp>
+        <p:nvSpPr>
+          <p:cNvPr id="12" name="TextBox 11"/>
+          <p:cNvSpPr txBox="1"/>
+          <p:nvPr/>
+        </p:nvSpPr>
+        <p:spPr>
+          <a:xfrm>
+            <a:off x="9333175" y="2906430"/>
+            <a:ext cx="1554480" cy="243840"/>
+          </a:xfrm>
+          <a:prstGeom prst="rect">
+            <a:avLst/>
+          </a:prstGeom>
+          <a:noFill/>
+        </p:spPr>
+        <p:txBody>
+          <a:bodyPr wrap="square" lIns="0" rIns="0" tIns="0" bIns="0">
+            <a:spAutoFit/>
+          </a:bodyPr>
+          <a:lstStyle/>
+          <a:p>
+            <a:pPr algn="l">
+              <a:lnSpc>
+                <a:spcPct val="115000"/>
+              </a:lnSpc>
+            </a:pPr>
+            <a:r>
+              <a:rPr sz="1200" b="1">
+                <a:solidFill>
+                  <a:srgbClr val="FFFFFF"/>
+                </a:solidFill>
+                <a:latin typeface="Yu Gothic UI"/>
+              </a:rPr>
+              <a:t>返還期限猶予</a:t>
+            </a:r>
+          </a:p>
+        </p:txBody>
+      </p:sp>
+      <p:sp>
+        <p:nvSpPr>
+          <p:cNvPr id="13" name="TextBox 12"/>
+          <p:cNvSpPr txBox="1"/>
+          <p:nvPr/>
+        </p:nvSpPr>
+        <p:spPr>
+          <a:xfrm>
+            <a:off x="9333175" y="3764137"/>
+            <a:ext cx="1554480" cy="243840"/>
+          </a:xfrm>
+          <a:prstGeom prst="rect">
+            <a:avLst/>
+          </a:prstGeom>
+          <a:noFill/>
+        </p:spPr>
+        <p:txBody>
+          <a:bodyPr wrap="square" lIns="0" rIns="0" tIns="0" bIns="0">
+            <a:spAutoFit/>
+          </a:bodyPr>
+          <a:lstStyle/>
+          <a:p>
+            <a:pPr algn="l">
+              <a:lnSpc>
+                <a:spcPct val="115000"/>
+              </a:lnSpc>
+            </a:pPr>
+            <a:r>
+              <a:rPr sz="1200" b="1">
+                <a:solidFill>
+                  <a:srgbClr val="E7CD7A"/>
+                </a:solidFill>
+                <a:latin typeface="Yu Gothic UI"/>
+              </a:rPr>
+              <a:t>返還免除</a:t>
+            </a:r>
+          </a:p>
+        </p:txBody>
+      </p:sp>
+      <p:sp>
+        <p:nvSpPr>
+          <p:cNvPr id="14" name="Rounded Rectangle 13"/>
           <p:cNvSpPr/>
           <p:nvPr/>
         </p:nvSpPr>
@@ -8380,7 +8957,7 @@
       </p:sp>
       <p:sp>
         <p:nvSpPr>
-          <p:cNvPr id="11" name="TextBox 10"/>
+          <p:cNvPr id="15" name="TextBox 14"/>
           <p:cNvSpPr txBox="1"/>
           <p:nvPr/>
         </p:nvSpPr>
@@ -8419,7 +8996,7 @@
       </p:sp>
       <p:sp>
         <p:nvSpPr>
-          <p:cNvPr id="12" name="Rounded Rectangle 11"/>
+          <p:cNvPr id="16" name="Rounded Rectangle 15"/>
           <p:cNvSpPr/>
           <p:nvPr/>
         </p:nvSpPr>
@@ -8463,7 +9040,7 @@
       </p:sp>
       <p:sp>
         <p:nvSpPr>
-          <p:cNvPr id="13" name="TextBox 12"/>
+          <p:cNvPr id="17" name="TextBox 16"/>
           <p:cNvSpPr txBox="1"/>
           <p:nvPr/>
         </p:nvSpPr>
@@ -8502,7 +9079,7 @@
       </p:sp>
       <p:sp>
         <p:nvSpPr>
-          <p:cNvPr id="14" name="TextBox 13"/>
+          <p:cNvPr id="18" name="TextBox 17"/>
           <p:cNvSpPr txBox="1"/>
           <p:nvPr/>
         </p:nvSpPr>
@@ -8534,23 +9111,7 @@
                 </a:solidFill>
                 <a:latin typeface="Yu Gothic UI"/>
               </a:rPr>
-              <a:t>上から 元の返還／減額返還／返還期限猶予／返還免除</a:t>
-            </a:r>
-          </a:p>
-          <a:p>
-            <a:pPr algn="l">
-              <a:lnSpc>
-                <a:spcPct val="125000"/>
-              </a:lnSpc>
-            </a:pPr>
-            <a:r>
-              <a:rPr sz="1300" b="0">
-                <a:solidFill>
-                  <a:srgbClr val="8EC5E8"/>
-                </a:solidFill>
-                <a:latin typeface="Yu Gothic UI"/>
-              </a:rPr>
-              <a:t>白の合計＝返す総額。減るのは免除だけ（黄の破線）</a:t>
+              <a:t>白の合計＝返す総額。減るのは免除だけ</a:t>
             </a:r>
           </a:p>
         </p:txBody>

--- a/tools/article-images/article-images.pptx
+++ b/tools/article-images/article-images.pptx
@@ -15,6 +15,7 @@
     <p:sldId id="263" r:id="rId14"/>
     <p:sldId id="264" r:id="rId15"/>
     <p:sldId id="265" r:id="rId16"/>
+    <p:sldId id="266" r:id="rId17"/>
   </p:sldIdLst>
   <p:sldSz cx="11430000" cy="6000750" type="screen4x3"/>
   <p:notesSz cx="6858000" cy="9144000"/>
@@ -3762,6 +3763,687 @@
 </file>
 
 <file path=ppt/slides/slide10.xml><?xml version="1.0" encoding="utf-8"?>
+<p:sld xmlns:a="http://schemas.openxmlformats.org/drawingml/2006/main" xmlns:p="http://schemas.openxmlformats.org/presentationml/2006/main" xmlns:r="http://schemas.openxmlformats.org/officeDocument/2006/relationships">
+  <p:cSld>
+    <p:bg>
+      <p:bgPr>
+        <a:solidFill>
+          <a:srgbClr val="014172"/>
+        </a:solidFill>
+        <a:effectLst/>
+      </p:bgPr>
+    </p:bg>
+    <p:spTree>
+      <p:nvGrpSpPr>
+        <p:cNvPr id="1" name=""/>
+        <p:cNvGrpSpPr/>
+        <p:nvPr/>
+      </p:nvGrpSpPr>
+      <p:grpSpPr/>
+      <p:sp>
+        <p:nvSpPr>
+          <p:cNvPr id="2" name="Rounded Rectangle 1"/>
+          <p:cNvSpPr/>
+          <p:nvPr/>
+        </p:nvSpPr>
+        <p:spPr>
+          <a:xfrm>
+            <a:off x="713232" y="566928"/>
+            <a:ext cx="2377440" cy="68580"/>
+          </a:xfrm>
+          <a:prstGeom prst="roundRect">
+            <a:avLst/>
+          </a:prstGeom>
+          <a:solidFill>
+            <a:srgbClr val="FFFFFF"/>
+          </a:solidFill>
+          <a:ln>
+            <a:noFill/>
+          </a:ln>
+          <a:effectLst/>
+        </p:spPr>
+        <p:style>
+          <a:lnRef idx="1">
+            <a:schemeClr val="accent1"/>
+          </a:lnRef>
+          <a:fillRef idx="3">
+            <a:schemeClr val="accent1"/>
+          </a:fillRef>
+          <a:effectRef idx="2">
+            <a:schemeClr val="accent1"/>
+          </a:effectRef>
+          <a:fontRef idx="minor">
+            <a:schemeClr val="lt1"/>
+          </a:fontRef>
+        </p:style>
+        <p:txBody>
+          <a:bodyPr rtlCol="0" anchor="ctr"/>
+          <a:lstStyle/>
+          <a:p>
+            <a:pPr algn="ctr"/>
+          </a:p>
+        </p:txBody>
+      </p:sp>
+      <p:sp>
+        <p:nvSpPr>
+          <p:cNvPr id="3" name="Rounded Rectangle 2"/>
+          <p:cNvSpPr/>
+          <p:nvPr/>
+        </p:nvSpPr>
+        <p:spPr>
+          <a:xfrm>
+            <a:off x="713232" y="781812"/>
+            <a:ext cx="1920240" cy="68580"/>
+          </a:xfrm>
+          <a:prstGeom prst="roundRect">
+            <a:avLst/>
+          </a:prstGeom>
+          <a:solidFill>
+            <a:srgbClr val="FFFFFF"/>
+          </a:solidFill>
+          <a:ln>
+            <a:noFill/>
+          </a:ln>
+          <a:effectLst/>
+        </p:spPr>
+        <p:style>
+          <a:lnRef idx="1">
+            <a:schemeClr val="accent1"/>
+          </a:lnRef>
+          <a:fillRef idx="3">
+            <a:schemeClr val="accent1"/>
+          </a:fillRef>
+          <a:effectRef idx="2">
+            <a:schemeClr val="accent1"/>
+          </a:effectRef>
+          <a:fontRef idx="minor">
+            <a:schemeClr val="lt1"/>
+          </a:fontRef>
+        </p:style>
+        <p:txBody>
+          <a:bodyPr rtlCol="0" anchor="ctr"/>
+          <a:lstStyle/>
+          <a:p>
+            <a:pPr algn="ctr"/>
+          </a:p>
+        </p:txBody>
+      </p:sp>
+      <p:sp>
+        <p:nvSpPr>
+          <p:cNvPr id="4" name="Rounded Rectangle 3"/>
+          <p:cNvSpPr/>
+          <p:nvPr/>
+        </p:nvSpPr>
+        <p:spPr>
+          <a:xfrm>
+            <a:off x="713232" y="996695"/>
+            <a:ext cx="1463040" cy="68580"/>
+          </a:xfrm>
+          <a:prstGeom prst="roundRect">
+            <a:avLst/>
+          </a:prstGeom>
+          <a:solidFill>
+            <a:srgbClr val="FFFFFF"/>
+          </a:solidFill>
+          <a:ln>
+            <a:noFill/>
+          </a:ln>
+          <a:effectLst/>
+        </p:spPr>
+        <p:style>
+          <a:lnRef idx="1">
+            <a:schemeClr val="accent1"/>
+          </a:lnRef>
+          <a:fillRef idx="3">
+            <a:schemeClr val="accent1"/>
+          </a:fillRef>
+          <a:effectRef idx="2">
+            <a:schemeClr val="accent1"/>
+          </a:effectRef>
+          <a:fontRef idx="minor">
+            <a:schemeClr val="lt1"/>
+          </a:fontRef>
+        </p:style>
+        <p:txBody>
+          <a:bodyPr rtlCol="0" anchor="ctr"/>
+          <a:lstStyle/>
+          <a:p>
+            <a:pPr algn="ctr"/>
+          </a:p>
+        </p:txBody>
+      </p:sp>
+      <p:sp>
+        <p:nvSpPr>
+          <p:cNvPr id="5" name="TextBox 4"/>
+          <p:cNvSpPr txBox="1"/>
+          <p:nvPr/>
+        </p:nvSpPr>
+        <p:spPr>
+          <a:xfrm>
+            <a:off x="713232" y="1481328"/>
+            <a:ext cx="4937760" cy="411480"/>
+          </a:xfrm>
+          <a:prstGeom prst="rect">
+            <a:avLst/>
+          </a:prstGeom>
+          <a:noFill/>
+        </p:spPr>
+        <p:txBody>
+          <a:bodyPr wrap="square" lIns="0" rIns="0" tIns="0" bIns="0">
+            <a:spAutoFit/>
+          </a:bodyPr>
+          <a:lstStyle/>
+          <a:p>
+            <a:pPr algn="l">
+              <a:lnSpc>
+                <a:spcPct val="125000"/>
+              </a:lnSpc>
+            </a:pPr>
+            <a:r>
+              <a:rPr sz="1800" b="1">
+                <a:solidFill>
+                  <a:srgbClr val="8EC5E8"/>
+                </a:solidFill>
+                <a:latin typeface="Yu Gothic UI"/>
+              </a:rPr>
+              <a:t>教育費</a:t>
+            </a:r>
+          </a:p>
+        </p:txBody>
+      </p:sp>
+      <p:sp>
+        <p:nvSpPr>
+          <p:cNvPr id="6" name="TextBox 5"/>
+          <p:cNvSpPr txBox="1"/>
+          <p:nvPr/>
+        </p:nvSpPr>
+        <p:spPr>
+          <a:xfrm>
+            <a:off x="713232" y="1938528"/>
+            <a:ext cx="5257800" cy="914400"/>
+          </a:xfrm>
+          <a:prstGeom prst="rect">
+            <a:avLst/>
+          </a:prstGeom>
+          <a:noFill/>
+        </p:spPr>
+        <p:txBody>
+          <a:bodyPr wrap="square" lIns="0" rIns="0" tIns="0" bIns="0">
+            <a:spAutoFit/>
+          </a:bodyPr>
+          <a:lstStyle/>
+          <a:p>
+            <a:pPr algn="l">
+              <a:lnSpc>
+                <a:spcPct val="125000"/>
+              </a:lnSpc>
+            </a:pPr>
+            <a:r>
+              <a:rPr sz="3400" b="1">
+                <a:solidFill>
+                  <a:srgbClr val="FFFFFF"/>
+                </a:solidFill>
+                <a:latin typeface="Yu Gothic UI"/>
+              </a:rPr>
+              <a:t>「保育の無償化」の中身</a:t>
+            </a:r>
+          </a:p>
+        </p:txBody>
+      </p:sp>
+      <p:sp>
+        <p:nvSpPr>
+          <p:cNvPr id="7" name="TextBox 6"/>
+          <p:cNvSpPr txBox="1"/>
+          <p:nvPr/>
+        </p:nvSpPr>
+        <p:spPr>
+          <a:xfrm>
+            <a:off x="713232" y="2999232"/>
+            <a:ext cx="5120640" cy="1280160"/>
+          </a:xfrm>
+          <a:prstGeom prst="rect">
+            <a:avLst/>
+          </a:prstGeom>
+          <a:noFill/>
+        </p:spPr>
+        <p:txBody>
+          <a:bodyPr wrap="square" lIns="0" rIns="0" tIns="0" bIns="0">
+            <a:spAutoFit/>
+          </a:bodyPr>
+          <a:lstStyle/>
+          <a:p>
+            <a:pPr algn="l">
+              <a:lnSpc>
+                <a:spcPct val="135000"/>
+              </a:lnSpc>
+            </a:pPr>
+            <a:r>
+              <a:rPr sz="2600" b="0">
+                <a:solidFill>
+                  <a:srgbClr val="FFFFFF"/>
+                </a:solidFill>
+                <a:latin typeface="Yu Gothic UI"/>
+              </a:rPr>
+              <a:t>無料になるのは利用料だけ</a:t>
+            </a:r>
+          </a:p>
+          <a:p>
+            <a:pPr algn="l">
+              <a:lnSpc>
+                <a:spcPct val="135000"/>
+              </a:lnSpc>
+            </a:pPr>
+            <a:r>
+              <a:rPr sz="2600" b="0">
+                <a:solidFill>
+                  <a:srgbClr val="FFFFFF"/>
+                </a:solidFill>
+                <a:latin typeface="Yu Gothic UI"/>
+              </a:rPr>
+              <a:t>0〜2歳児クラスは原則対象外</a:t>
+            </a:r>
+          </a:p>
+        </p:txBody>
+      </p:sp>
+      <p:sp>
+        <p:nvSpPr>
+          <p:cNvPr id="8" name="TextBox 7"/>
+          <p:cNvSpPr txBox="1"/>
+          <p:nvPr/>
+        </p:nvSpPr>
+        <p:spPr>
+          <a:xfrm>
+            <a:off x="713232" y="5138928"/>
+            <a:ext cx="5120640" cy="365760"/>
+          </a:xfrm>
+          <a:prstGeom prst="rect">
+            <a:avLst/>
+          </a:prstGeom>
+          <a:noFill/>
+        </p:spPr>
+        <p:txBody>
+          <a:bodyPr wrap="square" lIns="0" rIns="0" tIns="0" bIns="0">
+            <a:spAutoFit/>
+          </a:bodyPr>
+          <a:lstStyle/>
+          <a:p>
+            <a:pPr algn="l">
+              <a:lnSpc>
+                <a:spcPct val="125000"/>
+              </a:lnSpc>
+            </a:pPr>
+            <a:r>
+              <a:rPr sz="1700" b="0">
+                <a:solidFill>
+                  <a:srgbClr val="8EC5E8"/>
+                </a:solidFill>
+                <a:latin typeface="Yu Gothic UI"/>
+              </a:rPr>
+              <a:t>家計の制度ログ　kakei.nexeed-lab.com</a:t>
+            </a:r>
+          </a:p>
+        </p:txBody>
+      </p:sp>
+      <p:pic>
+        <p:nvPicPr>
+          <p:cNvPr id="9" name="Picture 8" descr="hoiku-mushouka.png"/>
+          <p:cNvPicPr>
+            <a:picLocks noChangeAspect="1"/>
+          </p:cNvPicPr>
+          <p:nvPr/>
+        </p:nvPicPr>
+        <p:blipFill>
+          <a:blip r:embed="rId2">
+            <a:extLst>
+              <a:ext uri="{96DAC541-7B7A-43D3-8B79-37D633B846F1}">
+                <asvg:svgBlip xmlns:asvg="http://schemas.microsoft.com/office/drawing/2016/SVG/main" r:embed="rId3"/>
+              </a:ext>
+            </a:extLst>
+          </a:blip>
+          <a:stretch>
+            <a:fillRect/>
+          </a:stretch>
+        </p:blipFill>
+        <p:spPr>
+          <a:xfrm>
+            <a:off x="6053328" y="566928"/>
+            <a:ext cx="4764024" cy="4288536"/>
+          </a:xfrm>
+          <a:prstGeom prst="rect">
+            <a:avLst/>
+          </a:prstGeom>
+        </p:spPr>
+      </p:pic>
+      <p:sp>
+        <p:nvSpPr>
+          <p:cNvPr id="10" name="TextBox 9"/>
+          <p:cNvSpPr txBox="1"/>
+          <p:nvPr/>
+        </p:nvSpPr>
+        <p:spPr>
+          <a:xfrm>
+            <a:off x="7158134" y="940340"/>
+            <a:ext cx="868680" cy="223520"/>
+          </a:xfrm>
+          <a:prstGeom prst="rect">
+            <a:avLst/>
+          </a:prstGeom>
+          <a:noFill/>
+        </p:spPr>
+        <p:txBody>
+          <a:bodyPr wrap="square" lIns="0" rIns="0" tIns="0" bIns="0">
+            <a:spAutoFit/>
+          </a:bodyPr>
+          <a:lstStyle/>
+          <a:p>
+            <a:pPr algn="ctr">
+              <a:lnSpc>
+                <a:spcPct val="115000"/>
+              </a:lnSpc>
+            </a:pPr>
+            <a:r>
+              <a:rPr sz="1100" b="1">
+                <a:solidFill>
+                  <a:srgbClr val="E7CD7A"/>
+                </a:solidFill>
+                <a:latin typeface="Yu Gothic UI"/>
+              </a:rPr>
+              <a:t>利用料</a:t>
+            </a:r>
+          </a:p>
+        </p:txBody>
+      </p:sp>
+      <p:sp>
+        <p:nvSpPr>
+          <p:cNvPr id="11" name="TextBox 10"/>
+          <p:cNvSpPr txBox="1"/>
+          <p:nvPr/>
+        </p:nvSpPr>
+        <p:spPr>
+          <a:xfrm>
+            <a:off x="8074292" y="940340"/>
+            <a:ext cx="868680" cy="223520"/>
+          </a:xfrm>
+          <a:prstGeom prst="rect">
+            <a:avLst/>
+          </a:prstGeom>
+          <a:noFill/>
+        </p:spPr>
+        <p:txBody>
+          <a:bodyPr wrap="square" lIns="0" rIns="0" tIns="0" bIns="0">
+            <a:spAutoFit/>
+          </a:bodyPr>
+          <a:lstStyle/>
+          <a:p>
+            <a:pPr algn="ctr">
+              <a:lnSpc>
+                <a:spcPct val="115000"/>
+              </a:lnSpc>
+            </a:pPr>
+            <a:r>
+              <a:rPr sz="1100" b="1">
+                <a:solidFill>
+                  <a:srgbClr val="FFFFFF"/>
+                </a:solidFill>
+                <a:latin typeface="Yu Gothic UI"/>
+              </a:rPr>
+              <a:t>食材料費</a:t>
+            </a:r>
+          </a:p>
+        </p:txBody>
+      </p:sp>
+      <p:sp>
+        <p:nvSpPr>
+          <p:cNvPr id="12" name="TextBox 11"/>
+          <p:cNvSpPr txBox="1"/>
+          <p:nvPr/>
+        </p:nvSpPr>
+        <p:spPr>
+          <a:xfrm>
+            <a:off x="8990451" y="940340"/>
+            <a:ext cx="868680" cy="223520"/>
+          </a:xfrm>
+          <a:prstGeom prst="rect">
+            <a:avLst/>
+          </a:prstGeom>
+          <a:noFill/>
+        </p:spPr>
+        <p:txBody>
+          <a:bodyPr wrap="square" lIns="0" rIns="0" tIns="0" bIns="0">
+            <a:spAutoFit/>
+          </a:bodyPr>
+          <a:lstStyle/>
+          <a:p>
+            <a:pPr algn="ctr">
+              <a:lnSpc>
+                <a:spcPct val="115000"/>
+              </a:lnSpc>
+            </a:pPr>
+            <a:r>
+              <a:rPr sz="1100" b="1">
+                <a:solidFill>
+                  <a:srgbClr val="FFFFFF"/>
+                </a:solidFill>
+                <a:latin typeface="Yu Gothic UI"/>
+              </a:rPr>
+              <a:t>通園送迎費</a:t>
+            </a:r>
+          </a:p>
+        </p:txBody>
+      </p:sp>
+      <p:sp>
+        <p:nvSpPr>
+          <p:cNvPr id="13" name="TextBox 12"/>
+          <p:cNvSpPr txBox="1"/>
+          <p:nvPr/>
+        </p:nvSpPr>
+        <p:spPr>
+          <a:xfrm>
+            <a:off x="9906609" y="940340"/>
+            <a:ext cx="868680" cy="223520"/>
+          </a:xfrm>
+          <a:prstGeom prst="rect">
+            <a:avLst/>
+          </a:prstGeom>
+          <a:noFill/>
+        </p:spPr>
+        <p:txBody>
+          <a:bodyPr wrap="square" lIns="0" rIns="0" tIns="0" bIns="0">
+            <a:spAutoFit/>
+          </a:bodyPr>
+          <a:lstStyle/>
+          <a:p>
+            <a:pPr algn="ctr">
+              <a:lnSpc>
+                <a:spcPct val="115000"/>
+              </a:lnSpc>
+            </a:pPr>
+            <a:r>
+              <a:rPr sz="1100" b="1">
+                <a:solidFill>
+                  <a:srgbClr val="FFFFFF"/>
+                </a:solidFill>
+                <a:latin typeface="Yu Gothic UI"/>
+              </a:rPr>
+              <a:t>行事費</a:t>
+            </a:r>
+          </a:p>
+        </p:txBody>
+      </p:sp>
+      <p:sp>
+        <p:nvSpPr>
+          <p:cNvPr id="14" name="TextBox 13"/>
+          <p:cNvSpPr txBox="1"/>
+          <p:nvPr/>
+        </p:nvSpPr>
+        <p:spPr>
+          <a:xfrm>
+            <a:off x="5945499" y="1843189"/>
+            <a:ext cx="1097280" cy="223520"/>
+          </a:xfrm>
+          <a:prstGeom prst="rect">
+            <a:avLst/>
+          </a:prstGeom>
+          <a:noFill/>
+        </p:spPr>
+        <p:txBody>
+          <a:bodyPr wrap="square" lIns="0" rIns="0" tIns="0" bIns="0">
+            <a:spAutoFit/>
+          </a:bodyPr>
+          <a:lstStyle/>
+          <a:p>
+            <a:pPr algn="r">
+              <a:lnSpc>
+                <a:spcPct val="115000"/>
+              </a:lnSpc>
+            </a:pPr>
+            <a:r>
+              <a:rPr sz="1100" b="1">
+                <a:solidFill>
+                  <a:srgbClr val="FFFFFF"/>
+                </a:solidFill>
+                <a:latin typeface="Yu Gothic UI"/>
+              </a:rPr>
+              <a:t>3〜5歳児</a:t>
+            </a:r>
+          </a:p>
+          <a:p>
+            <a:pPr algn="r">
+              <a:lnSpc>
+                <a:spcPct val="115000"/>
+              </a:lnSpc>
+            </a:pPr>
+            <a:r>
+              <a:rPr sz="1100" b="1">
+                <a:solidFill>
+                  <a:srgbClr val="FFFFFF"/>
+                </a:solidFill>
+                <a:latin typeface="Yu Gothic UI"/>
+              </a:rPr>
+              <a:t>クラス</a:t>
+            </a:r>
+          </a:p>
+        </p:txBody>
+      </p:sp>
+      <p:sp>
+        <p:nvSpPr>
+          <p:cNvPr id="15" name="TextBox 14"/>
+          <p:cNvSpPr txBox="1"/>
+          <p:nvPr/>
+        </p:nvSpPr>
+        <p:spPr>
+          <a:xfrm>
+            <a:off x="5945499" y="3513461"/>
+            <a:ext cx="1097280" cy="223520"/>
+          </a:xfrm>
+          <a:prstGeom prst="rect">
+            <a:avLst/>
+          </a:prstGeom>
+          <a:noFill/>
+        </p:spPr>
+        <p:txBody>
+          <a:bodyPr wrap="square" lIns="0" rIns="0" tIns="0" bIns="0">
+            <a:spAutoFit/>
+          </a:bodyPr>
+          <a:lstStyle/>
+          <a:p>
+            <a:pPr algn="r">
+              <a:lnSpc>
+                <a:spcPct val="115000"/>
+              </a:lnSpc>
+            </a:pPr>
+            <a:r>
+              <a:rPr sz="1100" b="1">
+                <a:solidFill>
+                  <a:srgbClr val="FFFFFF"/>
+                </a:solidFill>
+                <a:latin typeface="Yu Gothic UI"/>
+              </a:rPr>
+              <a:t>0〜2歳児</a:t>
+            </a:r>
+          </a:p>
+          <a:p>
+            <a:pPr algn="r">
+              <a:lnSpc>
+                <a:spcPct val="115000"/>
+              </a:lnSpc>
+            </a:pPr>
+            <a:r>
+              <a:rPr sz="1100" b="1">
+                <a:solidFill>
+                  <a:srgbClr val="FFFFFF"/>
+                </a:solidFill>
+                <a:latin typeface="Yu Gothic UI"/>
+              </a:rPr>
+              <a:t>クラス</a:t>
+            </a:r>
+          </a:p>
+        </p:txBody>
+      </p:sp>
+      <p:sp>
+        <p:nvSpPr>
+          <p:cNvPr id="16" name="TextBox 15"/>
+          <p:cNvSpPr txBox="1"/>
+          <p:nvPr/>
+        </p:nvSpPr>
+        <p:spPr>
+          <a:xfrm>
+            <a:off x="6053328" y="5376672"/>
+            <a:ext cx="4764024" cy="274320"/>
+          </a:xfrm>
+          <a:prstGeom prst="rect">
+            <a:avLst/>
+          </a:prstGeom>
+          <a:noFill/>
+        </p:spPr>
+        <p:txBody>
+          <a:bodyPr wrap="square" lIns="0" rIns="0" tIns="0" bIns="0">
+            <a:spAutoFit/>
+          </a:bodyPr>
+          <a:lstStyle/>
+          <a:p>
+            <a:pPr algn="l">
+              <a:lnSpc>
+                <a:spcPct val="125000"/>
+              </a:lnSpc>
+            </a:pPr>
+            <a:r>
+              <a:rPr sz="1300" b="0">
+                <a:solidFill>
+                  <a:srgbClr val="8EC5E8"/>
+                </a:solidFill>
+                <a:latin typeface="Yu Gothic UI"/>
+              </a:rPr>
+              <a:t>白＝払う分　黄色い破線＝無償化で払わなくなる分</a:t>
+            </a:r>
+          </a:p>
+          <a:p>
+            <a:pPr algn="l">
+              <a:lnSpc>
+                <a:spcPct val="125000"/>
+              </a:lnSpc>
+            </a:pPr>
+            <a:r>
+              <a:rPr sz="1300" b="0">
+                <a:solidFill>
+                  <a:srgbClr val="8EC5E8"/>
+                </a:solidFill>
+                <a:latin typeface="Yu Gothic UI"/>
+              </a:rPr>
+              <a:t>0〜2歳児クラスは住民税非課税世帯だけ利用料が無償</a:t>
+            </a:r>
+          </a:p>
+        </p:txBody>
+      </p:sp>
+    </p:spTree>
+  </p:cSld>
+  <p:clrMapOvr>
+    <a:masterClrMapping/>
+  </p:clrMapOvr>
+</p:sld>
+</file>
+
+<file path=ppt/slides/slide11.xml><?xml version="1.0" encoding="utf-8"?>
 <p:sld xmlns:a="http://schemas.openxmlformats.org/drawingml/2006/main" xmlns:p="http://schemas.openxmlformats.org/presentationml/2006/main" xmlns:r="http://schemas.openxmlformats.org/officeDocument/2006/relationships">
   <p:cSld>
     <p:bg>

--- a/tools/article-images/article-images.pptx
+++ b/tools/article-images/article-images.pptx
@@ -16,6 +16,9 @@
     <p:sldId id="264" r:id="rId15"/>
     <p:sldId id="265" r:id="rId16"/>
     <p:sldId id="266" r:id="rId17"/>
+    <p:sldId id="267" r:id="rId18"/>
+    <p:sldId id="268" r:id="rId19"/>
+    <p:sldId id="269" r:id="rId20"/>
   </p:sldIdLst>
   <p:sldSz cx="11430000" cy="6000750" type="screen4x3"/>
   <p:notesSz cx="6858000" cy="9144000"/>
@@ -4444,6 +4447,1962 @@
 </file>
 
 <file path=ppt/slides/slide11.xml><?xml version="1.0" encoding="utf-8"?>
+<p:sld xmlns:a="http://schemas.openxmlformats.org/drawingml/2006/main" xmlns:p="http://schemas.openxmlformats.org/presentationml/2006/main" xmlns:r="http://schemas.openxmlformats.org/officeDocument/2006/relationships">
+  <p:cSld>
+    <p:bg>
+      <p:bgPr>
+        <a:solidFill>
+          <a:srgbClr val="014172"/>
+        </a:solidFill>
+        <a:effectLst/>
+      </p:bgPr>
+    </p:bg>
+    <p:spTree>
+      <p:nvGrpSpPr>
+        <p:cNvPr id="1" name=""/>
+        <p:cNvGrpSpPr/>
+        <p:nvPr/>
+      </p:nvGrpSpPr>
+      <p:grpSpPr/>
+      <p:sp>
+        <p:nvSpPr>
+          <p:cNvPr id="2" name="Rounded Rectangle 1"/>
+          <p:cNvSpPr/>
+          <p:nvPr/>
+        </p:nvSpPr>
+        <p:spPr>
+          <a:xfrm>
+            <a:off x="713232" y="566928"/>
+            <a:ext cx="2377440" cy="68580"/>
+          </a:xfrm>
+          <a:prstGeom prst="roundRect">
+            <a:avLst/>
+          </a:prstGeom>
+          <a:solidFill>
+            <a:srgbClr val="FFFFFF"/>
+          </a:solidFill>
+          <a:ln>
+            <a:noFill/>
+          </a:ln>
+          <a:effectLst/>
+        </p:spPr>
+        <p:style>
+          <a:lnRef idx="1">
+            <a:schemeClr val="accent1"/>
+          </a:lnRef>
+          <a:fillRef idx="3">
+            <a:schemeClr val="accent1"/>
+          </a:fillRef>
+          <a:effectRef idx="2">
+            <a:schemeClr val="accent1"/>
+          </a:effectRef>
+          <a:fontRef idx="minor">
+            <a:schemeClr val="lt1"/>
+          </a:fontRef>
+        </p:style>
+        <p:txBody>
+          <a:bodyPr rtlCol="0" anchor="ctr"/>
+          <a:lstStyle/>
+          <a:p>
+            <a:pPr algn="ctr"/>
+          </a:p>
+        </p:txBody>
+      </p:sp>
+      <p:sp>
+        <p:nvSpPr>
+          <p:cNvPr id="3" name="Rounded Rectangle 2"/>
+          <p:cNvSpPr/>
+          <p:nvPr/>
+        </p:nvSpPr>
+        <p:spPr>
+          <a:xfrm>
+            <a:off x="713232" y="781812"/>
+            <a:ext cx="1920240" cy="68580"/>
+          </a:xfrm>
+          <a:prstGeom prst="roundRect">
+            <a:avLst/>
+          </a:prstGeom>
+          <a:solidFill>
+            <a:srgbClr val="FFFFFF"/>
+          </a:solidFill>
+          <a:ln>
+            <a:noFill/>
+          </a:ln>
+          <a:effectLst/>
+        </p:spPr>
+        <p:style>
+          <a:lnRef idx="1">
+            <a:schemeClr val="accent1"/>
+          </a:lnRef>
+          <a:fillRef idx="3">
+            <a:schemeClr val="accent1"/>
+          </a:fillRef>
+          <a:effectRef idx="2">
+            <a:schemeClr val="accent1"/>
+          </a:effectRef>
+          <a:fontRef idx="minor">
+            <a:schemeClr val="lt1"/>
+          </a:fontRef>
+        </p:style>
+        <p:txBody>
+          <a:bodyPr rtlCol="0" anchor="ctr"/>
+          <a:lstStyle/>
+          <a:p>
+            <a:pPr algn="ctr"/>
+          </a:p>
+        </p:txBody>
+      </p:sp>
+      <p:sp>
+        <p:nvSpPr>
+          <p:cNvPr id="4" name="Rounded Rectangle 3"/>
+          <p:cNvSpPr/>
+          <p:nvPr/>
+        </p:nvSpPr>
+        <p:spPr>
+          <a:xfrm>
+            <a:off x="713232" y="996695"/>
+            <a:ext cx="1463040" cy="68580"/>
+          </a:xfrm>
+          <a:prstGeom prst="roundRect">
+            <a:avLst/>
+          </a:prstGeom>
+          <a:solidFill>
+            <a:srgbClr val="FFFFFF"/>
+          </a:solidFill>
+          <a:ln>
+            <a:noFill/>
+          </a:ln>
+          <a:effectLst/>
+        </p:spPr>
+        <p:style>
+          <a:lnRef idx="1">
+            <a:schemeClr val="accent1"/>
+          </a:lnRef>
+          <a:fillRef idx="3">
+            <a:schemeClr val="accent1"/>
+          </a:fillRef>
+          <a:effectRef idx="2">
+            <a:schemeClr val="accent1"/>
+          </a:effectRef>
+          <a:fontRef idx="minor">
+            <a:schemeClr val="lt1"/>
+          </a:fontRef>
+        </p:style>
+        <p:txBody>
+          <a:bodyPr rtlCol="0" anchor="ctr"/>
+          <a:lstStyle/>
+          <a:p>
+            <a:pPr algn="ctr"/>
+          </a:p>
+        </p:txBody>
+      </p:sp>
+      <p:sp>
+        <p:nvSpPr>
+          <p:cNvPr id="5" name="TextBox 4"/>
+          <p:cNvSpPr txBox="1"/>
+          <p:nvPr/>
+        </p:nvSpPr>
+        <p:spPr>
+          <a:xfrm>
+            <a:off x="713232" y="1481328"/>
+            <a:ext cx="4937760" cy="411480"/>
+          </a:xfrm>
+          <a:prstGeom prst="rect">
+            <a:avLst/>
+          </a:prstGeom>
+          <a:noFill/>
+        </p:spPr>
+        <p:txBody>
+          <a:bodyPr wrap="square" lIns="0" rIns="0" tIns="0" bIns="0">
+            <a:spAutoFit/>
+          </a:bodyPr>
+          <a:lstStyle/>
+          <a:p>
+            <a:pPr algn="l">
+              <a:lnSpc>
+                <a:spcPct val="125000"/>
+              </a:lnSpc>
+            </a:pPr>
+            <a:r>
+              <a:rPr sz="1800" b="1">
+                <a:solidFill>
+                  <a:srgbClr val="8EC5E8"/>
+                </a:solidFill>
+                <a:latin typeface="Yu Gothic UI"/>
+              </a:rPr>
+              <a:t>相続</a:t>
+            </a:r>
+          </a:p>
+        </p:txBody>
+      </p:sp>
+      <p:sp>
+        <p:nvSpPr>
+          <p:cNvPr id="6" name="TextBox 5"/>
+          <p:cNvSpPr txBox="1"/>
+          <p:nvPr/>
+        </p:nvSpPr>
+        <p:spPr>
+          <a:xfrm>
+            <a:off x="713232" y="1938528"/>
+            <a:ext cx="5257800" cy="914400"/>
+          </a:xfrm>
+          <a:prstGeom prst="rect">
+            <a:avLst/>
+          </a:prstGeom>
+          <a:noFill/>
+        </p:spPr>
+        <p:txBody>
+          <a:bodyPr wrap="square" lIns="0" rIns="0" tIns="0" bIns="0">
+            <a:spAutoFit/>
+          </a:bodyPr>
+          <a:lstStyle/>
+          <a:p>
+            <a:pPr algn="l">
+              <a:lnSpc>
+                <a:spcPct val="125000"/>
+              </a:lnSpc>
+            </a:pPr>
+            <a:r>
+              <a:rPr sz="3400" b="1">
+                <a:solidFill>
+                  <a:srgbClr val="FFFFFF"/>
+                </a:solidFill>
+                <a:latin typeface="Yu Gothic UI"/>
+              </a:rPr>
+              <a:t>生命保険金の非課税枠</a:t>
+            </a:r>
+          </a:p>
+        </p:txBody>
+      </p:sp>
+      <p:sp>
+        <p:nvSpPr>
+          <p:cNvPr id="7" name="TextBox 6"/>
+          <p:cNvSpPr txBox="1"/>
+          <p:nvPr/>
+        </p:nvSpPr>
+        <p:spPr>
+          <a:xfrm>
+            <a:off x="713232" y="2999232"/>
+            <a:ext cx="5120640" cy="1280160"/>
+          </a:xfrm>
+          <a:prstGeom prst="rect">
+            <a:avLst/>
+          </a:prstGeom>
+          <a:noFill/>
+        </p:spPr>
+        <p:txBody>
+          <a:bodyPr wrap="square" lIns="0" rIns="0" tIns="0" bIns="0">
+            <a:spAutoFit/>
+          </a:bodyPr>
+          <a:lstStyle/>
+          <a:p>
+            <a:pPr algn="l">
+              <a:lnSpc>
+                <a:spcPct val="135000"/>
+              </a:lnSpc>
+            </a:pPr>
+            <a:r>
+              <a:rPr sz="2600" b="0">
+                <a:solidFill>
+                  <a:srgbClr val="FFFFFF"/>
+                </a:solidFill>
+                <a:latin typeface="Yu Gothic UI"/>
+              </a:rPr>
+              <a:t>受取人が相続人でないと</a:t>
+            </a:r>
+          </a:p>
+          <a:p>
+            <a:pPr algn="l">
+              <a:lnSpc>
+                <a:spcPct val="135000"/>
+              </a:lnSpc>
+            </a:pPr>
+            <a:r>
+              <a:rPr sz="2600" b="0">
+                <a:solidFill>
+                  <a:srgbClr val="FFFFFF"/>
+                </a:solidFill>
+                <a:latin typeface="Yu Gothic UI"/>
+              </a:rPr>
+              <a:t>1円も使えない</a:t>
+            </a:r>
+          </a:p>
+        </p:txBody>
+      </p:sp>
+      <p:sp>
+        <p:nvSpPr>
+          <p:cNvPr id="8" name="TextBox 7"/>
+          <p:cNvSpPr txBox="1"/>
+          <p:nvPr/>
+        </p:nvSpPr>
+        <p:spPr>
+          <a:xfrm>
+            <a:off x="713232" y="5138928"/>
+            <a:ext cx="5120640" cy="365760"/>
+          </a:xfrm>
+          <a:prstGeom prst="rect">
+            <a:avLst/>
+          </a:prstGeom>
+          <a:noFill/>
+        </p:spPr>
+        <p:txBody>
+          <a:bodyPr wrap="square" lIns="0" rIns="0" tIns="0" bIns="0">
+            <a:spAutoFit/>
+          </a:bodyPr>
+          <a:lstStyle/>
+          <a:p>
+            <a:pPr algn="l">
+              <a:lnSpc>
+                <a:spcPct val="125000"/>
+              </a:lnSpc>
+            </a:pPr>
+            <a:r>
+              <a:rPr sz="1700" b="0">
+                <a:solidFill>
+                  <a:srgbClr val="8EC5E8"/>
+                </a:solidFill>
+                <a:latin typeface="Yu Gothic UI"/>
+              </a:rPr>
+              <a:t>家計の制度ログ　kakei.nexeed-lab.com</a:t>
+            </a:r>
+          </a:p>
+        </p:txBody>
+      </p:sp>
+      <p:pic>
+        <p:nvPicPr>
+          <p:cNvPr id="9" name="Picture 8" descr="seimeihoken-hikazei.png"/>
+          <p:cNvPicPr>
+            <a:picLocks noChangeAspect="1"/>
+          </p:cNvPicPr>
+          <p:nvPr/>
+        </p:nvPicPr>
+        <p:blipFill>
+          <a:blip r:embed="rId2">
+            <a:extLst>
+              <a:ext uri="{96DAC541-7B7A-43D3-8B79-37D633B846F1}">
+                <asvg:svgBlip xmlns:asvg="http://schemas.microsoft.com/office/drawing/2016/SVG/main" r:embed="rId3"/>
+              </a:ext>
+            </a:extLst>
+          </a:blip>
+          <a:stretch>
+            <a:fillRect/>
+          </a:stretch>
+        </p:blipFill>
+        <p:spPr>
+          <a:xfrm>
+            <a:off x="6053328" y="566928"/>
+            <a:ext cx="4764024" cy="4288536"/>
+          </a:xfrm>
+          <a:prstGeom prst="rect">
+            <a:avLst/>
+          </a:prstGeom>
+        </p:spPr>
+      </p:pic>
+      <p:sp>
+        <p:nvSpPr>
+          <p:cNvPr id="10" name="TextBox 9"/>
+          <p:cNvSpPr txBox="1"/>
+          <p:nvPr/>
+        </p:nvSpPr>
+        <p:spPr>
+          <a:xfrm>
+            <a:off x="6237368" y="1406669"/>
+            <a:ext cx="841248" cy="264160"/>
+          </a:xfrm>
+          <a:prstGeom prst="rect">
+            <a:avLst/>
+          </a:prstGeom>
+          <a:noFill/>
+        </p:spPr>
+        <p:txBody>
+          <a:bodyPr wrap="square" lIns="0" rIns="0" tIns="0" bIns="0">
+            <a:spAutoFit/>
+          </a:bodyPr>
+          <a:lstStyle/>
+          <a:p>
+            <a:pPr algn="ctr">
+              <a:lnSpc>
+                <a:spcPct val="115000"/>
+              </a:lnSpc>
+            </a:pPr>
+            <a:r>
+              <a:rPr sz="1300" b="1">
+                <a:solidFill>
+                  <a:srgbClr val="014172"/>
+                </a:solidFill>
+                <a:latin typeface="Yu Gothic UI"/>
+              </a:rPr>
+              <a:t>配偶者</a:t>
+            </a:r>
+          </a:p>
+        </p:txBody>
+      </p:sp>
+      <p:sp>
+        <p:nvSpPr>
+          <p:cNvPr id="11" name="TextBox 10"/>
+          <p:cNvSpPr txBox="1"/>
+          <p:nvPr/>
+        </p:nvSpPr>
+        <p:spPr>
+          <a:xfrm>
+            <a:off x="6237368" y="2289603"/>
+            <a:ext cx="841248" cy="264160"/>
+          </a:xfrm>
+          <a:prstGeom prst="rect">
+            <a:avLst/>
+          </a:prstGeom>
+          <a:noFill/>
+        </p:spPr>
+        <p:txBody>
+          <a:bodyPr wrap="square" lIns="0" rIns="0" tIns="0" bIns="0">
+            <a:spAutoFit/>
+          </a:bodyPr>
+          <a:lstStyle/>
+          <a:p>
+            <a:pPr algn="ctr">
+              <a:lnSpc>
+                <a:spcPct val="115000"/>
+              </a:lnSpc>
+            </a:pPr>
+            <a:r>
+              <a:rPr sz="1300" b="1">
+                <a:solidFill>
+                  <a:srgbClr val="014172"/>
+                </a:solidFill>
+                <a:latin typeface="Yu Gothic UI"/>
+              </a:rPr>
+              <a:t>子</a:t>
+            </a:r>
+          </a:p>
+        </p:txBody>
+      </p:sp>
+      <p:sp>
+        <p:nvSpPr>
+          <p:cNvPr id="12" name="TextBox 11"/>
+          <p:cNvSpPr txBox="1"/>
+          <p:nvPr/>
+        </p:nvSpPr>
+        <p:spPr>
+          <a:xfrm>
+            <a:off x="6237368" y="3777978"/>
+            <a:ext cx="841248" cy="264160"/>
+          </a:xfrm>
+          <a:prstGeom prst="rect">
+            <a:avLst/>
+          </a:prstGeom>
+          <a:noFill/>
+        </p:spPr>
+        <p:txBody>
+          <a:bodyPr wrap="square" lIns="0" rIns="0" tIns="0" bIns="0">
+            <a:spAutoFit/>
+          </a:bodyPr>
+          <a:lstStyle/>
+          <a:p>
+            <a:pPr algn="ctr">
+              <a:lnSpc>
+                <a:spcPct val="115000"/>
+              </a:lnSpc>
+            </a:pPr>
+            <a:r>
+              <a:rPr sz="1300" b="1">
+                <a:solidFill>
+                  <a:srgbClr val="014172"/>
+                </a:solidFill>
+                <a:latin typeface="Yu Gothic UI"/>
+              </a:rPr>
+              <a:t>孫</a:t>
+            </a:r>
+          </a:p>
+        </p:txBody>
+      </p:sp>
+      <p:sp>
+        <p:nvSpPr>
+          <p:cNvPr id="13" name="TextBox 12"/>
+          <p:cNvSpPr txBox="1"/>
+          <p:nvPr/>
+        </p:nvSpPr>
+        <p:spPr>
+          <a:xfrm>
+            <a:off x="8556286" y="1838992"/>
+            <a:ext cx="1920240" cy="284480"/>
+          </a:xfrm>
+          <a:prstGeom prst="rect">
+            <a:avLst/>
+          </a:prstGeom>
+          <a:noFill/>
+        </p:spPr>
+        <p:txBody>
+          <a:bodyPr wrap="square" lIns="0" rIns="0" tIns="0" bIns="0">
+            <a:spAutoFit/>
+          </a:bodyPr>
+          <a:lstStyle/>
+          <a:p>
+            <a:pPr algn="ctr">
+              <a:lnSpc>
+                <a:spcPct val="115000"/>
+              </a:lnSpc>
+            </a:pPr>
+            <a:r>
+              <a:rPr sz="1400" b="1">
+                <a:solidFill>
+                  <a:srgbClr val="014172"/>
+                </a:solidFill>
+                <a:latin typeface="Yu Gothic UI"/>
+              </a:rPr>
+              <a:t>非課税枠に入る</a:t>
+            </a:r>
+          </a:p>
+        </p:txBody>
+      </p:sp>
+      <p:sp>
+        <p:nvSpPr>
+          <p:cNvPr id="14" name="TextBox 13"/>
+          <p:cNvSpPr txBox="1"/>
+          <p:nvPr/>
+        </p:nvSpPr>
+        <p:spPr>
+          <a:xfrm>
+            <a:off x="8556286" y="3796266"/>
+            <a:ext cx="1920240" cy="223520"/>
+          </a:xfrm>
+          <a:prstGeom prst="rect">
+            <a:avLst/>
+          </a:prstGeom>
+          <a:noFill/>
+        </p:spPr>
+        <p:txBody>
+          <a:bodyPr wrap="square" lIns="0" rIns="0" tIns="0" bIns="0">
+            <a:spAutoFit/>
+          </a:bodyPr>
+          <a:lstStyle/>
+          <a:p>
+            <a:pPr algn="ctr">
+              <a:lnSpc>
+                <a:spcPct val="115000"/>
+              </a:lnSpc>
+            </a:pPr>
+            <a:r>
+              <a:rPr sz="1100" b="1">
+                <a:solidFill>
+                  <a:srgbClr val="E7CD7A"/>
+                </a:solidFill>
+                <a:latin typeface="Yu Gothic UI"/>
+              </a:rPr>
+              <a:t>枠の外</a:t>
+            </a:r>
+          </a:p>
+          <a:p>
+            <a:pPr algn="ctr">
+              <a:lnSpc>
+                <a:spcPct val="115000"/>
+              </a:lnSpc>
+            </a:pPr>
+            <a:r>
+              <a:rPr sz="1100" b="1">
+                <a:solidFill>
+                  <a:srgbClr val="E7CD7A"/>
+                </a:solidFill>
+                <a:latin typeface="Yu Gothic UI"/>
+              </a:rPr>
+              <a:t>非課税の適用なし</a:t>
+            </a:r>
+          </a:p>
+        </p:txBody>
+      </p:sp>
+      <p:sp>
+        <p:nvSpPr>
+          <p:cNvPr id="15" name="TextBox 14"/>
+          <p:cNvSpPr txBox="1"/>
+          <p:nvPr/>
+        </p:nvSpPr>
+        <p:spPr>
+          <a:xfrm>
+            <a:off x="6053328" y="5376672"/>
+            <a:ext cx="4764024" cy="274320"/>
+          </a:xfrm>
+          <a:prstGeom prst="rect">
+            <a:avLst/>
+          </a:prstGeom>
+          <a:noFill/>
+        </p:spPr>
+        <p:txBody>
+          <a:bodyPr wrap="square" lIns="0" rIns="0" tIns="0" bIns="0">
+            <a:spAutoFit/>
+          </a:bodyPr>
+          <a:lstStyle/>
+          <a:p>
+            <a:pPr algn="l">
+              <a:lnSpc>
+                <a:spcPct val="125000"/>
+              </a:lnSpc>
+            </a:pPr>
+            <a:r>
+              <a:rPr sz="1300" b="0">
+                <a:solidFill>
+                  <a:srgbClr val="8EC5E8"/>
+                </a:solidFill>
+                <a:latin typeface="Yu Gothic UI"/>
+              </a:rPr>
+              <a:t>枠の大きさ＝500万円×法定相続人の数</a:t>
+            </a:r>
+          </a:p>
+          <a:p>
+            <a:pPr algn="l">
+              <a:lnSpc>
+                <a:spcPct val="125000"/>
+              </a:lnSpc>
+            </a:pPr>
+            <a:r>
+              <a:rPr sz="1300" b="0">
+                <a:solidFill>
+                  <a:srgbClr val="8EC5E8"/>
+                </a:solidFill>
+                <a:latin typeface="Yu Gothic UI"/>
+              </a:rPr>
+              <a:t>箱の大小は金額を表していない</a:t>
+            </a:r>
+          </a:p>
+        </p:txBody>
+      </p:sp>
+    </p:spTree>
+  </p:cSld>
+  <p:clrMapOvr>
+    <a:masterClrMapping/>
+  </p:clrMapOvr>
+</p:sld>
+</file>
+
+<file path=ppt/slides/slide12.xml><?xml version="1.0" encoding="utf-8"?>
+<p:sld xmlns:a="http://schemas.openxmlformats.org/drawingml/2006/main" xmlns:p="http://schemas.openxmlformats.org/presentationml/2006/main" xmlns:r="http://schemas.openxmlformats.org/officeDocument/2006/relationships">
+  <p:cSld>
+    <p:bg>
+      <p:bgPr>
+        <a:solidFill>
+          <a:srgbClr val="014172"/>
+        </a:solidFill>
+        <a:effectLst/>
+      </p:bgPr>
+    </p:bg>
+    <p:spTree>
+      <p:nvGrpSpPr>
+        <p:cNvPr id="1" name=""/>
+        <p:cNvGrpSpPr/>
+        <p:nvPr/>
+      </p:nvGrpSpPr>
+      <p:grpSpPr/>
+      <p:sp>
+        <p:nvSpPr>
+          <p:cNvPr id="2" name="Rounded Rectangle 1"/>
+          <p:cNvSpPr/>
+          <p:nvPr/>
+        </p:nvSpPr>
+        <p:spPr>
+          <a:xfrm>
+            <a:off x="713232" y="566928"/>
+            <a:ext cx="2377440" cy="68580"/>
+          </a:xfrm>
+          <a:prstGeom prst="roundRect">
+            <a:avLst/>
+          </a:prstGeom>
+          <a:solidFill>
+            <a:srgbClr val="FFFFFF"/>
+          </a:solidFill>
+          <a:ln>
+            <a:noFill/>
+          </a:ln>
+          <a:effectLst/>
+        </p:spPr>
+        <p:style>
+          <a:lnRef idx="1">
+            <a:schemeClr val="accent1"/>
+          </a:lnRef>
+          <a:fillRef idx="3">
+            <a:schemeClr val="accent1"/>
+          </a:fillRef>
+          <a:effectRef idx="2">
+            <a:schemeClr val="accent1"/>
+          </a:effectRef>
+          <a:fontRef idx="minor">
+            <a:schemeClr val="lt1"/>
+          </a:fontRef>
+        </p:style>
+        <p:txBody>
+          <a:bodyPr rtlCol="0" anchor="ctr"/>
+          <a:lstStyle/>
+          <a:p>
+            <a:pPr algn="ctr"/>
+          </a:p>
+        </p:txBody>
+      </p:sp>
+      <p:sp>
+        <p:nvSpPr>
+          <p:cNvPr id="3" name="Rounded Rectangle 2"/>
+          <p:cNvSpPr/>
+          <p:nvPr/>
+        </p:nvSpPr>
+        <p:spPr>
+          <a:xfrm>
+            <a:off x="713232" y="781812"/>
+            <a:ext cx="1920240" cy="68580"/>
+          </a:xfrm>
+          <a:prstGeom prst="roundRect">
+            <a:avLst/>
+          </a:prstGeom>
+          <a:solidFill>
+            <a:srgbClr val="FFFFFF"/>
+          </a:solidFill>
+          <a:ln>
+            <a:noFill/>
+          </a:ln>
+          <a:effectLst/>
+        </p:spPr>
+        <p:style>
+          <a:lnRef idx="1">
+            <a:schemeClr val="accent1"/>
+          </a:lnRef>
+          <a:fillRef idx="3">
+            <a:schemeClr val="accent1"/>
+          </a:fillRef>
+          <a:effectRef idx="2">
+            <a:schemeClr val="accent1"/>
+          </a:effectRef>
+          <a:fontRef idx="minor">
+            <a:schemeClr val="lt1"/>
+          </a:fontRef>
+        </p:style>
+        <p:txBody>
+          <a:bodyPr rtlCol="0" anchor="ctr"/>
+          <a:lstStyle/>
+          <a:p>
+            <a:pPr algn="ctr"/>
+          </a:p>
+        </p:txBody>
+      </p:sp>
+      <p:sp>
+        <p:nvSpPr>
+          <p:cNvPr id="4" name="Rounded Rectangle 3"/>
+          <p:cNvSpPr/>
+          <p:nvPr/>
+        </p:nvSpPr>
+        <p:spPr>
+          <a:xfrm>
+            <a:off x="713232" y="996695"/>
+            <a:ext cx="1463040" cy="68580"/>
+          </a:xfrm>
+          <a:prstGeom prst="roundRect">
+            <a:avLst/>
+          </a:prstGeom>
+          <a:solidFill>
+            <a:srgbClr val="FFFFFF"/>
+          </a:solidFill>
+          <a:ln>
+            <a:noFill/>
+          </a:ln>
+          <a:effectLst/>
+        </p:spPr>
+        <p:style>
+          <a:lnRef idx="1">
+            <a:schemeClr val="accent1"/>
+          </a:lnRef>
+          <a:fillRef idx="3">
+            <a:schemeClr val="accent1"/>
+          </a:fillRef>
+          <a:effectRef idx="2">
+            <a:schemeClr val="accent1"/>
+          </a:effectRef>
+          <a:fontRef idx="minor">
+            <a:schemeClr val="lt1"/>
+          </a:fontRef>
+        </p:style>
+        <p:txBody>
+          <a:bodyPr rtlCol="0" anchor="ctr"/>
+          <a:lstStyle/>
+          <a:p>
+            <a:pPr algn="ctr"/>
+          </a:p>
+        </p:txBody>
+      </p:sp>
+      <p:sp>
+        <p:nvSpPr>
+          <p:cNvPr id="5" name="TextBox 4"/>
+          <p:cNvSpPr txBox="1"/>
+          <p:nvPr/>
+        </p:nvSpPr>
+        <p:spPr>
+          <a:xfrm>
+            <a:off x="713232" y="1481328"/>
+            <a:ext cx="4937760" cy="411480"/>
+          </a:xfrm>
+          <a:prstGeom prst="rect">
+            <a:avLst/>
+          </a:prstGeom>
+          <a:noFill/>
+        </p:spPr>
+        <p:txBody>
+          <a:bodyPr wrap="square" lIns="0" rIns="0" tIns="0" bIns="0">
+            <a:spAutoFit/>
+          </a:bodyPr>
+          <a:lstStyle/>
+          <a:p>
+            <a:pPr algn="l">
+              <a:lnSpc>
+                <a:spcPct val="125000"/>
+              </a:lnSpc>
+            </a:pPr>
+            <a:r>
+              <a:rPr sz="1800" b="1">
+                <a:solidFill>
+                  <a:srgbClr val="8EC5E8"/>
+                </a:solidFill>
+                <a:latin typeface="Yu Gothic UI"/>
+              </a:rPr>
+              <a:t>年金</a:t>
+            </a:r>
+          </a:p>
+        </p:txBody>
+      </p:sp>
+      <p:sp>
+        <p:nvSpPr>
+          <p:cNvPr id="6" name="TextBox 5"/>
+          <p:cNvSpPr txBox="1"/>
+          <p:nvPr/>
+        </p:nvSpPr>
+        <p:spPr>
+          <a:xfrm>
+            <a:off x="713232" y="1938528"/>
+            <a:ext cx="5257800" cy="914400"/>
+          </a:xfrm>
+          <a:prstGeom prst="rect">
+            <a:avLst/>
+          </a:prstGeom>
+          <a:noFill/>
+        </p:spPr>
+        <p:txBody>
+          <a:bodyPr wrap="square" lIns="0" rIns="0" tIns="0" bIns="0">
+            <a:spAutoFit/>
+          </a:bodyPr>
+          <a:lstStyle/>
+          <a:p>
+            <a:pPr algn="l">
+              <a:lnSpc>
+                <a:spcPct val="125000"/>
+              </a:lnSpc>
+            </a:pPr>
+            <a:r>
+              <a:rPr sz="3200" b="1">
+                <a:solidFill>
+                  <a:srgbClr val="FFFFFF"/>
+                </a:solidFill>
+                <a:latin typeface="Yu Gothic UI"/>
+              </a:rPr>
+              <a:t>遺族基礎年金が止まる日</a:t>
+            </a:r>
+          </a:p>
+        </p:txBody>
+      </p:sp>
+      <p:sp>
+        <p:nvSpPr>
+          <p:cNvPr id="7" name="TextBox 6"/>
+          <p:cNvSpPr txBox="1"/>
+          <p:nvPr/>
+        </p:nvSpPr>
+        <p:spPr>
+          <a:xfrm>
+            <a:off x="713232" y="2999232"/>
+            <a:ext cx="5120640" cy="1280160"/>
+          </a:xfrm>
+          <a:prstGeom prst="rect">
+            <a:avLst/>
+          </a:prstGeom>
+          <a:noFill/>
+        </p:spPr>
+        <p:txBody>
+          <a:bodyPr wrap="square" lIns="0" rIns="0" tIns="0" bIns="0">
+            <a:spAutoFit/>
+          </a:bodyPr>
+          <a:lstStyle/>
+          <a:p>
+            <a:pPr algn="l">
+              <a:lnSpc>
+                <a:spcPct val="135000"/>
+              </a:lnSpc>
+            </a:pPr>
+            <a:r>
+              <a:rPr sz="2600" b="0">
+                <a:solidFill>
+                  <a:srgbClr val="FFFFFF"/>
+                </a:solidFill>
+                <a:latin typeface="Yu Gothic UI"/>
+              </a:rPr>
+              <a:t>子がいない世帯には</a:t>
+            </a:r>
+          </a:p>
+          <a:p>
+            <a:pPr algn="l">
+              <a:lnSpc>
+                <a:spcPct val="135000"/>
+              </a:lnSpc>
+            </a:pPr>
+            <a:r>
+              <a:rPr sz="2600" b="0">
+                <a:solidFill>
+                  <a:srgbClr val="FFFFFF"/>
+                </a:solidFill>
+                <a:latin typeface="Yu Gothic UI"/>
+              </a:rPr>
+              <a:t>はじめから出ない</a:t>
+            </a:r>
+          </a:p>
+        </p:txBody>
+      </p:sp>
+      <p:sp>
+        <p:nvSpPr>
+          <p:cNvPr id="8" name="TextBox 7"/>
+          <p:cNvSpPr txBox="1"/>
+          <p:nvPr/>
+        </p:nvSpPr>
+        <p:spPr>
+          <a:xfrm>
+            <a:off x="713232" y="5138928"/>
+            <a:ext cx="5120640" cy="365760"/>
+          </a:xfrm>
+          <a:prstGeom prst="rect">
+            <a:avLst/>
+          </a:prstGeom>
+          <a:noFill/>
+        </p:spPr>
+        <p:txBody>
+          <a:bodyPr wrap="square" lIns="0" rIns="0" tIns="0" bIns="0">
+            <a:spAutoFit/>
+          </a:bodyPr>
+          <a:lstStyle/>
+          <a:p>
+            <a:pPr algn="l">
+              <a:lnSpc>
+                <a:spcPct val="125000"/>
+              </a:lnSpc>
+            </a:pPr>
+            <a:r>
+              <a:rPr sz="1700" b="0">
+                <a:solidFill>
+                  <a:srgbClr val="8EC5E8"/>
+                </a:solidFill>
+                <a:latin typeface="Yu Gothic UI"/>
+              </a:rPr>
+              <a:t>家計の制度ログ　kakei.nexeed-lab.com</a:t>
+            </a:r>
+          </a:p>
+        </p:txBody>
+      </p:sp>
+      <p:pic>
+        <p:nvPicPr>
+          <p:cNvPr id="9" name="Picture 8" descr="izoku-nenkin.png"/>
+          <p:cNvPicPr>
+            <a:picLocks noChangeAspect="1"/>
+          </p:cNvPicPr>
+          <p:nvPr/>
+        </p:nvPicPr>
+        <p:blipFill>
+          <a:blip r:embed="rId2">
+            <a:extLst>
+              <a:ext uri="{96DAC541-7B7A-43D3-8B79-37D633B846F1}">
+                <asvg:svgBlip xmlns:asvg="http://schemas.microsoft.com/office/drawing/2016/SVG/main" r:embed="rId3"/>
+              </a:ext>
+            </a:extLst>
+          </a:blip>
+          <a:stretch>
+            <a:fillRect/>
+          </a:stretch>
+        </p:blipFill>
+        <p:spPr>
+          <a:xfrm>
+            <a:off x="6053328" y="566928"/>
+            <a:ext cx="4764024" cy="4288536"/>
+          </a:xfrm>
+          <a:prstGeom prst="rect">
+            <a:avLst/>
+          </a:prstGeom>
+        </p:spPr>
+      </p:pic>
+      <p:sp>
+        <p:nvSpPr>
+          <p:cNvPr id="10" name="TextBox 9"/>
+          <p:cNvSpPr txBox="1"/>
+          <p:nvPr/>
+        </p:nvSpPr>
+        <p:spPr>
+          <a:xfrm>
+            <a:off x="6529730" y="1239227"/>
+            <a:ext cx="1737360" cy="243840"/>
+          </a:xfrm>
+          <a:prstGeom prst="rect">
+            <a:avLst/>
+          </a:prstGeom>
+          <a:noFill/>
+        </p:spPr>
+        <p:txBody>
+          <a:bodyPr wrap="square" lIns="0" rIns="0" tIns="0" bIns="0">
+            <a:spAutoFit/>
+          </a:bodyPr>
+          <a:lstStyle/>
+          <a:p>
+            <a:pPr algn="l">
+              <a:lnSpc>
+                <a:spcPct val="115000"/>
+              </a:lnSpc>
+            </a:pPr>
+            <a:r>
+              <a:rPr sz="1200" b="1">
+                <a:solidFill>
+                  <a:srgbClr val="FFFFFF"/>
+                </a:solidFill>
+                <a:latin typeface="Yu Gothic UI"/>
+              </a:rPr>
+              <a:t>子がいる世帯</a:t>
+            </a:r>
+          </a:p>
+        </p:txBody>
+      </p:sp>
+      <p:sp>
+        <p:nvSpPr>
+          <p:cNvPr id="11" name="TextBox 10"/>
+          <p:cNvSpPr txBox="1"/>
+          <p:nvPr/>
+        </p:nvSpPr>
+        <p:spPr>
+          <a:xfrm>
+            <a:off x="6529730" y="2601468"/>
+            <a:ext cx="1737360" cy="243840"/>
+          </a:xfrm>
+          <a:prstGeom prst="rect">
+            <a:avLst/>
+          </a:prstGeom>
+          <a:noFill/>
+        </p:spPr>
+        <p:txBody>
+          <a:bodyPr wrap="square" lIns="0" rIns="0" tIns="0" bIns="0">
+            <a:spAutoFit/>
+          </a:bodyPr>
+          <a:lstStyle/>
+          <a:p>
+            <a:pPr algn="l">
+              <a:lnSpc>
+                <a:spcPct val="115000"/>
+              </a:lnSpc>
+            </a:pPr>
+            <a:r>
+              <a:rPr sz="1200" b="1">
+                <a:solidFill>
+                  <a:srgbClr val="FFFFFF"/>
+                </a:solidFill>
+                <a:latin typeface="Yu Gothic UI"/>
+              </a:rPr>
+              <a:t>子がいない世帯</a:t>
+            </a:r>
+          </a:p>
+        </p:txBody>
+      </p:sp>
+      <p:sp>
+        <p:nvSpPr>
+          <p:cNvPr id="12" name="TextBox 11"/>
+          <p:cNvSpPr txBox="1"/>
+          <p:nvPr/>
+        </p:nvSpPr>
+        <p:spPr>
+          <a:xfrm>
+            <a:off x="6824659" y="1907734"/>
+            <a:ext cx="1828800" cy="243840"/>
+          </a:xfrm>
+          <a:prstGeom prst="rect">
+            <a:avLst/>
+          </a:prstGeom>
+          <a:noFill/>
+        </p:spPr>
+        <p:txBody>
+          <a:bodyPr wrap="square" lIns="0" rIns="0" tIns="0" bIns="0">
+            <a:spAutoFit/>
+          </a:bodyPr>
+          <a:lstStyle/>
+          <a:p>
+            <a:pPr algn="ctr">
+              <a:lnSpc>
+                <a:spcPct val="115000"/>
+              </a:lnSpc>
+            </a:pPr>
+            <a:r>
+              <a:rPr sz="1200" b="1">
+                <a:solidFill>
+                  <a:srgbClr val="014172"/>
+                </a:solidFill>
+                <a:latin typeface="Yu Gothic UI"/>
+              </a:rPr>
+              <a:t>遺族基礎年金が出る</a:t>
+            </a:r>
+          </a:p>
+        </p:txBody>
+      </p:sp>
+      <p:sp>
+        <p:nvSpPr>
+          <p:cNvPr id="13" name="TextBox 12"/>
+          <p:cNvSpPr txBox="1"/>
+          <p:nvPr/>
+        </p:nvSpPr>
+        <p:spPr>
+          <a:xfrm>
+            <a:off x="9233540" y="1916878"/>
+            <a:ext cx="1188720" cy="223520"/>
+          </a:xfrm>
+          <a:prstGeom prst="rect">
+            <a:avLst/>
+          </a:prstGeom>
+          <a:noFill/>
+        </p:spPr>
+        <p:txBody>
+          <a:bodyPr wrap="square" lIns="0" rIns="0" tIns="0" bIns="0">
+            <a:spAutoFit/>
+          </a:bodyPr>
+          <a:lstStyle/>
+          <a:p>
+            <a:pPr algn="ctr">
+              <a:lnSpc>
+                <a:spcPct val="115000"/>
+              </a:lnSpc>
+            </a:pPr>
+            <a:r>
+              <a:rPr sz="1100" b="1">
+                <a:solidFill>
+                  <a:srgbClr val="E7CD7A"/>
+                </a:solidFill>
+                <a:latin typeface="Yu Gothic UI"/>
+              </a:rPr>
+              <a:t>止まる</a:t>
+            </a:r>
+          </a:p>
+        </p:txBody>
+      </p:sp>
+      <p:sp>
+        <p:nvSpPr>
+          <p:cNvPr id="14" name="TextBox 13"/>
+          <p:cNvSpPr txBox="1"/>
+          <p:nvPr/>
+        </p:nvSpPr>
+        <p:spPr>
+          <a:xfrm>
+            <a:off x="6751366" y="3279119"/>
+            <a:ext cx="1828800" cy="223520"/>
+          </a:xfrm>
+          <a:prstGeom prst="rect">
+            <a:avLst/>
+          </a:prstGeom>
+          <a:noFill/>
+        </p:spPr>
+        <p:txBody>
+          <a:bodyPr wrap="square" lIns="0" rIns="0" tIns="0" bIns="0">
+            <a:spAutoFit/>
+          </a:bodyPr>
+          <a:lstStyle/>
+          <a:p>
+            <a:pPr algn="ctr">
+              <a:lnSpc>
+                <a:spcPct val="115000"/>
+              </a:lnSpc>
+            </a:pPr>
+            <a:r>
+              <a:rPr sz="1100" b="1">
+                <a:solidFill>
+                  <a:srgbClr val="E7CD7A"/>
+                </a:solidFill>
+                <a:latin typeface="Yu Gothic UI"/>
+              </a:rPr>
+              <a:t>はじめから出ない</a:t>
+            </a:r>
+          </a:p>
+        </p:txBody>
+      </p:sp>
+      <p:sp>
+        <p:nvSpPr>
+          <p:cNvPr id="15" name="TextBox 14"/>
+          <p:cNvSpPr txBox="1"/>
+          <p:nvPr/>
+        </p:nvSpPr>
+        <p:spPr>
+          <a:xfrm>
+            <a:off x="7887755" y="4486531"/>
+            <a:ext cx="2194560" cy="203200"/>
+          </a:xfrm>
+          <a:prstGeom prst="rect">
+            <a:avLst/>
+          </a:prstGeom>
+          <a:noFill/>
+        </p:spPr>
+        <p:txBody>
+          <a:bodyPr wrap="square" lIns="0" rIns="0" tIns="0" bIns="0">
+            <a:spAutoFit/>
+          </a:bodyPr>
+          <a:lstStyle/>
+          <a:p>
+            <a:pPr algn="ctr">
+              <a:lnSpc>
+                <a:spcPct val="115000"/>
+              </a:lnSpc>
+            </a:pPr>
+            <a:r>
+              <a:rPr sz="1000" b="1">
+                <a:solidFill>
+                  <a:srgbClr val="E7CD7A"/>
+                </a:solidFill>
+                <a:latin typeface="Yu Gothic UI"/>
+              </a:rPr>
+              <a:t>子が18歳到達年度の末日</a:t>
+            </a:r>
+          </a:p>
+        </p:txBody>
+      </p:sp>
+      <p:sp>
+        <p:nvSpPr>
+          <p:cNvPr id="16" name="TextBox 15"/>
+          <p:cNvSpPr txBox="1"/>
+          <p:nvPr/>
+        </p:nvSpPr>
+        <p:spPr>
+          <a:xfrm>
+            <a:off x="6053328" y="5376672"/>
+            <a:ext cx="4764024" cy="274320"/>
+          </a:xfrm>
+          <a:prstGeom prst="rect">
+            <a:avLst/>
+          </a:prstGeom>
+          <a:noFill/>
+        </p:spPr>
+        <p:txBody>
+          <a:bodyPr wrap="square" lIns="0" rIns="0" tIns="0" bIns="0">
+            <a:spAutoFit/>
+          </a:bodyPr>
+          <a:lstStyle/>
+          <a:p>
+            <a:pPr algn="l">
+              <a:lnSpc>
+                <a:spcPct val="125000"/>
+              </a:lnSpc>
+            </a:pPr>
+            <a:r>
+              <a:rPr sz="1300" b="0">
+                <a:solidFill>
+                  <a:srgbClr val="8EC5E8"/>
+                </a:solidFill>
+                <a:latin typeface="Yu Gothic UI"/>
+              </a:rPr>
+              <a:t>横＝時間　白＝出る期間　黄色い破線＝出ない期間</a:t>
+            </a:r>
+          </a:p>
+          <a:p>
+            <a:pPr algn="l">
+              <a:lnSpc>
+                <a:spcPct val="125000"/>
+              </a:lnSpc>
+            </a:pPr>
+            <a:r>
+              <a:rPr sz="1300" b="0">
+                <a:solidFill>
+                  <a:srgbClr val="8EC5E8"/>
+                </a:solidFill>
+                <a:latin typeface="Yu Gothic UI"/>
+              </a:rPr>
+              <a:t>帯の長さは期間の目安で、金額は表していない</a:t>
+            </a:r>
+          </a:p>
+        </p:txBody>
+      </p:sp>
+    </p:spTree>
+  </p:cSld>
+  <p:clrMapOvr>
+    <a:masterClrMapping/>
+  </p:clrMapOvr>
+</p:sld>
+</file>
+
+<file path=ppt/slides/slide13.xml><?xml version="1.0" encoding="utf-8"?>
+<p:sld xmlns:a="http://schemas.openxmlformats.org/drawingml/2006/main" xmlns:p="http://schemas.openxmlformats.org/presentationml/2006/main" xmlns:r="http://schemas.openxmlformats.org/officeDocument/2006/relationships">
+  <p:cSld>
+    <p:bg>
+      <p:bgPr>
+        <a:solidFill>
+          <a:srgbClr val="014172"/>
+        </a:solidFill>
+        <a:effectLst/>
+      </p:bgPr>
+    </p:bg>
+    <p:spTree>
+      <p:nvGrpSpPr>
+        <p:cNvPr id="1" name=""/>
+        <p:cNvGrpSpPr/>
+        <p:nvPr/>
+      </p:nvGrpSpPr>
+      <p:grpSpPr/>
+      <p:sp>
+        <p:nvSpPr>
+          <p:cNvPr id="2" name="Rounded Rectangle 1"/>
+          <p:cNvSpPr/>
+          <p:nvPr/>
+        </p:nvSpPr>
+        <p:spPr>
+          <a:xfrm>
+            <a:off x="713232" y="566928"/>
+            <a:ext cx="2377440" cy="68580"/>
+          </a:xfrm>
+          <a:prstGeom prst="roundRect">
+            <a:avLst/>
+          </a:prstGeom>
+          <a:solidFill>
+            <a:srgbClr val="FFFFFF"/>
+          </a:solidFill>
+          <a:ln>
+            <a:noFill/>
+          </a:ln>
+          <a:effectLst/>
+        </p:spPr>
+        <p:style>
+          <a:lnRef idx="1">
+            <a:schemeClr val="accent1"/>
+          </a:lnRef>
+          <a:fillRef idx="3">
+            <a:schemeClr val="accent1"/>
+          </a:fillRef>
+          <a:effectRef idx="2">
+            <a:schemeClr val="accent1"/>
+          </a:effectRef>
+          <a:fontRef idx="minor">
+            <a:schemeClr val="lt1"/>
+          </a:fontRef>
+        </p:style>
+        <p:txBody>
+          <a:bodyPr rtlCol="0" anchor="ctr"/>
+          <a:lstStyle/>
+          <a:p>
+            <a:pPr algn="ctr"/>
+          </a:p>
+        </p:txBody>
+      </p:sp>
+      <p:sp>
+        <p:nvSpPr>
+          <p:cNvPr id="3" name="Rounded Rectangle 2"/>
+          <p:cNvSpPr/>
+          <p:nvPr/>
+        </p:nvSpPr>
+        <p:spPr>
+          <a:xfrm>
+            <a:off x="713232" y="781812"/>
+            <a:ext cx="1920240" cy="68580"/>
+          </a:xfrm>
+          <a:prstGeom prst="roundRect">
+            <a:avLst/>
+          </a:prstGeom>
+          <a:solidFill>
+            <a:srgbClr val="FFFFFF"/>
+          </a:solidFill>
+          <a:ln>
+            <a:noFill/>
+          </a:ln>
+          <a:effectLst/>
+        </p:spPr>
+        <p:style>
+          <a:lnRef idx="1">
+            <a:schemeClr val="accent1"/>
+          </a:lnRef>
+          <a:fillRef idx="3">
+            <a:schemeClr val="accent1"/>
+          </a:fillRef>
+          <a:effectRef idx="2">
+            <a:schemeClr val="accent1"/>
+          </a:effectRef>
+          <a:fontRef idx="minor">
+            <a:schemeClr val="lt1"/>
+          </a:fontRef>
+        </p:style>
+        <p:txBody>
+          <a:bodyPr rtlCol="0" anchor="ctr"/>
+          <a:lstStyle/>
+          <a:p>
+            <a:pPr algn="ctr"/>
+          </a:p>
+        </p:txBody>
+      </p:sp>
+      <p:sp>
+        <p:nvSpPr>
+          <p:cNvPr id="4" name="Rounded Rectangle 3"/>
+          <p:cNvSpPr/>
+          <p:nvPr/>
+        </p:nvSpPr>
+        <p:spPr>
+          <a:xfrm>
+            <a:off x="713232" y="996695"/>
+            <a:ext cx="1463040" cy="68580"/>
+          </a:xfrm>
+          <a:prstGeom prst="roundRect">
+            <a:avLst/>
+          </a:prstGeom>
+          <a:solidFill>
+            <a:srgbClr val="FFFFFF"/>
+          </a:solidFill>
+          <a:ln>
+            <a:noFill/>
+          </a:ln>
+          <a:effectLst/>
+        </p:spPr>
+        <p:style>
+          <a:lnRef idx="1">
+            <a:schemeClr val="accent1"/>
+          </a:lnRef>
+          <a:fillRef idx="3">
+            <a:schemeClr val="accent1"/>
+          </a:fillRef>
+          <a:effectRef idx="2">
+            <a:schemeClr val="accent1"/>
+          </a:effectRef>
+          <a:fontRef idx="minor">
+            <a:schemeClr val="lt1"/>
+          </a:fontRef>
+        </p:style>
+        <p:txBody>
+          <a:bodyPr rtlCol="0" anchor="ctr"/>
+          <a:lstStyle/>
+          <a:p>
+            <a:pPr algn="ctr"/>
+          </a:p>
+        </p:txBody>
+      </p:sp>
+      <p:sp>
+        <p:nvSpPr>
+          <p:cNvPr id="5" name="TextBox 4"/>
+          <p:cNvSpPr txBox="1"/>
+          <p:nvPr/>
+        </p:nvSpPr>
+        <p:spPr>
+          <a:xfrm>
+            <a:off x="713232" y="1481328"/>
+            <a:ext cx="4937760" cy="411480"/>
+          </a:xfrm>
+          <a:prstGeom prst="rect">
+            <a:avLst/>
+          </a:prstGeom>
+          <a:noFill/>
+        </p:spPr>
+        <p:txBody>
+          <a:bodyPr wrap="square" lIns="0" rIns="0" tIns="0" bIns="0">
+            <a:spAutoFit/>
+          </a:bodyPr>
+          <a:lstStyle/>
+          <a:p>
+            <a:pPr algn="l">
+              <a:lnSpc>
+                <a:spcPct val="125000"/>
+              </a:lnSpc>
+            </a:pPr>
+            <a:r>
+              <a:rPr sz="1800" b="1">
+                <a:solidFill>
+                  <a:srgbClr val="8EC5E8"/>
+                </a:solidFill>
+                <a:latin typeface="Yu Gothic UI"/>
+              </a:rPr>
+              <a:t>資産形成</a:t>
+            </a:r>
+          </a:p>
+        </p:txBody>
+      </p:sp>
+      <p:sp>
+        <p:nvSpPr>
+          <p:cNvPr id="6" name="TextBox 5"/>
+          <p:cNvSpPr txBox="1"/>
+          <p:nvPr/>
+        </p:nvSpPr>
+        <p:spPr>
+          <a:xfrm>
+            <a:off x="713232" y="1938528"/>
+            <a:ext cx="5257800" cy="914400"/>
+          </a:xfrm>
+          <a:prstGeom prst="rect">
+            <a:avLst/>
+          </a:prstGeom>
+          <a:noFill/>
+        </p:spPr>
+        <p:txBody>
+          <a:bodyPr wrap="square" lIns="0" rIns="0" tIns="0" bIns="0">
+            <a:spAutoFit/>
+          </a:bodyPr>
+          <a:lstStyle/>
+          <a:p>
+            <a:pPr algn="l">
+              <a:lnSpc>
+                <a:spcPct val="125000"/>
+              </a:lnSpc>
+            </a:pPr>
+            <a:r>
+              <a:rPr sz="3400" b="1">
+                <a:solidFill>
+                  <a:srgbClr val="FFFFFF"/>
+                </a:solidFill>
+                <a:latin typeface="Yu Gothic UI"/>
+              </a:rPr>
+              <a:t>iDeCoの掛金上限</a:t>
+            </a:r>
+          </a:p>
+        </p:txBody>
+      </p:sp>
+      <p:sp>
+        <p:nvSpPr>
+          <p:cNvPr id="7" name="TextBox 6"/>
+          <p:cNvSpPr txBox="1"/>
+          <p:nvPr/>
+        </p:nvSpPr>
+        <p:spPr>
+          <a:xfrm>
+            <a:off x="713232" y="2999232"/>
+            <a:ext cx="5120640" cy="1280160"/>
+          </a:xfrm>
+          <a:prstGeom prst="rect">
+            <a:avLst/>
+          </a:prstGeom>
+          <a:noFill/>
+        </p:spPr>
+        <p:txBody>
+          <a:bodyPr wrap="square" lIns="0" rIns="0" tIns="0" bIns="0">
+            <a:spAutoFit/>
+          </a:bodyPr>
+          <a:lstStyle/>
+          <a:p>
+            <a:pPr algn="l">
+              <a:lnSpc>
+                <a:spcPct val="135000"/>
+              </a:lnSpc>
+            </a:pPr>
+            <a:r>
+              <a:rPr sz="2600" b="0">
+                <a:solidFill>
+                  <a:srgbClr val="FFFFFF"/>
+                </a:solidFill>
+                <a:latin typeface="Yu Gothic UI"/>
+              </a:rPr>
+              <a:t>2026年12月1日から</a:t>
+            </a:r>
+          </a:p>
+          <a:p>
+            <a:pPr algn="l">
+              <a:lnSpc>
+                <a:spcPct val="135000"/>
+              </a:lnSpc>
+            </a:pPr>
+            <a:r>
+              <a:rPr sz="2600" b="0">
+                <a:solidFill>
+                  <a:srgbClr val="FFFFFF"/>
+                </a:solidFill>
+                <a:latin typeface="Yu Gothic UI"/>
+              </a:rPr>
+              <a:t>会社員の差が無くなる</a:t>
+            </a:r>
+          </a:p>
+        </p:txBody>
+      </p:sp>
+      <p:sp>
+        <p:nvSpPr>
+          <p:cNvPr id="8" name="TextBox 7"/>
+          <p:cNvSpPr txBox="1"/>
+          <p:nvPr/>
+        </p:nvSpPr>
+        <p:spPr>
+          <a:xfrm>
+            <a:off x="713232" y="5138928"/>
+            <a:ext cx="5120640" cy="365760"/>
+          </a:xfrm>
+          <a:prstGeom prst="rect">
+            <a:avLst/>
+          </a:prstGeom>
+          <a:noFill/>
+        </p:spPr>
+        <p:txBody>
+          <a:bodyPr wrap="square" lIns="0" rIns="0" tIns="0" bIns="0">
+            <a:spAutoFit/>
+          </a:bodyPr>
+          <a:lstStyle/>
+          <a:p>
+            <a:pPr algn="l">
+              <a:lnSpc>
+                <a:spcPct val="125000"/>
+              </a:lnSpc>
+            </a:pPr>
+            <a:r>
+              <a:rPr sz="1700" b="0">
+                <a:solidFill>
+                  <a:srgbClr val="8EC5E8"/>
+                </a:solidFill>
+                <a:latin typeface="Yu Gothic UI"/>
+              </a:rPr>
+              <a:t>家計の制度ログ　kakei.nexeed-lab.com</a:t>
+            </a:r>
+          </a:p>
+        </p:txBody>
+      </p:sp>
+      <p:pic>
+        <p:nvPicPr>
+          <p:cNvPr id="9" name="Picture 8" descr="ideco-jougen.png"/>
+          <p:cNvPicPr>
+            <a:picLocks noChangeAspect="1"/>
+          </p:cNvPicPr>
+          <p:nvPr/>
+        </p:nvPicPr>
+        <p:blipFill>
+          <a:blip r:embed="rId2">
+            <a:extLst>
+              <a:ext uri="{96DAC541-7B7A-43D3-8B79-37D633B846F1}">
+                <asvg:svgBlip xmlns:asvg="http://schemas.microsoft.com/office/drawing/2016/SVG/main" r:embed="rId3"/>
+              </a:ext>
+            </a:extLst>
+          </a:blip>
+          <a:stretch>
+            <a:fillRect/>
+          </a:stretch>
+        </p:blipFill>
+        <p:spPr>
+          <a:xfrm>
+            <a:off x="6053328" y="566928"/>
+            <a:ext cx="4764024" cy="4288536"/>
+          </a:xfrm>
+          <a:prstGeom prst="rect">
+            <a:avLst/>
+          </a:prstGeom>
+        </p:spPr>
+      </p:pic>
+      <p:sp>
+        <p:nvSpPr>
+          <p:cNvPr id="10" name="TextBox 9"/>
+          <p:cNvSpPr txBox="1"/>
+          <p:nvPr/>
+        </p:nvSpPr>
+        <p:spPr>
+          <a:xfrm>
+            <a:off x="6319699" y="1872326"/>
+            <a:ext cx="713232" cy="203200"/>
+          </a:xfrm>
+          <a:prstGeom prst="rect">
+            <a:avLst/>
+          </a:prstGeom>
+          <a:noFill/>
+        </p:spPr>
+        <p:txBody>
+          <a:bodyPr wrap="square" lIns="0" rIns="0" tIns="0" bIns="0">
+            <a:spAutoFit/>
+          </a:bodyPr>
+          <a:lstStyle/>
+          <a:p>
+            <a:pPr algn="ctr">
+              <a:lnSpc>
+                <a:spcPct val="115000"/>
+              </a:lnSpc>
+            </a:pPr>
+            <a:r>
+              <a:rPr sz="1000" b="1">
+                <a:solidFill>
+                  <a:srgbClr val="FFFFFF"/>
+                </a:solidFill>
+                <a:latin typeface="Yu Gothic UI"/>
+              </a:rPr>
+              <a:t>第1号</a:t>
+            </a:r>
+          </a:p>
+        </p:txBody>
+      </p:sp>
+      <p:sp>
+        <p:nvSpPr>
+          <p:cNvPr id="11" name="TextBox 10"/>
+          <p:cNvSpPr txBox="1"/>
+          <p:nvPr/>
+        </p:nvSpPr>
+        <p:spPr>
+          <a:xfrm>
+            <a:off x="7052626" y="3253800"/>
+            <a:ext cx="713232" cy="182880"/>
+          </a:xfrm>
+          <a:prstGeom prst="rect">
+            <a:avLst/>
+          </a:prstGeom>
+          <a:noFill/>
+        </p:spPr>
+        <p:txBody>
+          <a:bodyPr wrap="square" lIns="0" rIns="0" tIns="0" bIns="0">
+            <a:spAutoFit/>
+          </a:bodyPr>
+          <a:lstStyle/>
+          <a:p>
+            <a:pPr algn="ctr">
+              <a:lnSpc>
+                <a:spcPct val="115000"/>
+              </a:lnSpc>
+            </a:pPr>
+            <a:r>
+              <a:rPr sz="900" b="1">
+                <a:solidFill>
+                  <a:srgbClr val="FFFFFF"/>
+                </a:solidFill>
+                <a:latin typeface="Yu Gothic UI"/>
+              </a:rPr>
+              <a:t>第2号</a:t>
+            </a:r>
+          </a:p>
+          <a:p>
+            <a:pPr algn="ctr">
+              <a:lnSpc>
+                <a:spcPct val="115000"/>
+              </a:lnSpc>
+            </a:pPr>
+            <a:r>
+              <a:rPr sz="900" b="1">
+                <a:solidFill>
+                  <a:srgbClr val="FFFFFF"/>
+                </a:solidFill>
+                <a:latin typeface="Yu Gothic UI"/>
+              </a:rPr>
+              <a:t>企業年金なし</a:t>
+            </a:r>
+          </a:p>
+        </p:txBody>
+      </p:sp>
+      <p:sp>
+        <p:nvSpPr>
+          <p:cNvPr id="12" name="TextBox 11"/>
+          <p:cNvSpPr txBox="1"/>
+          <p:nvPr/>
+        </p:nvSpPr>
+        <p:spPr>
+          <a:xfrm>
+            <a:off x="7785553" y="3339571"/>
+            <a:ext cx="713232" cy="182880"/>
+          </a:xfrm>
+          <a:prstGeom prst="rect">
+            <a:avLst/>
+          </a:prstGeom>
+          <a:noFill/>
+        </p:spPr>
+        <p:txBody>
+          <a:bodyPr wrap="square" lIns="0" rIns="0" tIns="0" bIns="0">
+            <a:spAutoFit/>
+          </a:bodyPr>
+          <a:lstStyle/>
+          <a:p>
+            <a:pPr algn="ctr">
+              <a:lnSpc>
+                <a:spcPct val="115000"/>
+              </a:lnSpc>
+            </a:pPr>
+            <a:r>
+              <a:rPr sz="900" b="1">
+                <a:solidFill>
+                  <a:srgbClr val="FFFFFF"/>
+                </a:solidFill>
+                <a:latin typeface="Yu Gothic UI"/>
+              </a:rPr>
+              <a:t>第2号</a:t>
+            </a:r>
+          </a:p>
+          <a:p>
+            <a:pPr algn="ctr">
+              <a:lnSpc>
+                <a:spcPct val="115000"/>
+              </a:lnSpc>
+            </a:pPr>
+            <a:r>
+              <a:rPr sz="900" b="1">
+                <a:solidFill>
+                  <a:srgbClr val="FFFFFF"/>
+                </a:solidFill>
+                <a:latin typeface="Yu Gothic UI"/>
+              </a:rPr>
+              <a:t>企業年金あり</a:t>
+            </a:r>
+          </a:p>
+        </p:txBody>
+      </p:sp>
+      <p:sp>
+        <p:nvSpPr>
+          <p:cNvPr id="13" name="TextBox 12"/>
+          <p:cNvSpPr txBox="1"/>
+          <p:nvPr/>
+        </p:nvSpPr>
+        <p:spPr>
+          <a:xfrm>
+            <a:off x="8876678" y="1593616"/>
+            <a:ext cx="1645920" cy="223520"/>
+          </a:xfrm>
+          <a:prstGeom prst="rect">
+            <a:avLst/>
+          </a:prstGeom>
+          <a:noFill/>
+        </p:spPr>
+        <p:txBody>
+          <a:bodyPr wrap="square" lIns="0" rIns="0" tIns="0" bIns="0">
+            <a:spAutoFit/>
+          </a:bodyPr>
+          <a:lstStyle/>
+          <a:p>
+            <a:pPr algn="ctr">
+              <a:lnSpc>
+                <a:spcPct val="115000"/>
+              </a:lnSpc>
+            </a:pPr>
+            <a:r>
+              <a:rPr sz="1100" b="1">
+                <a:solidFill>
+                  <a:srgbClr val="E7CD7A"/>
+                </a:solidFill>
+                <a:latin typeface="Yu Gothic UI"/>
+              </a:rPr>
+              <a:t>第2号は同じ額に</a:t>
+            </a:r>
+          </a:p>
+        </p:txBody>
+      </p:sp>
+      <p:sp>
+        <p:nvSpPr>
+          <p:cNvPr id="14" name="TextBox 13"/>
+          <p:cNvSpPr txBox="1"/>
+          <p:nvPr/>
+        </p:nvSpPr>
+        <p:spPr>
+          <a:xfrm>
+            <a:off x="6494842" y="4420942"/>
+            <a:ext cx="1828800" cy="203200"/>
+          </a:xfrm>
+          <a:prstGeom prst="rect">
+            <a:avLst/>
+          </a:prstGeom>
+          <a:noFill/>
+        </p:spPr>
+        <p:txBody>
+          <a:bodyPr wrap="square" lIns="0" rIns="0" tIns="0" bIns="0">
+            <a:spAutoFit/>
+          </a:bodyPr>
+          <a:lstStyle/>
+          <a:p>
+            <a:pPr algn="ctr">
+              <a:lnSpc>
+                <a:spcPct val="115000"/>
+              </a:lnSpc>
+            </a:pPr>
+            <a:r>
+              <a:rPr sz="1000" b="1">
+                <a:solidFill>
+                  <a:srgbClr val="FFFFFF"/>
+                </a:solidFill>
+                <a:latin typeface="Yu Gothic UI"/>
+              </a:rPr>
+              <a:t>2026年11月30日まで</a:t>
+            </a:r>
+          </a:p>
+        </p:txBody>
+      </p:sp>
+      <p:sp>
+        <p:nvSpPr>
+          <p:cNvPr id="15" name="TextBox 14"/>
+          <p:cNvSpPr txBox="1"/>
+          <p:nvPr/>
+        </p:nvSpPr>
+        <p:spPr>
+          <a:xfrm>
+            <a:off x="8785238" y="4420942"/>
+            <a:ext cx="1828800" cy="203200"/>
+          </a:xfrm>
+          <a:prstGeom prst="rect">
+            <a:avLst/>
+          </a:prstGeom>
+          <a:noFill/>
+        </p:spPr>
+        <p:txBody>
+          <a:bodyPr wrap="square" lIns="0" rIns="0" tIns="0" bIns="0">
+            <a:spAutoFit/>
+          </a:bodyPr>
+          <a:lstStyle/>
+          <a:p>
+            <a:pPr algn="ctr">
+              <a:lnSpc>
+                <a:spcPct val="115000"/>
+              </a:lnSpc>
+            </a:pPr>
+            <a:r>
+              <a:rPr sz="1000" b="1">
+                <a:solidFill>
+                  <a:srgbClr val="FFFFFF"/>
+                </a:solidFill>
+                <a:latin typeface="Yu Gothic UI"/>
+              </a:rPr>
+              <a:t>2026年12月1日から</a:t>
+            </a:r>
+          </a:p>
+        </p:txBody>
+      </p:sp>
+      <p:sp>
+        <p:nvSpPr>
+          <p:cNvPr id="16" name="TextBox 15"/>
+          <p:cNvSpPr txBox="1"/>
+          <p:nvPr/>
+        </p:nvSpPr>
+        <p:spPr>
+          <a:xfrm>
+            <a:off x="6053328" y="5376672"/>
+            <a:ext cx="4764024" cy="274320"/>
+          </a:xfrm>
+          <a:prstGeom prst="rect">
+            <a:avLst/>
+          </a:prstGeom>
+          <a:noFill/>
+        </p:spPr>
+        <p:txBody>
+          <a:bodyPr wrap="square" lIns="0" rIns="0" tIns="0" bIns="0">
+            <a:spAutoFit/>
+          </a:bodyPr>
+          <a:lstStyle/>
+          <a:p>
+            <a:pPr algn="l">
+              <a:lnSpc>
+                <a:spcPct val="125000"/>
+              </a:lnSpc>
+            </a:pPr>
+            <a:r>
+              <a:rPr sz="1300" b="0">
+                <a:solidFill>
+                  <a:srgbClr val="8EC5E8"/>
+                </a:solidFill>
+                <a:latin typeface="Yu Gothic UI"/>
+              </a:rPr>
+              <a:t>縦＝1か月の掛金上限（円）</a:t>
+            </a:r>
+          </a:p>
+          <a:p>
+            <a:pPr algn="l">
+              <a:lnSpc>
+                <a:spcPct val="125000"/>
+              </a:lnSpc>
+            </a:pPr>
+            <a:r>
+              <a:rPr sz="1300" b="0">
+                <a:solidFill>
+                  <a:srgbClr val="8EC5E8"/>
+                </a:solidFill>
+                <a:latin typeface="Yu Gothic UI"/>
+              </a:rPr>
+              <a:t>第1号＝自営業者等　第2号＝会社員・公務員</a:t>
+            </a:r>
+          </a:p>
+        </p:txBody>
+      </p:sp>
+    </p:spTree>
+  </p:cSld>
+  <p:clrMapOvr>
+    <a:masterClrMapping/>
+  </p:clrMapOvr>
+</p:sld>
+</file>
+
+<file path=ppt/slides/slide14.xml><?xml version="1.0" encoding="utf-8"?>
 <p:sld xmlns:a="http://schemas.openxmlformats.org/drawingml/2006/main" xmlns:p="http://schemas.openxmlformats.org/presentationml/2006/main" xmlns:r="http://schemas.openxmlformats.org/officeDocument/2006/relationships">
   <p:cSld>
     <p:bg>

--- a/tools/article-images/article-images.pptx
+++ b/tools/article-images/article-images.pptx
@@ -19,6 +19,9 @@
     <p:sldId id="267" r:id="rId18"/>
     <p:sldId id="268" r:id="rId19"/>
     <p:sldId id="269" r:id="rId20"/>
+    <p:sldId id="270" r:id="rId21"/>
+    <p:sldId id="271" r:id="rId22"/>
+    <p:sldId id="272" r:id="rId23"/>
   </p:sldIdLst>
   <p:sldSz cx="11430000" cy="6000750" type="screen4x3"/>
   <p:notesSz cx="6858000" cy="9144000"/>
@@ -6403,6 +6406,1971 @@
 </file>
 
 <file path=ppt/slides/slide14.xml><?xml version="1.0" encoding="utf-8"?>
+<p:sld xmlns:a="http://schemas.openxmlformats.org/drawingml/2006/main" xmlns:p="http://schemas.openxmlformats.org/presentationml/2006/main" xmlns:r="http://schemas.openxmlformats.org/officeDocument/2006/relationships">
+  <p:cSld>
+    <p:bg>
+      <p:bgPr>
+        <a:solidFill>
+          <a:srgbClr val="014172"/>
+        </a:solidFill>
+        <a:effectLst/>
+      </p:bgPr>
+    </p:bg>
+    <p:spTree>
+      <p:nvGrpSpPr>
+        <p:cNvPr id="1" name=""/>
+        <p:cNvGrpSpPr/>
+        <p:nvPr/>
+      </p:nvGrpSpPr>
+      <p:grpSpPr/>
+      <p:sp>
+        <p:nvSpPr>
+          <p:cNvPr id="2" name="Rounded Rectangle 1"/>
+          <p:cNvSpPr/>
+          <p:nvPr/>
+        </p:nvSpPr>
+        <p:spPr>
+          <a:xfrm>
+            <a:off x="713232" y="566928"/>
+            <a:ext cx="2377440" cy="68580"/>
+          </a:xfrm>
+          <a:prstGeom prst="roundRect">
+            <a:avLst/>
+          </a:prstGeom>
+          <a:solidFill>
+            <a:srgbClr val="FFFFFF"/>
+          </a:solidFill>
+          <a:ln>
+            <a:noFill/>
+          </a:ln>
+          <a:effectLst/>
+        </p:spPr>
+        <p:style>
+          <a:lnRef idx="1">
+            <a:schemeClr val="accent1"/>
+          </a:lnRef>
+          <a:fillRef idx="3">
+            <a:schemeClr val="accent1"/>
+          </a:fillRef>
+          <a:effectRef idx="2">
+            <a:schemeClr val="accent1"/>
+          </a:effectRef>
+          <a:fontRef idx="minor">
+            <a:schemeClr val="lt1"/>
+          </a:fontRef>
+        </p:style>
+        <p:txBody>
+          <a:bodyPr rtlCol="0" anchor="ctr"/>
+          <a:lstStyle/>
+          <a:p>
+            <a:pPr algn="ctr"/>
+          </a:p>
+        </p:txBody>
+      </p:sp>
+      <p:sp>
+        <p:nvSpPr>
+          <p:cNvPr id="3" name="Rounded Rectangle 2"/>
+          <p:cNvSpPr/>
+          <p:nvPr/>
+        </p:nvSpPr>
+        <p:spPr>
+          <a:xfrm>
+            <a:off x="713232" y="781812"/>
+            <a:ext cx="1920240" cy="68580"/>
+          </a:xfrm>
+          <a:prstGeom prst="roundRect">
+            <a:avLst/>
+          </a:prstGeom>
+          <a:solidFill>
+            <a:srgbClr val="FFFFFF"/>
+          </a:solidFill>
+          <a:ln>
+            <a:noFill/>
+          </a:ln>
+          <a:effectLst/>
+        </p:spPr>
+        <p:style>
+          <a:lnRef idx="1">
+            <a:schemeClr val="accent1"/>
+          </a:lnRef>
+          <a:fillRef idx="3">
+            <a:schemeClr val="accent1"/>
+          </a:fillRef>
+          <a:effectRef idx="2">
+            <a:schemeClr val="accent1"/>
+          </a:effectRef>
+          <a:fontRef idx="minor">
+            <a:schemeClr val="lt1"/>
+          </a:fontRef>
+        </p:style>
+        <p:txBody>
+          <a:bodyPr rtlCol="0" anchor="ctr"/>
+          <a:lstStyle/>
+          <a:p>
+            <a:pPr algn="ctr"/>
+          </a:p>
+        </p:txBody>
+      </p:sp>
+      <p:sp>
+        <p:nvSpPr>
+          <p:cNvPr id="4" name="Rounded Rectangle 3"/>
+          <p:cNvSpPr/>
+          <p:nvPr/>
+        </p:nvSpPr>
+        <p:spPr>
+          <a:xfrm>
+            <a:off x="713232" y="996695"/>
+            <a:ext cx="1463040" cy="68580"/>
+          </a:xfrm>
+          <a:prstGeom prst="roundRect">
+            <a:avLst/>
+          </a:prstGeom>
+          <a:solidFill>
+            <a:srgbClr val="FFFFFF"/>
+          </a:solidFill>
+          <a:ln>
+            <a:noFill/>
+          </a:ln>
+          <a:effectLst/>
+        </p:spPr>
+        <p:style>
+          <a:lnRef idx="1">
+            <a:schemeClr val="accent1"/>
+          </a:lnRef>
+          <a:fillRef idx="3">
+            <a:schemeClr val="accent1"/>
+          </a:fillRef>
+          <a:effectRef idx="2">
+            <a:schemeClr val="accent1"/>
+          </a:effectRef>
+          <a:fontRef idx="minor">
+            <a:schemeClr val="lt1"/>
+          </a:fontRef>
+        </p:style>
+        <p:txBody>
+          <a:bodyPr rtlCol="0" anchor="ctr"/>
+          <a:lstStyle/>
+          <a:p>
+            <a:pPr algn="ctr"/>
+          </a:p>
+        </p:txBody>
+      </p:sp>
+      <p:sp>
+        <p:nvSpPr>
+          <p:cNvPr id="5" name="TextBox 4"/>
+          <p:cNvSpPr txBox="1"/>
+          <p:nvPr/>
+        </p:nvSpPr>
+        <p:spPr>
+          <a:xfrm>
+            <a:off x="713232" y="1481328"/>
+            <a:ext cx="4937760" cy="411480"/>
+          </a:xfrm>
+          <a:prstGeom prst="rect">
+            <a:avLst/>
+          </a:prstGeom>
+          <a:noFill/>
+        </p:spPr>
+        <p:txBody>
+          <a:bodyPr wrap="square" lIns="0" rIns="0" tIns="0" bIns="0">
+            <a:spAutoFit/>
+          </a:bodyPr>
+          <a:lstStyle/>
+          <a:p>
+            <a:pPr algn="l">
+              <a:lnSpc>
+                <a:spcPct val="125000"/>
+              </a:lnSpc>
+            </a:pPr>
+            <a:r>
+              <a:rPr sz="1800" b="1">
+                <a:solidFill>
+                  <a:srgbClr val="8EC5E8"/>
+                </a:solidFill>
+                <a:latin typeface="Yu Gothic UI"/>
+              </a:rPr>
+              <a:t>年金</a:t>
+            </a:r>
+          </a:p>
+        </p:txBody>
+      </p:sp>
+      <p:sp>
+        <p:nvSpPr>
+          <p:cNvPr id="6" name="TextBox 5"/>
+          <p:cNvSpPr txBox="1"/>
+          <p:nvPr/>
+        </p:nvSpPr>
+        <p:spPr>
+          <a:xfrm>
+            <a:off x="713232" y="1938528"/>
+            <a:ext cx="5257800" cy="914400"/>
+          </a:xfrm>
+          <a:prstGeom prst="rect">
+            <a:avLst/>
+          </a:prstGeom>
+          <a:noFill/>
+        </p:spPr>
+        <p:txBody>
+          <a:bodyPr wrap="square" lIns="0" rIns="0" tIns="0" bIns="0">
+            <a:spAutoFit/>
+          </a:bodyPr>
+          <a:lstStyle/>
+          <a:p>
+            <a:pPr algn="l">
+              <a:lnSpc>
+                <a:spcPct val="125000"/>
+              </a:lnSpc>
+            </a:pPr>
+            <a:r>
+              <a:rPr sz="3400" b="1">
+                <a:solidFill>
+                  <a:srgbClr val="FFFFFF"/>
+                </a:solidFill>
+                <a:latin typeface="Yu Gothic UI"/>
+              </a:rPr>
+              <a:t>年金の繰上げ・繰下げ</a:t>
+            </a:r>
+          </a:p>
+        </p:txBody>
+      </p:sp>
+      <p:sp>
+        <p:nvSpPr>
+          <p:cNvPr id="7" name="TextBox 6"/>
+          <p:cNvSpPr txBox="1"/>
+          <p:nvPr/>
+        </p:nvSpPr>
+        <p:spPr>
+          <a:xfrm>
+            <a:off x="713232" y="2999232"/>
+            <a:ext cx="5120640" cy="1280160"/>
+          </a:xfrm>
+          <a:prstGeom prst="rect">
+            <a:avLst/>
+          </a:prstGeom>
+          <a:noFill/>
+        </p:spPr>
+        <p:txBody>
+          <a:bodyPr wrap="square" lIns="0" rIns="0" tIns="0" bIns="0">
+            <a:spAutoFit/>
+          </a:bodyPr>
+          <a:lstStyle/>
+          <a:p>
+            <a:pPr algn="l">
+              <a:lnSpc>
+                <a:spcPct val="135000"/>
+              </a:lnSpc>
+            </a:pPr>
+            <a:r>
+              <a:rPr sz="2600" b="0">
+                <a:solidFill>
+                  <a:srgbClr val="FFFFFF"/>
+                </a:solidFill>
+                <a:latin typeface="Yu Gothic UI"/>
+              </a:rPr>
+              <a:t>繰上げは取り消せず</a:t>
+            </a:r>
+          </a:p>
+          <a:p>
+            <a:pPr algn="l">
+              <a:lnSpc>
+                <a:spcPct val="135000"/>
+              </a:lnSpc>
+            </a:pPr>
+            <a:r>
+              <a:rPr sz="2600" b="0">
+                <a:solidFill>
+                  <a:srgbClr val="FFFFFF"/>
+                </a:solidFill>
+                <a:latin typeface="Yu Gothic UI"/>
+              </a:rPr>
+              <a:t>繰下げでも増えない部分がある</a:t>
+            </a:r>
+          </a:p>
+        </p:txBody>
+      </p:sp>
+      <p:sp>
+        <p:nvSpPr>
+          <p:cNvPr id="8" name="TextBox 7"/>
+          <p:cNvSpPr txBox="1"/>
+          <p:nvPr/>
+        </p:nvSpPr>
+        <p:spPr>
+          <a:xfrm>
+            <a:off x="713232" y="5138928"/>
+            <a:ext cx="5120640" cy="365760"/>
+          </a:xfrm>
+          <a:prstGeom prst="rect">
+            <a:avLst/>
+          </a:prstGeom>
+          <a:noFill/>
+        </p:spPr>
+        <p:txBody>
+          <a:bodyPr wrap="square" lIns="0" rIns="0" tIns="0" bIns="0">
+            <a:spAutoFit/>
+          </a:bodyPr>
+          <a:lstStyle/>
+          <a:p>
+            <a:pPr algn="l">
+              <a:lnSpc>
+                <a:spcPct val="125000"/>
+              </a:lnSpc>
+            </a:pPr>
+            <a:r>
+              <a:rPr sz="1700" b="0">
+                <a:solidFill>
+                  <a:srgbClr val="8EC5E8"/>
+                </a:solidFill>
+                <a:latin typeface="Yu Gothic UI"/>
+              </a:rPr>
+              <a:t>家計の制度ログ　kakei.nexeed-lab.com</a:t>
+            </a:r>
+          </a:p>
+        </p:txBody>
+      </p:sp>
+      <p:pic>
+        <p:nvPicPr>
+          <p:cNvPr id="9" name="Picture 8" descr="kuriage-kurisage.png"/>
+          <p:cNvPicPr>
+            <a:picLocks noChangeAspect="1"/>
+          </p:cNvPicPr>
+          <p:nvPr/>
+        </p:nvPicPr>
+        <p:blipFill>
+          <a:blip r:embed="rId2">
+            <a:extLst>
+              <a:ext uri="{96DAC541-7B7A-43D3-8B79-37D633B846F1}">
+                <asvg:svgBlip xmlns:asvg="http://schemas.microsoft.com/office/drawing/2016/SVG/main" r:embed="rId3"/>
+              </a:ext>
+            </a:extLst>
+          </a:blip>
+          <a:stretch>
+            <a:fillRect/>
+          </a:stretch>
+        </p:blipFill>
+        <p:spPr>
+          <a:xfrm>
+            <a:off x="6053328" y="566928"/>
+            <a:ext cx="4764024" cy="4288536"/>
+          </a:xfrm>
+          <a:prstGeom prst="rect">
+            <a:avLst/>
+          </a:prstGeom>
+        </p:spPr>
+      </p:pic>
+      <p:sp>
+        <p:nvSpPr>
+          <p:cNvPr id="10" name="TextBox 9"/>
+          <p:cNvSpPr txBox="1"/>
+          <p:nvPr/>
+        </p:nvSpPr>
+        <p:spPr>
+          <a:xfrm>
+            <a:off x="6539683" y="4402653"/>
+            <a:ext cx="822960" cy="243840"/>
+          </a:xfrm>
+          <a:prstGeom prst="rect">
+            <a:avLst/>
+          </a:prstGeom>
+          <a:noFill/>
+        </p:spPr>
+        <p:txBody>
+          <a:bodyPr wrap="square" lIns="0" rIns="0" tIns="0" bIns="0">
+            <a:spAutoFit/>
+          </a:bodyPr>
+          <a:lstStyle/>
+          <a:p>
+            <a:pPr algn="ctr">
+              <a:lnSpc>
+                <a:spcPct val="115000"/>
+              </a:lnSpc>
+            </a:pPr>
+            <a:r>
+              <a:rPr sz="1200" b="1">
+                <a:solidFill>
+                  <a:srgbClr val="FFFFFF"/>
+                </a:solidFill>
+                <a:latin typeface="Yu Gothic UI"/>
+              </a:rPr>
+              <a:t>60歳</a:t>
+            </a:r>
+          </a:p>
+        </p:txBody>
+      </p:sp>
+      <p:sp>
+        <p:nvSpPr>
+          <p:cNvPr id="11" name="TextBox 10"/>
+          <p:cNvSpPr txBox="1"/>
+          <p:nvPr/>
+        </p:nvSpPr>
+        <p:spPr>
+          <a:xfrm>
+            <a:off x="8005536" y="4402653"/>
+            <a:ext cx="822960" cy="243840"/>
+          </a:xfrm>
+          <a:prstGeom prst="rect">
+            <a:avLst/>
+          </a:prstGeom>
+          <a:noFill/>
+        </p:spPr>
+        <p:txBody>
+          <a:bodyPr wrap="square" lIns="0" rIns="0" tIns="0" bIns="0">
+            <a:spAutoFit/>
+          </a:bodyPr>
+          <a:lstStyle/>
+          <a:p>
+            <a:pPr algn="ctr">
+              <a:lnSpc>
+                <a:spcPct val="115000"/>
+              </a:lnSpc>
+            </a:pPr>
+            <a:r>
+              <a:rPr sz="1200" b="1">
+                <a:solidFill>
+                  <a:srgbClr val="FFFFFF"/>
+                </a:solidFill>
+                <a:latin typeface="Yu Gothic UI"/>
+              </a:rPr>
+              <a:t>65歳</a:t>
+            </a:r>
+          </a:p>
+        </p:txBody>
+      </p:sp>
+      <p:sp>
+        <p:nvSpPr>
+          <p:cNvPr id="12" name="TextBox 11"/>
+          <p:cNvSpPr txBox="1"/>
+          <p:nvPr/>
+        </p:nvSpPr>
+        <p:spPr>
+          <a:xfrm>
+            <a:off x="9471390" y="4402653"/>
+            <a:ext cx="822960" cy="243840"/>
+          </a:xfrm>
+          <a:prstGeom prst="rect">
+            <a:avLst/>
+          </a:prstGeom>
+          <a:noFill/>
+        </p:spPr>
+        <p:txBody>
+          <a:bodyPr wrap="square" lIns="0" rIns="0" tIns="0" bIns="0">
+            <a:spAutoFit/>
+          </a:bodyPr>
+          <a:lstStyle/>
+          <a:p>
+            <a:pPr algn="ctr">
+              <a:lnSpc>
+                <a:spcPct val="115000"/>
+              </a:lnSpc>
+            </a:pPr>
+            <a:r>
+              <a:rPr sz="1200" b="1">
+                <a:solidFill>
+                  <a:srgbClr val="FFFFFF"/>
+                </a:solidFill>
+                <a:latin typeface="Yu Gothic UI"/>
+              </a:rPr>
+              <a:t>75歳</a:t>
+            </a:r>
+          </a:p>
+        </p:txBody>
+      </p:sp>
+      <p:sp>
+        <p:nvSpPr>
+          <p:cNvPr id="13" name="TextBox 12"/>
+          <p:cNvSpPr txBox="1"/>
+          <p:nvPr/>
+        </p:nvSpPr>
+        <p:spPr>
+          <a:xfrm>
+            <a:off x="6621979" y="3587740"/>
+            <a:ext cx="658368" cy="203200"/>
+          </a:xfrm>
+          <a:prstGeom prst="rect">
+            <a:avLst/>
+          </a:prstGeom>
+          <a:noFill/>
+        </p:spPr>
+        <p:txBody>
+          <a:bodyPr wrap="square" lIns="0" rIns="0" tIns="0" bIns="0">
+            <a:spAutoFit/>
+          </a:bodyPr>
+          <a:lstStyle/>
+          <a:p>
+            <a:pPr algn="ctr">
+              <a:lnSpc>
+                <a:spcPct val="115000"/>
+              </a:lnSpc>
+            </a:pPr>
+            <a:r>
+              <a:rPr sz="1000" b="1">
+                <a:solidFill>
+                  <a:srgbClr val="014172"/>
+                </a:solidFill>
+                <a:latin typeface="Yu Gothic UI"/>
+              </a:rPr>
+              <a:t>24％</a:t>
+            </a:r>
+          </a:p>
+          <a:p>
+            <a:pPr algn="ctr">
+              <a:lnSpc>
+                <a:spcPct val="115000"/>
+              </a:lnSpc>
+            </a:pPr>
+            <a:r>
+              <a:rPr sz="1000" b="1">
+                <a:solidFill>
+                  <a:srgbClr val="014172"/>
+                </a:solidFill>
+                <a:latin typeface="Yu Gothic UI"/>
+              </a:rPr>
+              <a:t>減る</a:t>
+            </a:r>
+          </a:p>
+        </p:txBody>
+      </p:sp>
+      <p:sp>
+        <p:nvSpPr>
+          <p:cNvPr id="14" name="TextBox 13"/>
+          <p:cNvSpPr txBox="1"/>
+          <p:nvPr/>
+        </p:nvSpPr>
+        <p:spPr>
+          <a:xfrm>
+            <a:off x="8087832" y="3468319"/>
+            <a:ext cx="658368" cy="223520"/>
+          </a:xfrm>
+          <a:prstGeom prst="rect">
+            <a:avLst/>
+          </a:prstGeom>
+          <a:noFill/>
+        </p:spPr>
+        <p:txBody>
+          <a:bodyPr wrap="square" lIns="0" rIns="0" tIns="0" bIns="0">
+            <a:spAutoFit/>
+          </a:bodyPr>
+          <a:lstStyle/>
+          <a:p>
+            <a:pPr algn="ctr">
+              <a:lnSpc>
+                <a:spcPct val="115000"/>
+              </a:lnSpc>
+            </a:pPr>
+            <a:r>
+              <a:rPr sz="1100" b="1">
+                <a:solidFill>
+                  <a:srgbClr val="014172"/>
+                </a:solidFill>
+                <a:latin typeface="Yu Gothic UI"/>
+              </a:rPr>
+              <a:t>基準</a:t>
+            </a:r>
+          </a:p>
+        </p:txBody>
+      </p:sp>
+      <p:sp>
+        <p:nvSpPr>
+          <p:cNvPr id="15" name="TextBox 14"/>
+          <p:cNvSpPr txBox="1"/>
+          <p:nvPr/>
+        </p:nvSpPr>
+        <p:spPr>
+          <a:xfrm>
+            <a:off x="9553686" y="2877069"/>
+            <a:ext cx="658368" cy="203200"/>
+          </a:xfrm>
+          <a:prstGeom prst="rect">
+            <a:avLst/>
+          </a:prstGeom>
+          <a:noFill/>
+        </p:spPr>
+        <p:txBody>
+          <a:bodyPr wrap="square" lIns="0" rIns="0" tIns="0" bIns="0">
+            <a:spAutoFit/>
+          </a:bodyPr>
+          <a:lstStyle/>
+          <a:p>
+            <a:pPr algn="ctr">
+              <a:lnSpc>
+                <a:spcPct val="115000"/>
+              </a:lnSpc>
+            </a:pPr>
+            <a:r>
+              <a:rPr sz="1000" b="1">
+                <a:solidFill>
+                  <a:srgbClr val="014172"/>
+                </a:solidFill>
+                <a:latin typeface="Yu Gothic UI"/>
+              </a:rPr>
+              <a:t>84％</a:t>
+            </a:r>
+          </a:p>
+          <a:p>
+            <a:pPr algn="ctr">
+              <a:lnSpc>
+                <a:spcPct val="115000"/>
+              </a:lnSpc>
+            </a:pPr>
+            <a:r>
+              <a:rPr sz="1000" b="1">
+                <a:solidFill>
+                  <a:srgbClr val="014172"/>
+                </a:solidFill>
+                <a:latin typeface="Yu Gothic UI"/>
+              </a:rPr>
+              <a:t>増える</a:t>
+            </a:r>
+          </a:p>
+        </p:txBody>
+      </p:sp>
+      <p:sp>
+        <p:nvSpPr>
+          <p:cNvPr id="16" name="TextBox 15"/>
+          <p:cNvSpPr txBox="1"/>
+          <p:nvPr/>
+        </p:nvSpPr>
+        <p:spPr>
+          <a:xfrm>
+            <a:off x="8877030" y="1014619"/>
+            <a:ext cx="2011680" cy="203200"/>
+          </a:xfrm>
+          <a:prstGeom prst="rect">
+            <a:avLst/>
+          </a:prstGeom>
+          <a:noFill/>
+        </p:spPr>
+        <p:txBody>
+          <a:bodyPr wrap="square" lIns="0" rIns="0" tIns="0" bIns="0">
+            <a:spAutoFit/>
+          </a:bodyPr>
+          <a:lstStyle/>
+          <a:p>
+            <a:pPr algn="ctr">
+              <a:lnSpc>
+                <a:spcPct val="115000"/>
+              </a:lnSpc>
+            </a:pPr>
+            <a:r>
+              <a:rPr sz="1000" b="1">
+                <a:solidFill>
+                  <a:srgbClr val="E7CD7A"/>
+                </a:solidFill>
+                <a:latin typeface="Yu Gothic UI"/>
+              </a:rPr>
+              <a:t>加給年金額・振替加算額</a:t>
+            </a:r>
+          </a:p>
+          <a:p>
+            <a:pPr algn="ctr">
+              <a:lnSpc>
+                <a:spcPct val="115000"/>
+              </a:lnSpc>
+            </a:pPr>
+            <a:r>
+              <a:rPr sz="1000" b="1">
+                <a:solidFill>
+                  <a:srgbClr val="E7CD7A"/>
+                </a:solidFill>
+                <a:latin typeface="Yu Gothic UI"/>
+              </a:rPr>
+              <a:t>ここは増えない</a:t>
+            </a:r>
+          </a:p>
+        </p:txBody>
+      </p:sp>
+      <p:sp>
+        <p:nvSpPr>
+          <p:cNvPr id="17" name="TextBox 16"/>
+          <p:cNvSpPr txBox="1"/>
+          <p:nvPr/>
+        </p:nvSpPr>
+        <p:spPr>
+          <a:xfrm>
+            <a:off x="6053328" y="5376672"/>
+            <a:ext cx="4764024" cy="274320"/>
+          </a:xfrm>
+          <a:prstGeom prst="rect">
+            <a:avLst/>
+          </a:prstGeom>
+          <a:noFill/>
+        </p:spPr>
+        <p:txBody>
+          <a:bodyPr wrap="square" lIns="0" rIns="0" tIns="0" bIns="0">
+            <a:spAutoFit/>
+          </a:bodyPr>
+          <a:lstStyle/>
+          <a:p>
+            <a:pPr algn="l">
+              <a:lnSpc>
+                <a:spcPct val="125000"/>
+              </a:lnSpc>
+            </a:pPr>
+            <a:r>
+              <a:rPr sz="1300" b="0">
+                <a:solidFill>
+                  <a:srgbClr val="8EC5E8"/>
+                </a:solidFill>
+                <a:latin typeface="Yu Gothic UI"/>
+              </a:rPr>
+              <a:t>縦＝年金額（65歳を100とした割合）</a:t>
+            </a:r>
+          </a:p>
+          <a:p>
+            <a:pPr algn="l">
+              <a:lnSpc>
+                <a:spcPct val="125000"/>
+              </a:lnSpc>
+            </a:pPr>
+            <a:r>
+              <a:rPr sz="1300" b="0">
+                <a:solidFill>
+                  <a:srgbClr val="8EC5E8"/>
+                </a:solidFill>
+                <a:latin typeface="Yu Gothic UI"/>
+              </a:rPr>
+              <a:t>黄色い破線＝繰上げでも繰下げでも増減しない部分</a:t>
+            </a:r>
+          </a:p>
+        </p:txBody>
+      </p:sp>
+    </p:spTree>
+  </p:cSld>
+  <p:clrMapOvr>
+    <a:masterClrMapping/>
+  </p:clrMapOvr>
+</p:sld>
+</file>
+
+<file path=ppt/slides/slide15.xml><?xml version="1.0" encoding="utf-8"?>
+<p:sld xmlns:a="http://schemas.openxmlformats.org/drawingml/2006/main" xmlns:p="http://schemas.openxmlformats.org/presentationml/2006/main" xmlns:r="http://schemas.openxmlformats.org/officeDocument/2006/relationships">
+  <p:cSld>
+    <p:bg>
+      <p:bgPr>
+        <a:solidFill>
+          <a:srgbClr val="014172"/>
+        </a:solidFill>
+        <a:effectLst/>
+      </p:bgPr>
+    </p:bg>
+    <p:spTree>
+      <p:nvGrpSpPr>
+        <p:cNvPr id="1" name=""/>
+        <p:cNvGrpSpPr/>
+        <p:nvPr/>
+      </p:nvGrpSpPr>
+      <p:grpSpPr/>
+      <p:sp>
+        <p:nvSpPr>
+          <p:cNvPr id="2" name="Rounded Rectangle 1"/>
+          <p:cNvSpPr/>
+          <p:nvPr/>
+        </p:nvSpPr>
+        <p:spPr>
+          <a:xfrm>
+            <a:off x="713232" y="566928"/>
+            <a:ext cx="2377440" cy="68580"/>
+          </a:xfrm>
+          <a:prstGeom prst="roundRect">
+            <a:avLst/>
+          </a:prstGeom>
+          <a:solidFill>
+            <a:srgbClr val="FFFFFF"/>
+          </a:solidFill>
+          <a:ln>
+            <a:noFill/>
+          </a:ln>
+          <a:effectLst/>
+        </p:spPr>
+        <p:style>
+          <a:lnRef idx="1">
+            <a:schemeClr val="accent1"/>
+          </a:lnRef>
+          <a:fillRef idx="3">
+            <a:schemeClr val="accent1"/>
+          </a:fillRef>
+          <a:effectRef idx="2">
+            <a:schemeClr val="accent1"/>
+          </a:effectRef>
+          <a:fontRef idx="minor">
+            <a:schemeClr val="lt1"/>
+          </a:fontRef>
+        </p:style>
+        <p:txBody>
+          <a:bodyPr rtlCol="0" anchor="ctr"/>
+          <a:lstStyle/>
+          <a:p>
+            <a:pPr algn="ctr"/>
+          </a:p>
+        </p:txBody>
+      </p:sp>
+      <p:sp>
+        <p:nvSpPr>
+          <p:cNvPr id="3" name="Rounded Rectangle 2"/>
+          <p:cNvSpPr/>
+          <p:nvPr/>
+        </p:nvSpPr>
+        <p:spPr>
+          <a:xfrm>
+            <a:off x="713232" y="781812"/>
+            <a:ext cx="1920240" cy="68580"/>
+          </a:xfrm>
+          <a:prstGeom prst="roundRect">
+            <a:avLst/>
+          </a:prstGeom>
+          <a:solidFill>
+            <a:srgbClr val="FFFFFF"/>
+          </a:solidFill>
+          <a:ln>
+            <a:noFill/>
+          </a:ln>
+          <a:effectLst/>
+        </p:spPr>
+        <p:style>
+          <a:lnRef idx="1">
+            <a:schemeClr val="accent1"/>
+          </a:lnRef>
+          <a:fillRef idx="3">
+            <a:schemeClr val="accent1"/>
+          </a:fillRef>
+          <a:effectRef idx="2">
+            <a:schemeClr val="accent1"/>
+          </a:effectRef>
+          <a:fontRef idx="minor">
+            <a:schemeClr val="lt1"/>
+          </a:fontRef>
+        </p:style>
+        <p:txBody>
+          <a:bodyPr rtlCol="0" anchor="ctr"/>
+          <a:lstStyle/>
+          <a:p>
+            <a:pPr algn="ctr"/>
+          </a:p>
+        </p:txBody>
+      </p:sp>
+      <p:sp>
+        <p:nvSpPr>
+          <p:cNvPr id="4" name="Rounded Rectangle 3"/>
+          <p:cNvSpPr/>
+          <p:nvPr/>
+        </p:nvSpPr>
+        <p:spPr>
+          <a:xfrm>
+            <a:off x="713232" y="996695"/>
+            <a:ext cx="1463040" cy="68580"/>
+          </a:xfrm>
+          <a:prstGeom prst="roundRect">
+            <a:avLst/>
+          </a:prstGeom>
+          <a:solidFill>
+            <a:srgbClr val="FFFFFF"/>
+          </a:solidFill>
+          <a:ln>
+            <a:noFill/>
+          </a:ln>
+          <a:effectLst/>
+        </p:spPr>
+        <p:style>
+          <a:lnRef idx="1">
+            <a:schemeClr val="accent1"/>
+          </a:lnRef>
+          <a:fillRef idx="3">
+            <a:schemeClr val="accent1"/>
+          </a:fillRef>
+          <a:effectRef idx="2">
+            <a:schemeClr val="accent1"/>
+          </a:effectRef>
+          <a:fontRef idx="minor">
+            <a:schemeClr val="lt1"/>
+          </a:fontRef>
+        </p:style>
+        <p:txBody>
+          <a:bodyPr rtlCol="0" anchor="ctr"/>
+          <a:lstStyle/>
+          <a:p>
+            <a:pPr algn="ctr"/>
+          </a:p>
+        </p:txBody>
+      </p:sp>
+      <p:sp>
+        <p:nvSpPr>
+          <p:cNvPr id="5" name="TextBox 4"/>
+          <p:cNvSpPr txBox="1"/>
+          <p:nvPr/>
+        </p:nvSpPr>
+        <p:spPr>
+          <a:xfrm>
+            <a:off x="713232" y="1481328"/>
+            <a:ext cx="4937760" cy="411480"/>
+          </a:xfrm>
+          <a:prstGeom prst="rect">
+            <a:avLst/>
+          </a:prstGeom>
+          <a:noFill/>
+        </p:spPr>
+        <p:txBody>
+          <a:bodyPr wrap="square" lIns="0" rIns="0" tIns="0" bIns="0">
+            <a:spAutoFit/>
+          </a:bodyPr>
+          <a:lstStyle/>
+          <a:p>
+            <a:pPr algn="l">
+              <a:lnSpc>
+                <a:spcPct val="125000"/>
+              </a:lnSpc>
+            </a:pPr>
+            <a:r>
+              <a:rPr sz="1800" b="1">
+                <a:solidFill>
+                  <a:srgbClr val="8EC5E8"/>
+                </a:solidFill>
+                <a:latin typeface="Yu Gothic UI"/>
+              </a:rPr>
+              <a:t>資産形成</a:t>
+            </a:r>
+          </a:p>
+        </p:txBody>
+      </p:sp>
+      <p:sp>
+        <p:nvSpPr>
+          <p:cNvPr id="6" name="TextBox 5"/>
+          <p:cNvSpPr txBox="1"/>
+          <p:nvPr/>
+        </p:nvSpPr>
+        <p:spPr>
+          <a:xfrm>
+            <a:off x="713232" y="1938528"/>
+            <a:ext cx="5257800" cy="914400"/>
+          </a:xfrm>
+          <a:prstGeom prst="rect">
+            <a:avLst/>
+          </a:prstGeom>
+          <a:noFill/>
+        </p:spPr>
+        <p:txBody>
+          <a:bodyPr wrap="square" lIns="0" rIns="0" tIns="0" bIns="0">
+            <a:spAutoFit/>
+          </a:bodyPr>
+          <a:lstStyle/>
+          <a:p>
+            <a:pPr algn="l">
+              <a:lnSpc>
+                <a:spcPct val="125000"/>
+              </a:lnSpc>
+            </a:pPr>
+            <a:r>
+              <a:rPr sz="3400" b="1">
+                <a:solidFill>
+                  <a:srgbClr val="FFFFFF"/>
+                </a:solidFill>
+                <a:latin typeface="Yu Gothic UI"/>
+              </a:rPr>
+              <a:t>退職所得控除の折れ点</a:t>
+            </a:r>
+          </a:p>
+        </p:txBody>
+      </p:sp>
+      <p:sp>
+        <p:nvSpPr>
+          <p:cNvPr id="7" name="TextBox 6"/>
+          <p:cNvSpPr txBox="1"/>
+          <p:nvPr/>
+        </p:nvSpPr>
+        <p:spPr>
+          <a:xfrm>
+            <a:off x="713232" y="2999232"/>
+            <a:ext cx="5120640" cy="1280160"/>
+          </a:xfrm>
+          <a:prstGeom prst="rect">
+            <a:avLst/>
+          </a:prstGeom>
+          <a:noFill/>
+        </p:spPr>
+        <p:txBody>
+          <a:bodyPr wrap="square" lIns="0" rIns="0" tIns="0" bIns="0">
+            <a:spAutoFit/>
+          </a:bodyPr>
+          <a:lstStyle/>
+          <a:p>
+            <a:pPr algn="l">
+              <a:lnSpc>
+                <a:spcPct val="135000"/>
+              </a:lnSpc>
+            </a:pPr>
+            <a:r>
+              <a:rPr sz="2600" b="0">
+                <a:solidFill>
+                  <a:srgbClr val="FFFFFF"/>
+                </a:solidFill>
+                <a:latin typeface="Yu Gothic UI"/>
+              </a:rPr>
+              <a:t>勤続20年を境に</a:t>
+            </a:r>
+          </a:p>
+          <a:p>
+            <a:pPr algn="l">
+              <a:lnSpc>
+                <a:spcPct val="135000"/>
+              </a:lnSpc>
+            </a:pPr>
+            <a:r>
+              <a:rPr sz="2600" b="0">
+                <a:solidFill>
+                  <a:srgbClr val="FFFFFF"/>
+                </a:solidFill>
+                <a:latin typeface="Yu Gothic UI"/>
+              </a:rPr>
+              <a:t>1年あたり40万円→70万円</a:t>
+            </a:r>
+          </a:p>
+        </p:txBody>
+      </p:sp>
+      <p:sp>
+        <p:nvSpPr>
+          <p:cNvPr id="8" name="TextBox 7"/>
+          <p:cNvSpPr txBox="1"/>
+          <p:nvPr/>
+        </p:nvSpPr>
+        <p:spPr>
+          <a:xfrm>
+            <a:off x="713232" y="5138928"/>
+            <a:ext cx="5120640" cy="365760"/>
+          </a:xfrm>
+          <a:prstGeom prst="rect">
+            <a:avLst/>
+          </a:prstGeom>
+          <a:noFill/>
+        </p:spPr>
+        <p:txBody>
+          <a:bodyPr wrap="square" lIns="0" rIns="0" tIns="0" bIns="0">
+            <a:spAutoFit/>
+          </a:bodyPr>
+          <a:lstStyle/>
+          <a:p>
+            <a:pPr algn="l">
+              <a:lnSpc>
+                <a:spcPct val="125000"/>
+              </a:lnSpc>
+            </a:pPr>
+            <a:r>
+              <a:rPr sz="1700" b="0">
+                <a:solidFill>
+                  <a:srgbClr val="8EC5E8"/>
+                </a:solidFill>
+                <a:latin typeface="Yu Gothic UI"/>
+              </a:rPr>
+              <a:t>家計の制度ログ　kakei.nexeed-lab.com</a:t>
+            </a:r>
+          </a:p>
+        </p:txBody>
+      </p:sp>
+      <p:pic>
+        <p:nvPicPr>
+          <p:cNvPr id="9" name="Picture 8" descr="taishoku-shotoku.png"/>
+          <p:cNvPicPr>
+            <a:picLocks noChangeAspect="1"/>
+          </p:cNvPicPr>
+          <p:nvPr/>
+        </p:nvPicPr>
+        <p:blipFill>
+          <a:blip r:embed="rId2">
+            <a:extLst>
+              <a:ext uri="{96DAC541-7B7A-43D3-8B79-37D633B846F1}">
+                <asvg:svgBlip xmlns:asvg="http://schemas.microsoft.com/office/drawing/2016/SVG/main" r:embed="rId3"/>
+              </a:ext>
+            </a:extLst>
+          </a:blip>
+          <a:stretch>
+            <a:fillRect/>
+          </a:stretch>
+        </p:blipFill>
+        <p:spPr>
+          <a:xfrm>
+            <a:off x="6053328" y="566928"/>
+            <a:ext cx="4764024" cy="4288536"/>
+          </a:xfrm>
+          <a:prstGeom prst="rect">
+            <a:avLst/>
+          </a:prstGeom>
+        </p:spPr>
+      </p:pic>
+      <p:sp>
+        <p:nvSpPr>
+          <p:cNvPr id="10" name="TextBox 9"/>
+          <p:cNvSpPr txBox="1"/>
+          <p:nvPr/>
+        </p:nvSpPr>
+        <p:spPr>
+          <a:xfrm>
+            <a:off x="6760264" y="3309030"/>
+            <a:ext cx="1554480" cy="223520"/>
+          </a:xfrm>
+          <a:prstGeom prst="rect">
+            <a:avLst/>
+          </a:prstGeom>
+          <a:noFill/>
+        </p:spPr>
+        <p:txBody>
+          <a:bodyPr wrap="square" lIns="0" rIns="0" tIns="0" bIns="0">
+            <a:spAutoFit/>
+          </a:bodyPr>
+          <a:lstStyle/>
+          <a:p>
+            <a:pPr algn="ctr">
+              <a:lnSpc>
+                <a:spcPct val="115000"/>
+              </a:lnSpc>
+            </a:pPr>
+            <a:r>
+              <a:rPr sz="1100" b="1">
+                <a:solidFill>
+                  <a:srgbClr val="FFFFFF"/>
+                </a:solidFill>
+                <a:latin typeface="Yu Gothic UI"/>
+              </a:rPr>
+              <a:t>1年あたり40万円</a:t>
+            </a:r>
+          </a:p>
+        </p:txBody>
+      </p:sp>
+      <p:sp>
+        <p:nvSpPr>
+          <p:cNvPr id="11" name="TextBox 10"/>
+          <p:cNvSpPr txBox="1"/>
+          <p:nvPr/>
+        </p:nvSpPr>
+        <p:spPr>
+          <a:xfrm>
+            <a:off x="8684197" y="1740651"/>
+            <a:ext cx="1554480" cy="223520"/>
+          </a:xfrm>
+          <a:prstGeom prst="rect">
+            <a:avLst/>
+          </a:prstGeom>
+          <a:noFill/>
+        </p:spPr>
+        <p:txBody>
+          <a:bodyPr wrap="square" lIns="0" rIns="0" tIns="0" bIns="0">
+            <a:spAutoFit/>
+          </a:bodyPr>
+          <a:lstStyle/>
+          <a:p>
+            <a:pPr algn="ctr">
+              <a:lnSpc>
+                <a:spcPct val="115000"/>
+              </a:lnSpc>
+            </a:pPr>
+            <a:r>
+              <a:rPr sz="1100" b="1">
+                <a:solidFill>
+                  <a:srgbClr val="FFFFFF"/>
+                </a:solidFill>
+                <a:latin typeface="Yu Gothic UI"/>
+              </a:rPr>
+              <a:t>1年あたり70万円</a:t>
+            </a:r>
+          </a:p>
+        </p:txBody>
+      </p:sp>
+      <p:sp>
+        <p:nvSpPr>
+          <p:cNvPr id="12" name="TextBox 11"/>
+          <p:cNvSpPr txBox="1"/>
+          <p:nvPr/>
+        </p:nvSpPr>
+        <p:spPr>
+          <a:xfrm>
+            <a:off x="8024211" y="4436303"/>
+            <a:ext cx="1188720" cy="223520"/>
+          </a:xfrm>
+          <a:prstGeom prst="rect">
+            <a:avLst/>
+          </a:prstGeom>
+          <a:noFill/>
+        </p:spPr>
+        <p:txBody>
+          <a:bodyPr wrap="square" lIns="0" rIns="0" tIns="0" bIns="0">
+            <a:spAutoFit/>
+          </a:bodyPr>
+          <a:lstStyle/>
+          <a:p>
+            <a:pPr algn="ctr">
+              <a:lnSpc>
+                <a:spcPct val="115000"/>
+              </a:lnSpc>
+            </a:pPr>
+            <a:r>
+              <a:rPr sz="1100" b="1">
+                <a:solidFill>
+                  <a:srgbClr val="E7CD7A"/>
+                </a:solidFill>
+                <a:latin typeface="Yu Gothic UI"/>
+              </a:rPr>
+              <a:t>勤続20年</a:t>
+            </a:r>
+          </a:p>
+        </p:txBody>
+      </p:sp>
+      <p:sp>
+        <p:nvSpPr>
+          <p:cNvPr id="13" name="TextBox 12"/>
+          <p:cNvSpPr txBox="1"/>
+          <p:nvPr/>
+        </p:nvSpPr>
+        <p:spPr>
+          <a:xfrm>
+            <a:off x="6053328" y="5376672"/>
+            <a:ext cx="4764024" cy="274320"/>
+          </a:xfrm>
+          <a:prstGeom prst="rect">
+            <a:avLst/>
+          </a:prstGeom>
+          <a:noFill/>
+        </p:spPr>
+        <p:txBody>
+          <a:bodyPr wrap="square" lIns="0" rIns="0" tIns="0" bIns="0">
+            <a:spAutoFit/>
+          </a:bodyPr>
+          <a:lstStyle/>
+          <a:p>
+            <a:pPr algn="l">
+              <a:lnSpc>
+                <a:spcPct val="125000"/>
+              </a:lnSpc>
+            </a:pPr>
+            <a:r>
+              <a:rPr sz="1300" b="0">
+                <a:solidFill>
+                  <a:srgbClr val="8EC5E8"/>
+                </a:solidFill>
+                <a:latin typeface="Yu Gothic UI"/>
+              </a:rPr>
+              <a:t>横＝勤続年数　縦＝退職所得控除額</a:t>
+            </a:r>
+          </a:p>
+          <a:p>
+            <a:pPr algn="l">
+              <a:lnSpc>
+                <a:spcPct val="125000"/>
+              </a:lnSpc>
+            </a:pPr>
+            <a:r>
+              <a:rPr sz="1300" b="0">
+                <a:solidFill>
+                  <a:srgbClr val="8EC5E8"/>
+                </a:solidFill>
+                <a:latin typeface="Yu Gothic UI"/>
+              </a:rPr>
+              <a:t>目盛りの数字は置いていない（額は本文の表）</a:t>
+            </a:r>
+          </a:p>
+        </p:txBody>
+      </p:sp>
+    </p:spTree>
+  </p:cSld>
+  <p:clrMapOvr>
+    <a:masterClrMapping/>
+  </p:clrMapOvr>
+</p:sld>
+</file>
+
+<file path=ppt/slides/slide16.xml><?xml version="1.0" encoding="utf-8"?>
+<p:sld xmlns:a="http://schemas.openxmlformats.org/drawingml/2006/main" xmlns:p="http://schemas.openxmlformats.org/presentationml/2006/main" xmlns:r="http://schemas.openxmlformats.org/officeDocument/2006/relationships">
+  <p:cSld>
+    <p:bg>
+      <p:bgPr>
+        <a:solidFill>
+          <a:srgbClr val="014172"/>
+        </a:solidFill>
+        <a:effectLst/>
+      </p:bgPr>
+    </p:bg>
+    <p:spTree>
+      <p:nvGrpSpPr>
+        <p:cNvPr id="1" name=""/>
+        <p:cNvGrpSpPr/>
+        <p:nvPr/>
+      </p:nvGrpSpPr>
+      <p:grpSpPr/>
+      <p:sp>
+        <p:nvSpPr>
+          <p:cNvPr id="2" name="Rounded Rectangle 1"/>
+          <p:cNvSpPr/>
+          <p:nvPr/>
+        </p:nvSpPr>
+        <p:spPr>
+          <a:xfrm>
+            <a:off x="713232" y="566928"/>
+            <a:ext cx="2377440" cy="68580"/>
+          </a:xfrm>
+          <a:prstGeom prst="roundRect">
+            <a:avLst/>
+          </a:prstGeom>
+          <a:solidFill>
+            <a:srgbClr val="FFFFFF"/>
+          </a:solidFill>
+          <a:ln>
+            <a:noFill/>
+          </a:ln>
+          <a:effectLst/>
+        </p:spPr>
+        <p:style>
+          <a:lnRef idx="1">
+            <a:schemeClr val="accent1"/>
+          </a:lnRef>
+          <a:fillRef idx="3">
+            <a:schemeClr val="accent1"/>
+          </a:fillRef>
+          <a:effectRef idx="2">
+            <a:schemeClr val="accent1"/>
+          </a:effectRef>
+          <a:fontRef idx="minor">
+            <a:schemeClr val="lt1"/>
+          </a:fontRef>
+        </p:style>
+        <p:txBody>
+          <a:bodyPr rtlCol="0" anchor="ctr"/>
+          <a:lstStyle/>
+          <a:p>
+            <a:pPr algn="ctr"/>
+          </a:p>
+        </p:txBody>
+      </p:sp>
+      <p:sp>
+        <p:nvSpPr>
+          <p:cNvPr id="3" name="Rounded Rectangle 2"/>
+          <p:cNvSpPr/>
+          <p:nvPr/>
+        </p:nvSpPr>
+        <p:spPr>
+          <a:xfrm>
+            <a:off x="713232" y="781812"/>
+            <a:ext cx="1920240" cy="68580"/>
+          </a:xfrm>
+          <a:prstGeom prst="roundRect">
+            <a:avLst/>
+          </a:prstGeom>
+          <a:solidFill>
+            <a:srgbClr val="FFFFFF"/>
+          </a:solidFill>
+          <a:ln>
+            <a:noFill/>
+          </a:ln>
+          <a:effectLst/>
+        </p:spPr>
+        <p:style>
+          <a:lnRef idx="1">
+            <a:schemeClr val="accent1"/>
+          </a:lnRef>
+          <a:fillRef idx="3">
+            <a:schemeClr val="accent1"/>
+          </a:fillRef>
+          <a:effectRef idx="2">
+            <a:schemeClr val="accent1"/>
+          </a:effectRef>
+          <a:fontRef idx="minor">
+            <a:schemeClr val="lt1"/>
+          </a:fontRef>
+        </p:style>
+        <p:txBody>
+          <a:bodyPr rtlCol="0" anchor="ctr"/>
+          <a:lstStyle/>
+          <a:p>
+            <a:pPr algn="ctr"/>
+          </a:p>
+        </p:txBody>
+      </p:sp>
+      <p:sp>
+        <p:nvSpPr>
+          <p:cNvPr id="4" name="Rounded Rectangle 3"/>
+          <p:cNvSpPr/>
+          <p:nvPr/>
+        </p:nvSpPr>
+        <p:spPr>
+          <a:xfrm>
+            <a:off x="713232" y="996695"/>
+            <a:ext cx="1463040" cy="68580"/>
+          </a:xfrm>
+          <a:prstGeom prst="roundRect">
+            <a:avLst/>
+          </a:prstGeom>
+          <a:solidFill>
+            <a:srgbClr val="FFFFFF"/>
+          </a:solidFill>
+          <a:ln>
+            <a:noFill/>
+          </a:ln>
+          <a:effectLst/>
+        </p:spPr>
+        <p:style>
+          <a:lnRef idx="1">
+            <a:schemeClr val="accent1"/>
+          </a:lnRef>
+          <a:fillRef idx="3">
+            <a:schemeClr val="accent1"/>
+          </a:fillRef>
+          <a:effectRef idx="2">
+            <a:schemeClr val="accent1"/>
+          </a:effectRef>
+          <a:fontRef idx="minor">
+            <a:schemeClr val="lt1"/>
+          </a:fontRef>
+        </p:style>
+        <p:txBody>
+          <a:bodyPr rtlCol="0" anchor="ctr"/>
+          <a:lstStyle/>
+          <a:p>
+            <a:pPr algn="ctr"/>
+          </a:p>
+        </p:txBody>
+      </p:sp>
+      <p:sp>
+        <p:nvSpPr>
+          <p:cNvPr id="5" name="TextBox 4"/>
+          <p:cNvSpPr txBox="1"/>
+          <p:nvPr/>
+        </p:nvSpPr>
+        <p:spPr>
+          <a:xfrm>
+            <a:off x="713232" y="1481328"/>
+            <a:ext cx="4937760" cy="411480"/>
+          </a:xfrm>
+          <a:prstGeom prst="rect">
+            <a:avLst/>
+          </a:prstGeom>
+          <a:noFill/>
+        </p:spPr>
+        <p:txBody>
+          <a:bodyPr wrap="square" lIns="0" rIns="0" tIns="0" bIns="0">
+            <a:spAutoFit/>
+          </a:bodyPr>
+          <a:lstStyle/>
+          <a:p>
+            <a:pPr algn="l">
+              <a:lnSpc>
+                <a:spcPct val="125000"/>
+              </a:lnSpc>
+            </a:pPr>
+            <a:r>
+              <a:rPr sz="1800" b="1">
+                <a:solidFill>
+                  <a:srgbClr val="8EC5E8"/>
+                </a:solidFill>
+                <a:latin typeface="Yu Gothic UI"/>
+              </a:rPr>
+              <a:t>相続</a:t>
+            </a:r>
+          </a:p>
+        </p:txBody>
+      </p:sp>
+      <p:sp>
+        <p:nvSpPr>
+          <p:cNvPr id="6" name="TextBox 5"/>
+          <p:cNvSpPr txBox="1"/>
+          <p:nvPr/>
+        </p:nvSpPr>
+        <p:spPr>
+          <a:xfrm>
+            <a:off x="713232" y="1938528"/>
+            <a:ext cx="5257800" cy="914400"/>
+          </a:xfrm>
+          <a:prstGeom prst="rect">
+            <a:avLst/>
+          </a:prstGeom>
+          <a:noFill/>
+        </p:spPr>
+        <p:txBody>
+          <a:bodyPr wrap="square" lIns="0" rIns="0" tIns="0" bIns="0">
+            <a:spAutoFit/>
+          </a:bodyPr>
+          <a:lstStyle/>
+          <a:p>
+            <a:pPr algn="l">
+              <a:lnSpc>
+                <a:spcPct val="125000"/>
+              </a:lnSpc>
+            </a:pPr>
+            <a:r>
+              <a:rPr sz="3400" b="1">
+                <a:solidFill>
+                  <a:srgbClr val="FFFFFF"/>
+                </a:solidFill>
+                <a:latin typeface="Yu Gothic UI"/>
+              </a:rPr>
+              <a:t>小規模宅地等の特例</a:t>
+            </a:r>
+          </a:p>
+        </p:txBody>
+      </p:sp>
+      <p:sp>
+        <p:nvSpPr>
+          <p:cNvPr id="7" name="TextBox 6"/>
+          <p:cNvSpPr txBox="1"/>
+          <p:nvPr/>
+        </p:nvSpPr>
+        <p:spPr>
+          <a:xfrm>
+            <a:off x="713232" y="2999232"/>
+            <a:ext cx="5120640" cy="1280160"/>
+          </a:xfrm>
+          <a:prstGeom prst="rect">
+            <a:avLst/>
+          </a:prstGeom>
+          <a:noFill/>
+        </p:spPr>
+        <p:txBody>
+          <a:bodyPr wrap="square" lIns="0" rIns="0" tIns="0" bIns="0">
+            <a:spAutoFit/>
+          </a:bodyPr>
+          <a:lstStyle/>
+          <a:p>
+            <a:pPr algn="l">
+              <a:lnSpc>
+                <a:spcPct val="135000"/>
+              </a:lnSpc>
+            </a:pPr>
+            <a:r>
+              <a:rPr sz="2600" b="0">
+                <a:solidFill>
+                  <a:srgbClr val="FFFFFF"/>
+                </a:solidFill>
+                <a:latin typeface="Yu Gothic UI"/>
+              </a:rPr>
+              <a:t>誰が相続するかで</a:t>
+            </a:r>
+          </a:p>
+          <a:p>
+            <a:pPr algn="l">
+              <a:lnSpc>
+                <a:spcPct val="135000"/>
+              </a:lnSpc>
+            </a:pPr>
+            <a:r>
+              <a:rPr sz="2600" b="0">
+                <a:solidFill>
+                  <a:srgbClr val="FFFFFF"/>
+                </a:solidFill>
+                <a:latin typeface="Yu Gothic UI"/>
+              </a:rPr>
+              <a:t>満たす要件の数が変わる</a:t>
+            </a:r>
+          </a:p>
+        </p:txBody>
+      </p:sp>
+      <p:sp>
+        <p:nvSpPr>
+          <p:cNvPr id="8" name="TextBox 7"/>
+          <p:cNvSpPr txBox="1"/>
+          <p:nvPr/>
+        </p:nvSpPr>
+        <p:spPr>
+          <a:xfrm>
+            <a:off x="713232" y="5138928"/>
+            <a:ext cx="5120640" cy="365760"/>
+          </a:xfrm>
+          <a:prstGeom prst="rect">
+            <a:avLst/>
+          </a:prstGeom>
+          <a:noFill/>
+        </p:spPr>
+        <p:txBody>
+          <a:bodyPr wrap="square" lIns="0" rIns="0" tIns="0" bIns="0">
+            <a:spAutoFit/>
+          </a:bodyPr>
+          <a:lstStyle/>
+          <a:p>
+            <a:pPr algn="l">
+              <a:lnSpc>
+                <a:spcPct val="125000"/>
+              </a:lnSpc>
+            </a:pPr>
+            <a:r>
+              <a:rPr sz="1700" b="0">
+                <a:solidFill>
+                  <a:srgbClr val="8EC5E8"/>
+                </a:solidFill>
+                <a:latin typeface="Yu Gothic UI"/>
+              </a:rPr>
+              <a:t>家計の制度ログ　kakei.nexeed-lab.com</a:t>
+            </a:r>
+          </a:p>
+        </p:txBody>
+      </p:sp>
+      <p:pic>
+        <p:nvPicPr>
+          <p:cNvPr id="9" name="Picture 8" descr="shoukibo-takuchi.png"/>
+          <p:cNvPicPr>
+            <a:picLocks noChangeAspect="1"/>
+          </p:cNvPicPr>
+          <p:nvPr/>
+        </p:nvPicPr>
+        <p:blipFill>
+          <a:blip r:embed="rId2">
+            <a:extLst>
+              <a:ext uri="{96DAC541-7B7A-43D3-8B79-37D633B846F1}">
+                <asvg:svgBlip xmlns:asvg="http://schemas.microsoft.com/office/drawing/2016/SVG/main" r:embed="rId3"/>
+              </a:ext>
+            </a:extLst>
+          </a:blip>
+          <a:stretch>
+            <a:fillRect/>
+          </a:stretch>
+        </p:blipFill>
+        <p:spPr>
+          <a:xfrm>
+            <a:off x="6053328" y="566928"/>
+            <a:ext cx="4764024" cy="4288536"/>
+          </a:xfrm>
+          <a:prstGeom prst="rect">
+            <a:avLst/>
+          </a:prstGeom>
+        </p:spPr>
+      </p:pic>
+      <p:sp>
+        <p:nvSpPr>
+          <p:cNvPr id="10" name="TextBox 9"/>
+          <p:cNvSpPr txBox="1"/>
+          <p:nvPr/>
+        </p:nvSpPr>
+        <p:spPr>
+          <a:xfrm>
+            <a:off x="6237544" y="1489128"/>
+            <a:ext cx="1024128" cy="243840"/>
+          </a:xfrm>
+          <a:prstGeom prst="rect">
+            <a:avLst/>
+          </a:prstGeom>
+          <a:noFill/>
+        </p:spPr>
+        <p:txBody>
+          <a:bodyPr wrap="square" lIns="0" rIns="0" tIns="0" bIns="0">
+            <a:spAutoFit/>
+          </a:bodyPr>
+          <a:lstStyle/>
+          <a:p>
+            <a:pPr algn="ctr">
+              <a:lnSpc>
+                <a:spcPct val="115000"/>
+              </a:lnSpc>
+            </a:pPr>
+            <a:r>
+              <a:rPr sz="1200" b="1">
+                <a:solidFill>
+                  <a:srgbClr val="014172"/>
+                </a:solidFill>
+                <a:latin typeface="Yu Gothic UI"/>
+              </a:rPr>
+              <a:t>配偶者</a:t>
+            </a:r>
+          </a:p>
+        </p:txBody>
+      </p:sp>
+      <p:sp>
+        <p:nvSpPr>
+          <p:cNvPr id="11" name="TextBox 10"/>
+          <p:cNvSpPr txBox="1"/>
+          <p:nvPr/>
+        </p:nvSpPr>
+        <p:spPr>
+          <a:xfrm>
+            <a:off x="6237544" y="2713568"/>
+            <a:ext cx="1024128" cy="203200"/>
+          </a:xfrm>
+          <a:prstGeom prst="rect">
+            <a:avLst/>
+          </a:prstGeom>
+          <a:noFill/>
+        </p:spPr>
+        <p:txBody>
+          <a:bodyPr wrap="square" lIns="0" rIns="0" tIns="0" bIns="0">
+            <a:spAutoFit/>
+          </a:bodyPr>
+          <a:lstStyle/>
+          <a:p>
+            <a:pPr algn="ctr">
+              <a:lnSpc>
+                <a:spcPct val="115000"/>
+              </a:lnSpc>
+            </a:pPr>
+            <a:r>
+              <a:rPr sz="1000" b="1">
+                <a:solidFill>
+                  <a:srgbClr val="014172"/>
+                </a:solidFill>
+                <a:latin typeface="Yu Gothic UI"/>
+              </a:rPr>
+              <a:t>同居していた</a:t>
+            </a:r>
+          </a:p>
+          <a:p>
+            <a:pPr algn="ctr">
+              <a:lnSpc>
+                <a:spcPct val="115000"/>
+              </a:lnSpc>
+            </a:pPr>
+            <a:r>
+              <a:rPr sz="1000" b="1">
+                <a:solidFill>
+                  <a:srgbClr val="014172"/>
+                </a:solidFill>
+                <a:latin typeface="Yu Gothic UI"/>
+              </a:rPr>
+              <a:t>親族</a:t>
+            </a:r>
+          </a:p>
+        </p:txBody>
+      </p:sp>
+      <p:sp>
+        <p:nvSpPr>
+          <p:cNvPr id="12" name="TextBox 11"/>
+          <p:cNvSpPr txBox="1"/>
+          <p:nvPr/>
+        </p:nvSpPr>
+        <p:spPr>
+          <a:xfrm>
+            <a:off x="6237544" y="3919719"/>
+            <a:ext cx="1024128" cy="203200"/>
+          </a:xfrm>
+          <a:prstGeom prst="rect">
+            <a:avLst/>
+          </a:prstGeom>
+          <a:noFill/>
+        </p:spPr>
+        <p:txBody>
+          <a:bodyPr wrap="square" lIns="0" rIns="0" tIns="0" bIns="0">
+            <a:spAutoFit/>
+          </a:bodyPr>
+          <a:lstStyle/>
+          <a:p>
+            <a:pPr algn="ctr">
+              <a:lnSpc>
+                <a:spcPct val="115000"/>
+              </a:lnSpc>
+            </a:pPr>
+            <a:r>
+              <a:rPr sz="1000" b="1">
+                <a:solidFill>
+                  <a:srgbClr val="014172"/>
+                </a:solidFill>
+                <a:latin typeface="Yu Gothic UI"/>
+              </a:rPr>
+              <a:t>それ以外の</a:t>
+            </a:r>
+          </a:p>
+          <a:p>
+            <a:pPr algn="ctr">
+              <a:lnSpc>
+                <a:spcPct val="115000"/>
+              </a:lnSpc>
+            </a:pPr>
+            <a:r>
+              <a:rPr sz="1000" b="1">
+                <a:solidFill>
+                  <a:srgbClr val="014172"/>
+                </a:solidFill>
+                <a:latin typeface="Yu Gothic UI"/>
+              </a:rPr>
+              <a:t>親族</a:t>
+            </a:r>
+          </a:p>
+        </p:txBody>
+      </p:sp>
+      <p:sp>
+        <p:nvSpPr>
+          <p:cNvPr id="13" name="TextBox 12"/>
+          <p:cNvSpPr txBox="1"/>
+          <p:nvPr/>
+        </p:nvSpPr>
+        <p:spPr>
+          <a:xfrm>
+            <a:off x="7794029" y="1479984"/>
+            <a:ext cx="1463040" cy="264160"/>
+          </a:xfrm>
+          <a:prstGeom prst="rect">
+            <a:avLst/>
+          </a:prstGeom>
+          <a:noFill/>
+        </p:spPr>
+        <p:txBody>
+          <a:bodyPr wrap="square" lIns="0" rIns="0" tIns="0" bIns="0">
+            <a:spAutoFit/>
+          </a:bodyPr>
+          <a:lstStyle/>
+          <a:p>
+            <a:pPr algn="l">
+              <a:lnSpc>
+                <a:spcPct val="115000"/>
+              </a:lnSpc>
+            </a:pPr>
+            <a:r>
+              <a:rPr sz="1300" b="1">
+                <a:solidFill>
+                  <a:srgbClr val="FFFFFF"/>
+                </a:solidFill>
+                <a:latin typeface="Yu Gothic UI"/>
+              </a:rPr>
+              <a:t>要件なし</a:t>
+            </a:r>
+          </a:p>
+        </p:txBody>
+      </p:sp>
+      <p:sp>
+        <p:nvSpPr>
+          <p:cNvPr id="14" name="TextBox 13"/>
+          <p:cNvSpPr txBox="1"/>
+          <p:nvPr/>
+        </p:nvSpPr>
+        <p:spPr>
+          <a:xfrm>
+            <a:off x="8508632" y="2713568"/>
+            <a:ext cx="1737360" cy="203200"/>
+          </a:xfrm>
+          <a:prstGeom prst="rect">
+            <a:avLst/>
+          </a:prstGeom>
+          <a:noFill/>
+        </p:spPr>
+        <p:txBody>
+          <a:bodyPr wrap="square" lIns="0" rIns="0" tIns="0" bIns="0">
+            <a:spAutoFit/>
+          </a:bodyPr>
+          <a:lstStyle/>
+          <a:p>
+            <a:pPr algn="l">
+              <a:lnSpc>
+                <a:spcPct val="115000"/>
+              </a:lnSpc>
+            </a:pPr>
+            <a:r>
+              <a:rPr sz="1000" b="1">
+                <a:solidFill>
+                  <a:srgbClr val="FFFFFF"/>
+                </a:solidFill>
+                <a:latin typeface="Yu Gothic UI"/>
+              </a:rPr>
+              <a:t>申告期限まで</a:t>
+            </a:r>
+          </a:p>
+          <a:p>
+            <a:pPr algn="l">
+              <a:lnSpc>
+                <a:spcPct val="115000"/>
+              </a:lnSpc>
+            </a:pPr>
+            <a:r>
+              <a:rPr sz="1000" b="1">
+                <a:solidFill>
+                  <a:srgbClr val="FFFFFF"/>
+                </a:solidFill>
+                <a:latin typeface="Yu Gothic UI"/>
+              </a:rPr>
+              <a:t>居住し、所有する</a:t>
+            </a:r>
+          </a:p>
+        </p:txBody>
+      </p:sp>
+      <p:sp>
+        <p:nvSpPr>
+          <p:cNvPr id="15" name="TextBox 14"/>
+          <p:cNvSpPr txBox="1"/>
+          <p:nvPr/>
+        </p:nvSpPr>
+        <p:spPr>
+          <a:xfrm>
+            <a:off x="7640392" y="3423857"/>
+            <a:ext cx="2194560" cy="203200"/>
+          </a:xfrm>
+          <a:prstGeom prst="rect">
+            <a:avLst/>
+          </a:prstGeom>
+          <a:noFill/>
+        </p:spPr>
+        <p:txBody>
+          <a:bodyPr wrap="square" lIns="0" rIns="0" tIns="0" bIns="0">
+            <a:spAutoFit/>
+          </a:bodyPr>
+          <a:lstStyle/>
+          <a:p>
+            <a:pPr algn="ctr">
+              <a:lnSpc>
+                <a:spcPct val="115000"/>
+              </a:lnSpc>
+            </a:pPr>
+            <a:r>
+              <a:rPr sz="1000" b="1">
+                <a:solidFill>
+                  <a:srgbClr val="E7CD7A"/>
+                </a:solidFill>
+                <a:latin typeface="Yu Gothic UI"/>
+              </a:rPr>
+              <a:t>(1)から(6)をすべて満たす</a:t>
+            </a:r>
+          </a:p>
+        </p:txBody>
+      </p:sp>
+      <p:sp>
+        <p:nvSpPr>
+          <p:cNvPr id="16" name="TextBox 15"/>
+          <p:cNvSpPr txBox="1"/>
+          <p:nvPr/>
+        </p:nvSpPr>
+        <p:spPr>
+          <a:xfrm>
+            <a:off x="6053328" y="5376672"/>
+            <a:ext cx="4764024" cy="274320"/>
+          </a:xfrm>
+          <a:prstGeom prst="rect">
+            <a:avLst/>
+          </a:prstGeom>
+          <a:noFill/>
+        </p:spPr>
+        <p:txBody>
+          <a:bodyPr wrap="square" lIns="0" rIns="0" tIns="0" bIns="0">
+            <a:spAutoFit/>
+          </a:bodyPr>
+          <a:lstStyle/>
+          <a:p>
+            <a:pPr algn="l">
+              <a:lnSpc>
+                <a:spcPct val="125000"/>
+              </a:lnSpc>
+            </a:pPr>
+            <a:r>
+              <a:rPr sz="1300" b="0">
+                <a:solidFill>
+                  <a:srgbClr val="8EC5E8"/>
+                </a:solidFill>
+                <a:latin typeface="Yu Gothic UI"/>
+              </a:rPr>
+              <a:t>四角の数＝満たすべき要件の数</a:t>
+            </a:r>
+          </a:p>
+          <a:p>
+            <a:pPr algn="l">
+              <a:lnSpc>
+                <a:spcPct val="125000"/>
+              </a:lnSpc>
+            </a:pPr>
+            <a:r>
+              <a:rPr sz="1300" b="0">
+                <a:solidFill>
+                  <a:srgbClr val="8EC5E8"/>
+                </a:solidFill>
+                <a:latin typeface="Yu Gothic UI"/>
+              </a:rPr>
+              <a:t>面積や金額は表していない</a:t>
+            </a:r>
+          </a:p>
+        </p:txBody>
+      </p:sp>
+    </p:spTree>
+  </p:cSld>
+  <p:clrMapOvr>
+    <a:masterClrMapping/>
+  </p:clrMapOvr>
+</p:sld>
+</file>
+
+<file path=ppt/slides/slide17.xml><?xml version="1.0" encoding="utf-8"?>
 <p:sld xmlns:a="http://schemas.openxmlformats.org/drawingml/2006/main" xmlns:p="http://schemas.openxmlformats.org/presentationml/2006/main" xmlns:r="http://schemas.openxmlformats.org/officeDocument/2006/relationships">
   <p:cSld>
     <p:bg>
